--- a/Exams/CSC175  Sp26 Final Exam Sample Questions ANS.pptx
+++ b/Exams/CSC175  Sp26 Final Exam Sample Questions ANS.pptx
@@ -6,7 +6,7 @@
     <p:sldMasterId id="2147483672" r:id="rId2"/>
   </p:sldMasterIdLst>
   <p:notesMasterIdLst>
-    <p:notesMasterId r:id="rId10"/>
+    <p:notesMasterId r:id="rId22"/>
   </p:notesMasterIdLst>
   <p:sldIdLst>
     <p:sldId id="256" r:id="rId3"/>
@@ -16,6 +16,18 @@
     <p:sldId id="291" r:id="rId7"/>
     <p:sldId id="295" r:id="rId8"/>
     <p:sldId id="290" r:id="rId9"/>
+    <p:sldId id="301" r:id="rId10"/>
+    <p:sldId id="302" r:id="rId11"/>
+    <p:sldId id="303" r:id="rId12"/>
+    <p:sldId id="304" r:id="rId13"/>
+    <p:sldId id="305" r:id="rId14"/>
+    <p:sldId id="306" r:id="rId15"/>
+    <p:sldId id="307" r:id="rId16"/>
+    <p:sldId id="299" r:id="rId17"/>
+    <p:sldId id="300" r:id="rId18"/>
+    <p:sldId id="296" r:id="rId19"/>
+    <p:sldId id="298" r:id="rId20"/>
+    <p:sldId id="297" r:id="rId21"/>
   </p:sldIdLst>
   <p:sldSz cx="12192000" cy="6858000"/>
   <p:notesSz cx="6950075" cy="9236075"/>
@@ -403,7 +415,7 @@
             <a:fld id="{2AEAFE1F-9E52-45C8-9793-E819F0044A1C}" type="datetimeFigureOut">
               <a:rPr lang="en-US" smtClean="0"/>
               <a:pPr/>
-              <a:t>4/9/2026</a:t>
+              <a:t>4/14/2026</a:t>
             </a:fld>
             <a:endParaRPr lang="en-US"/>
           </a:p>
@@ -2233,6 +2245,1228 @@
 </p:notes>
 </file>
 
+<file path=ppt/notesSlides/notesSlide2.xml><?xml version="1.0" encoding="utf-8"?>
+<p:notes xmlns:a="http://schemas.openxmlformats.org/drawingml/2006/main" xmlns:r="http://schemas.openxmlformats.org/officeDocument/2006/relationships" xmlns:p="http://schemas.openxmlformats.org/presentationml/2006/main">
+  <p:cSld>
+    <p:spTree>
+      <p:nvGrpSpPr>
+        <p:cNvPr id="1" name=""/>
+        <p:cNvGrpSpPr/>
+        <p:nvPr/>
+      </p:nvGrpSpPr>
+      <p:grpSpPr>
+        <a:xfrm>
+          <a:off x="0" y="0"/>
+          <a:ext cx="0" cy="0"/>
+          <a:chOff x="0" y="0"/>
+          <a:chExt cx="0" cy="0"/>
+        </a:xfrm>
+      </p:grpSpPr>
+      <p:sp>
+        <p:nvSpPr>
+          <p:cNvPr id="2" name="Slide Image Placeholder 1"/>
+          <p:cNvSpPr>
+            <a:spLocks noGrp="1" noRot="1" noChangeAspect="1"/>
+          </p:cNvSpPr>
+          <p:nvPr>
+            <p:ph type="sldImg"/>
+          </p:nvPr>
+        </p:nvSpPr>
+        <p:spPr/>
+      </p:sp>
+      <p:sp>
+        <p:nvSpPr>
+          <p:cNvPr id="3" name="Notes Placeholder 2"/>
+          <p:cNvSpPr>
+            <a:spLocks noGrp="1"/>
+          </p:cNvSpPr>
+          <p:nvPr>
+            <p:ph type="body" idx="1"/>
+          </p:nvPr>
+        </p:nvSpPr>
+        <p:spPr/>
+        <p:txBody>
+          <a:bodyPr/>
+          <a:lstStyle/>
+          <a:p>
+            <a:r>
+              <a:rPr lang="en-US" altLang="zh-CN" dirty="0"/>
+              <a:t>Transmission on Link 1 = </a:t>
+            </a:r>
+            <a:r>
+              <a:rPr lang="en-US" altLang="zh-CN" b="1" dirty="0"/>
+              <a:t>1 s per payload</a:t>
+            </a:r>
+            <a:r>
+              <a:rPr lang="en-US" altLang="zh-CN" dirty="0"/>
+              <a:t> Propagation = </a:t>
+            </a:r>
+            <a:r>
+              <a:rPr lang="en-US" altLang="zh-CN" b="1" dirty="0"/>
+              <a:t>2 s</a:t>
+            </a:r>
+            <a:r>
+              <a:rPr lang="en-US" altLang="zh-CN" dirty="0"/>
+              <a:t> So arrivals: </a:t>
+            </a:r>
+            <a:r>
+              <a:rPr lang="en-US" altLang="zh-CN" b="1" dirty="0"/>
+              <a:t>3, 4, 5, …, 12</a:t>
+            </a:r>
+            <a:endParaRPr lang="zh-CN" altLang="en-US" dirty="0"/>
+          </a:p>
+        </p:txBody>
+      </p:sp>
+      <p:sp>
+        <p:nvSpPr>
+          <p:cNvPr id="4" name="Slide Number Placeholder 3"/>
+          <p:cNvSpPr>
+            <a:spLocks noGrp="1"/>
+          </p:cNvSpPr>
+          <p:nvPr>
+            <p:ph type="sldNum" sz="quarter" idx="5"/>
+          </p:nvPr>
+        </p:nvSpPr>
+        <p:spPr/>
+        <p:txBody>
+          <a:bodyPr/>
+          <a:lstStyle/>
+          <a:p>
+            <a:fld id="{2D71AD5F-E36F-46B9-A99B-7B025244359D}" type="slidenum">
+              <a:rPr lang="en-US" smtClean="0"/>
+              <a:pPr/>
+              <a:t>8</a:t>
+            </a:fld>
+            <a:endParaRPr lang="en-US"/>
+          </a:p>
+        </p:txBody>
+      </p:sp>
+    </p:spTree>
+    <p:extLst>
+      <p:ext uri="{BB962C8B-B14F-4D97-AF65-F5344CB8AC3E}">
+        <p14:creationId xmlns:p14="http://schemas.microsoft.com/office/powerpoint/2010/main" val="1659353979"/>
+      </p:ext>
+    </p:extLst>
+  </p:cSld>
+  <p:clrMapOvr>
+    <a:masterClrMapping/>
+  </p:clrMapOvr>
+</p:notes>
+</file>
+
+<file path=ppt/notesSlides/notesSlide3.xml><?xml version="1.0" encoding="utf-8"?>
+<p:notes xmlns:a="http://schemas.openxmlformats.org/drawingml/2006/main" xmlns:r="http://schemas.openxmlformats.org/officeDocument/2006/relationships" xmlns:p="http://schemas.openxmlformats.org/presentationml/2006/main">
+  <p:cSld>
+    <p:spTree>
+      <p:nvGrpSpPr>
+        <p:cNvPr id="1" name=""/>
+        <p:cNvGrpSpPr/>
+        <p:nvPr/>
+      </p:nvGrpSpPr>
+      <p:grpSpPr>
+        <a:xfrm>
+          <a:off x="0" y="0"/>
+          <a:ext cx="0" cy="0"/>
+          <a:chOff x="0" y="0"/>
+          <a:chExt cx="0" cy="0"/>
+        </a:xfrm>
+      </p:grpSpPr>
+      <p:sp>
+        <p:nvSpPr>
+          <p:cNvPr id="2" name="Slide Image Placeholder 1"/>
+          <p:cNvSpPr>
+            <a:spLocks noGrp="1" noRot="1" noChangeAspect="1"/>
+          </p:cNvSpPr>
+          <p:nvPr>
+            <p:ph type="sldImg"/>
+          </p:nvPr>
+        </p:nvSpPr>
+        <p:spPr/>
+      </p:sp>
+      <p:sp>
+        <p:nvSpPr>
+          <p:cNvPr id="3" name="Notes Placeholder 2"/>
+          <p:cNvSpPr>
+            <a:spLocks noGrp="1"/>
+          </p:cNvSpPr>
+          <p:nvPr>
+            <p:ph type="body" idx="1"/>
+          </p:nvPr>
+        </p:nvSpPr>
+        <p:spPr/>
+        <p:txBody>
+          <a:bodyPr/>
+          <a:lstStyle/>
+          <a:p>
+            <a:r>
+              <a:rPr lang="en-US" altLang="zh-CN" dirty="0"/>
+              <a:t>Transmission on Link 1 = </a:t>
+            </a:r>
+            <a:r>
+              <a:rPr lang="en-US" altLang="zh-CN" b="1" dirty="0"/>
+              <a:t>1 s per payload</a:t>
+            </a:r>
+            <a:r>
+              <a:rPr lang="en-US" altLang="zh-CN" dirty="0"/>
+              <a:t> Propagation = </a:t>
+            </a:r>
+            <a:r>
+              <a:rPr lang="en-US" altLang="zh-CN" b="1" dirty="0"/>
+              <a:t>2 s</a:t>
+            </a:r>
+            <a:r>
+              <a:rPr lang="en-US" altLang="zh-CN" dirty="0"/>
+              <a:t> So arrivals: </a:t>
+            </a:r>
+            <a:r>
+              <a:rPr lang="en-US" altLang="zh-CN" b="1" dirty="0"/>
+              <a:t>3, 4, 5, …, 12</a:t>
+            </a:r>
+          </a:p>
+          <a:p>
+            <a:r>
+              <a:rPr lang="en-US" altLang="zh-CN" dirty="0"/>
+              <a:t>Start sending at </a:t>
+            </a:r>
+            <a:r>
+              <a:rPr lang="en-US" altLang="zh-CN" b="1" dirty="0"/>
+              <a:t>t = 3</a:t>
+            </a:r>
+            <a:r>
+              <a:rPr lang="en-US" altLang="zh-CN" dirty="0"/>
+              <a:t> Finish sending at </a:t>
+            </a:r>
+            <a:r>
+              <a:rPr lang="en-US" altLang="zh-CN" b="1" dirty="0"/>
+              <a:t>t = 5</a:t>
+            </a:r>
+            <a:r>
+              <a:rPr lang="en-US" altLang="zh-CN" dirty="0"/>
+              <a:t> Then propagate 10 s → arrive at </a:t>
+            </a:r>
+            <a:r>
+              <a:rPr lang="en-US" altLang="zh-CN" b="1" dirty="0"/>
+              <a:t>t = 15</a:t>
+            </a:r>
+            <a:endParaRPr lang="zh-CN" altLang="en-US" dirty="0"/>
+          </a:p>
+        </p:txBody>
+      </p:sp>
+      <p:sp>
+        <p:nvSpPr>
+          <p:cNvPr id="4" name="Slide Number Placeholder 3"/>
+          <p:cNvSpPr>
+            <a:spLocks noGrp="1"/>
+          </p:cNvSpPr>
+          <p:nvPr>
+            <p:ph type="sldNum" sz="quarter" idx="5"/>
+          </p:nvPr>
+        </p:nvSpPr>
+        <p:spPr/>
+        <p:txBody>
+          <a:bodyPr/>
+          <a:lstStyle/>
+          <a:p>
+            <a:fld id="{2D71AD5F-E36F-46B9-A99B-7B025244359D}" type="slidenum">
+              <a:rPr lang="en-US" smtClean="0"/>
+              <a:pPr/>
+              <a:t>9</a:t>
+            </a:fld>
+            <a:endParaRPr lang="en-US"/>
+          </a:p>
+        </p:txBody>
+      </p:sp>
+    </p:spTree>
+    <p:extLst>
+      <p:ext uri="{BB962C8B-B14F-4D97-AF65-F5344CB8AC3E}">
+        <p14:creationId xmlns:p14="http://schemas.microsoft.com/office/powerpoint/2010/main" val="225540833"/>
+      </p:ext>
+    </p:extLst>
+  </p:cSld>
+  <p:clrMapOvr>
+    <a:masterClrMapping/>
+  </p:clrMapOvr>
+</p:notes>
+</file>
+
+<file path=ppt/notesSlides/notesSlide4.xml><?xml version="1.0" encoding="utf-8"?>
+<p:notes xmlns:a="http://schemas.openxmlformats.org/drawingml/2006/main" xmlns:r="http://schemas.openxmlformats.org/officeDocument/2006/relationships" xmlns:p="http://schemas.openxmlformats.org/presentationml/2006/main">
+  <p:cSld>
+    <p:spTree>
+      <p:nvGrpSpPr>
+        <p:cNvPr id="1" name=""/>
+        <p:cNvGrpSpPr/>
+        <p:nvPr/>
+      </p:nvGrpSpPr>
+      <p:grpSpPr>
+        <a:xfrm>
+          <a:off x="0" y="0"/>
+          <a:ext cx="0" cy="0"/>
+          <a:chOff x="0" y="0"/>
+          <a:chExt cx="0" cy="0"/>
+        </a:xfrm>
+      </p:grpSpPr>
+      <p:sp>
+        <p:nvSpPr>
+          <p:cNvPr id="2" name="Slide Image Placeholder 1"/>
+          <p:cNvSpPr>
+            <a:spLocks noGrp="1" noRot="1" noChangeAspect="1"/>
+          </p:cNvSpPr>
+          <p:nvPr>
+            <p:ph type="sldImg"/>
+          </p:nvPr>
+        </p:nvSpPr>
+        <p:spPr/>
+      </p:sp>
+      <mc:AlternateContent xmlns:mc="http://schemas.openxmlformats.org/markup-compatibility/2006">
+        <mc:Choice xmlns:a14="http://schemas.microsoft.com/office/drawing/2010/main" Requires="a14">
+          <p:sp>
+            <p:nvSpPr>
+              <p:cNvPr id="3" name="Notes Placeholder 2"/>
+              <p:cNvSpPr>
+                <a:spLocks noGrp="1"/>
+              </p:cNvSpPr>
+              <p:nvPr>
+                <p:ph type="body" idx="1"/>
+              </p:nvPr>
+            </p:nvSpPr>
+            <p:spPr/>
+            <p:txBody>
+              <a:bodyPr/>
+              <a:lstStyle/>
+              <a:p>
+                <a:r>
+                  <a:rPr lang="nl-NL" altLang="zh-CN" dirty="0"/>
+                  <a:t>Queue slope = arrival − departure</a:t>
+                </a:r>
+                <a:br>
+                  <a:rPr lang="nl-NL" altLang="zh-CN" dirty="0"/>
+                </a:br>
+                <a:br>
+                  <a:rPr lang="nl-NL" altLang="zh-CN" dirty="0"/>
+                </a:br>
+                <a:r>
+                  <a:rPr lang="nl-NL" altLang="zh-CN" dirty="0"/>
+                  <a:t>If queue &gt; 0:</a:t>
+                </a:r>
+                <a:br>
+                  <a:rPr lang="nl-NL" altLang="zh-CN" dirty="0"/>
+                </a:br>
+                <a:r>
+                  <a:rPr lang="nl-NL" altLang="zh-CN" dirty="0"/>
+                  <a:t>departure = bandwidth</a:t>
+                </a:r>
+                <a:br>
+                  <a:rPr lang="nl-NL" altLang="zh-CN" dirty="0"/>
+                </a:br>
+                <a:r>
+                  <a:rPr lang="nl-NL" altLang="zh-CN" dirty="0"/>
+                  <a:t>If the queue is empty, the departure rate is </a:t>
+                </a:r>
+                <a14:m>
+                  <m:oMath xmlns:m="http://schemas.openxmlformats.org/officeDocument/2006/math">
+                    <m:r>
+                      <m:rPr>
+                        <m:sty m:val="p"/>
+                      </m:rPr>
+                      <a:rPr lang="nl-NL" altLang="zh-CN" sz="1200" kern="1200">
+                        <a:solidFill>
+                          <a:schemeClr val="tx1"/>
+                        </a:solidFill>
+                        <a:latin typeface="+mn-lt"/>
+                        <a:ea typeface="+mn-ea"/>
+                        <a:cs typeface="+mn-cs"/>
+                      </a:rPr>
+                      <m:t>min</m:t>
+                    </m:r>
+                    <m:r>
+                      <a:rPr lang="nl-NL" altLang="zh-CN" sz="1200" i="0" kern="1200">
+                        <a:solidFill>
+                          <a:schemeClr val="tx1"/>
+                        </a:solidFill>
+                        <a:latin typeface="+mn-lt"/>
+                        <a:ea typeface="+mn-ea"/>
+                        <a:cs typeface="+mn-cs"/>
+                      </a:rPr>
+                      <m:t>⁡</m:t>
+                    </m:r>
+                    <m:d>
+                      <m:dPr>
+                        <m:sepChr m:val=","/>
+                        <m:ctrlPr>
+                          <a:rPr lang="ar-AE" altLang="zh-CN" sz="1200" i="1" kern="1200">
+                            <a:solidFill>
+                              <a:schemeClr val="tx1"/>
+                            </a:solidFill>
+                            <a:latin typeface="+mn-lt"/>
+                            <a:ea typeface="+mn-ea"/>
+                            <a:cs typeface="+mn-cs"/>
+                          </a:rPr>
+                        </m:ctrlPr>
+                      </m:dPr>
+                      <m:e>
+                        <m:r>
+                          <m:rPr>
+                            <m:nor/>
+                          </m:rPr>
+                          <a:rPr lang="nl-NL" altLang="zh-CN" sz="1200" b="0" i="1" kern="1200">
+                            <a:solidFill>
+                              <a:schemeClr val="tx1"/>
+                            </a:solidFill>
+                            <a:latin typeface="+mn-lt"/>
+                            <a:ea typeface="+mn-ea"/>
+                            <a:cs typeface="+mn-cs"/>
+                          </a:rPr>
+                          <m:t>arrival</m:t>
+                        </m:r>
+                        <m:r>
+                          <m:rPr>
+                            <m:nor/>
+                          </m:rPr>
+                          <a:rPr lang="nl-NL" altLang="zh-CN" sz="1200" b="0" i="1" kern="1200">
+                            <a:solidFill>
+                              <a:schemeClr val="tx1"/>
+                            </a:solidFill>
+                            <a:latin typeface="+mn-lt"/>
+                            <a:ea typeface="+mn-ea"/>
+                            <a:cs typeface="+mn-cs"/>
+                          </a:rPr>
+                          <m:t> </m:t>
+                        </m:r>
+                        <m:r>
+                          <m:rPr>
+                            <m:nor/>
+                          </m:rPr>
+                          <a:rPr lang="nl-NL" altLang="zh-CN" sz="1200" b="0" i="1" kern="1200">
+                            <a:solidFill>
+                              <a:schemeClr val="tx1"/>
+                            </a:solidFill>
+                            <a:latin typeface="+mn-lt"/>
+                            <a:ea typeface="+mn-ea"/>
+                            <a:cs typeface="+mn-cs"/>
+                          </a:rPr>
+                          <m:t>rate</m:t>
+                        </m:r>
+                      </m:e>
+                      <m:e>
+                        <m:r>
+                          <m:rPr>
+                            <m:nor/>
+                          </m:rPr>
+                          <a:rPr lang="nl-NL" altLang="zh-CN" sz="1200" b="0" i="1" kern="1200">
+                            <a:solidFill>
+                              <a:schemeClr val="tx1"/>
+                            </a:solidFill>
+                            <a:latin typeface="+mn-lt"/>
+                            <a:ea typeface="+mn-ea"/>
+                            <a:cs typeface="+mn-cs"/>
+                          </a:rPr>
+                          <m:t>bandwidth</m:t>
+                        </m:r>
+                      </m:e>
+                    </m:d>
+                  </m:oMath>
+                </a14:m>
+                <a:r>
+                  <a:rPr lang="ar-AE" altLang="zh-CN" dirty="0"/>
+                  <a:t>, </a:t>
+                </a:r>
+                <a:r>
+                  <a:rPr lang="nl-NL" altLang="zh-CN" dirty="0"/>
+                  <a:t>so the queue slope cannot be negative.</a:t>
+                </a:r>
+                <a:br>
+                  <a:rPr lang="nl-NL" altLang="zh-CN" dirty="0"/>
+                </a:br>
+                <a:r>
+                  <a:rPr lang="nl-NL" altLang="zh-CN" dirty="0"/>
+                  <a:t>If queue = 0:</a:t>
+                </a:r>
+                <a:br>
+                  <a:rPr lang="nl-NL" altLang="zh-CN" dirty="0"/>
+                </a:br>
+                <a:r>
+                  <a:rPr lang="nl-NL" altLang="zh-CN" dirty="0"/>
+                  <a:t>slope = max(0, arrival − bandwidth)</a:t>
+                </a:r>
+                <a:endParaRPr lang="en-US" altLang="zh-CN" dirty="0"/>
+              </a:p>
+              <a:p>
+                <a:r>
+                  <a:rPr lang="en-US" altLang="zh-CN" dirty="0"/>
+                  <a:t>Write your answer as a range. Examples:</a:t>
+                </a:r>
+              </a:p>
+              <a:p>
+                <a:pPr lvl="1"/>
+                <a:r>
+                  <a:rPr lang="en-US" altLang="zh-CN" dirty="0"/>
+                  <a:t>If the bandwidth must be exactly 3 Gbps, write </a:t>
+                </a:r>
+                <a:r>
+                  <a:rPr lang="en-US" altLang="zh-CN" b="1" dirty="0"/>
+                  <a:t>[3, 3]</a:t>
+                </a:r>
+                <a:r>
+                  <a:rPr lang="en-US" altLang="zh-CN" dirty="0"/>
+                  <a:t>.</a:t>
+                </a:r>
+              </a:p>
+              <a:p>
+                <a:pPr lvl="1"/>
+                <a:r>
+                  <a:rPr lang="en-US" altLang="zh-CN" dirty="0"/>
+                  <a:t>If the exact bandwidth cannot be determined, but must be at least 3 Gbps, write </a:t>
+                </a:r>
+                <a:r>
+                  <a:rPr lang="en-US" altLang="zh-CN" b="1" dirty="0"/>
+                  <a:t>[3, ∞]</a:t>
+                </a:r>
+                <a:r>
+                  <a:rPr lang="en-US" altLang="zh-CN" dirty="0"/>
+                  <a:t>.</a:t>
+                </a:r>
+              </a:p>
+              <a:p>
+                <a:pPr lvl="1"/>
+                <a:r>
+                  <a:rPr lang="en-US" altLang="zh-CN" dirty="0"/>
+                  <a:t>If there is not enough information to determine any range, write </a:t>
+                </a:r>
+                <a:r>
+                  <a:rPr lang="en-US" altLang="zh-CN" b="1" dirty="0"/>
+                  <a:t>[0, ∞]</a:t>
+                </a:r>
+                <a:r>
+                  <a:rPr lang="en-US" altLang="zh-CN" dirty="0"/>
+                  <a:t>. </a:t>
+                </a:r>
+                <a:r>
+                  <a:rPr lang="nl-NL" altLang="zh-CN" dirty="0"/>
+                  <a:t>queue slope = 15 Gbps</a:t>
+                </a:r>
+                <a:endParaRPr lang="en-US" altLang="zh-CN" dirty="0"/>
+              </a:p>
+              <a:p>
+                <a:endParaRPr lang="zh-CN" altLang="en-US" dirty="0"/>
+              </a:p>
+            </p:txBody>
+          </p:sp>
+        </mc:Choice>
+        <mc:Fallback>
+          <p:sp>
+            <p:nvSpPr>
+              <p:cNvPr id="3" name="Notes Placeholder 2"/>
+              <p:cNvSpPr>
+                <a:spLocks noGrp="1"/>
+              </p:cNvSpPr>
+              <p:nvPr>
+                <p:ph type="body" idx="1"/>
+              </p:nvPr>
+            </p:nvSpPr>
+            <p:spPr/>
+            <p:txBody>
+              <a:bodyPr/>
+              <a:lstStyle/>
+              <a:p>
+                <a:r>
+                  <a:rPr lang="nl-NL" altLang="zh-CN" dirty="0"/>
+                  <a:t>Queue slope = arrival − departure</a:t>
+                </a:r>
+                <a:br>
+                  <a:rPr lang="nl-NL" altLang="zh-CN" dirty="0"/>
+                </a:br>
+                <a:br>
+                  <a:rPr lang="nl-NL" altLang="zh-CN" dirty="0"/>
+                </a:br>
+                <a:r>
+                  <a:rPr lang="nl-NL" altLang="zh-CN" dirty="0"/>
+                  <a:t>If queue &gt; 0:</a:t>
+                </a:r>
+                <a:br>
+                  <a:rPr lang="nl-NL" altLang="zh-CN" dirty="0"/>
+                </a:br>
+                <a:r>
+                  <a:rPr lang="nl-NL" altLang="zh-CN" dirty="0"/>
+                  <a:t>departure = bandwidth</a:t>
+                </a:r>
+                <a:br>
+                  <a:rPr lang="nl-NL" altLang="zh-CN" dirty="0"/>
+                </a:br>
+                <a:r>
+                  <a:rPr lang="nl-NL" altLang="zh-CN" dirty="0"/>
+                  <a:t>If the queue is empty, the departure rate is </a:t>
+                </a:r>
+                <a:r>
+                  <a:rPr lang="nl-NL" altLang="zh-CN" sz="1200" i="0" kern="1200">
+                    <a:solidFill>
+                      <a:schemeClr val="tx1"/>
+                    </a:solidFill>
+                    <a:latin typeface="+mn-lt"/>
+                    <a:ea typeface="+mn-ea"/>
+                    <a:cs typeface="+mn-cs"/>
+                  </a:rPr>
+                  <a:t>min⁡</a:t>
+                </a:r>
+                <a:r>
+                  <a:rPr lang="ar-AE" altLang="zh-CN" sz="1200" i="0" kern="1200">
+                    <a:solidFill>
+                      <a:schemeClr val="tx1"/>
+                    </a:solidFill>
+                    <a:latin typeface="+mn-lt"/>
+                    <a:ea typeface="+mn-ea"/>
+                    <a:cs typeface="+mn-cs"/>
+                  </a:rPr>
+                  <a:t>(</a:t>
+                </a:r>
+                <a:r>
+                  <a:rPr lang="nl-NL" altLang="zh-CN" sz="1200" b="0" i="0" kern="1200">
+                    <a:solidFill>
+                      <a:schemeClr val="tx1"/>
+                    </a:solidFill>
+                    <a:latin typeface="+mn-lt"/>
+                    <a:ea typeface="+mn-ea"/>
+                    <a:cs typeface="+mn-cs"/>
+                  </a:rPr>
+                  <a:t>"arrival rate</a:t>
+                </a:r>
+                <a:r>
+                  <a:rPr lang="ar-AE" altLang="zh-CN" sz="1200" b="0" i="0" kern="1200">
+                    <a:solidFill>
+                      <a:schemeClr val="tx1"/>
+                    </a:solidFill>
+                    <a:latin typeface="+mn-lt"/>
+                    <a:ea typeface="+mn-ea"/>
+                    <a:cs typeface="+mn-cs"/>
+                  </a:rPr>
+                  <a:t>" ⓜ,</a:t>
+                </a:r>
+                <a:r>
+                  <a:rPr lang="nl-NL" altLang="zh-CN" sz="1200" b="0" i="0" kern="1200">
+                    <a:solidFill>
+                      <a:schemeClr val="tx1"/>
+                    </a:solidFill>
+                    <a:latin typeface="+mn-lt"/>
+                    <a:ea typeface="+mn-ea"/>
+                    <a:cs typeface="+mn-cs"/>
+                  </a:rPr>
+                  <a:t>"bandwidth</a:t>
+                </a:r>
+                <a:r>
+                  <a:rPr lang="ar-AE" altLang="zh-CN" sz="1200" b="0" i="0" kern="1200">
+                    <a:solidFill>
+                      <a:schemeClr val="tx1"/>
+                    </a:solidFill>
+                    <a:latin typeface="+mn-lt"/>
+                    <a:ea typeface="+mn-ea"/>
+                    <a:cs typeface="+mn-cs"/>
+                  </a:rPr>
+                  <a:t>" )</a:t>
+                </a:r>
+                <a:r>
+                  <a:rPr lang="ar-AE" altLang="zh-CN" dirty="0"/>
+                  <a:t>, </a:t>
+                </a:r>
+                <a:r>
+                  <a:rPr lang="nl-NL" altLang="zh-CN" dirty="0"/>
+                  <a:t>so the queue slope cannot be negative.</a:t>
+                </a:r>
+                <a:br>
+                  <a:rPr lang="nl-NL" altLang="zh-CN" dirty="0"/>
+                </a:br>
+                <a:r>
+                  <a:rPr lang="nl-NL" altLang="zh-CN" dirty="0"/>
+                  <a:t>If queue = 0:</a:t>
+                </a:r>
+                <a:br>
+                  <a:rPr lang="nl-NL" altLang="zh-CN" dirty="0"/>
+                </a:br>
+                <a:r>
+                  <a:rPr lang="nl-NL" altLang="zh-CN" dirty="0"/>
+                  <a:t>slope = max(0, arrival − bandwidth)</a:t>
+                </a:r>
+                <a:endParaRPr lang="en-US" altLang="zh-CN" dirty="0"/>
+              </a:p>
+              <a:p>
+                <a:r>
+                  <a:rPr lang="en-US" altLang="zh-CN" dirty="0"/>
+                  <a:t>Write your answer as a range. Examples:</a:t>
+                </a:r>
+              </a:p>
+              <a:p>
+                <a:pPr lvl="1"/>
+                <a:r>
+                  <a:rPr lang="en-US" altLang="zh-CN" dirty="0"/>
+                  <a:t>If the bandwidth must be exactly 3 Gbps, write </a:t>
+                </a:r>
+                <a:r>
+                  <a:rPr lang="en-US" altLang="zh-CN" b="1" dirty="0"/>
+                  <a:t>[3, 3]</a:t>
+                </a:r>
+                <a:r>
+                  <a:rPr lang="en-US" altLang="zh-CN" dirty="0"/>
+                  <a:t>.</a:t>
+                </a:r>
+              </a:p>
+              <a:p>
+                <a:pPr lvl="1"/>
+                <a:r>
+                  <a:rPr lang="en-US" altLang="zh-CN" dirty="0"/>
+                  <a:t>If the exact bandwidth cannot be determined, but must be at least 3 Gbps, write </a:t>
+                </a:r>
+                <a:r>
+                  <a:rPr lang="en-US" altLang="zh-CN" b="1" dirty="0"/>
+                  <a:t>[3, ∞]</a:t>
+                </a:r>
+                <a:r>
+                  <a:rPr lang="en-US" altLang="zh-CN" dirty="0"/>
+                  <a:t>.</a:t>
+                </a:r>
+              </a:p>
+              <a:p>
+                <a:pPr lvl="1"/>
+                <a:r>
+                  <a:rPr lang="en-US" altLang="zh-CN" dirty="0"/>
+                  <a:t>If there is not enough information to determine any range, write </a:t>
+                </a:r>
+                <a:r>
+                  <a:rPr lang="en-US" altLang="zh-CN" b="1" dirty="0"/>
+                  <a:t>[0, ∞]</a:t>
+                </a:r>
+                <a:r>
+                  <a:rPr lang="en-US" altLang="zh-CN" dirty="0"/>
+                  <a:t>. </a:t>
+                </a:r>
+                <a:r>
+                  <a:rPr lang="nl-NL" altLang="zh-CN" dirty="0"/>
+                  <a:t>queue slope = 15 Gbps</a:t>
+                </a:r>
+                <a:endParaRPr lang="en-US" altLang="zh-CN" dirty="0"/>
+              </a:p>
+              <a:p>
+                <a:endParaRPr lang="zh-CN" altLang="en-US" dirty="0"/>
+              </a:p>
+            </p:txBody>
+          </p:sp>
+        </mc:Fallback>
+      </mc:AlternateContent>
+      <p:sp>
+        <p:nvSpPr>
+          <p:cNvPr id="4" name="Slide Number Placeholder 3"/>
+          <p:cNvSpPr>
+            <a:spLocks noGrp="1"/>
+          </p:cNvSpPr>
+          <p:nvPr>
+            <p:ph type="sldNum" sz="quarter" idx="5"/>
+          </p:nvPr>
+        </p:nvSpPr>
+        <p:spPr/>
+        <p:txBody>
+          <a:bodyPr/>
+          <a:lstStyle/>
+          <a:p>
+            <a:fld id="{2D71AD5F-E36F-46B9-A99B-7B025244359D}" type="slidenum">
+              <a:rPr lang="en-US" smtClean="0"/>
+              <a:pPr/>
+              <a:t>13</a:t>
+            </a:fld>
+            <a:endParaRPr lang="en-US"/>
+          </a:p>
+        </p:txBody>
+      </p:sp>
+    </p:spTree>
+    <p:extLst>
+      <p:ext uri="{BB962C8B-B14F-4D97-AF65-F5344CB8AC3E}">
+        <p14:creationId xmlns:p14="http://schemas.microsoft.com/office/powerpoint/2010/main" val="1464909944"/>
+      </p:ext>
+    </p:extLst>
+  </p:cSld>
+  <p:clrMapOvr>
+    <a:masterClrMapping/>
+  </p:clrMapOvr>
+</p:notes>
+</file>
+
+<file path=ppt/notesSlides/notesSlide5.xml><?xml version="1.0" encoding="utf-8"?>
+<p:notes xmlns:a="http://schemas.openxmlformats.org/drawingml/2006/main" xmlns:r="http://schemas.openxmlformats.org/officeDocument/2006/relationships" xmlns:p="http://schemas.openxmlformats.org/presentationml/2006/main">
+  <p:cSld>
+    <p:spTree>
+      <p:nvGrpSpPr>
+        <p:cNvPr id="1" name=""/>
+        <p:cNvGrpSpPr/>
+        <p:nvPr/>
+      </p:nvGrpSpPr>
+      <p:grpSpPr>
+        <a:xfrm>
+          <a:off x="0" y="0"/>
+          <a:ext cx="0" cy="0"/>
+          <a:chOff x="0" y="0"/>
+          <a:chExt cx="0" cy="0"/>
+        </a:xfrm>
+      </p:grpSpPr>
+      <p:sp>
+        <p:nvSpPr>
+          <p:cNvPr id="2" name="Slide Image Placeholder 1"/>
+          <p:cNvSpPr>
+            <a:spLocks noGrp="1" noRot="1" noChangeAspect="1"/>
+          </p:cNvSpPr>
+          <p:nvPr>
+            <p:ph type="sldImg"/>
+          </p:nvPr>
+        </p:nvSpPr>
+        <p:spPr/>
+      </p:sp>
+      <p:sp>
+        <p:nvSpPr>
+          <p:cNvPr id="3" name="Notes Placeholder 2"/>
+          <p:cNvSpPr>
+            <a:spLocks noGrp="1"/>
+          </p:cNvSpPr>
+          <p:nvPr>
+            <p:ph type="body" idx="1"/>
+          </p:nvPr>
+        </p:nvSpPr>
+        <p:spPr/>
+        <p:txBody>
+          <a:bodyPr/>
+          <a:lstStyle/>
+          <a:p>
+            <a:r>
+              <a:rPr lang="en-US" altLang="zh-CN" dirty="0"/>
+              <a:t>Because the exam is using </a:t>
+            </a:r>
+            <a:r>
+              <a:rPr lang="en-US" altLang="zh-CN" b="1" dirty="0"/>
+              <a:t>two different transmission models</a:t>
+            </a:r>
+            <a:r>
+              <a:rPr lang="en-US" altLang="zh-CN" dirty="0"/>
+              <a:t>.</a:t>
+            </a:r>
+          </a:p>
+          <a:p>
+            <a:r>
+              <a:rPr lang="en-US" altLang="zh-CN" dirty="0"/>
+              <a:t>In </a:t>
+            </a:r>
+            <a:r>
+              <a:rPr lang="en-US" altLang="zh-CN" b="1" dirty="0"/>
+              <a:t>Q2.1–Q2.6</a:t>
+            </a:r>
+            <a:r>
+              <a:rPr lang="en-US" altLang="zh-CN" dirty="0"/>
+              <a:t>, the problem explicitly says: </a:t>
+            </a:r>
+            <a:r>
+              <a:rPr lang="en-US" altLang="zh-CN" b="1" dirty="0"/>
+              <a:t>“E must receive all bits of a payload before sending that payload along the next link.”</a:t>
+            </a:r>
+            <a:r>
+              <a:rPr lang="en-US" altLang="zh-CN" dirty="0"/>
+              <a:t> That is classic </a:t>
+            </a:r>
+            <a:r>
+              <a:rPr lang="en-US" altLang="zh-CN" b="1" dirty="0"/>
+              <a:t>store-and-forward</a:t>
+            </a:r>
+            <a:r>
+              <a:rPr lang="en-US" altLang="zh-CN" dirty="0"/>
+              <a:t> behavior, so a whole 20 Gbit payload must finish arriving at (E) before (E) starts transmitting it onward.</a:t>
+            </a:r>
+          </a:p>
+          <a:p>
+            <a:r>
+              <a:rPr lang="en-US" altLang="zh-CN" dirty="0"/>
+              <a:t>In </a:t>
+            </a:r>
+            <a:r>
+              <a:rPr lang="en-US" altLang="zh-CN" b="1" dirty="0"/>
+              <a:t>Q2.7–Q2.9</a:t>
+            </a:r>
+            <a:r>
+              <a:rPr lang="en-US" altLang="zh-CN" dirty="0"/>
+              <a:t>, the setup changes to: </a:t>
+            </a:r>
+            <a:r>
+              <a:rPr lang="en-US" altLang="zh-CN" b="1" dirty="0"/>
+              <a:t>“At E, each bit can be forwarded independently of other bits.”</a:t>
+            </a:r>
+            <a:r>
+              <a:rPr lang="en-US" altLang="zh-CN" dirty="0"/>
+              <a:t> That is a </a:t>
+            </a:r>
+            <a:r>
+              <a:rPr lang="en-US" altLang="zh-CN" b="1" dirty="0"/>
+              <a:t>bit-by-bit / fluid</a:t>
+            </a:r>
+            <a:r>
+              <a:rPr lang="en-US" altLang="zh-CN" dirty="0"/>
+              <a:t> model, so (E) can start forwarding as soon as the first bit arrives, without waiting for the whole payload.</a:t>
+            </a:r>
+          </a:p>
+          <a:p>
+            <a:r>
+              <a:rPr lang="en-US" altLang="zh-CN" dirty="0"/>
+              <a:t>So the exam is not being inconsistent; it is switching models on purpose.</a:t>
+            </a:r>
+          </a:p>
+          <a:p>
+            <a:r>
+              <a:rPr lang="en-US" altLang="zh-CN" dirty="0"/>
+              <a:t>Under the bit-by-bit model, Q2.1 would look like this:</a:t>
+            </a:r>
+          </a:p>
+          <a:p>
+            <a:r>
+              <a:rPr lang="en-US" altLang="zh-CN" sz="1200" kern="1200" dirty="0">
+                <a:solidFill>
+                  <a:schemeClr val="tx1"/>
+                </a:solidFill>
+                <a:latin typeface="+mn-lt"/>
+                <a:ea typeface="+mn-ea"/>
+                <a:cs typeface="+mn-cs"/>
+              </a:rPr>
+              <a:t>H -&gt; E -&gt; T</a:t>
+            </a:r>
+          </a:p>
+          <a:p>
+            <a:r>
+              <a:rPr lang="en-US" altLang="zh-CN" sz="1200" kern="1200" dirty="0">
+                <a:solidFill>
+                  <a:schemeClr val="tx1"/>
+                </a:solidFill>
+                <a:latin typeface="+mn-lt"/>
+                <a:ea typeface="+mn-ea"/>
+                <a:cs typeface="+mn-cs"/>
+              </a:rPr>
+              <a:t>Link 1: 20 Gbps, 2 s propagation</a:t>
+            </a:r>
+          </a:p>
+          <a:p>
+            <a:r>
+              <a:rPr lang="en-US" altLang="zh-CN" sz="1200" kern="1200" dirty="0">
+                <a:solidFill>
+                  <a:schemeClr val="tx1"/>
+                </a:solidFill>
+                <a:latin typeface="+mn-lt"/>
+                <a:ea typeface="+mn-ea"/>
+                <a:cs typeface="+mn-cs"/>
+              </a:rPr>
+              <a:t>Link 2: 10 Gbps, 10 s propagation</a:t>
+            </a:r>
+          </a:p>
+          <a:p>
+            <a:endParaRPr lang="en-US" altLang="zh-CN" sz="1200" kern="1200" dirty="0">
+              <a:solidFill>
+                <a:schemeClr val="tx1"/>
+              </a:solidFill>
+              <a:latin typeface="+mn-lt"/>
+              <a:ea typeface="+mn-ea"/>
+              <a:cs typeface="+mn-cs"/>
+            </a:endParaRPr>
+          </a:p>
+          <a:p>
+            <a:r>
+              <a:rPr lang="en-US" altLang="zh-CN" sz="1200" kern="1200" dirty="0">
+                <a:solidFill>
+                  <a:schemeClr val="tx1"/>
+                </a:solidFill>
+                <a:latin typeface="+mn-lt"/>
+                <a:ea typeface="+mn-ea"/>
+                <a:cs typeface="+mn-cs"/>
+              </a:rPr>
+              <a:t>Payload 1:</a:t>
+            </a:r>
+          </a:p>
+          <a:p>
+            <a:r>
+              <a:rPr lang="en-US" altLang="zh-CN" sz="1200" kern="1200" dirty="0">
+                <a:solidFill>
+                  <a:schemeClr val="tx1"/>
+                </a:solidFill>
+                <a:latin typeface="+mn-lt"/>
+                <a:ea typeface="+mn-ea"/>
+                <a:cs typeface="+mn-cs"/>
+              </a:rPr>
+              <a:t>H sends bits during [0,1]</a:t>
+            </a:r>
+          </a:p>
+          <a:p>
+            <a:r>
+              <a:rPr lang="en-US" altLang="zh-CN" sz="1200" kern="1200" dirty="0">
+                <a:solidFill>
+                  <a:schemeClr val="tx1"/>
+                </a:solidFill>
+                <a:latin typeface="+mn-lt"/>
+                <a:ea typeface="+mn-ea"/>
+                <a:cs typeface="+mn-cs"/>
+              </a:rPr>
+              <a:t>E receives bits during [2,3]</a:t>
+            </a:r>
+          </a:p>
+          <a:p>
+            <a:r>
+              <a:rPr lang="en-US" altLang="zh-CN" sz="1200" kern="1200" dirty="0">
+                <a:solidFill>
+                  <a:schemeClr val="tx1"/>
+                </a:solidFill>
+                <a:latin typeface="+mn-lt"/>
+                <a:ea typeface="+mn-ea"/>
+                <a:cs typeface="+mn-cs"/>
+              </a:rPr>
+              <a:t>E starts forwarding immediately at t = 2</a:t>
+            </a:r>
+          </a:p>
+          <a:p>
+            <a:r>
+              <a:rPr lang="en-US" altLang="zh-CN" sz="1200" kern="1200" dirty="0">
+                <a:solidFill>
+                  <a:schemeClr val="tx1"/>
+                </a:solidFill>
+                <a:latin typeface="+mn-lt"/>
+                <a:ea typeface="+mn-ea"/>
+                <a:cs typeface="+mn-cs"/>
+              </a:rPr>
+              <a:t>E finishes sending payload 1 at t = 4</a:t>
+            </a:r>
+          </a:p>
+          <a:p>
+            <a:r>
+              <a:rPr lang="en-US" altLang="zh-CN" sz="1200" kern="1200" dirty="0">
+                <a:solidFill>
+                  <a:schemeClr val="tx1"/>
+                </a:solidFill>
+                <a:latin typeface="+mn-lt"/>
+                <a:ea typeface="+mn-ea"/>
+                <a:cs typeface="+mn-cs"/>
+              </a:rPr>
+              <a:t>T receives the last bit at t = 14</a:t>
+            </a:r>
+          </a:p>
+          <a:p>
+            <a:r>
+              <a:rPr lang="en-US" altLang="zh-CN" dirty="0"/>
+              <a:t>So compared with the store-and-forward answer:</a:t>
+            </a:r>
+          </a:p>
+          <a:p>
+            <a:r>
+              <a:rPr lang="en-US" altLang="zh-CN" dirty="0"/>
+              <a:t>first bit can leave (E) at </a:t>
+            </a:r>
+            <a:r>
+              <a:rPr lang="en-US" altLang="zh-CN" b="1" dirty="0"/>
+              <a:t>t = 2</a:t>
+            </a:r>
+            <a:r>
+              <a:rPr lang="en-US" altLang="zh-CN" dirty="0"/>
+              <a:t> instead of </a:t>
+            </a:r>
+            <a:r>
+              <a:rPr lang="en-US" altLang="zh-CN" b="1" dirty="0"/>
+              <a:t>t = 3</a:t>
+            </a:r>
+            <a:endParaRPr lang="en-US" altLang="zh-CN" dirty="0"/>
+          </a:p>
+          <a:p>
+            <a:r>
+              <a:rPr lang="en-US" altLang="zh-CN" dirty="0"/>
+              <a:t>the last bit of payload 1 reaches (T) at </a:t>
+            </a:r>
+            <a:r>
+              <a:rPr lang="en-US" altLang="zh-CN" b="1" dirty="0"/>
+              <a:t>t = 14</a:t>
+            </a:r>
+            <a:r>
+              <a:rPr lang="en-US" altLang="zh-CN" dirty="0"/>
+              <a:t> instead of </a:t>
+            </a:r>
+            <a:r>
+              <a:rPr lang="en-US" altLang="zh-CN" b="1" dirty="0"/>
+              <a:t>t = 15</a:t>
+            </a:r>
+            <a:endParaRPr lang="en-US" altLang="zh-CN" dirty="0"/>
+          </a:p>
+          <a:p>
+            <a:r>
+              <a:rPr lang="en-US" altLang="zh-CN" dirty="0"/>
+              <a:t>And the later payloads would finish at (T) every 2 seconds after that:</a:t>
+            </a:r>
+            <a:br>
+              <a:rPr lang="en-US" altLang="zh-CN" dirty="0"/>
+            </a:br>
+            <a:r>
+              <a:rPr lang="en-US" altLang="zh-CN" dirty="0"/>
+              <a:t>[</a:t>
+            </a:r>
+            <a:br>
+              <a:rPr lang="en-US" altLang="zh-CN" dirty="0"/>
+            </a:br>
+            <a:r>
+              <a:rPr lang="en-US" altLang="zh-CN" dirty="0"/>
+              <a:t>14, 16, 18, \dots, 32</a:t>
+            </a:r>
+            <a:br>
+              <a:rPr lang="en-US" altLang="zh-CN" dirty="0"/>
+            </a:br>
+            <a:r>
+              <a:rPr lang="en-US" altLang="zh-CN" dirty="0"/>
+              <a:t>]</a:t>
+            </a:r>
+          </a:p>
+          <a:p>
+            <a:r>
+              <a:rPr lang="en-US" altLang="zh-CN"/>
+              <a:t>That is why the later subparts use queue </a:t>
+            </a:r>
+            <a:r>
+              <a:rPr lang="en-US" altLang="zh-CN" b="1"/>
+              <a:t>size in Gbit</a:t>
+            </a:r>
+            <a:r>
+              <a:rPr lang="en-US" altLang="zh-CN"/>
+              <a:t> and </a:t>
+            </a:r>
+            <a:r>
+              <a:rPr lang="en-US" altLang="zh-CN" b="1"/>
+              <a:t>slope/rate</a:t>
+            </a:r>
+            <a:r>
+              <a:rPr lang="en-US" altLang="zh-CN"/>
+              <a:t>, instead of whole-packet waiting times.</a:t>
+            </a:r>
+          </a:p>
+          <a:p>
+            <a:endParaRPr lang="zh-CN" altLang="en-US"/>
+          </a:p>
+        </p:txBody>
+      </p:sp>
+      <p:sp>
+        <p:nvSpPr>
+          <p:cNvPr id="4" name="Slide Number Placeholder 3"/>
+          <p:cNvSpPr>
+            <a:spLocks noGrp="1"/>
+          </p:cNvSpPr>
+          <p:nvPr>
+            <p:ph type="sldNum" sz="quarter" idx="5"/>
+          </p:nvPr>
+        </p:nvSpPr>
+        <p:spPr/>
+        <p:txBody>
+          <a:bodyPr/>
+          <a:lstStyle/>
+          <a:p>
+            <a:fld id="{2D71AD5F-E36F-46B9-A99B-7B025244359D}" type="slidenum">
+              <a:rPr lang="en-US" smtClean="0"/>
+              <a:pPr/>
+              <a:t>14</a:t>
+            </a:fld>
+            <a:endParaRPr lang="en-US"/>
+          </a:p>
+        </p:txBody>
+      </p:sp>
+    </p:spTree>
+    <p:extLst>
+      <p:ext uri="{BB962C8B-B14F-4D97-AF65-F5344CB8AC3E}">
+        <p14:creationId xmlns:p14="http://schemas.microsoft.com/office/powerpoint/2010/main" val="3494257972"/>
+      </p:ext>
+    </p:extLst>
+  </p:cSld>
+  <p:clrMapOvr>
+    <a:masterClrMapping/>
+  </p:clrMapOvr>
+</p:notes>
+</file>
+
+<file path=ppt/notesSlides/notesSlide6.xml><?xml version="1.0" encoding="utf-8"?>
+<p:notes xmlns:a="http://schemas.openxmlformats.org/drawingml/2006/main" xmlns:r="http://schemas.openxmlformats.org/officeDocument/2006/relationships" xmlns:p="http://schemas.openxmlformats.org/presentationml/2006/main">
+  <p:cSld>
+    <p:spTree>
+      <p:nvGrpSpPr>
+        <p:cNvPr id="1" name=""/>
+        <p:cNvGrpSpPr/>
+        <p:nvPr/>
+      </p:nvGrpSpPr>
+      <p:grpSpPr>
+        <a:xfrm>
+          <a:off x="0" y="0"/>
+          <a:ext cx="0" cy="0"/>
+          <a:chOff x="0" y="0"/>
+          <a:chExt cx="0" cy="0"/>
+        </a:xfrm>
+      </p:grpSpPr>
+      <p:sp>
+        <p:nvSpPr>
+          <p:cNvPr id="2" name="Slide Image Placeholder 1"/>
+          <p:cNvSpPr>
+            <a:spLocks noGrp="1" noRot="1" noChangeAspect="1"/>
+          </p:cNvSpPr>
+          <p:nvPr>
+            <p:ph type="sldImg"/>
+          </p:nvPr>
+        </p:nvSpPr>
+        <p:spPr/>
+      </p:sp>
+      <p:sp>
+        <p:nvSpPr>
+          <p:cNvPr id="3" name="Notes Placeholder 2"/>
+          <p:cNvSpPr>
+            <a:spLocks noGrp="1"/>
+          </p:cNvSpPr>
+          <p:nvPr>
+            <p:ph type="body" idx="1"/>
+          </p:nvPr>
+        </p:nvSpPr>
+        <p:spPr/>
+        <p:txBody>
+          <a:bodyPr/>
+          <a:lstStyle/>
+          <a:p>
+            <a:r>
+              <a:rPr lang="en-US" altLang="zh-CN" dirty="0"/>
+              <a:t>The middle router can lose its direct route to  D, while each outer router may still hear a finite route from the other outer router, because poisoned reverse only hides the route from the neighbor being used as next hop.  As a result, the false route can circulate around the triangle and the metric can increase repeatedly, so B still has count-to-infinity. For C, removing D still leaves a triangle among the three non-destination routers. That creates the same problem as in B:</a:t>
+            </a:r>
+            <a:endParaRPr lang="zh-CN" altLang="en-US" dirty="0"/>
+          </a:p>
+        </p:txBody>
+      </p:sp>
+      <p:sp>
+        <p:nvSpPr>
+          <p:cNvPr id="4" name="Slide Number Placeholder 3"/>
+          <p:cNvSpPr>
+            <a:spLocks noGrp="1"/>
+          </p:cNvSpPr>
+          <p:nvPr>
+            <p:ph type="sldNum" sz="quarter" idx="5"/>
+          </p:nvPr>
+        </p:nvSpPr>
+        <p:spPr/>
+        <p:txBody>
+          <a:bodyPr/>
+          <a:lstStyle/>
+          <a:p>
+            <a:fld id="{2D71AD5F-E36F-46B9-A99B-7B025244359D}" type="slidenum">
+              <a:rPr lang="en-US" smtClean="0"/>
+              <a:pPr/>
+              <a:t>16</a:t>
+            </a:fld>
+            <a:endParaRPr lang="en-US"/>
+          </a:p>
+        </p:txBody>
+      </p:sp>
+    </p:spTree>
+    <p:extLst>
+      <p:ext uri="{BB962C8B-B14F-4D97-AF65-F5344CB8AC3E}">
+        <p14:creationId xmlns:p14="http://schemas.microsoft.com/office/powerpoint/2010/main" val="841813967"/>
+      </p:ext>
+    </p:extLst>
+  </p:cSld>
+  <p:clrMapOvr>
+    <a:masterClrMapping/>
+  </p:clrMapOvr>
+</p:notes>
+</file>
+
 <file path=ppt/slideLayouts/slideLayout1.xml><?xml version="1.0" encoding="utf-8"?>
 <p:sldLayout xmlns:a="http://schemas.openxmlformats.org/drawingml/2006/main" xmlns:r="http://schemas.openxmlformats.org/officeDocument/2006/relationships" xmlns:p="http://schemas.openxmlformats.org/presentationml/2006/main" showMasterSp="0" type="title" preserve="1">
   <p:cSld name="Title Slide">
@@ -2376,7 +3610,7 @@
             <a:fld id="{2E26774B-6488-4259-9342-6CBDB2BFD4E4}" type="datetime1">
               <a:rPr lang="en-US" smtClean="0"/>
               <a:pPr eaLnBrk="1" latinLnBrk="0" hangingPunct="1"/>
-              <a:t>4/9/2026</a:t>
+              <a:t>4/14/2026</a:t>
             </a:fld>
             <a:endParaRPr lang="en-US" sz="1600" dirty="0"/>
           </a:p>
@@ -2737,7 +3971,7 @@
             <a:fld id="{9B2E7711-0BE3-4AFC-959B-CB5C31A7AE48}" type="datetime1">
               <a:rPr lang="en-US" smtClean="0"/>
               <a:pPr eaLnBrk="1" latinLnBrk="0" hangingPunct="1"/>
-              <a:t>4/9/2026</a:t>
+              <a:t>4/14/2026</a:t>
             </a:fld>
             <a:endParaRPr lang="en-US"/>
           </a:p>
@@ -2914,7 +4148,7 @@
             <a:fld id="{825AAB62-A572-4E37-B772-B4A75ADE0B18}" type="datetime1">
               <a:rPr lang="en-US" smtClean="0"/>
               <a:pPr eaLnBrk="1" latinLnBrk="0" hangingPunct="1"/>
-              <a:t>4/9/2026</a:t>
+              <a:t>4/14/2026</a:t>
             </a:fld>
             <a:endParaRPr lang="en-US"/>
           </a:p>
@@ -8242,7 +9476,7 @@
             <a:fld id="{B0F52420-10F8-488E-969A-A9BE388BE9C4}" type="datetime1">
               <a:rPr lang="en-US" smtClean="0"/>
               <a:pPr eaLnBrk="1" latinLnBrk="0" hangingPunct="1"/>
-              <a:t>4/9/2026</a:t>
+              <a:t>4/14/2026</a:t>
             </a:fld>
             <a:endParaRPr lang="en-US" dirty="0"/>
           </a:p>
@@ -12656,7 +13890,7 @@
             <a:fld id="{96E96F24-58CF-47DA-907C-A9CD6353E425}" type="datetime1">
               <a:rPr lang="en-US" smtClean="0"/>
               <a:pPr eaLnBrk="1" latinLnBrk="0" hangingPunct="1"/>
-              <a:t>4/9/2026</a:t>
+              <a:t>4/14/2026</a:t>
             </a:fld>
             <a:endParaRPr lang="en-US" dirty="0"/>
           </a:p>
@@ -14590,7 +15824,7 @@
             <a:fld id="{53AE4463-726A-4A35-9F46-98893432A3F9}" type="datetime1">
               <a:rPr lang="en-US" smtClean="0"/>
               <a:pPr eaLnBrk="1" latinLnBrk="0" hangingPunct="1"/>
-              <a:t>4/9/2026</a:t>
+              <a:t>4/14/2026</a:t>
             </a:fld>
             <a:endParaRPr lang="en-US"/>
           </a:p>
@@ -14944,7 +16178,7 @@
             <a:fld id="{FDF404D0-E306-4E90-90E3-E44D26246FFC}" type="datetime1">
               <a:rPr lang="en-US" smtClean="0"/>
               <a:pPr eaLnBrk="1" latinLnBrk="0" hangingPunct="1"/>
-              <a:t>4/9/2026</a:t>
+              <a:t>4/14/2026</a:t>
             </a:fld>
             <a:endParaRPr lang="en-US"/>
           </a:p>
@@ -15178,7 +16412,7 @@
             <a:fld id="{1485DA14-76F0-4D93-83FB-7878C79A1986}" type="datetime1">
               <a:rPr lang="en-US" smtClean="0"/>
               <a:pPr eaLnBrk="1" latinLnBrk="0" hangingPunct="1"/>
-              <a:t>4/9/2026</a:t>
+              <a:t>4/14/2026</a:t>
             </a:fld>
             <a:endParaRPr lang="en-US"/>
           </a:p>
@@ -15321,7 +16555,7 @@
             <a:fld id="{A15E552D-49E1-496B-B79C-E100986B8B5F}" type="datetime1">
               <a:rPr lang="en-US" smtClean="0"/>
               <a:pPr eaLnBrk="1" latinLnBrk="0" hangingPunct="1"/>
-              <a:t>4/9/2026</a:t>
+              <a:t>4/14/2026</a:t>
             </a:fld>
             <a:endParaRPr lang="en-US"/>
           </a:p>
@@ -15600,7 +16834,7 @@
             <a:fld id="{CEC72505-1551-4A98-97CD-F520B07184AD}" type="datetime1">
               <a:rPr lang="en-US" smtClean="0"/>
               <a:pPr eaLnBrk="1" latinLnBrk="0" hangingPunct="1"/>
-              <a:t>4/9/2026</a:t>
+              <a:t>4/14/2026</a:t>
             </a:fld>
             <a:endParaRPr lang="en-US"/>
           </a:p>
@@ -16009,7 +17243,7 @@
             <a:fld id="{7218F47B-BA16-4F20-B5BA-73F598D94B51}" type="datetime1">
               <a:rPr lang="en-US" smtClean="0"/>
               <a:pPr eaLnBrk="1" latinLnBrk="0" hangingPunct="1"/>
-              <a:t>4/9/2026</a:t>
+              <a:t>4/14/2026</a:t>
             </a:fld>
             <a:endParaRPr lang="en-US"/>
           </a:p>
@@ -16348,7 +17582,7 @@
             <a:fld id="{4F3CB514-9CA6-4E48-9463-A430D31CFDE3}" type="datetime1">
               <a:rPr lang="en-US" smtClean="0"/>
               <a:pPr eaLnBrk="1" latinLnBrk="0" hangingPunct="1"/>
-              <a:t>4/9/2026</a:t>
+              <a:t>4/14/2026</a:t>
             </a:fld>
             <a:endParaRPr lang="en-US" sz="1400" dirty="0">
               <a:solidFill>
@@ -18426,6 +19660,2940 @@
     <p:extLst>
       <p:ext uri="{BB962C8B-B14F-4D97-AF65-F5344CB8AC3E}">
         <p14:creationId xmlns:p14="http://schemas.microsoft.com/office/powerpoint/2010/main" val="1683281344"/>
+      </p:ext>
+    </p:extLst>
+  </p:cSld>
+  <p:clrMapOvr>
+    <a:masterClrMapping/>
+  </p:clrMapOvr>
+</p:sld>
+</file>
+
+<file path=ppt/slides/slide10.xml><?xml version="1.0" encoding="utf-8"?>
+<p:sld xmlns:a="http://schemas.openxmlformats.org/drawingml/2006/main" xmlns:r="http://schemas.openxmlformats.org/officeDocument/2006/relationships" xmlns:p="http://schemas.openxmlformats.org/presentationml/2006/main">
+  <p:cSld>
+    <p:spTree>
+      <p:nvGrpSpPr>
+        <p:cNvPr id="1" name=""/>
+        <p:cNvGrpSpPr/>
+        <p:nvPr/>
+      </p:nvGrpSpPr>
+      <p:grpSpPr>
+        <a:xfrm>
+          <a:off x="0" y="0"/>
+          <a:ext cx="0" cy="0"/>
+          <a:chOff x="0" y="0"/>
+          <a:chExt cx="0" cy="0"/>
+        </a:xfrm>
+      </p:grpSpPr>
+      <p:sp>
+        <p:nvSpPr>
+          <p:cNvPr id="2" name="Title 1">
+            <a:extLst>
+              <a:ext uri="{FF2B5EF4-FFF2-40B4-BE49-F238E27FC236}">
+                <a16:creationId xmlns:a16="http://schemas.microsoft.com/office/drawing/2014/main" id="{DF0927B0-2D9B-4671-75C4-62CB42000023}"/>
+              </a:ext>
+            </a:extLst>
+          </p:cNvPr>
+          <p:cNvSpPr>
+            <a:spLocks noGrp="1"/>
+          </p:cNvSpPr>
+          <p:nvPr>
+            <p:ph type="title"/>
+          </p:nvPr>
+        </p:nvSpPr>
+        <p:spPr/>
+        <p:txBody>
+          <a:bodyPr/>
+          <a:lstStyle/>
+          <a:p>
+            <a:r>
+              <a:rPr lang="en-US" altLang="zh-CN" dirty="0"/>
+              <a:t>Lecture 3 - Links Queuing Delays ANS</a:t>
+            </a:r>
+            <a:endParaRPr lang="zh-CN" altLang="en-US" dirty="0"/>
+          </a:p>
+        </p:txBody>
+      </p:sp>
+      <p:sp>
+        <p:nvSpPr>
+          <p:cNvPr id="3" name="Slide Number Placeholder 2">
+            <a:extLst>
+              <a:ext uri="{FF2B5EF4-FFF2-40B4-BE49-F238E27FC236}">
+                <a16:creationId xmlns:a16="http://schemas.microsoft.com/office/drawing/2014/main" id="{B022CDB5-0DC1-2A82-F21C-CBABAAA787E0}"/>
+              </a:ext>
+            </a:extLst>
+          </p:cNvPr>
+          <p:cNvSpPr>
+            <a:spLocks noGrp="1"/>
+          </p:cNvSpPr>
+          <p:nvPr>
+            <p:ph type="sldNum" sz="quarter" idx="12"/>
+          </p:nvPr>
+        </p:nvSpPr>
+        <p:spPr/>
+        <p:txBody>
+          <a:bodyPr/>
+          <a:lstStyle/>
+          <a:p>
+            <a:fld id="{EA7C8D44-3667-46F6-9772-CC52308E2A7F}" type="slidenum">
+              <a:rPr kumimoji="0" lang="en-US" smtClean="0"/>
+              <a:pPr/>
+              <a:t>10</a:t>
+            </a:fld>
+            <a:endParaRPr kumimoji="0" lang="en-US" dirty="0"/>
+          </a:p>
+        </p:txBody>
+      </p:sp>
+      <p:sp>
+        <p:nvSpPr>
+          <p:cNvPr id="4" name="Content Placeholder 3">
+            <a:extLst>
+              <a:ext uri="{FF2B5EF4-FFF2-40B4-BE49-F238E27FC236}">
+                <a16:creationId xmlns:a16="http://schemas.microsoft.com/office/drawing/2014/main" id="{852433A0-E01D-0482-6B3B-9C08BD51DDB9}"/>
+              </a:ext>
+            </a:extLst>
+          </p:cNvPr>
+          <p:cNvSpPr>
+            <a:spLocks noGrp="1"/>
+          </p:cNvSpPr>
+          <p:nvPr>
+            <p:ph sz="quarter" idx="1"/>
+          </p:nvPr>
+        </p:nvSpPr>
+        <p:spPr>
+          <a:xfrm>
+            <a:off x="609600" y="1219200"/>
+            <a:ext cx="6934200" cy="4937760"/>
+          </a:xfrm>
+        </p:spPr>
+        <p:txBody>
+          <a:bodyPr>
+            <a:normAutofit/>
+          </a:bodyPr>
+          <a:lstStyle/>
+          <a:p>
+            <a:r>
+              <a:rPr lang="en-US" altLang="zh-CN" dirty="0"/>
+              <a:t>Q6 ANS:  When the first bit of a payload is sent out from </a:t>
+            </a:r>
+            <a:r>
+              <a:rPr lang="zh-CN" altLang="en-US" dirty="0"/>
+              <a:t>𝐸</a:t>
+            </a:r>
+            <a:r>
+              <a:rPr lang="en-US" altLang="zh-CN" dirty="0"/>
+              <a:t>, the last bit gets sent out 2 seconds later.  This is because Link 2 has bandwidth 10 Gbps, and the payload is 20 </a:t>
+            </a:r>
+            <a:r>
+              <a:rPr lang="en-US" altLang="zh-CN" dirty="0" err="1"/>
+              <a:t>Gbits</a:t>
+            </a:r>
+            <a:r>
+              <a:rPr lang="en-US" altLang="zh-CN" dirty="0"/>
+              <a:t>.</a:t>
+            </a:r>
+          </a:p>
+          <a:p>
+            <a:r>
+              <a:rPr lang="en-US" altLang="zh-CN" dirty="0"/>
+              <a:t>The last bit then takes another 10 seconds to arrive at </a:t>
+            </a:r>
+            <a:r>
+              <a:rPr lang="zh-CN" altLang="en-US" dirty="0"/>
+              <a:t>𝑇 </a:t>
+            </a:r>
+            <a:r>
+              <a:rPr lang="en-US" altLang="zh-CN" dirty="0"/>
+              <a:t>. This is the propagation delay of Link 2.</a:t>
+            </a:r>
+          </a:p>
+          <a:p>
+            <a:r>
+              <a:rPr lang="en-US" altLang="zh-CN" dirty="0"/>
+              <a:t>Thus, the time the last bit of a payload arrives at </a:t>
+            </a:r>
+            <a:r>
+              <a:rPr lang="zh-CN" altLang="en-US" dirty="0"/>
+              <a:t>𝑇 </a:t>
+            </a:r>
+            <a:r>
+              <a:rPr lang="en-US" altLang="zh-CN" dirty="0"/>
+              <a:t>is </a:t>
+            </a:r>
+            <a:r>
+              <a:rPr lang="en-US" altLang="zh-CN" dirty="0">
+                <a:solidFill>
+                  <a:srgbClr val="C00000"/>
+                </a:solidFill>
+              </a:rPr>
+              <a:t>12 seconds after the time the first bit is sent out of </a:t>
+            </a:r>
+            <a:r>
+              <a:rPr lang="zh-CN" altLang="en-US" dirty="0">
+                <a:solidFill>
+                  <a:srgbClr val="C00000"/>
+                </a:solidFill>
+              </a:rPr>
+              <a:t>𝐸</a:t>
+            </a:r>
+            <a:r>
+              <a:rPr lang="en-US" altLang="zh-CN" dirty="0"/>
+              <a:t>. </a:t>
+            </a:r>
+            <a:br>
+              <a:rPr lang="en-US" altLang="zh-CN" dirty="0"/>
+            </a:br>
+            <a:endParaRPr lang="zh-CN" altLang="en-US" dirty="0"/>
+          </a:p>
+        </p:txBody>
+      </p:sp>
+      <p:pic>
+        <p:nvPicPr>
+          <p:cNvPr id="6" name="Picture 5" descr="The provided text appears to be a schedule or timetable indicating the time of arrival and sending times for payloads, with each payload numbered sequentially and the corresponding time listed in a tabular format.&#10;&#10;AI-generated content may be incorrect.">
+            <a:extLst>
+              <a:ext uri="{FF2B5EF4-FFF2-40B4-BE49-F238E27FC236}">
+                <a16:creationId xmlns:a16="http://schemas.microsoft.com/office/drawing/2014/main" id="{7B398CF2-B5DB-2E8E-CE6C-43D32F86506A}"/>
+              </a:ext>
+            </a:extLst>
+          </p:cNvPr>
+          <p:cNvPicPr>
+            <a:picLocks noChangeAspect="1"/>
+          </p:cNvPicPr>
+          <p:nvPr/>
+        </p:nvPicPr>
+        <p:blipFill>
+          <a:blip r:embed="rId2"/>
+          <a:stretch>
+            <a:fillRect/>
+          </a:stretch>
+        </p:blipFill>
+        <p:spPr>
+          <a:xfrm>
+            <a:off x="7620000" y="2133600"/>
+            <a:ext cx="4315427" cy="3343742"/>
+          </a:xfrm>
+          <a:prstGeom prst="rect">
+            <a:avLst/>
+          </a:prstGeom>
+        </p:spPr>
+      </p:pic>
+      <p:pic>
+        <p:nvPicPr>
+          <p:cNvPr id="7" name="Picture 6">
+            <a:extLst>
+              <a:ext uri="{FF2B5EF4-FFF2-40B4-BE49-F238E27FC236}">
+                <a16:creationId xmlns:a16="http://schemas.microsoft.com/office/drawing/2014/main" id="{85438842-C3AF-4806-EDBA-438645A59F1F}"/>
+              </a:ext>
+            </a:extLst>
+          </p:cNvPr>
+          <p:cNvPicPr>
+            <a:picLocks noChangeAspect="1"/>
+          </p:cNvPicPr>
+          <p:nvPr/>
+        </p:nvPicPr>
+        <p:blipFill>
+          <a:blip r:embed="rId3"/>
+          <a:stretch>
+            <a:fillRect/>
+          </a:stretch>
+        </p:blipFill>
+        <p:spPr>
+          <a:xfrm>
+            <a:off x="5430635" y="5798056"/>
+            <a:ext cx="6697010" cy="924054"/>
+          </a:xfrm>
+          <a:prstGeom prst="rect">
+            <a:avLst/>
+          </a:prstGeom>
+        </p:spPr>
+      </p:pic>
+    </p:spTree>
+    <p:extLst>
+      <p:ext uri="{BB962C8B-B14F-4D97-AF65-F5344CB8AC3E}">
+        <p14:creationId xmlns:p14="http://schemas.microsoft.com/office/powerpoint/2010/main" val="1650916134"/>
+      </p:ext>
+    </p:extLst>
+  </p:cSld>
+  <p:clrMapOvr>
+    <a:masterClrMapping/>
+  </p:clrMapOvr>
+</p:sld>
+</file>
+
+<file path=ppt/slides/slide11.xml><?xml version="1.0" encoding="utf-8"?>
+<p:sld xmlns:a="http://schemas.openxmlformats.org/drawingml/2006/main" xmlns:r="http://schemas.openxmlformats.org/officeDocument/2006/relationships" xmlns:p="http://schemas.openxmlformats.org/presentationml/2006/main">
+  <p:cSld>
+    <p:spTree>
+      <p:nvGrpSpPr>
+        <p:cNvPr id="1" name=""/>
+        <p:cNvGrpSpPr/>
+        <p:nvPr/>
+      </p:nvGrpSpPr>
+      <p:grpSpPr>
+        <a:xfrm>
+          <a:off x="0" y="0"/>
+          <a:ext cx="0" cy="0"/>
+          <a:chOff x="0" y="0"/>
+          <a:chExt cx="0" cy="0"/>
+        </a:xfrm>
+      </p:grpSpPr>
+      <p:sp>
+        <p:nvSpPr>
+          <p:cNvPr id="2" name="Title 1">
+            <a:extLst>
+              <a:ext uri="{FF2B5EF4-FFF2-40B4-BE49-F238E27FC236}">
+                <a16:creationId xmlns:a16="http://schemas.microsoft.com/office/drawing/2014/main" id="{6ACF35F6-2F09-B518-7E8D-CD64C6A37170}"/>
+              </a:ext>
+            </a:extLst>
+          </p:cNvPr>
+          <p:cNvSpPr>
+            <a:spLocks noGrp="1"/>
+          </p:cNvSpPr>
+          <p:nvPr>
+            <p:ph type="title"/>
+          </p:nvPr>
+        </p:nvSpPr>
+        <p:spPr/>
+        <p:txBody>
+          <a:bodyPr/>
+          <a:lstStyle/>
+          <a:p>
+            <a:r>
+              <a:rPr lang="en-US" altLang="zh-CN" dirty="0"/>
+              <a:t>Lecture 3 - Links Queuing Delays ANS</a:t>
+            </a:r>
+            <a:endParaRPr lang="zh-CN" altLang="en-US" dirty="0"/>
+          </a:p>
+        </p:txBody>
+      </p:sp>
+      <p:sp>
+        <p:nvSpPr>
+          <p:cNvPr id="3" name="Slide Number Placeholder 2">
+            <a:extLst>
+              <a:ext uri="{FF2B5EF4-FFF2-40B4-BE49-F238E27FC236}">
+                <a16:creationId xmlns:a16="http://schemas.microsoft.com/office/drawing/2014/main" id="{9431E2AF-89F9-A04A-85A4-EB194565F2F9}"/>
+              </a:ext>
+            </a:extLst>
+          </p:cNvPr>
+          <p:cNvSpPr>
+            <a:spLocks noGrp="1"/>
+          </p:cNvSpPr>
+          <p:nvPr>
+            <p:ph type="sldNum" sz="quarter" idx="12"/>
+          </p:nvPr>
+        </p:nvSpPr>
+        <p:spPr/>
+        <p:txBody>
+          <a:bodyPr/>
+          <a:lstStyle/>
+          <a:p>
+            <a:fld id="{EA7C8D44-3667-46F6-9772-CC52308E2A7F}" type="slidenum">
+              <a:rPr kumimoji="0" lang="en-US" smtClean="0"/>
+              <a:pPr/>
+              <a:t>11</a:t>
+            </a:fld>
+            <a:endParaRPr kumimoji="0" lang="en-US" dirty="0"/>
+          </a:p>
+        </p:txBody>
+      </p:sp>
+      <p:sp>
+        <p:nvSpPr>
+          <p:cNvPr id="4" name="Content Placeholder 3">
+            <a:extLst>
+              <a:ext uri="{FF2B5EF4-FFF2-40B4-BE49-F238E27FC236}">
+                <a16:creationId xmlns:a16="http://schemas.microsoft.com/office/drawing/2014/main" id="{835E8B7E-477A-63DB-A385-4BE308270C6C}"/>
+              </a:ext>
+            </a:extLst>
+          </p:cNvPr>
+          <p:cNvSpPr>
+            <a:spLocks noGrp="1"/>
+          </p:cNvSpPr>
+          <p:nvPr>
+            <p:ph sz="quarter" idx="1"/>
+          </p:nvPr>
+        </p:nvSpPr>
+        <p:spPr>
+          <a:xfrm>
+            <a:off x="609600" y="1219200"/>
+            <a:ext cx="7391400" cy="4937760"/>
+          </a:xfrm>
+        </p:spPr>
+        <p:txBody>
+          <a:bodyPr>
+            <a:normAutofit fontScale="92500" lnSpcReduction="10000"/>
+          </a:bodyPr>
+          <a:lstStyle/>
+          <a:p>
+            <a:r>
+              <a:rPr lang="en-US" altLang="zh-CN" dirty="0">
+                <a:solidFill>
+                  <a:srgbClr val="C00000"/>
+                </a:solidFill>
+              </a:rPr>
+              <a:t>New Setup: </a:t>
+            </a:r>
+            <a:r>
+              <a:rPr lang="en-US" altLang="zh-CN" dirty="0"/>
+              <a:t>Starting at </a:t>
+            </a:r>
+            <a:r>
+              <a:rPr lang="zh-CN" altLang="en-US" dirty="0"/>
+              <a:t>𝑡 </a:t>
+            </a:r>
+            <a:r>
+              <a:rPr lang="en-US" altLang="zh-CN" dirty="0"/>
+              <a:t>= 0, </a:t>
+            </a:r>
+            <a:r>
+              <a:rPr lang="en-US" altLang="zh-CN" i="1" dirty="0"/>
+              <a:t>H</a:t>
+            </a:r>
+            <a:r>
+              <a:rPr lang="en-US" altLang="zh-CN" dirty="0"/>
+              <a:t> sends an endless stream of data, at constant rate 20 Gbps</a:t>
+            </a:r>
+            <a:r>
+              <a:rPr lang="zh-CN" altLang="en-US" dirty="0"/>
+              <a:t> </a:t>
+            </a:r>
+            <a:r>
+              <a:rPr lang="en-US" altLang="zh-CN" dirty="0"/>
+              <a:t>to </a:t>
+            </a:r>
+            <a:r>
+              <a:rPr lang="zh-CN" altLang="en-US" dirty="0"/>
+              <a:t>𝑇</a:t>
+            </a:r>
+            <a:r>
+              <a:rPr lang="en-US" altLang="zh-CN" dirty="0"/>
+              <a:t>.  At </a:t>
+            </a:r>
+            <a:r>
+              <a:rPr lang="zh-CN" altLang="en-US" dirty="0"/>
+              <a:t>𝐸</a:t>
+            </a:r>
+            <a:r>
+              <a:rPr lang="en-US" altLang="zh-CN" dirty="0"/>
+              <a:t>, each bit can be forwarded independently of other bits.</a:t>
+            </a:r>
+          </a:p>
+          <a:p>
+            <a:r>
+              <a:rPr lang="en-US" altLang="zh-CN" dirty="0"/>
+              <a:t>Q7 Link 2 has a constant bandwidth of 15 Gbps.  How does the queue size grow with time?</a:t>
+            </a:r>
+          </a:p>
+          <a:p>
+            <a:r>
+              <a:rPr lang="en-US" altLang="zh-CN" dirty="0"/>
+              <a:t>ANS:  The first bit is sent at </a:t>
+            </a:r>
+            <a:r>
+              <a:rPr lang="zh-CN" altLang="en-US" dirty="0"/>
+              <a:t>𝑡 </a:t>
+            </a:r>
+            <a:r>
+              <a:rPr lang="en-US" altLang="zh-CN" dirty="0"/>
+              <a:t>= 0, and arrives at </a:t>
+            </a:r>
+            <a:r>
+              <a:rPr lang="zh-CN" altLang="en-US" dirty="0"/>
+              <a:t>𝐸 </a:t>
+            </a:r>
+            <a:r>
+              <a:rPr lang="en-US" altLang="zh-CN" dirty="0"/>
+              <a:t>at </a:t>
+            </a:r>
+            <a:r>
+              <a:rPr lang="zh-CN" altLang="en-US" dirty="0"/>
+              <a:t>𝑡 </a:t>
+            </a:r>
+            <a:r>
+              <a:rPr lang="en-US" altLang="zh-CN" dirty="0"/>
+              <a:t>= 2,  after 2-second propagation delay of Link 1.  This means that from </a:t>
+            </a:r>
+            <a:r>
+              <a:rPr lang="zh-CN" altLang="en-US" dirty="0"/>
+              <a:t>𝑡 </a:t>
+            </a:r>
+            <a:r>
+              <a:rPr lang="en-US" altLang="zh-CN" dirty="0"/>
+              <a:t>= 0 to </a:t>
+            </a:r>
+            <a:r>
+              <a:rPr lang="zh-CN" altLang="en-US" dirty="0"/>
+              <a:t>𝑡 </a:t>
+            </a:r>
+            <a:r>
+              <a:rPr lang="en-US" altLang="zh-CN" dirty="0"/>
+              <a:t>= 2, no data arrives at </a:t>
+            </a:r>
+            <a:r>
+              <a:rPr lang="zh-CN" altLang="en-US" dirty="0"/>
+              <a:t>𝐸</a:t>
+            </a:r>
+            <a:r>
+              <a:rPr lang="en-US" altLang="zh-CN" dirty="0"/>
+              <a:t>, so there is no queue.</a:t>
+            </a:r>
+          </a:p>
+          <a:p>
+            <a:r>
+              <a:rPr lang="en-US" altLang="zh-CN" dirty="0"/>
+              <a:t>Starting at </a:t>
+            </a:r>
+            <a:r>
+              <a:rPr lang="zh-CN" altLang="en-US" dirty="0"/>
+              <a:t>𝑡 </a:t>
+            </a:r>
+            <a:r>
+              <a:rPr lang="en-US" altLang="zh-CN" dirty="0"/>
+              <a:t>= 2, a steady stream of 20 Gbps is arriving at </a:t>
+            </a:r>
+            <a:r>
+              <a:rPr lang="zh-CN" altLang="en-US" dirty="0"/>
+              <a:t>𝐸</a:t>
+            </a:r>
+            <a:r>
+              <a:rPr lang="en-US" altLang="zh-CN" dirty="0"/>
+              <a:t>, and a steady stream of 15 Gbps is leaving </a:t>
+            </a:r>
+            <a:r>
+              <a:rPr lang="zh-CN" altLang="en-US" dirty="0"/>
+              <a:t>𝐸</a:t>
+            </a:r>
+            <a:r>
+              <a:rPr lang="en-US" altLang="zh-CN" dirty="0"/>
+              <a:t>.  This means that every second, 20 </a:t>
+            </a:r>
+            <a:r>
+              <a:rPr lang="en-US" altLang="zh-CN" dirty="0" err="1"/>
+              <a:t>Gbits</a:t>
+            </a:r>
+            <a:r>
+              <a:rPr lang="en-US" altLang="zh-CN" dirty="0"/>
+              <a:t> enter and 15 </a:t>
+            </a:r>
+            <a:r>
+              <a:rPr lang="en-US" altLang="zh-CN" dirty="0" err="1"/>
+              <a:t>Gbits</a:t>
+            </a:r>
+            <a:r>
+              <a:rPr lang="en-US" altLang="zh-CN" dirty="0"/>
+              <a:t> leave. This leaves 20 − 15 = 5 </a:t>
+            </a:r>
+            <a:r>
+              <a:rPr lang="en-US" altLang="zh-CN" dirty="0" err="1"/>
+              <a:t>Gbits</a:t>
+            </a:r>
+            <a:r>
+              <a:rPr lang="en-US" altLang="zh-CN" dirty="0"/>
+              <a:t>, which get added to the queue in every second.</a:t>
+            </a:r>
+            <a:endParaRPr lang="zh-CN" altLang="en-US" dirty="0"/>
+          </a:p>
+        </p:txBody>
+      </p:sp>
+      <p:pic>
+        <p:nvPicPr>
+          <p:cNvPr id="6" name="Picture 5" descr="The image illustrates a diagram showing two links (Link 1 and Link 2), a propagation delay of 2 seconds and 10 seconds respectively, and a bandwidth of 20 Gbps, with annotations indicating further subdivisions.&#10;&#10;AI-generated content may be incorrect.">
+            <a:extLst>
+              <a:ext uri="{FF2B5EF4-FFF2-40B4-BE49-F238E27FC236}">
+                <a16:creationId xmlns:a16="http://schemas.microsoft.com/office/drawing/2014/main" id="{B429C39B-9AB3-DCDD-2A99-2BE39FE64E66}"/>
+              </a:ext>
+            </a:extLst>
+          </p:cNvPr>
+          <p:cNvPicPr>
+            <a:picLocks noChangeAspect="1"/>
+          </p:cNvPicPr>
+          <p:nvPr/>
+        </p:nvPicPr>
+        <p:blipFill>
+          <a:blip r:embed="rId2"/>
+          <a:stretch>
+            <a:fillRect/>
+          </a:stretch>
+        </p:blipFill>
+        <p:spPr>
+          <a:xfrm>
+            <a:off x="4914469" y="5748055"/>
+            <a:ext cx="6944694" cy="943107"/>
+          </a:xfrm>
+          <a:prstGeom prst="rect">
+            <a:avLst/>
+          </a:prstGeom>
+        </p:spPr>
+      </p:pic>
+      <p:pic>
+        <p:nvPicPr>
+          <p:cNvPr id="8" name="Picture 7" descr="The image is a graph showing a queue size (in gigabits) plotted against time (in seconds), with values at intervals of 10 seconds.&#10;&#10;AI-generated content may be incorrect.">
+            <a:extLst>
+              <a:ext uri="{FF2B5EF4-FFF2-40B4-BE49-F238E27FC236}">
+                <a16:creationId xmlns:a16="http://schemas.microsoft.com/office/drawing/2014/main" id="{20D52324-FC7E-747F-EAA7-9D705E42C117}"/>
+              </a:ext>
+            </a:extLst>
+          </p:cNvPr>
+          <p:cNvPicPr>
+            <a:picLocks noChangeAspect="1"/>
+          </p:cNvPicPr>
+          <p:nvPr/>
+        </p:nvPicPr>
+        <p:blipFill>
+          <a:blip r:embed="rId3"/>
+          <a:stretch>
+            <a:fillRect/>
+          </a:stretch>
+        </p:blipFill>
+        <p:spPr>
+          <a:xfrm>
+            <a:off x="8001000" y="2161505"/>
+            <a:ext cx="3858163" cy="3134162"/>
+          </a:xfrm>
+          <a:prstGeom prst="rect">
+            <a:avLst/>
+          </a:prstGeom>
+        </p:spPr>
+      </p:pic>
+    </p:spTree>
+    <p:extLst>
+      <p:ext uri="{BB962C8B-B14F-4D97-AF65-F5344CB8AC3E}">
+        <p14:creationId xmlns:p14="http://schemas.microsoft.com/office/powerpoint/2010/main" val="4234736129"/>
+      </p:ext>
+    </p:extLst>
+  </p:cSld>
+  <p:clrMapOvr>
+    <a:masterClrMapping/>
+  </p:clrMapOvr>
+</p:sld>
+</file>
+
+<file path=ppt/slides/slide12.xml><?xml version="1.0" encoding="utf-8"?>
+<p:sld xmlns:a="http://schemas.openxmlformats.org/drawingml/2006/main" xmlns:r="http://schemas.openxmlformats.org/officeDocument/2006/relationships" xmlns:p="http://schemas.openxmlformats.org/presentationml/2006/main">
+  <p:cSld>
+    <p:spTree>
+      <p:nvGrpSpPr>
+        <p:cNvPr id="1" name="">
+          <a:extLst>
+            <a:ext uri="{FF2B5EF4-FFF2-40B4-BE49-F238E27FC236}">
+              <a16:creationId xmlns:a16="http://schemas.microsoft.com/office/drawing/2014/main" id="{7C8E44B1-43BD-800B-2E5E-290DCC0A02AB}"/>
+            </a:ext>
+          </a:extLst>
+        </p:cNvPr>
+        <p:cNvGrpSpPr/>
+        <p:nvPr/>
+      </p:nvGrpSpPr>
+      <p:grpSpPr>
+        <a:xfrm>
+          <a:off x="0" y="0"/>
+          <a:ext cx="0" cy="0"/>
+          <a:chOff x="0" y="0"/>
+          <a:chExt cx="0" cy="0"/>
+        </a:xfrm>
+      </p:grpSpPr>
+      <p:sp>
+        <p:nvSpPr>
+          <p:cNvPr id="2" name="Title 1">
+            <a:extLst>
+              <a:ext uri="{FF2B5EF4-FFF2-40B4-BE49-F238E27FC236}">
+                <a16:creationId xmlns:a16="http://schemas.microsoft.com/office/drawing/2014/main" id="{ADE1BF2A-CB61-36DB-2B4E-C2379E77684F}"/>
+              </a:ext>
+            </a:extLst>
+          </p:cNvPr>
+          <p:cNvSpPr>
+            <a:spLocks noGrp="1"/>
+          </p:cNvSpPr>
+          <p:nvPr>
+            <p:ph type="title"/>
+          </p:nvPr>
+        </p:nvSpPr>
+        <p:spPr/>
+        <p:txBody>
+          <a:bodyPr/>
+          <a:lstStyle/>
+          <a:p>
+            <a:r>
+              <a:rPr lang="en-US" altLang="zh-CN" dirty="0"/>
+              <a:t>Lecture 3 - Links Queuing Delays ANS</a:t>
+            </a:r>
+            <a:endParaRPr lang="zh-CN" altLang="en-US" dirty="0"/>
+          </a:p>
+        </p:txBody>
+      </p:sp>
+      <p:sp>
+        <p:nvSpPr>
+          <p:cNvPr id="3" name="Slide Number Placeholder 2">
+            <a:extLst>
+              <a:ext uri="{FF2B5EF4-FFF2-40B4-BE49-F238E27FC236}">
+                <a16:creationId xmlns:a16="http://schemas.microsoft.com/office/drawing/2014/main" id="{B35D0E6F-37FB-0ADE-488F-ECF5444640A3}"/>
+              </a:ext>
+            </a:extLst>
+          </p:cNvPr>
+          <p:cNvSpPr>
+            <a:spLocks noGrp="1"/>
+          </p:cNvSpPr>
+          <p:nvPr>
+            <p:ph type="sldNum" sz="quarter" idx="12"/>
+          </p:nvPr>
+        </p:nvSpPr>
+        <p:spPr/>
+        <p:txBody>
+          <a:bodyPr/>
+          <a:lstStyle/>
+          <a:p>
+            <a:fld id="{EA7C8D44-3667-46F6-9772-CC52308E2A7F}" type="slidenum">
+              <a:rPr kumimoji="0" lang="en-US" smtClean="0"/>
+              <a:pPr/>
+              <a:t>12</a:t>
+            </a:fld>
+            <a:endParaRPr kumimoji="0" lang="en-US" dirty="0"/>
+          </a:p>
+        </p:txBody>
+      </p:sp>
+      <p:sp>
+        <p:nvSpPr>
+          <p:cNvPr id="4" name="Content Placeholder 3">
+            <a:extLst>
+              <a:ext uri="{FF2B5EF4-FFF2-40B4-BE49-F238E27FC236}">
+                <a16:creationId xmlns:a16="http://schemas.microsoft.com/office/drawing/2014/main" id="{605155A4-DC05-9C01-C94F-BB734C35CCD1}"/>
+              </a:ext>
+            </a:extLst>
+          </p:cNvPr>
+          <p:cNvSpPr>
+            <a:spLocks noGrp="1"/>
+          </p:cNvSpPr>
+          <p:nvPr>
+            <p:ph sz="quarter" idx="1"/>
+          </p:nvPr>
+        </p:nvSpPr>
+        <p:spPr>
+          <a:xfrm>
+            <a:off x="609600" y="1219200"/>
+            <a:ext cx="7391400" cy="4876800"/>
+          </a:xfrm>
+        </p:spPr>
+        <p:txBody>
+          <a:bodyPr>
+            <a:normAutofit fontScale="70000" lnSpcReduction="20000"/>
+          </a:bodyPr>
+          <a:lstStyle/>
+          <a:p>
+            <a:r>
+              <a:rPr lang="en-US" altLang="zh-CN" dirty="0">
+                <a:solidFill>
+                  <a:srgbClr val="C00000"/>
+                </a:solidFill>
+              </a:rPr>
+              <a:t>New Setup: </a:t>
+            </a:r>
+            <a:r>
+              <a:rPr lang="en-US" altLang="zh-CN" dirty="0"/>
+              <a:t>Starting at </a:t>
+            </a:r>
+            <a:r>
+              <a:rPr lang="zh-CN" altLang="en-US" dirty="0"/>
+              <a:t>𝑡 </a:t>
+            </a:r>
+            <a:r>
+              <a:rPr lang="en-US" altLang="zh-CN" dirty="0"/>
+              <a:t>= 0, </a:t>
+            </a:r>
+            <a:r>
+              <a:rPr lang="en-US" altLang="zh-CN" i="1" dirty="0"/>
+              <a:t>H</a:t>
+            </a:r>
+            <a:r>
+              <a:rPr lang="en-US" altLang="zh-CN" dirty="0"/>
+              <a:t> sends an endless stream of data, at constant rate 20 Gbps</a:t>
+            </a:r>
+            <a:r>
+              <a:rPr lang="zh-CN" altLang="en-US" dirty="0"/>
+              <a:t> </a:t>
+            </a:r>
+            <a:r>
+              <a:rPr lang="en-US" altLang="zh-CN" dirty="0"/>
+              <a:t>to </a:t>
+            </a:r>
+            <a:r>
+              <a:rPr lang="zh-CN" altLang="en-US" dirty="0"/>
+              <a:t>𝑇</a:t>
+            </a:r>
+            <a:r>
+              <a:rPr lang="en-US" altLang="zh-CN" dirty="0"/>
+              <a:t>.  At </a:t>
+            </a:r>
+            <a:r>
+              <a:rPr lang="zh-CN" altLang="en-US" dirty="0"/>
+              <a:t>𝐸</a:t>
+            </a:r>
+            <a:r>
+              <a:rPr lang="en-US" altLang="zh-CN" dirty="0"/>
+              <a:t>, each bit can be forwarded independently of other bits.</a:t>
+            </a:r>
+          </a:p>
+          <a:p>
+            <a:r>
+              <a:rPr lang="en-US" altLang="zh-CN" dirty="0"/>
+              <a:t>Q8 Bandwidth of Link 2 alternates forever between 60 and 0 Gbps, changing every 2 seconds: From </a:t>
+            </a:r>
+            <a:r>
+              <a:rPr lang="zh-CN" altLang="en-US" dirty="0"/>
+              <a:t>𝑡 </a:t>
+            </a:r>
+            <a:r>
+              <a:rPr lang="en-US" altLang="zh-CN" dirty="0"/>
+              <a:t>= 0 to </a:t>
+            </a:r>
+            <a:r>
+              <a:rPr lang="zh-CN" altLang="en-US" dirty="0"/>
+              <a:t>𝑡 </a:t>
+            </a:r>
+            <a:r>
+              <a:rPr lang="en-US" altLang="zh-CN" dirty="0"/>
+              <a:t>= 2, the bandwidth is 60 Gbps. From </a:t>
+            </a:r>
+            <a:r>
+              <a:rPr lang="zh-CN" altLang="en-US" dirty="0"/>
+              <a:t>𝑡 </a:t>
+            </a:r>
+            <a:r>
+              <a:rPr lang="en-US" altLang="zh-CN" dirty="0"/>
+              <a:t>= 2 to </a:t>
+            </a:r>
+            <a:r>
+              <a:rPr lang="zh-CN" altLang="en-US" dirty="0"/>
+              <a:t>𝑡 </a:t>
+            </a:r>
+            <a:r>
+              <a:rPr lang="en-US" altLang="zh-CN" dirty="0"/>
+              <a:t>= 4, the bandwidth is 0 Gbps, and so on.</a:t>
+            </a:r>
+          </a:p>
+          <a:p>
+            <a:r>
+              <a:rPr lang="en-US" altLang="zh-CN" dirty="0"/>
+              <a:t>How does the queue size grow with time?</a:t>
+            </a:r>
+          </a:p>
+          <a:p>
+            <a:r>
+              <a:rPr lang="en-US" altLang="zh-CN" dirty="0"/>
+              <a:t>ANS:  queue change rate (slope) = Link 1 bandwidth (arrival rate) –  Link 2 bandwidth (departure rate)</a:t>
+            </a:r>
+          </a:p>
+          <a:p>
+            <a:pPr lvl="1"/>
+            <a:r>
+              <a:rPr lang="en-US" altLang="zh-CN" dirty="0"/>
+              <a:t>Holds true when queue is not empty.</a:t>
+            </a:r>
+          </a:p>
+          <a:p>
+            <a:pPr lvl="1"/>
+            <a:r>
+              <a:rPr lang="en-US" altLang="zh-CN" dirty="0"/>
+              <a:t>When queue is empty, queue slope = max(0, Link 1 bandwidth – Link 2 bandwidth) since queue size cannot be negative.</a:t>
+            </a:r>
+          </a:p>
+          <a:p>
+            <a:r>
+              <a:rPr lang="en-US" altLang="zh-CN" dirty="0"/>
+              <a:t>From </a:t>
+            </a:r>
+            <a:r>
+              <a:rPr lang="zh-CN" altLang="en-US" dirty="0"/>
+              <a:t>𝑡 </a:t>
+            </a:r>
+            <a:r>
+              <a:rPr lang="en-US" altLang="zh-CN" dirty="0"/>
+              <a:t>= 0 to </a:t>
+            </a:r>
+            <a:r>
+              <a:rPr lang="zh-CN" altLang="en-US" dirty="0"/>
+              <a:t>𝑡 </a:t>
+            </a:r>
+            <a:r>
+              <a:rPr lang="en-US" altLang="zh-CN" dirty="0"/>
+              <a:t>= 2, no data arrives at </a:t>
+            </a:r>
+            <a:r>
+              <a:rPr lang="zh-CN" altLang="en-US" dirty="0"/>
+              <a:t>𝐸</a:t>
+            </a:r>
+            <a:r>
+              <a:rPr lang="en-US" altLang="zh-CN" dirty="0"/>
+              <a:t>, so there is no queue.</a:t>
+            </a:r>
+          </a:p>
+          <a:p>
+            <a:r>
+              <a:rPr lang="en-US" altLang="zh-CN" dirty="0"/>
+              <a:t>From </a:t>
+            </a:r>
+            <a:r>
+              <a:rPr lang="zh-CN" altLang="en-US" dirty="0"/>
+              <a:t>𝑡 </a:t>
+            </a:r>
+            <a:r>
+              <a:rPr lang="en-US" altLang="zh-CN" dirty="0"/>
+              <a:t>= 2 to </a:t>
+            </a:r>
+            <a:r>
+              <a:rPr lang="zh-CN" altLang="en-US" dirty="0"/>
+              <a:t>𝑡 </a:t>
+            </a:r>
+            <a:r>
+              <a:rPr lang="en-US" altLang="zh-CN" dirty="0"/>
+              <a:t>= 4, a steady stream of 20 Gbps is arriving at </a:t>
+            </a:r>
+            <a:r>
+              <a:rPr lang="zh-CN" altLang="en-US" dirty="0"/>
+              <a:t>𝐸</a:t>
+            </a:r>
+            <a:r>
+              <a:rPr lang="en-US" altLang="zh-CN" dirty="0"/>
+              <a:t>, and 0 Gbps is leaving </a:t>
+            </a:r>
+            <a:r>
+              <a:rPr lang="zh-CN" altLang="en-US" dirty="0"/>
+              <a:t>𝐸</a:t>
+            </a:r>
+            <a:r>
+              <a:rPr lang="en-US" altLang="zh-CN" dirty="0"/>
+              <a:t>. queue change rate = 20 – 0 = 20. This means that every second, 20 </a:t>
+            </a:r>
+            <a:r>
+              <a:rPr lang="en-US" altLang="zh-CN" dirty="0" err="1"/>
+              <a:t>Gbits</a:t>
+            </a:r>
+            <a:r>
+              <a:rPr lang="en-US" altLang="zh-CN" dirty="0"/>
+              <a:t> get added to the queue.</a:t>
+            </a:r>
+            <a:endParaRPr lang="zh-CN" altLang="en-US" dirty="0"/>
+          </a:p>
+          <a:p>
+            <a:r>
+              <a:rPr lang="en-US" altLang="zh-CN" dirty="0"/>
+              <a:t>From </a:t>
+            </a:r>
+            <a:r>
+              <a:rPr lang="zh-CN" altLang="en-US" dirty="0"/>
+              <a:t>𝑡 </a:t>
+            </a:r>
+            <a:r>
+              <a:rPr lang="en-US" altLang="zh-CN" dirty="0"/>
+              <a:t>= 4 to </a:t>
+            </a:r>
+            <a:r>
+              <a:rPr lang="zh-CN" altLang="en-US" dirty="0"/>
+              <a:t>𝑡 </a:t>
+            </a:r>
+            <a:r>
+              <a:rPr lang="en-US" altLang="zh-CN" dirty="0"/>
+              <a:t>= 6, a steady stream of 20 Gbps is arriving at </a:t>
+            </a:r>
+            <a:r>
+              <a:rPr lang="zh-CN" altLang="en-US" dirty="0"/>
+              <a:t>𝐸</a:t>
+            </a:r>
+            <a:r>
+              <a:rPr lang="en-US" altLang="zh-CN" dirty="0"/>
+              <a:t>, and 60 Gbps is leaving </a:t>
+            </a:r>
+            <a:r>
+              <a:rPr lang="zh-CN" altLang="en-US" dirty="0"/>
+              <a:t>𝐸</a:t>
+            </a:r>
+            <a:r>
+              <a:rPr lang="en-US" altLang="zh-CN" dirty="0"/>
+              <a:t>. queue change rate = 20 – 60 = -40. This means that every second, 40 </a:t>
+            </a:r>
+            <a:r>
+              <a:rPr lang="en-US" altLang="zh-CN" dirty="0" err="1"/>
+              <a:t>Gbits</a:t>
+            </a:r>
+            <a:r>
+              <a:rPr lang="en-US" altLang="zh-CN" dirty="0"/>
+              <a:t> get removed from the queue.</a:t>
+            </a:r>
+            <a:endParaRPr lang="zh-CN" altLang="en-US" dirty="0"/>
+          </a:p>
+          <a:p>
+            <a:endParaRPr lang="zh-CN" altLang="en-US" dirty="0"/>
+          </a:p>
+          <a:p>
+            <a:endParaRPr lang="en-US" altLang="zh-CN" dirty="0"/>
+          </a:p>
+        </p:txBody>
+      </p:sp>
+      <p:pic>
+        <p:nvPicPr>
+          <p:cNvPr id="6" name="Picture 5" descr="The image illustrates a diagram showing two links (Link 1 and Link 2), a propagation delay of 2 seconds and 10 seconds respectively, and a bandwidth of 20 Gbps, with annotations indicating further subdivisions.&#10;&#10;AI-generated content may be incorrect.">
+            <a:extLst>
+              <a:ext uri="{FF2B5EF4-FFF2-40B4-BE49-F238E27FC236}">
+                <a16:creationId xmlns:a16="http://schemas.microsoft.com/office/drawing/2014/main" id="{56160479-D6CD-E9AB-8919-31903487FD37}"/>
+              </a:ext>
+            </a:extLst>
+          </p:cNvPr>
+          <p:cNvPicPr>
+            <a:picLocks noChangeAspect="1"/>
+          </p:cNvPicPr>
+          <p:nvPr/>
+        </p:nvPicPr>
+        <p:blipFill>
+          <a:blip r:embed="rId2"/>
+          <a:stretch>
+            <a:fillRect/>
+          </a:stretch>
+        </p:blipFill>
+        <p:spPr>
+          <a:xfrm>
+            <a:off x="4951366" y="5884796"/>
+            <a:ext cx="6944694" cy="943107"/>
+          </a:xfrm>
+          <a:prstGeom prst="rect">
+            <a:avLst/>
+          </a:prstGeom>
+        </p:spPr>
+      </p:pic>
+      <p:pic>
+        <p:nvPicPr>
+          <p:cNvPr id="8" name="Picture 7">
+            <a:extLst>
+              <a:ext uri="{FF2B5EF4-FFF2-40B4-BE49-F238E27FC236}">
+                <a16:creationId xmlns:a16="http://schemas.microsoft.com/office/drawing/2014/main" id="{E3CC8FC6-121A-085E-B301-4BAC70A2F576}"/>
+              </a:ext>
+            </a:extLst>
+          </p:cNvPr>
+          <p:cNvPicPr>
+            <a:picLocks noChangeAspect="1"/>
+          </p:cNvPicPr>
+          <p:nvPr/>
+        </p:nvPicPr>
+        <p:blipFill>
+          <a:blip r:embed="rId3">
+            <a:extLst>
+              <a:ext uri="{28A0092B-C50C-407E-A947-70E740481C1C}">
+                <a14:useLocalDpi xmlns:a14="http://schemas.microsoft.com/office/drawing/2010/main" val="0"/>
+              </a:ext>
+            </a:extLst>
+          </a:blip>
+          <a:srcRect/>
+          <a:stretch/>
+        </p:blipFill>
+        <p:spPr>
+          <a:xfrm>
+            <a:off x="8010625" y="2133439"/>
+            <a:ext cx="3858163" cy="3109281"/>
+          </a:xfrm>
+          <a:prstGeom prst="rect">
+            <a:avLst/>
+          </a:prstGeom>
+        </p:spPr>
+      </p:pic>
+    </p:spTree>
+    <p:extLst>
+      <p:ext uri="{BB962C8B-B14F-4D97-AF65-F5344CB8AC3E}">
+        <p14:creationId xmlns:p14="http://schemas.microsoft.com/office/powerpoint/2010/main" val="3698580190"/>
+      </p:ext>
+    </p:extLst>
+  </p:cSld>
+  <p:clrMapOvr>
+    <a:masterClrMapping/>
+  </p:clrMapOvr>
+</p:sld>
+</file>
+
+<file path=ppt/slides/slide13.xml><?xml version="1.0" encoding="utf-8"?>
+<p:sld xmlns:a="http://schemas.openxmlformats.org/drawingml/2006/main" xmlns:r="http://schemas.openxmlformats.org/officeDocument/2006/relationships" xmlns:p="http://schemas.openxmlformats.org/presentationml/2006/main">
+  <p:cSld>
+    <p:spTree>
+      <p:nvGrpSpPr>
+        <p:cNvPr id="1" name="">
+          <a:extLst>
+            <a:ext uri="{FF2B5EF4-FFF2-40B4-BE49-F238E27FC236}">
+              <a16:creationId xmlns:a16="http://schemas.microsoft.com/office/drawing/2014/main" id="{A0D011D0-0CE0-1570-71B3-F4818613B5EC}"/>
+            </a:ext>
+          </a:extLst>
+        </p:cNvPr>
+        <p:cNvGrpSpPr/>
+        <p:nvPr/>
+      </p:nvGrpSpPr>
+      <p:grpSpPr>
+        <a:xfrm>
+          <a:off x="0" y="0"/>
+          <a:ext cx="0" cy="0"/>
+          <a:chOff x="0" y="0"/>
+          <a:chExt cx="0" cy="0"/>
+        </a:xfrm>
+      </p:grpSpPr>
+      <p:pic>
+        <p:nvPicPr>
+          <p:cNvPr id="6" name="Picture 5" descr="The image illustrates a diagram showing two links (Link 1 and Link 2), a propagation delay of 2 seconds and 10 seconds respectively, and a bandwidth of 20 Gbps, with annotations indicating further subdivisions.&#10;&#10;AI-generated content may be incorrect.">
+            <a:extLst>
+              <a:ext uri="{FF2B5EF4-FFF2-40B4-BE49-F238E27FC236}">
+                <a16:creationId xmlns:a16="http://schemas.microsoft.com/office/drawing/2014/main" id="{ACFC414A-165B-0052-67E3-9ADB6A6C1AD5}"/>
+              </a:ext>
+            </a:extLst>
+          </p:cNvPr>
+          <p:cNvPicPr>
+            <a:picLocks noChangeAspect="1"/>
+          </p:cNvPicPr>
+          <p:nvPr/>
+        </p:nvPicPr>
+        <p:blipFill>
+          <a:blip r:embed="rId3"/>
+          <a:stretch>
+            <a:fillRect/>
+          </a:stretch>
+        </p:blipFill>
+        <p:spPr>
+          <a:xfrm>
+            <a:off x="4951366" y="5686293"/>
+            <a:ext cx="6944694" cy="943107"/>
+          </a:xfrm>
+          <a:prstGeom prst="rect">
+            <a:avLst/>
+          </a:prstGeom>
+        </p:spPr>
+      </p:pic>
+      <p:pic>
+        <p:nvPicPr>
+          <p:cNvPr id="5" name="Picture 4">
+            <a:extLst>
+              <a:ext uri="{FF2B5EF4-FFF2-40B4-BE49-F238E27FC236}">
+                <a16:creationId xmlns:a16="http://schemas.microsoft.com/office/drawing/2014/main" id="{6793AC55-20A3-236A-4447-9C12D2474163}"/>
+              </a:ext>
+            </a:extLst>
+          </p:cNvPr>
+          <p:cNvPicPr>
+            <a:picLocks noChangeAspect="1"/>
+          </p:cNvPicPr>
+          <p:nvPr/>
+        </p:nvPicPr>
+        <p:blipFill>
+          <a:blip r:embed="rId4">
+            <a:extLst>
+              <a:ext uri="{28A0092B-C50C-407E-A947-70E740481C1C}">
+                <a14:useLocalDpi xmlns:a14="http://schemas.microsoft.com/office/drawing/2010/main" val="0"/>
+              </a:ext>
+            </a:extLst>
+          </a:blip>
+          <a:srcRect/>
+          <a:stretch/>
+        </p:blipFill>
+        <p:spPr>
+          <a:xfrm>
+            <a:off x="6608239" y="1630298"/>
+            <a:ext cx="5384739" cy="1979574"/>
+          </a:xfrm>
+          <a:prstGeom prst="rect">
+            <a:avLst/>
+          </a:prstGeom>
+        </p:spPr>
+      </p:pic>
+      <p:sp>
+        <p:nvSpPr>
+          <p:cNvPr id="2" name="Title 1">
+            <a:extLst>
+              <a:ext uri="{FF2B5EF4-FFF2-40B4-BE49-F238E27FC236}">
+                <a16:creationId xmlns:a16="http://schemas.microsoft.com/office/drawing/2014/main" id="{EE481A31-2568-7387-D8A7-2AD31D393FCD}"/>
+              </a:ext>
+            </a:extLst>
+          </p:cNvPr>
+          <p:cNvSpPr>
+            <a:spLocks noGrp="1"/>
+          </p:cNvSpPr>
+          <p:nvPr>
+            <p:ph type="title"/>
+          </p:nvPr>
+        </p:nvSpPr>
+        <p:spPr/>
+        <p:txBody>
+          <a:bodyPr/>
+          <a:lstStyle/>
+          <a:p>
+            <a:r>
+              <a:rPr lang="en-US" altLang="zh-CN" dirty="0"/>
+              <a:t>Lecture 3 - Links Queuing Delays ANS</a:t>
+            </a:r>
+            <a:endParaRPr lang="zh-CN" altLang="en-US" dirty="0"/>
+          </a:p>
+        </p:txBody>
+      </p:sp>
+      <p:sp>
+        <p:nvSpPr>
+          <p:cNvPr id="3" name="Slide Number Placeholder 2">
+            <a:extLst>
+              <a:ext uri="{FF2B5EF4-FFF2-40B4-BE49-F238E27FC236}">
+                <a16:creationId xmlns:a16="http://schemas.microsoft.com/office/drawing/2014/main" id="{7808DD4A-6750-7C92-CA58-AE5F0341C43B}"/>
+              </a:ext>
+            </a:extLst>
+          </p:cNvPr>
+          <p:cNvSpPr>
+            <a:spLocks noGrp="1"/>
+          </p:cNvSpPr>
+          <p:nvPr>
+            <p:ph type="sldNum" sz="quarter" idx="12"/>
+          </p:nvPr>
+        </p:nvSpPr>
+        <p:spPr/>
+        <p:txBody>
+          <a:bodyPr/>
+          <a:lstStyle/>
+          <a:p>
+            <a:fld id="{EA7C8D44-3667-46F6-9772-CC52308E2A7F}" type="slidenum">
+              <a:rPr kumimoji="0" lang="en-US" smtClean="0"/>
+              <a:pPr/>
+              <a:t>13</a:t>
+            </a:fld>
+            <a:endParaRPr kumimoji="0" lang="en-US" dirty="0"/>
+          </a:p>
+        </p:txBody>
+      </p:sp>
+      <p:sp>
+        <p:nvSpPr>
+          <p:cNvPr id="4" name="Content Placeholder 3">
+            <a:extLst>
+              <a:ext uri="{FF2B5EF4-FFF2-40B4-BE49-F238E27FC236}">
+                <a16:creationId xmlns:a16="http://schemas.microsoft.com/office/drawing/2014/main" id="{5C7864E7-E858-39D6-648E-1BD80922A9C9}"/>
+              </a:ext>
+            </a:extLst>
+          </p:cNvPr>
+          <p:cNvSpPr>
+            <a:spLocks noGrp="1"/>
+          </p:cNvSpPr>
+          <p:nvPr>
+            <p:ph sz="quarter" idx="1"/>
+          </p:nvPr>
+        </p:nvSpPr>
+        <p:spPr>
+          <a:xfrm>
+            <a:off x="609600" y="1219200"/>
+            <a:ext cx="5998639" cy="5257800"/>
+          </a:xfrm>
+        </p:spPr>
+        <p:txBody>
+          <a:bodyPr>
+            <a:normAutofit fontScale="62500" lnSpcReduction="20000"/>
+          </a:bodyPr>
+          <a:lstStyle/>
+          <a:p>
+            <a:r>
+              <a:rPr lang="en-US" altLang="zh-CN" dirty="0">
+                <a:solidFill>
+                  <a:srgbClr val="C00000"/>
+                </a:solidFill>
+              </a:rPr>
+              <a:t>New Setup: </a:t>
+            </a:r>
+            <a:r>
+              <a:rPr lang="en-US" altLang="zh-CN" dirty="0"/>
+              <a:t>Starting at </a:t>
+            </a:r>
+            <a:r>
+              <a:rPr lang="zh-CN" altLang="en-US" dirty="0"/>
+              <a:t>𝑡 </a:t>
+            </a:r>
+            <a:r>
+              <a:rPr lang="en-US" altLang="zh-CN" dirty="0"/>
+              <a:t>= 0, </a:t>
+            </a:r>
+            <a:r>
+              <a:rPr lang="en-US" altLang="zh-CN" i="1" dirty="0"/>
+              <a:t>H</a:t>
+            </a:r>
+            <a:r>
+              <a:rPr lang="en-US" altLang="zh-CN" dirty="0"/>
+              <a:t> sends an endless stream of data, at constant rate 20 Gbps</a:t>
+            </a:r>
+            <a:r>
+              <a:rPr lang="zh-CN" altLang="en-US" dirty="0"/>
+              <a:t> </a:t>
+            </a:r>
+            <a:r>
+              <a:rPr lang="en-US" altLang="zh-CN" dirty="0"/>
+              <a:t>to </a:t>
+            </a:r>
+            <a:r>
+              <a:rPr lang="zh-CN" altLang="en-US" dirty="0"/>
+              <a:t>𝑇</a:t>
+            </a:r>
+            <a:r>
+              <a:rPr lang="en-US" altLang="zh-CN" dirty="0"/>
+              <a:t>.  At </a:t>
+            </a:r>
+            <a:r>
+              <a:rPr lang="zh-CN" altLang="en-US" dirty="0"/>
+              <a:t>𝐸</a:t>
+            </a:r>
+            <a:r>
+              <a:rPr lang="en-US" altLang="zh-CN" dirty="0"/>
+              <a:t>, each bit can be forwarded independently of other bits.</a:t>
+            </a:r>
+          </a:p>
+          <a:p>
+            <a:r>
+              <a:rPr lang="en-US" altLang="zh-CN" dirty="0"/>
+              <a:t>Q9 Bandwidth of Link 2 now changes in an unknown pattern. Use the graph to determine the bandwidth of Link 2 at the following times.</a:t>
+            </a:r>
+          </a:p>
+          <a:p>
+            <a:r>
+              <a:rPr lang="en-US" altLang="zh-CN" dirty="0"/>
+              <a:t>ANS:  queue change rate (slope) = Link 1 bandwidth (arrival rate) –  Link 2 bandwidth (departure rate)</a:t>
+            </a:r>
+          </a:p>
+          <a:p>
+            <a:pPr lvl="1"/>
+            <a:r>
+              <a:rPr lang="en-US" altLang="zh-CN" dirty="0"/>
+              <a:t>Holds true when queue is not empty.</a:t>
+            </a:r>
+          </a:p>
+          <a:p>
+            <a:pPr lvl="1"/>
+            <a:r>
+              <a:rPr lang="en-US" altLang="zh-CN" dirty="0"/>
+              <a:t>When queue is empty, queue slope = max(0, Link 1 bandwidth – Link 2 bandwidth) since queue size cannot be negative.</a:t>
+            </a:r>
+          </a:p>
+          <a:p>
+            <a:r>
+              <a:rPr lang="en-US" altLang="zh-CN" dirty="0"/>
+              <a:t>At t=5, the queue has change rate of 0 Gbps, Link 2 bandwidth = Link 1 bandwidth  - queue change rate = 20 – 0 = 20 Gbps.  But the queue is empty, so any departure rate larger than or equal to 20 Gbps is OK.</a:t>
+            </a:r>
+          </a:p>
+          <a:p>
+            <a:r>
+              <a:rPr lang="en-US" altLang="zh-CN" dirty="0"/>
+              <a:t>At t=7, the queue is increasing with a rate of 30 Gbit/2s, with </a:t>
+            </a:r>
+            <a:r>
+              <a:rPr lang="nl-NL" altLang="zh-CN" dirty="0"/>
+              <a:t>queue slope = 15 Gbps</a:t>
+            </a:r>
+            <a:r>
+              <a:rPr lang="en-US" altLang="zh-CN" dirty="0"/>
+              <a:t>, Link 2 bandwidth = Link 1 bandwidth  - queue change rate = 20 – 15 = 5 Gbps. </a:t>
+            </a:r>
+          </a:p>
+          <a:p>
+            <a:r>
+              <a:rPr lang="en-US" altLang="zh-CN" dirty="0"/>
+              <a:t>At t=9, the queue is draining at a rate of 15 Gbps, so Link 2 bandwidth = Link 1 bandwidth  - queue change rate = 20 – (-15) = 35 Gbps. </a:t>
+            </a:r>
+            <a:br>
+              <a:rPr lang="en-US" altLang="zh-CN" dirty="0"/>
+            </a:br>
+            <a:endParaRPr lang="en-US" altLang="zh-CN" dirty="0"/>
+          </a:p>
+        </p:txBody>
+      </p:sp>
+      <p:pic>
+        <p:nvPicPr>
+          <p:cNvPr id="9" name="Picture 8" descr="The diagram displays a table with time intervals (5, 7, 9 seconds) and corresponding bandwidth measurements (20 Mbps, 5.5 Mbps, 35 Mbps) for Link 2.&#10;&#10;AI-generated content may be incorrect.">
+            <a:extLst>
+              <a:ext uri="{FF2B5EF4-FFF2-40B4-BE49-F238E27FC236}">
+                <a16:creationId xmlns:a16="http://schemas.microsoft.com/office/drawing/2014/main" id="{5211D75A-0033-09E7-1ABA-4A88866B3726}"/>
+              </a:ext>
+            </a:extLst>
+          </p:cNvPr>
+          <p:cNvPicPr>
+            <a:picLocks noChangeAspect="1"/>
+          </p:cNvPicPr>
+          <p:nvPr/>
+        </p:nvPicPr>
+        <p:blipFill>
+          <a:blip r:embed="rId5"/>
+          <a:stretch>
+            <a:fillRect/>
+          </a:stretch>
+        </p:blipFill>
+        <p:spPr>
+          <a:xfrm>
+            <a:off x="8514213" y="3761974"/>
+            <a:ext cx="3381847" cy="1924319"/>
+          </a:xfrm>
+          <a:prstGeom prst="rect">
+            <a:avLst/>
+          </a:prstGeom>
+        </p:spPr>
+      </p:pic>
+    </p:spTree>
+    <p:extLst>
+      <p:ext uri="{BB962C8B-B14F-4D97-AF65-F5344CB8AC3E}">
+        <p14:creationId xmlns:p14="http://schemas.microsoft.com/office/powerpoint/2010/main" val="422039370"/>
+      </p:ext>
+    </p:extLst>
+  </p:cSld>
+  <p:clrMapOvr>
+    <a:masterClrMapping/>
+  </p:clrMapOvr>
+</p:sld>
+</file>
+
+<file path=ppt/slides/slide14.xml><?xml version="1.0" encoding="utf-8"?>
+<p:sld xmlns:a="http://schemas.openxmlformats.org/drawingml/2006/main" xmlns:r="http://schemas.openxmlformats.org/officeDocument/2006/relationships" xmlns:p="http://schemas.openxmlformats.org/presentationml/2006/main">
+  <p:cSld>
+    <p:spTree>
+      <p:nvGrpSpPr>
+        <p:cNvPr id="1" name=""/>
+        <p:cNvGrpSpPr/>
+        <p:nvPr/>
+      </p:nvGrpSpPr>
+      <p:grpSpPr>
+        <a:xfrm>
+          <a:off x="0" y="0"/>
+          <a:ext cx="0" cy="0"/>
+          <a:chOff x="0" y="0"/>
+          <a:chExt cx="0" cy="0"/>
+        </a:xfrm>
+      </p:grpSpPr>
+      <p:sp>
+        <p:nvSpPr>
+          <p:cNvPr id="2" name="Title 1">
+            <a:extLst>
+              <a:ext uri="{FF2B5EF4-FFF2-40B4-BE49-F238E27FC236}">
+                <a16:creationId xmlns:a16="http://schemas.microsoft.com/office/drawing/2014/main" id="{79E30A78-69F5-844A-50B0-27A96C17C047}"/>
+              </a:ext>
+            </a:extLst>
+          </p:cNvPr>
+          <p:cNvSpPr>
+            <a:spLocks noGrp="1"/>
+          </p:cNvSpPr>
+          <p:nvPr>
+            <p:ph type="title"/>
+          </p:nvPr>
+        </p:nvSpPr>
+        <p:spPr/>
+        <p:txBody>
+          <a:bodyPr>
+            <a:normAutofit fontScale="90000"/>
+          </a:bodyPr>
+          <a:lstStyle/>
+          <a:p>
+            <a:r>
+              <a:rPr lang="nl-NL" altLang="zh-CN" dirty="0"/>
+              <a:t>Store-and-Forward vs. Bit-by-Bit Forwarding (Cut-through)</a:t>
+            </a:r>
+            <a:endParaRPr lang="zh-CN" altLang="en-US" dirty="0"/>
+          </a:p>
+        </p:txBody>
+      </p:sp>
+      <p:sp>
+        <p:nvSpPr>
+          <p:cNvPr id="3" name="Slide Number Placeholder 2">
+            <a:extLst>
+              <a:ext uri="{FF2B5EF4-FFF2-40B4-BE49-F238E27FC236}">
+                <a16:creationId xmlns:a16="http://schemas.microsoft.com/office/drawing/2014/main" id="{5ACFF24A-8576-5D77-AA62-109FF3BE1067}"/>
+              </a:ext>
+            </a:extLst>
+          </p:cNvPr>
+          <p:cNvSpPr>
+            <a:spLocks noGrp="1"/>
+          </p:cNvSpPr>
+          <p:nvPr>
+            <p:ph type="sldNum" sz="quarter" idx="12"/>
+          </p:nvPr>
+        </p:nvSpPr>
+        <p:spPr/>
+        <p:txBody>
+          <a:bodyPr/>
+          <a:lstStyle/>
+          <a:p>
+            <a:fld id="{EA7C8D44-3667-46F6-9772-CC52308E2A7F}" type="slidenum">
+              <a:rPr kumimoji="0" lang="en-US" smtClean="0"/>
+              <a:pPr/>
+              <a:t>14</a:t>
+            </a:fld>
+            <a:endParaRPr kumimoji="0" lang="en-US" dirty="0"/>
+          </a:p>
+        </p:txBody>
+      </p:sp>
+      <p:sp>
+        <p:nvSpPr>
+          <p:cNvPr id="4" name="Content Placeholder 3">
+            <a:extLst>
+              <a:ext uri="{FF2B5EF4-FFF2-40B4-BE49-F238E27FC236}">
+                <a16:creationId xmlns:a16="http://schemas.microsoft.com/office/drawing/2014/main" id="{FB8F1A1E-0D8B-B069-05F9-F8C1CB012E1F}"/>
+              </a:ext>
+            </a:extLst>
+          </p:cNvPr>
+          <p:cNvSpPr>
+            <a:spLocks noGrp="1"/>
+          </p:cNvSpPr>
+          <p:nvPr>
+            <p:ph sz="quarter" idx="1"/>
+          </p:nvPr>
+        </p:nvSpPr>
+        <p:spPr>
+          <a:xfrm>
+            <a:off x="609600" y="1219200"/>
+            <a:ext cx="5715000" cy="4937760"/>
+          </a:xfrm>
+        </p:spPr>
+        <p:txBody>
+          <a:bodyPr>
+            <a:normAutofit/>
+          </a:bodyPr>
+          <a:lstStyle/>
+          <a:p>
+            <a:r>
+              <a:rPr lang="en-US" altLang="zh-CN" b="1" dirty="0"/>
+              <a:t>Q1–5: Store-and-Forward</a:t>
+            </a:r>
+          </a:p>
+          <a:p>
+            <a:r>
+              <a:rPr lang="en-US" altLang="zh-CN" dirty="0"/>
+              <a:t>“E must receive all bits before sending”</a:t>
+            </a:r>
+          </a:p>
+          <a:p>
+            <a:r>
+              <a:rPr lang="en-US" altLang="zh-CN" dirty="0"/>
+              <a:t>E waits for the </a:t>
+            </a:r>
+            <a:r>
+              <a:rPr lang="en-US" altLang="zh-CN" b="1" dirty="0"/>
+              <a:t>entire payload</a:t>
+            </a:r>
+            <a:r>
+              <a:rPr lang="en-US" altLang="zh-CN" dirty="0"/>
+              <a:t> </a:t>
+            </a:r>
+          </a:p>
+          <a:p>
+            <a:r>
+              <a:rPr lang="en-US" altLang="zh-CN" dirty="0"/>
+              <a:t>Then starts transmitting </a:t>
+            </a:r>
+          </a:p>
+          <a:p>
+            <a:r>
+              <a:rPr lang="en-US" altLang="zh-CN" dirty="0"/>
+              <a:t>Packets move </a:t>
+            </a:r>
+            <a:r>
+              <a:rPr lang="en-US" altLang="zh-CN" b="1" dirty="0"/>
+              <a:t>as chunks</a:t>
+            </a:r>
+            <a:r>
+              <a:rPr lang="en-US" altLang="zh-CN" dirty="0"/>
+              <a:t> </a:t>
+            </a:r>
+          </a:p>
+          <a:p>
+            <a:r>
+              <a:rPr lang="en-US" altLang="zh-CN" dirty="0"/>
+              <a:t>Consequence:</a:t>
+            </a:r>
+          </a:p>
+          <a:p>
+            <a:pPr lvl="1"/>
+            <a:r>
+              <a:rPr lang="en-US" altLang="zh-CN" dirty="0"/>
+              <a:t>You get </a:t>
+            </a:r>
+            <a:r>
+              <a:rPr lang="en-US" altLang="zh-CN" b="1" dirty="0"/>
+              <a:t>packet-level queueing</a:t>
+            </a:r>
+            <a:r>
+              <a:rPr lang="en-US" altLang="zh-CN" dirty="0"/>
+              <a:t> </a:t>
+            </a:r>
+          </a:p>
+          <a:p>
+            <a:pPr lvl="1"/>
+            <a:r>
+              <a:rPr lang="en-US" altLang="zh-CN" dirty="0"/>
+              <a:t>Clear “arrival time” (last bit) </a:t>
+            </a:r>
+          </a:p>
+          <a:p>
+            <a:pPr lvl="1"/>
+            <a:r>
+              <a:rPr lang="en-US" altLang="zh-CN" dirty="0"/>
+              <a:t>Clear “send start time”</a:t>
+            </a:r>
+            <a:endParaRPr lang="zh-CN" altLang="en-US" dirty="0"/>
+          </a:p>
+        </p:txBody>
+      </p:sp>
+      <p:sp>
+        <p:nvSpPr>
+          <p:cNvPr id="5" name="Content Placeholder 3">
+            <a:extLst>
+              <a:ext uri="{FF2B5EF4-FFF2-40B4-BE49-F238E27FC236}">
+                <a16:creationId xmlns:a16="http://schemas.microsoft.com/office/drawing/2014/main" id="{FAB67699-18F4-B68E-EBC2-54C8E8528AD5}"/>
+              </a:ext>
+            </a:extLst>
+          </p:cNvPr>
+          <p:cNvSpPr txBox="1">
+            <a:spLocks/>
+          </p:cNvSpPr>
+          <p:nvPr/>
+        </p:nvSpPr>
+        <p:spPr>
+          <a:xfrm>
+            <a:off x="6324600" y="1219200"/>
+            <a:ext cx="5638800" cy="4937760"/>
+          </a:xfrm>
+          <a:prstGeom prst="rect">
+            <a:avLst/>
+          </a:prstGeom>
+        </p:spPr>
+        <p:txBody>
+          <a:bodyPr vert="horz">
+            <a:normAutofit fontScale="92500"/>
+          </a:bodyPr>
+          <a:lstStyle>
+            <a:lvl1pPr marL="274320" indent="-274320" algn="l" rtl="0" eaLnBrk="1" latinLnBrk="0" hangingPunct="1">
+              <a:spcBef>
+                <a:spcPts val="600"/>
+              </a:spcBef>
+              <a:buClr>
+                <a:schemeClr val="accent1"/>
+              </a:buClr>
+              <a:buSzPct val="76000"/>
+              <a:buFont typeface="Wingdings 3"/>
+              <a:buChar char=""/>
+              <a:defRPr kumimoji="0" sz="2600" kern="1200">
+                <a:solidFill>
+                  <a:schemeClr val="tx1"/>
+                </a:solidFill>
+                <a:latin typeface="+mn-lt"/>
+                <a:ea typeface="+mn-ea"/>
+                <a:cs typeface="+mn-cs"/>
+              </a:defRPr>
+            </a:lvl1pPr>
+            <a:lvl2pPr marL="548640" indent="-274320" algn="l" rtl="0" eaLnBrk="1" latinLnBrk="0" hangingPunct="1">
+              <a:spcBef>
+                <a:spcPts val="500"/>
+              </a:spcBef>
+              <a:buClr>
+                <a:schemeClr val="accent2"/>
+              </a:buClr>
+              <a:buSzPct val="76000"/>
+              <a:buFont typeface="Wingdings 3"/>
+              <a:buChar char=""/>
+              <a:defRPr kumimoji="0" sz="2300" kern="1200">
+                <a:solidFill>
+                  <a:schemeClr val="tx2"/>
+                </a:solidFill>
+                <a:latin typeface="+mn-lt"/>
+                <a:ea typeface="+mn-ea"/>
+                <a:cs typeface="+mn-cs"/>
+              </a:defRPr>
+            </a:lvl2pPr>
+            <a:lvl3pPr marL="822960" indent="-228600" algn="l" rtl="0" eaLnBrk="1" latinLnBrk="0" hangingPunct="1">
+              <a:spcBef>
+                <a:spcPts val="500"/>
+              </a:spcBef>
+              <a:buClr>
+                <a:schemeClr val="bg1">
+                  <a:shade val="50000"/>
+                </a:schemeClr>
+              </a:buClr>
+              <a:buSzPct val="76000"/>
+              <a:buFont typeface="Wingdings 3"/>
+              <a:buChar char=""/>
+              <a:defRPr kumimoji="0" sz="2000" kern="1200">
+                <a:solidFill>
+                  <a:schemeClr val="tx1"/>
+                </a:solidFill>
+                <a:latin typeface="+mn-lt"/>
+                <a:ea typeface="+mn-ea"/>
+                <a:cs typeface="+mn-cs"/>
+              </a:defRPr>
+            </a:lvl3pPr>
+            <a:lvl4pPr marL="1097280" indent="-228600" algn="l" rtl="0" eaLnBrk="1" latinLnBrk="0" hangingPunct="1">
+              <a:spcBef>
+                <a:spcPts val="400"/>
+              </a:spcBef>
+              <a:buClr>
+                <a:schemeClr val="accent2">
+                  <a:shade val="75000"/>
+                </a:schemeClr>
+              </a:buClr>
+              <a:buSzPct val="70000"/>
+              <a:buFont typeface="Wingdings"/>
+              <a:buChar char=""/>
+              <a:defRPr kumimoji="0" sz="1800" kern="1200">
+                <a:solidFill>
+                  <a:schemeClr val="tx1"/>
+                </a:solidFill>
+                <a:latin typeface="+mn-lt"/>
+                <a:ea typeface="+mn-ea"/>
+                <a:cs typeface="+mn-cs"/>
+              </a:defRPr>
+            </a:lvl4pPr>
+            <a:lvl5pPr marL="1371600" indent="-228600" algn="l" rtl="0" eaLnBrk="1" latinLnBrk="0" hangingPunct="1">
+              <a:spcBef>
+                <a:spcPts val="300"/>
+              </a:spcBef>
+              <a:buClr>
+                <a:schemeClr val="accent2"/>
+              </a:buClr>
+              <a:buSzPct val="70000"/>
+              <a:buFont typeface="Wingdings"/>
+              <a:buChar char=""/>
+              <a:defRPr kumimoji="0" sz="1600" kern="1200">
+                <a:solidFill>
+                  <a:schemeClr val="tx1"/>
+                </a:solidFill>
+                <a:latin typeface="+mn-lt"/>
+                <a:ea typeface="+mn-ea"/>
+                <a:cs typeface="+mn-cs"/>
+              </a:defRPr>
+            </a:lvl5pPr>
+            <a:lvl6pPr marL="1645920" indent="-182880" algn="l" rtl="0" eaLnBrk="1" latinLnBrk="0" hangingPunct="1">
+              <a:spcBef>
+                <a:spcPts val="300"/>
+              </a:spcBef>
+              <a:buClr>
+                <a:srgbClr val="9FB8CD">
+                  <a:shade val="75000"/>
+                </a:srgbClr>
+              </a:buClr>
+              <a:buSzPct val="75000"/>
+              <a:buFont typeface="Wingdings 3"/>
+              <a:buChar char=""/>
+              <a:defRPr kumimoji="0" lang="en-US" sz="1600" kern="1200" smtClean="0">
+                <a:solidFill>
+                  <a:schemeClr val="tx1"/>
+                </a:solidFill>
+                <a:latin typeface="+mn-lt"/>
+                <a:ea typeface="+mn-ea"/>
+                <a:cs typeface="+mn-cs"/>
+              </a:defRPr>
+            </a:lvl6pPr>
+            <a:lvl7pPr marL="1828800" indent="-182880" algn="l" rtl="0" eaLnBrk="1" latinLnBrk="0" hangingPunct="1">
+              <a:spcBef>
+                <a:spcPts val="300"/>
+              </a:spcBef>
+              <a:buClr>
+                <a:srgbClr val="727CA3">
+                  <a:shade val="75000"/>
+                </a:srgbClr>
+              </a:buClr>
+              <a:buSzPct val="75000"/>
+              <a:buFont typeface="Wingdings 3"/>
+              <a:buChar char=""/>
+              <a:defRPr kumimoji="0" lang="en-US" sz="1400" kern="1200" smtClean="0">
+                <a:solidFill>
+                  <a:schemeClr val="tx1"/>
+                </a:solidFill>
+                <a:latin typeface="+mn-lt"/>
+                <a:ea typeface="+mn-ea"/>
+                <a:cs typeface="+mn-cs"/>
+              </a:defRPr>
+            </a:lvl7pPr>
+            <a:lvl8pPr marL="2011680" indent="-182880" algn="l" rtl="0" eaLnBrk="1" latinLnBrk="0" hangingPunct="1">
+              <a:spcBef>
+                <a:spcPts val="300"/>
+              </a:spcBef>
+              <a:buClr>
+                <a:prstClr val="white">
+                  <a:shade val="50000"/>
+                </a:prstClr>
+              </a:buClr>
+              <a:buSzPct val="75000"/>
+              <a:buFont typeface="Wingdings 3"/>
+              <a:buChar char=""/>
+              <a:defRPr kumimoji="0" lang="en-US" sz="1400" kern="1200" smtClean="0">
+                <a:solidFill>
+                  <a:schemeClr val="tx1"/>
+                </a:solidFill>
+                <a:latin typeface="+mn-lt"/>
+                <a:ea typeface="+mn-ea"/>
+                <a:cs typeface="+mn-cs"/>
+              </a:defRPr>
+            </a:lvl8pPr>
+            <a:lvl9pPr marL="2194560" indent="-182880" algn="l" rtl="0" eaLnBrk="1" latinLnBrk="0" hangingPunct="1">
+              <a:spcBef>
+                <a:spcPts val="300"/>
+              </a:spcBef>
+              <a:buClr>
+                <a:srgbClr val="9FB8CD"/>
+              </a:buClr>
+              <a:buSzPct val="75000"/>
+              <a:buFont typeface="Wingdings 3"/>
+              <a:buChar char=""/>
+              <a:defRPr kumimoji="0" lang="en-US" sz="1200" kern="1200" smtClean="0">
+                <a:solidFill>
+                  <a:schemeClr val="tx1"/>
+                </a:solidFill>
+                <a:latin typeface="+mn-lt"/>
+                <a:ea typeface="+mn-ea"/>
+                <a:cs typeface="+mn-cs"/>
+              </a:defRPr>
+            </a:lvl9pPr>
+          </a:lstStyle>
+          <a:p>
+            <a:r>
+              <a:rPr lang="en-US" altLang="zh-CN" b="1" dirty="0"/>
+              <a:t>Q7–9: Bit-by-Bit Forwarding (Cut-through)</a:t>
+            </a:r>
+          </a:p>
+          <a:p>
+            <a:r>
+              <a:rPr lang="en-US" altLang="zh-CN" dirty="0"/>
+              <a:t>“each bit can be forwarded independently”</a:t>
+            </a:r>
+          </a:p>
+          <a:p>
+            <a:r>
+              <a:rPr lang="en-US" altLang="zh-CN" dirty="0"/>
+              <a:t>E can start sending </a:t>
+            </a:r>
+            <a:r>
+              <a:rPr lang="en-US" altLang="zh-CN" b="1" dirty="0"/>
+              <a:t>as soon as bits arrive</a:t>
+            </a:r>
+            <a:r>
+              <a:rPr lang="en-US" altLang="zh-CN" dirty="0"/>
+              <a:t> </a:t>
+            </a:r>
+          </a:p>
+          <a:p>
+            <a:r>
+              <a:rPr lang="en-US" altLang="zh-CN" dirty="0"/>
+              <a:t>No need to wait for full packet </a:t>
+            </a:r>
+          </a:p>
+          <a:p>
+            <a:r>
+              <a:rPr lang="en-US" altLang="zh-CN" dirty="0"/>
+              <a:t>Data flows like a </a:t>
+            </a:r>
+            <a:r>
+              <a:rPr lang="en-US" altLang="zh-CN" b="1" dirty="0"/>
+              <a:t>continuous stream</a:t>
+            </a:r>
+            <a:r>
+              <a:rPr lang="en-US" altLang="zh-CN" dirty="0"/>
+              <a:t> </a:t>
+            </a:r>
+          </a:p>
+          <a:p>
+            <a:r>
+              <a:rPr lang="en-US" altLang="zh-CN" dirty="0"/>
+              <a:t>Consequence:</a:t>
+            </a:r>
+          </a:p>
+          <a:p>
+            <a:pPr lvl="1"/>
+            <a:r>
+              <a:rPr lang="en-US" altLang="zh-CN" dirty="0"/>
+              <a:t>No packet boundaries </a:t>
+            </a:r>
+          </a:p>
+          <a:p>
+            <a:pPr lvl="1"/>
+            <a:r>
+              <a:rPr lang="en-US" altLang="zh-CN" dirty="0"/>
+              <a:t>Queue is measured in </a:t>
+            </a:r>
+            <a:r>
+              <a:rPr lang="en-US" altLang="zh-CN" b="1" dirty="0"/>
+              <a:t>bits (fluid model)</a:t>
+            </a:r>
+            <a:r>
+              <a:rPr lang="en-US" altLang="zh-CN" dirty="0"/>
+              <a:t> </a:t>
+            </a:r>
+          </a:p>
+          <a:p>
+            <a:pPr lvl="1"/>
+            <a:r>
+              <a:rPr lang="en-US" altLang="zh-CN" dirty="0"/>
+              <a:t>Use </a:t>
+            </a:r>
+            <a:r>
+              <a:rPr lang="en-US" altLang="zh-CN" b="1" dirty="0"/>
+              <a:t>rates (Gbps)</a:t>
+            </a:r>
+            <a:r>
+              <a:rPr lang="en-US" altLang="zh-CN" dirty="0"/>
+              <a:t> instead of per-packet timing</a:t>
+            </a:r>
+          </a:p>
+          <a:p>
+            <a:endParaRPr lang="zh-CN" altLang="en-US" dirty="0"/>
+          </a:p>
+        </p:txBody>
+      </p:sp>
+    </p:spTree>
+    <p:extLst>
+      <p:ext uri="{BB962C8B-B14F-4D97-AF65-F5344CB8AC3E}">
+        <p14:creationId xmlns:p14="http://schemas.microsoft.com/office/powerpoint/2010/main" val="1858741263"/>
+      </p:ext>
+    </p:extLst>
+  </p:cSld>
+  <p:clrMapOvr>
+    <a:masterClrMapping/>
+  </p:clrMapOvr>
+</p:sld>
+</file>
+
+<file path=ppt/slides/slide15.xml><?xml version="1.0" encoding="utf-8"?>
+<p:sld xmlns:a="http://schemas.openxmlformats.org/drawingml/2006/main" xmlns:r="http://schemas.openxmlformats.org/officeDocument/2006/relationships" xmlns:p="http://schemas.openxmlformats.org/presentationml/2006/main">
+  <p:cSld>
+    <p:spTree>
+      <p:nvGrpSpPr>
+        <p:cNvPr id="1" name=""/>
+        <p:cNvGrpSpPr/>
+        <p:nvPr/>
+      </p:nvGrpSpPr>
+      <p:grpSpPr>
+        <a:xfrm>
+          <a:off x="0" y="0"/>
+          <a:ext cx="0" cy="0"/>
+          <a:chOff x="0" y="0"/>
+          <a:chExt cx="0" cy="0"/>
+        </a:xfrm>
+      </p:grpSpPr>
+      <p:sp>
+        <p:nvSpPr>
+          <p:cNvPr id="2" name="Title 1">
+            <a:extLst>
+              <a:ext uri="{FF2B5EF4-FFF2-40B4-BE49-F238E27FC236}">
+                <a16:creationId xmlns:a16="http://schemas.microsoft.com/office/drawing/2014/main" id="{D29210BF-FC1A-DBAE-9A35-1233B04B9C38}"/>
+              </a:ext>
+            </a:extLst>
+          </p:cNvPr>
+          <p:cNvSpPr>
+            <a:spLocks noGrp="1"/>
+          </p:cNvSpPr>
+          <p:nvPr>
+            <p:ph type="title"/>
+          </p:nvPr>
+        </p:nvSpPr>
+        <p:spPr/>
+        <p:txBody>
+          <a:bodyPr/>
+          <a:lstStyle/>
+          <a:p>
+            <a:r>
+              <a:rPr lang="nl-NL" altLang="zh-CN" dirty="0"/>
+              <a:t>Lecture 5.2 - Distance-Vector ANS</a:t>
+            </a:r>
+            <a:endParaRPr lang="zh-CN" altLang="en-US" dirty="0"/>
+          </a:p>
+        </p:txBody>
+      </p:sp>
+      <p:sp>
+        <p:nvSpPr>
+          <p:cNvPr id="3" name="Slide Number Placeholder 2">
+            <a:extLst>
+              <a:ext uri="{FF2B5EF4-FFF2-40B4-BE49-F238E27FC236}">
+                <a16:creationId xmlns:a16="http://schemas.microsoft.com/office/drawing/2014/main" id="{36FD5EF7-D16B-DC85-5A21-2856DABD4425}"/>
+              </a:ext>
+            </a:extLst>
+          </p:cNvPr>
+          <p:cNvSpPr>
+            <a:spLocks noGrp="1"/>
+          </p:cNvSpPr>
+          <p:nvPr>
+            <p:ph type="sldNum" sz="quarter" idx="12"/>
+          </p:nvPr>
+        </p:nvSpPr>
+        <p:spPr/>
+        <p:txBody>
+          <a:bodyPr/>
+          <a:lstStyle/>
+          <a:p>
+            <a:fld id="{EA7C8D44-3667-46F6-9772-CC52308E2A7F}" type="slidenum">
+              <a:rPr kumimoji="0" lang="en-US" smtClean="0"/>
+              <a:pPr/>
+              <a:t>15</a:t>
+            </a:fld>
+            <a:endParaRPr kumimoji="0" lang="en-US" dirty="0"/>
+          </a:p>
+        </p:txBody>
+      </p:sp>
+      <p:sp>
+        <p:nvSpPr>
+          <p:cNvPr id="4" name="Content Placeholder 3">
+            <a:extLst>
+              <a:ext uri="{FF2B5EF4-FFF2-40B4-BE49-F238E27FC236}">
+                <a16:creationId xmlns:a16="http://schemas.microsoft.com/office/drawing/2014/main" id="{DC01B710-3CC3-6734-51F3-765540047FD4}"/>
+              </a:ext>
+            </a:extLst>
+          </p:cNvPr>
+          <p:cNvSpPr>
+            <a:spLocks noGrp="1"/>
+          </p:cNvSpPr>
+          <p:nvPr>
+            <p:ph sz="quarter" idx="1"/>
+          </p:nvPr>
+        </p:nvSpPr>
+        <p:spPr>
+          <a:xfrm>
+            <a:off x="609600" y="1219200"/>
+            <a:ext cx="6858000" cy="4937760"/>
+          </a:xfrm>
+        </p:spPr>
+        <p:txBody>
+          <a:bodyPr>
+            <a:normAutofit/>
+          </a:bodyPr>
+          <a:lstStyle/>
+          <a:p>
+            <a:r>
+              <a:rPr lang="en-US" altLang="zh-CN" dirty="0"/>
+              <a:t>Distance-Vector: Distance-vector routing is plagued by the “count-to-infinity" problem. Poisoned reverse is one approach to mitigating this problem. For the following graphs, consider the case where distance-vector routing has converged to a stable set of routes, and then </a:t>
+            </a:r>
+            <a:r>
+              <a:rPr lang="en-US" altLang="zh-CN" dirty="0">
+                <a:solidFill>
+                  <a:srgbClr val="C00000"/>
+                </a:solidFill>
+              </a:rPr>
+              <a:t>the destination (marked D) fails</a:t>
+            </a:r>
+            <a:r>
+              <a:rPr lang="en-US" altLang="zh-CN" dirty="0"/>
+              <a:t>, taking down all of the links attached to it.  Which of these graphs still have the count-to-infinity problem even when poisoned reverse is used? </a:t>
+            </a:r>
+            <a:endParaRPr lang="zh-CN" altLang="en-US" dirty="0"/>
+          </a:p>
+        </p:txBody>
+      </p:sp>
+      <p:pic>
+        <p:nvPicPr>
+          <p:cNvPr id="8" name="Picture 7" descr="The image shows a series of four diagrams, each illustrating a different graph structure, likely representing various types of networks or connections.&#10;&#10;AI-generated content may be incorrect.">
+            <a:extLst>
+              <a:ext uri="{FF2B5EF4-FFF2-40B4-BE49-F238E27FC236}">
+                <a16:creationId xmlns:a16="http://schemas.microsoft.com/office/drawing/2014/main" id="{49C5CA7D-9013-3F1B-0254-80DFDA424C6B}"/>
+              </a:ext>
+            </a:extLst>
+          </p:cNvPr>
+          <p:cNvPicPr>
+            <a:picLocks noChangeAspect="1"/>
+          </p:cNvPicPr>
+          <p:nvPr/>
+        </p:nvPicPr>
+        <p:blipFill>
+          <a:blip r:embed="rId2"/>
+          <a:stretch>
+            <a:fillRect/>
+          </a:stretch>
+        </p:blipFill>
+        <p:spPr>
+          <a:xfrm>
+            <a:off x="7239000" y="2199504"/>
+            <a:ext cx="4439376" cy="3439296"/>
+          </a:xfrm>
+          <a:prstGeom prst="rect">
+            <a:avLst/>
+          </a:prstGeom>
+        </p:spPr>
+      </p:pic>
+    </p:spTree>
+    <p:extLst>
+      <p:ext uri="{BB962C8B-B14F-4D97-AF65-F5344CB8AC3E}">
+        <p14:creationId xmlns:p14="http://schemas.microsoft.com/office/powerpoint/2010/main" val="1322562913"/>
+      </p:ext>
+    </p:extLst>
+  </p:cSld>
+  <p:clrMapOvr>
+    <a:masterClrMapping/>
+  </p:clrMapOvr>
+</p:sld>
+</file>
+
+<file path=ppt/slides/slide16.xml><?xml version="1.0" encoding="utf-8"?>
+<p:sld xmlns:a="http://schemas.openxmlformats.org/drawingml/2006/main" xmlns:r="http://schemas.openxmlformats.org/officeDocument/2006/relationships" xmlns:p="http://schemas.openxmlformats.org/presentationml/2006/main">
+  <p:cSld>
+    <p:spTree>
+      <p:nvGrpSpPr>
+        <p:cNvPr id="1" name="">
+          <a:extLst>
+            <a:ext uri="{FF2B5EF4-FFF2-40B4-BE49-F238E27FC236}">
+              <a16:creationId xmlns:a16="http://schemas.microsoft.com/office/drawing/2014/main" id="{05772107-8491-E5F6-D393-BBC8A393B94C}"/>
+            </a:ext>
+          </a:extLst>
+        </p:cNvPr>
+        <p:cNvGrpSpPr/>
+        <p:nvPr/>
+      </p:nvGrpSpPr>
+      <p:grpSpPr>
+        <a:xfrm>
+          <a:off x="0" y="0"/>
+          <a:ext cx="0" cy="0"/>
+          <a:chOff x="0" y="0"/>
+          <a:chExt cx="0" cy="0"/>
+        </a:xfrm>
+      </p:grpSpPr>
+      <p:sp>
+        <p:nvSpPr>
+          <p:cNvPr id="2" name="Title 1">
+            <a:extLst>
+              <a:ext uri="{FF2B5EF4-FFF2-40B4-BE49-F238E27FC236}">
+                <a16:creationId xmlns:a16="http://schemas.microsoft.com/office/drawing/2014/main" id="{E8DC2F52-FC5D-3053-E9AD-CC3A66D7A531}"/>
+              </a:ext>
+            </a:extLst>
+          </p:cNvPr>
+          <p:cNvSpPr>
+            <a:spLocks noGrp="1"/>
+          </p:cNvSpPr>
+          <p:nvPr>
+            <p:ph type="title"/>
+          </p:nvPr>
+        </p:nvSpPr>
+        <p:spPr/>
+        <p:txBody>
+          <a:bodyPr/>
+          <a:lstStyle/>
+          <a:p>
+            <a:r>
+              <a:rPr lang="nl-NL" altLang="zh-CN" dirty="0"/>
+              <a:t>Lecture 5.2 - Distance-Vector ANS</a:t>
+            </a:r>
+            <a:endParaRPr lang="zh-CN" altLang="en-US" dirty="0"/>
+          </a:p>
+        </p:txBody>
+      </p:sp>
+      <p:sp>
+        <p:nvSpPr>
+          <p:cNvPr id="3" name="Slide Number Placeholder 2">
+            <a:extLst>
+              <a:ext uri="{FF2B5EF4-FFF2-40B4-BE49-F238E27FC236}">
+                <a16:creationId xmlns:a16="http://schemas.microsoft.com/office/drawing/2014/main" id="{E25312B6-4602-E504-6436-B650FDD9D23E}"/>
+              </a:ext>
+            </a:extLst>
+          </p:cNvPr>
+          <p:cNvSpPr>
+            <a:spLocks noGrp="1"/>
+          </p:cNvSpPr>
+          <p:nvPr>
+            <p:ph type="sldNum" sz="quarter" idx="12"/>
+          </p:nvPr>
+        </p:nvSpPr>
+        <p:spPr/>
+        <p:txBody>
+          <a:bodyPr/>
+          <a:lstStyle/>
+          <a:p>
+            <a:fld id="{EA7C8D44-3667-46F6-9772-CC52308E2A7F}" type="slidenum">
+              <a:rPr kumimoji="0" lang="en-US" smtClean="0"/>
+              <a:pPr/>
+              <a:t>16</a:t>
+            </a:fld>
+            <a:endParaRPr kumimoji="0" lang="en-US" dirty="0"/>
+          </a:p>
+        </p:txBody>
+      </p:sp>
+      <p:sp>
+        <p:nvSpPr>
+          <p:cNvPr id="4" name="Content Placeholder 3">
+            <a:extLst>
+              <a:ext uri="{FF2B5EF4-FFF2-40B4-BE49-F238E27FC236}">
+                <a16:creationId xmlns:a16="http://schemas.microsoft.com/office/drawing/2014/main" id="{A1EB19EC-68F2-DBA3-7D35-D12F237A6C3E}"/>
+              </a:ext>
+            </a:extLst>
+          </p:cNvPr>
+          <p:cNvSpPr>
+            <a:spLocks noGrp="1"/>
+          </p:cNvSpPr>
+          <p:nvPr>
+            <p:ph sz="quarter" idx="1"/>
+          </p:nvPr>
+        </p:nvSpPr>
+        <p:spPr>
+          <a:xfrm>
+            <a:off x="609600" y="1219200"/>
+            <a:ext cx="6629400" cy="4937760"/>
+          </a:xfrm>
+        </p:spPr>
+        <p:txBody>
+          <a:bodyPr>
+            <a:normAutofit fontScale="77500" lnSpcReduction="20000"/>
+          </a:bodyPr>
+          <a:lstStyle/>
+          <a:p>
+            <a:r>
+              <a:rPr lang="en-US" altLang="zh-CN" dirty="0"/>
+              <a:t>Destination (marked D) fails, taking down all of the links attached to it.  Which of these graphs still have the count-to-infinity problem even when poisoned reverse is used? </a:t>
+            </a:r>
+          </a:p>
+          <a:p>
+            <a:r>
+              <a:rPr lang="en-US" altLang="zh-CN" dirty="0"/>
+              <a:t>ANS: </a:t>
+            </a:r>
+          </a:p>
+          <a:p>
+            <a:r>
+              <a:rPr lang="en-US" altLang="zh-CN" dirty="0"/>
+              <a:t>A &amp; D: No. Once D is removed, the remaining three routers form a path, not a triangle. That means any mistaken route can only bounce between two neighbors, and poisoned reverse is designed to stop exactly that kind of 2-node loop. So A &amp; D does not have count-to-infinity with poisoned reverse.</a:t>
+            </a:r>
+          </a:p>
+          <a:p>
+            <a:r>
+              <a:rPr lang="en-US" altLang="zh-CN" dirty="0"/>
+              <a:t>B &amp; C:  Yes.  When D fails, the remaining three routers form a triangle. A router may poison one neighbor but still advertise a finite path to another, allowing the bad route to travel around the 3-node cycle. Because poisoned reverse only hides the route from the neighbor being used as next hop, the false route can circulate around the triangle and the metric can increase repeatedly</a:t>
+            </a:r>
+          </a:p>
+          <a:p>
+            <a:endParaRPr lang="en-US" altLang="zh-CN" dirty="0"/>
+          </a:p>
+          <a:p>
+            <a:endParaRPr lang="zh-CN" altLang="en-US" dirty="0"/>
+          </a:p>
+        </p:txBody>
+      </p:sp>
+      <p:pic>
+        <p:nvPicPr>
+          <p:cNvPr id="8" name="Picture 7" descr="The image shows a series of four diagrams, each illustrating a different graph structure, likely representing various types of networks or connections.&#10;&#10;AI-generated content may be incorrect.">
+            <a:extLst>
+              <a:ext uri="{FF2B5EF4-FFF2-40B4-BE49-F238E27FC236}">
+                <a16:creationId xmlns:a16="http://schemas.microsoft.com/office/drawing/2014/main" id="{63DD3AF4-7F71-0C35-6AFB-B9C0BEB673FF}"/>
+              </a:ext>
+            </a:extLst>
+          </p:cNvPr>
+          <p:cNvPicPr>
+            <a:picLocks noChangeAspect="1"/>
+          </p:cNvPicPr>
+          <p:nvPr/>
+        </p:nvPicPr>
+        <p:blipFill>
+          <a:blip r:embed="rId3"/>
+          <a:stretch>
+            <a:fillRect/>
+          </a:stretch>
+        </p:blipFill>
+        <p:spPr>
+          <a:xfrm>
+            <a:off x="7239000" y="2199504"/>
+            <a:ext cx="4439376" cy="3439296"/>
+          </a:xfrm>
+          <a:prstGeom prst="rect">
+            <a:avLst/>
+          </a:prstGeom>
+        </p:spPr>
+      </p:pic>
+    </p:spTree>
+    <p:extLst>
+      <p:ext uri="{BB962C8B-B14F-4D97-AF65-F5344CB8AC3E}">
+        <p14:creationId xmlns:p14="http://schemas.microsoft.com/office/powerpoint/2010/main" val="2254890132"/>
+      </p:ext>
+    </p:extLst>
+  </p:cSld>
+  <p:clrMapOvr>
+    <a:masterClrMapping/>
+  </p:clrMapOvr>
+</p:sld>
+</file>
+
+<file path=ppt/slides/slide17.xml><?xml version="1.0" encoding="utf-8"?>
+<p:sld xmlns:a="http://schemas.openxmlformats.org/drawingml/2006/main" xmlns:r="http://schemas.openxmlformats.org/officeDocument/2006/relationships" xmlns:p="http://schemas.openxmlformats.org/presentationml/2006/main">
+  <p:cSld>
+    <p:spTree>
+      <p:nvGrpSpPr>
+        <p:cNvPr id="1" name=""/>
+        <p:cNvGrpSpPr/>
+        <p:nvPr/>
+      </p:nvGrpSpPr>
+      <p:grpSpPr>
+        <a:xfrm>
+          <a:off x="0" y="0"/>
+          <a:ext cx="0" cy="0"/>
+          <a:chOff x="0" y="0"/>
+          <a:chExt cx="0" cy="0"/>
+        </a:xfrm>
+      </p:grpSpPr>
+      <p:sp>
+        <p:nvSpPr>
+          <p:cNvPr id="2" name="Title 1">
+            <a:extLst>
+              <a:ext uri="{FF2B5EF4-FFF2-40B4-BE49-F238E27FC236}">
+                <a16:creationId xmlns:a16="http://schemas.microsoft.com/office/drawing/2014/main" id="{C71C7C31-0F0B-891C-070F-9DEC3FC6DD57}"/>
+              </a:ext>
+            </a:extLst>
+          </p:cNvPr>
+          <p:cNvSpPr>
+            <a:spLocks noGrp="1"/>
+          </p:cNvSpPr>
+          <p:nvPr>
+            <p:ph type="title"/>
+          </p:nvPr>
+        </p:nvSpPr>
+        <p:spPr/>
+        <p:txBody>
+          <a:bodyPr/>
+          <a:lstStyle/>
+          <a:p>
+            <a:r>
+              <a:rPr lang="nl-NL" altLang="zh-CN" dirty="0"/>
+              <a:t>Lecture 5.3 - Link-State</a:t>
+            </a:r>
+            <a:endParaRPr lang="zh-CN" altLang="en-US" dirty="0"/>
+          </a:p>
+        </p:txBody>
+      </p:sp>
+      <p:sp>
+        <p:nvSpPr>
+          <p:cNvPr id="3" name="Slide Number Placeholder 2">
+            <a:extLst>
+              <a:ext uri="{FF2B5EF4-FFF2-40B4-BE49-F238E27FC236}">
+                <a16:creationId xmlns:a16="http://schemas.microsoft.com/office/drawing/2014/main" id="{EEB9B094-B5A7-D81C-6C56-6C3F0449FBA2}"/>
+              </a:ext>
+            </a:extLst>
+          </p:cNvPr>
+          <p:cNvSpPr>
+            <a:spLocks noGrp="1"/>
+          </p:cNvSpPr>
+          <p:nvPr>
+            <p:ph type="sldNum" sz="quarter" idx="12"/>
+          </p:nvPr>
+        </p:nvSpPr>
+        <p:spPr/>
+        <p:txBody>
+          <a:bodyPr/>
+          <a:lstStyle/>
+          <a:p>
+            <a:fld id="{EA7C8D44-3667-46F6-9772-CC52308E2A7F}" type="slidenum">
+              <a:rPr kumimoji="0" lang="en-US" smtClean="0"/>
+              <a:pPr/>
+              <a:t>17</a:t>
+            </a:fld>
+            <a:endParaRPr kumimoji="0" lang="en-US" dirty="0"/>
+          </a:p>
+        </p:txBody>
+      </p:sp>
+      <p:sp>
+        <p:nvSpPr>
+          <p:cNvPr id="4" name="Content Placeholder 3">
+            <a:extLst>
+              <a:ext uri="{FF2B5EF4-FFF2-40B4-BE49-F238E27FC236}">
+                <a16:creationId xmlns:a16="http://schemas.microsoft.com/office/drawing/2014/main" id="{AAFF5FAD-2769-678D-A6C0-FC125B4FE46D}"/>
+              </a:ext>
+            </a:extLst>
+          </p:cNvPr>
+          <p:cNvSpPr>
+            <a:spLocks noGrp="1"/>
+          </p:cNvSpPr>
+          <p:nvPr>
+            <p:ph sz="quarter" idx="1"/>
+          </p:nvPr>
+        </p:nvSpPr>
+        <p:spPr>
+          <a:xfrm>
+            <a:off x="609600" y="1219200"/>
+            <a:ext cx="6934200" cy="4937760"/>
+          </a:xfrm>
+        </p:spPr>
+        <p:txBody>
+          <a:bodyPr>
+            <a:normAutofit/>
+          </a:bodyPr>
+          <a:lstStyle/>
+          <a:p>
+            <a:r>
+              <a:rPr lang="en-US" altLang="zh-CN" dirty="0"/>
+              <a:t>Link-State: For the network shown below, consider the case where all nodes have flooded their link-state information to everyone, shortest paths have been calculated, and the appropriate forwarding entries installed. But then </a:t>
+            </a:r>
+            <a:r>
+              <a:rPr lang="en-US" altLang="zh-CN" dirty="0">
+                <a:solidFill>
+                  <a:srgbClr val="C00000"/>
+                </a:solidFill>
+              </a:rPr>
+              <a:t>the link between E and F goes down</a:t>
+            </a:r>
+            <a:r>
+              <a:rPr lang="en-US" altLang="zh-CN" dirty="0"/>
+              <a:t>. The packets announcing this link-status change reach </a:t>
+            </a:r>
+            <a:r>
+              <a:rPr lang="en-US" altLang="zh-CN" dirty="0">
+                <a:solidFill>
+                  <a:srgbClr val="C00000"/>
+                </a:solidFill>
+              </a:rPr>
+              <a:t>all nodes except B, </a:t>
+            </a:r>
+            <a:r>
+              <a:rPr lang="en-US" altLang="zh-CN" dirty="0"/>
+              <a:t>and again routes are recalculated. When </a:t>
+            </a:r>
+            <a:r>
+              <a:rPr lang="en-US" altLang="zh-CN" dirty="0">
+                <a:solidFill>
+                  <a:srgbClr val="C00000"/>
+                </a:solidFill>
+              </a:rPr>
+              <a:t>D sends a packet to F</a:t>
+            </a:r>
+            <a:r>
+              <a:rPr lang="en-US" altLang="zh-CN" dirty="0"/>
+              <a:t>, what path does it take? Ties are broken in alphabetical order.</a:t>
+            </a:r>
+            <a:endParaRPr lang="zh-CN" altLang="en-US" dirty="0"/>
+          </a:p>
+        </p:txBody>
+      </p:sp>
+      <p:pic>
+        <p:nvPicPr>
+          <p:cNvPr id="6" name="Picture 5" descr="The text appears to be a sequence of alphabetic characters (A, B, C, D, E, F, G, H, I) with some numbers (1, 2, 2) next to them, possibly indicating some form of categorization or mapping. However, without an image, it's difficult to provide a description. If you can provide an image, I'd be happy to help!&#10;&#10;AI-generated content may be incorrect.">
+            <a:extLst>
+              <a:ext uri="{FF2B5EF4-FFF2-40B4-BE49-F238E27FC236}">
+                <a16:creationId xmlns:a16="http://schemas.microsoft.com/office/drawing/2014/main" id="{5A3520D4-9D06-6B51-E3D5-69493F18D9E7}"/>
+              </a:ext>
+            </a:extLst>
+          </p:cNvPr>
+          <p:cNvPicPr>
+            <a:picLocks noChangeAspect="1"/>
+          </p:cNvPicPr>
+          <p:nvPr/>
+        </p:nvPicPr>
+        <p:blipFill>
+          <a:blip r:embed="rId2"/>
+          <a:stretch>
+            <a:fillRect/>
+          </a:stretch>
+        </p:blipFill>
+        <p:spPr>
+          <a:xfrm>
+            <a:off x="8077200" y="1907010"/>
+            <a:ext cx="3877280" cy="3894323"/>
+          </a:xfrm>
+          <a:prstGeom prst="rect">
+            <a:avLst/>
+          </a:prstGeom>
+        </p:spPr>
+      </p:pic>
+    </p:spTree>
+    <p:extLst>
+      <p:ext uri="{BB962C8B-B14F-4D97-AF65-F5344CB8AC3E}">
+        <p14:creationId xmlns:p14="http://schemas.microsoft.com/office/powerpoint/2010/main" val="3254364885"/>
+      </p:ext>
+    </p:extLst>
+  </p:cSld>
+  <p:clrMapOvr>
+    <a:masterClrMapping/>
+  </p:clrMapOvr>
+</p:sld>
+</file>
+
+<file path=ppt/slides/slide18.xml><?xml version="1.0" encoding="utf-8"?>
+<p:sld xmlns:a="http://schemas.openxmlformats.org/drawingml/2006/main" xmlns:r="http://schemas.openxmlformats.org/officeDocument/2006/relationships" xmlns:p="http://schemas.openxmlformats.org/presentationml/2006/main">
+  <p:cSld>
+    <p:spTree>
+      <p:nvGrpSpPr>
+        <p:cNvPr id="1" name="">
+          <a:extLst>
+            <a:ext uri="{FF2B5EF4-FFF2-40B4-BE49-F238E27FC236}">
+              <a16:creationId xmlns:a16="http://schemas.microsoft.com/office/drawing/2014/main" id="{3541A6D9-4608-1302-56D3-6F79D86642EA}"/>
+            </a:ext>
+          </a:extLst>
+        </p:cNvPr>
+        <p:cNvGrpSpPr/>
+        <p:nvPr/>
+      </p:nvGrpSpPr>
+      <p:grpSpPr>
+        <a:xfrm>
+          <a:off x="0" y="0"/>
+          <a:ext cx="0" cy="0"/>
+          <a:chOff x="0" y="0"/>
+          <a:chExt cx="0" cy="0"/>
+        </a:xfrm>
+      </p:grpSpPr>
+      <p:sp>
+        <p:nvSpPr>
+          <p:cNvPr id="2" name="Title 1">
+            <a:extLst>
+              <a:ext uri="{FF2B5EF4-FFF2-40B4-BE49-F238E27FC236}">
+                <a16:creationId xmlns:a16="http://schemas.microsoft.com/office/drawing/2014/main" id="{BEA6CD0E-DDE3-C748-2404-441960385AB0}"/>
+              </a:ext>
+            </a:extLst>
+          </p:cNvPr>
+          <p:cNvSpPr>
+            <a:spLocks noGrp="1"/>
+          </p:cNvSpPr>
+          <p:nvPr>
+            <p:ph type="title"/>
+          </p:nvPr>
+        </p:nvSpPr>
+        <p:spPr/>
+        <p:txBody>
+          <a:bodyPr/>
+          <a:lstStyle/>
+          <a:p>
+            <a:r>
+              <a:rPr lang="nl-NL" altLang="zh-CN" dirty="0"/>
+              <a:t>Lecture 5.3 - Link-State ANS</a:t>
+            </a:r>
+            <a:endParaRPr lang="zh-CN" altLang="en-US" dirty="0"/>
+          </a:p>
+        </p:txBody>
+      </p:sp>
+      <p:sp>
+        <p:nvSpPr>
+          <p:cNvPr id="3" name="Slide Number Placeholder 2">
+            <a:extLst>
+              <a:ext uri="{FF2B5EF4-FFF2-40B4-BE49-F238E27FC236}">
+                <a16:creationId xmlns:a16="http://schemas.microsoft.com/office/drawing/2014/main" id="{04B64B2C-CF76-0115-FDE0-EB616D5EE56C}"/>
+              </a:ext>
+            </a:extLst>
+          </p:cNvPr>
+          <p:cNvSpPr>
+            <a:spLocks noGrp="1"/>
+          </p:cNvSpPr>
+          <p:nvPr>
+            <p:ph type="sldNum" sz="quarter" idx="12"/>
+          </p:nvPr>
+        </p:nvSpPr>
+        <p:spPr/>
+        <p:txBody>
+          <a:bodyPr/>
+          <a:lstStyle/>
+          <a:p>
+            <a:fld id="{EA7C8D44-3667-46F6-9772-CC52308E2A7F}" type="slidenum">
+              <a:rPr kumimoji="0" lang="en-US" smtClean="0"/>
+              <a:pPr/>
+              <a:t>18</a:t>
+            </a:fld>
+            <a:endParaRPr kumimoji="0" lang="en-US" dirty="0"/>
+          </a:p>
+        </p:txBody>
+      </p:sp>
+      <mc:AlternateContent xmlns:mc="http://schemas.openxmlformats.org/markup-compatibility/2006">
+        <mc:Choice xmlns:a14="http://schemas.microsoft.com/office/drawing/2010/main" Requires="a14">
+          <p:sp>
+            <p:nvSpPr>
+              <p:cNvPr id="4" name="Content Placeholder 3">
+                <a:extLst>
+                  <a:ext uri="{FF2B5EF4-FFF2-40B4-BE49-F238E27FC236}">
+                    <a16:creationId xmlns:a16="http://schemas.microsoft.com/office/drawing/2014/main" id="{FC08828E-1347-1982-8706-699760CE6539}"/>
+                  </a:ext>
+                </a:extLst>
+              </p:cNvPr>
+              <p:cNvSpPr>
+                <a:spLocks noGrp="1"/>
+              </p:cNvSpPr>
+              <p:nvPr>
+                <p:ph sz="quarter" idx="1"/>
+              </p:nvPr>
+            </p:nvSpPr>
+            <p:spPr>
+              <a:xfrm>
+                <a:off x="609600" y="1219200"/>
+                <a:ext cx="6934200" cy="4937760"/>
+              </a:xfrm>
+            </p:spPr>
+            <p:txBody>
+              <a:bodyPr>
+                <a:normAutofit fontScale="77500" lnSpcReduction="20000"/>
+              </a:bodyPr>
+              <a:lstStyle/>
+              <a:p>
+                <a:r>
+                  <a:rPr lang="en-US" altLang="zh-CN" dirty="0"/>
+                  <a:t>The </a:t>
+                </a:r>
+                <a:r>
+                  <a:rPr lang="en-US" altLang="zh-CN" dirty="0">
+                    <a:solidFill>
+                      <a:srgbClr val="C00000"/>
+                    </a:solidFill>
+                  </a:rPr>
+                  <a:t>link between E and F goes down</a:t>
+                </a:r>
+                <a:r>
+                  <a:rPr lang="en-US" altLang="zh-CN" dirty="0"/>
+                  <a:t>. The packets announcing this link-status change reach </a:t>
+                </a:r>
+                <a:r>
+                  <a:rPr lang="en-US" altLang="zh-CN" dirty="0">
+                    <a:solidFill>
+                      <a:srgbClr val="C00000"/>
+                    </a:solidFill>
+                  </a:rPr>
+                  <a:t>all nodes except B, </a:t>
+                </a:r>
+                <a:r>
+                  <a:rPr lang="en-US" altLang="zh-CN" dirty="0"/>
+                  <a:t>and again routes are recalculated. When </a:t>
+                </a:r>
+                <a:r>
+                  <a:rPr lang="en-US" altLang="zh-CN" dirty="0">
+                    <a:solidFill>
+                      <a:srgbClr val="C00000"/>
+                    </a:solidFill>
+                  </a:rPr>
+                  <a:t>D sends a packet to F</a:t>
+                </a:r>
+                <a:r>
+                  <a:rPr lang="en-US" altLang="zh-CN" dirty="0"/>
+                  <a:t>, what path does it take? Ties are broken in alphabetical order.</a:t>
+                </a:r>
+              </a:p>
+              <a:p>
+                <a:r>
+                  <a:rPr lang="en-US" altLang="zh-CN" dirty="0"/>
+                  <a:t>ANS: DABEHIF</a:t>
+                </a:r>
+              </a:p>
+              <a:p>
+                <a:r>
+                  <a:rPr lang="en-US" altLang="zh-CN" dirty="0"/>
+                  <a:t>Explanations:</a:t>
+                </a:r>
+                <a:endParaRPr lang="en-US" altLang="zh-CN" b="1" dirty="0"/>
+              </a:p>
+              <a:p>
+                <a:pPr lvl="1"/>
+                <a:r>
+                  <a:rPr lang="en-US" altLang="zh-CN" dirty="0"/>
+                  <a:t>After the E–F link goes down, D recomputes using the new topology, where the best path from D to F is </a:t>
+                </a:r>
+                <a14:m>
+                  <m:oMath xmlns:m="http://schemas.openxmlformats.org/officeDocument/2006/math">
+                    <m:r>
+                      <a:rPr lang="zh-CN" altLang="en-US" i="1"/>
+                      <m:t>𝐷</m:t>
+                    </m:r>
+                    <m:r>
+                      <a:rPr lang="en-US" altLang="zh-CN"/>
+                      <m:t>→</m:t>
+                    </m:r>
+                    <m:r>
+                      <a:rPr lang="zh-CN" altLang="en-US" i="1"/>
+                      <m:t>𝐴</m:t>
+                    </m:r>
+                    <m:r>
+                      <a:rPr lang="en-US" altLang="zh-CN"/>
+                      <m:t>→</m:t>
+                    </m:r>
+                    <m:r>
+                      <a:rPr lang="zh-CN" altLang="en-US" i="1"/>
+                      <m:t>𝐵</m:t>
+                    </m:r>
+                    <m:r>
+                      <a:rPr lang="en-US" altLang="zh-CN"/>
+                      <m:t>→</m:t>
+                    </m:r>
+                    <m:r>
+                      <a:rPr lang="zh-CN" altLang="en-US" i="1"/>
+                      <m:t>𝐶</m:t>
+                    </m:r>
+                    <m:r>
+                      <a:rPr lang="en-US" altLang="zh-CN"/>
+                      <m:t>→</m:t>
+                    </m:r>
+                    <m:r>
+                      <a:rPr lang="zh-CN" altLang="en-US" i="1"/>
+                      <m:t>𝐹</m:t>
+                    </m:r>
+                  </m:oMath>
+                </a14:m>
+                <a:r>
+                  <a:rPr lang="en-US" altLang="zh-CN" dirty="0"/>
+                  <a:t> with total cost 6. </a:t>
+                </a:r>
+              </a:p>
+              <a:p>
+                <a:pPr lvl="1"/>
+                <a:r>
+                  <a:rPr lang="en-US" altLang="zh-CN" dirty="0"/>
+                  <a:t>A also recomputes correctly, so when it receives the packet from D, it forwards it to B. B did </a:t>
+                </a:r>
+                <a:r>
+                  <a:rPr lang="en-US" altLang="zh-CN" b="1" dirty="0"/>
+                  <a:t>not</a:t>
+                </a:r>
+                <a:r>
+                  <a:rPr lang="en-US" altLang="zh-CN" dirty="0"/>
+                  <a:t> receive the link-state update, so it still believes the old shortest path to F is </a:t>
+                </a:r>
+                <a14:m>
+                  <m:oMath xmlns:m="http://schemas.openxmlformats.org/officeDocument/2006/math">
+                    <m:r>
+                      <a:rPr lang="zh-CN" altLang="en-US" i="1"/>
+                      <m:t>𝐵</m:t>
+                    </m:r>
+                    <m:r>
+                      <a:rPr lang="en-US" altLang="zh-CN"/>
+                      <m:t>→</m:t>
+                    </m:r>
+                    <m:r>
+                      <a:rPr lang="zh-CN" altLang="en-US" i="1"/>
+                      <m:t>𝐸</m:t>
+                    </m:r>
+                    <m:r>
+                      <a:rPr lang="en-US" altLang="zh-CN"/>
+                      <m:t>→</m:t>
+                    </m:r>
+                    <m:r>
+                      <a:rPr lang="zh-CN" altLang="en-US" i="1"/>
+                      <m:t>𝐹</m:t>
+                    </m:r>
+                  </m:oMath>
+                </a14:m>
+                <a:r>
+                  <a:rPr lang="en-US" altLang="zh-CN" dirty="0"/>
+                  <a:t>, with cost 3, and therefore sends the packet to E.</a:t>
+                </a:r>
+              </a:p>
+              <a:p>
+                <a:pPr lvl="1"/>
+                <a:r>
+                  <a:rPr lang="en-US" altLang="zh-CN" dirty="0"/>
+                  <a:t>E did receive the failure update, so E knows the direct link to F is down and cannot forward there. From E’s updated view, the best remaining route to F is </a:t>
+                </a:r>
+                <a14:m>
+                  <m:oMath xmlns:m="http://schemas.openxmlformats.org/officeDocument/2006/math">
+                    <m:r>
+                      <a:rPr lang="zh-CN" altLang="en-US" i="1"/>
+                      <m:t>𝐸</m:t>
+                    </m:r>
+                    <m:r>
+                      <a:rPr lang="en-US" altLang="zh-CN"/>
+                      <m:t>→</m:t>
+                    </m:r>
+                    <m:r>
+                      <a:rPr lang="zh-CN" altLang="en-US" i="1"/>
+                      <m:t>𝐻</m:t>
+                    </m:r>
+                    <m:r>
+                      <a:rPr lang="en-US" altLang="zh-CN"/>
+                      <m:t>→</m:t>
+                    </m:r>
+                    <m:r>
+                      <a:rPr lang="zh-CN" altLang="en-US" i="1"/>
+                      <m:t>𝐼</m:t>
+                    </m:r>
+                    <m:r>
+                      <a:rPr lang="en-US" altLang="zh-CN"/>
+                      <m:t>→</m:t>
+                    </m:r>
+                    <m:r>
+                      <a:rPr lang="zh-CN" altLang="en-US" i="1"/>
+                      <m:t>𝐹</m:t>
+                    </m:r>
+                  </m:oMath>
+                </a14:m>
+                <a:r>
+                  <a:rPr lang="en-US" altLang="zh-CN" dirty="0"/>
+                  <a:t>, with cost 5, which is better than going back through B and C.</a:t>
+                </a:r>
+              </a:p>
+              <a:p>
+                <a:pPr lvl="1"/>
+                <a:r>
+                  <a:rPr lang="en-US" altLang="zh-CN" dirty="0"/>
+                  <a:t>Putting those forwarding decisions together gives the actual packet path: </a:t>
+                </a:r>
+                <a:r>
+                  <a:rPr lang="en-US" altLang="zh-CN" b="1" dirty="0"/>
+                  <a:t>DABEHIF</a:t>
+                </a:r>
+                <a:r>
+                  <a:rPr lang="en-US" altLang="zh-CN" dirty="0"/>
+                  <a:t>.</a:t>
+                </a:r>
+              </a:p>
+              <a:p>
+                <a:endParaRPr lang="zh-CN" altLang="en-US" dirty="0"/>
+              </a:p>
+            </p:txBody>
+          </p:sp>
+        </mc:Choice>
+        <mc:Fallback>
+          <p:sp>
+            <p:nvSpPr>
+              <p:cNvPr id="4" name="Content Placeholder 3">
+                <a:extLst>
+                  <a:ext uri="{FF2B5EF4-FFF2-40B4-BE49-F238E27FC236}">
+                    <a16:creationId xmlns:a16="http://schemas.microsoft.com/office/drawing/2014/main" id="{FC08828E-1347-1982-8706-699760CE6539}"/>
+                  </a:ext>
+                </a:extLst>
+              </p:cNvPr>
+              <p:cNvSpPr>
+                <a:spLocks noGrp="1" noRot="1" noChangeAspect="1" noMove="1" noResize="1" noEditPoints="1" noAdjustHandles="1" noChangeArrowheads="1" noChangeShapeType="1" noTextEdit="1"/>
+              </p:cNvSpPr>
+              <p:nvPr>
+                <p:ph sz="quarter" idx="1"/>
+              </p:nvPr>
+            </p:nvSpPr>
+            <p:spPr>
+              <a:xfrm>
+                <a:off x="609600" y="1219200"/>
+                <a:ext cx="6934200" cy="4937760"/>
+              </a:xfrm>
+              <a:blipFill>
+                <a:blip r:embed="rId2"/>
+                <a:stretch>
+                  <a:fillRect l="-351" t="-1852" r="-1494"/>
+                </a:stretch>
+              </a:blipFill>
+            </p:spPr>
+            <p:txBody>
+              <a:bodyPr/>
+              <a:lstStyle/>
+              <a:p>
+                <a:r>
+                  <a:rPr lang="zh-CN" altLang="en-US">
+                    <a:noFill/>
+                  </a:rPr>
+                  <a:t> </a:t>
+                </a:r>
+              </a:p>
+            </p:txBody>
+          </p:sp>
+        </mc:Fallback>
+      </mc:AlternateContent>
+      <p:pic>
+        <p:nvPicPr>
+          <p:cNvPr id="6" name="Picture 5" descr="The text appears to be a sequence of alphabetic characters (A, B, C, D, E, F, G, H, I) with some numbers (1, 2, 2) next to them, possibly indicating some form of categorization or mapping. However, without an image, it's difficult to provide a description. If you can provide an image, I'd be happy to help!&#10;&#10;AI-generated content may be incorrect.">
+            <a:extLst>
+              <a:ext uri="{FF2B5EF4-FFF2-40B4-BE49-F238E27FC236}">
+                <a16:creationId xmlns:a16="http://schemas.microsoft.com/office/drawing/2014/main" id="{EAF1C6A4-188E-A288-CA44-7D1C44269027}"/>
+              </a:ext>
+            </a:extLst>
+          </p:cNvPr>
+          <p:cNvPicPr>
+            <a:picLocks noChangeAspect="1"/>
+          </p:cNvPicPr>
+          <p:nvPr/>
+        </p:nvPicPr>
+        <p:blipFill>
+          <a:blip r:embed="rId3"/>
+          <a:stretch>
+            <a:fillRect/>
+          </a:stretch>
+        </p:blipFill>
+        <p:spPr>
+          <a:xfrm>
+            <a:off x="8077200" y="1907010"/>
+            <a:ext cx="3877280" cy="3894323"/>
+          </a:xfrm>
+          <a:prstGeom prst="rect">
+            <a:avLst/>
+          </a:prstGeom>
+        </p:spPr>
+      </p:pic>
+    </p:spTree>
+    <p:extLst>
+      <p:ext uri="{BB962C8B-B14F-4D97-AF65-F5344CB8AC3E}">
+        <p14:creationId xmlns:p14="http://schemas.microsoft.com/office/powerpoint/2010/main" val="3133781649"/>
+      </p:ext>
+    </p:extLst>
+  </p:cSld>
+  <p:clrMapOvr>
+    <a:masterClrMapping/>
+  </p:clrMapOvr>
+</p:sld>
+</file>
+
+<file path=ppt/slides/slide19.xml><?xml version="1.0" encoding="utf-8"?>
+<p:sld xmlns:a="http://schemas.openxmlformats.org/drawingml/2006/main" xmlns:r="http://schemas.openxmlformats.org/officeDocument/2006/relationships" xmlns:p="http://schemas.openxmlformats.org/presentationml/2006/main">
+  <p:cSld>
+    <p:spTree>
+      <p:nvGrpSpPr>
+        <p:cNvPr id="1" name=""/>
+        <p:cNvGrpSpPr/>
+        <p:nvPr/>
+      </p:nvGrpSpPr>
+      <p:grpSpPr>
+        <a:xfrm>
+          <a:off x="0" y="0"/>
+          <a:ext cx="0" cy="0"/>
+          <a:chOff x="0" y="0"/>
+          <a:chExt cx="0" cy="0"/>
+        </a:xfrm>
+      </p:grpSpPr>
+      <p:sp>
+        <p:nvSpPr>
+          <p:cNvPr id="2" name="Title 1">
+            <a:extLst>
+              <a:ext uri="{FF2B5EF4-FFF2-40B4-BE49-F238E27FC236}">
+                <a16:creationId xmlns:a16="http://schemas.microsoft.com/office/drawing/2014/main" id="{055D0C6C-32D6-2193-1138-49ACDA812A4D}"/>
+              </a:ext>
+            </a:extLst>
+          </p:cNvPr>
+          <p:cNvSpPr>
+            <a:spLocks noGrp="1"/>
+          </p:cNvSpPr>
+          <p:nvPr>
+            <p:ph type="title"/>
+          </p:nvPr>
+        </p:nvSpPr>
+        <p:spPr/>
+        <p:txBody>
+          <a:bodyPr/>
+          <a:lstStyle/>
+          <a:p>
+            <a:endParaRPr lang="zh-CN" altLang="en-US"/>
+          </a:p>
+        </p:txBody>
+      </p:sp>
+      <p:sp>
+        <p:nvSpPr>
+          <p:cNvPr id="3" name="Slide Number Placeholder 2">
+            <a:extLst>
+              <a:ext uri="{FF2B5EF4-FFF2-40B4-BE49-F238E27FC236}">
+                <a16:creationId xmlns:a16="http://schemas.microsoft.com/office/drawing/2014/main" id="{72BBE3DE-7600-4933-01A4-D23F2EE66A28}"/>
+              </a:ext>
+            </a:extLst>
+          </p:cNvPr>
+          <p:cNvSpPr>
+            <a:spLocks noGrp="1"/>
+          </p:cNvSpPr>
+          <p:nvPr>
+            <p:ph type="sldNum" sz="quarter" idx="12"/>
+          </p:nvPr>
+        </p:nvSpPr>
+        <p:spPr/>
+        <p:txBody>
+          <a:bodyPr/>
+          <a:lstStyle/>
+          <a:p>
+            <a:fld id="{EA7C8D44-3667-46F6-9772-CC52308E2A7F}" type="slidenum">
+              <a:rPr kumimoji="0" lang="en-US" smtClean="0"/>
+              <a:pPr/>
+              <a:t>19</a:t>
+            </a:fld>
+            <a:endParaRPr kumimoji="0" lang="en-US" dirty="0"/>
+          </a:p>
+        </p:txBody>
+      </p:sp>
+      <p:sp>
+        <p:nvSpPr>
+          <p:cNvPr id="4" name="Content Placeholder 3">
+            <a:extLst>
+              <a:ext uri="{FF2B5EF4-FFF2-40B4-BE49-F238E27FC236}">
+                <a16:creationId xmlns:a16="http://schemas.microsoft.com/office/drawing/2014/main" id="{D3CFD29F-59AD-01F1-1238-A4C73A7208AA}"/>
+              </a:ext>
+            </a:extLst>
+          </p:cNvPr>
+          <p:cNvSpPr>
+            <a:spLocks noGrp="1"/>
+          </p:cNvSpPr>
+          <p:nvPr>
+            <p:ph sz="quarter" idx="1"/>
+          </p:nvPr>
+        </p:nvSpPr>
+        <p:spPr/>
+        <p:txBody>
+          <a:bodyPr/>
+          <a:lstStyle/>
+          <a:p>
+            <a:endParaRPr lang="zh-CN" altLang="en-US"/>
+          </a:p>
+        </p:txBody>
+      </p:sp>
+    </p:spTree>
+    <p:extLst>
+      <p:ext uri="{BB962C8B-B14F-4D97-AF65-F5344CB8AC3E}">
+        <p14:creationId xmlns:p14="http://schemas.microsoft.com/office/powerpoint/2010/main" val="1237061952"/>
       </p:ext>
     </p:extLst>
   </p:cSld>
@@ -23355,6 +27523,1227 @@
 </p:sld>
 </file>
 
+<file path=ppt/slides/slide8.xml><?xml version="1.0" encoding="utf-8"?>
+<p:sld xmlns:a="http://schemas.openxmlformats.org/drawingml/2006/main" xmlns:r="http://schemas.openxmlformats.org/officeDocument/2006/relationships" xmlns:p="http://schemas.openxmlformats.org/presentationml/2006/main">
+  <p:cSld>
+    <p:spTree>
+      <p:nvGrpSpPr>
+        <p:cNvPr id="1" name=""/>
+        <p:cNvGrpSpPr/>
+        <p:nvPr/>
+      </p:nvGrpSpPr>
+      <p:grpSpPr>
+        <a:xfrm>
+          <a:off x="0" y="0"/>
+          <a:ext cx="0" cy="0"/>
+          <a:chOff x="0" y="0"/>
+          <a:chExt cx="0" cy="0"/>
+        </a:xfrm>
+      </p:grpSpPr>
+      <p:sp>
+        <p:nvSpPr>
+          <p:cNvPr id="2" name="Title 1">
+            <a:extLst>
+              <a:ext uri="{FF2B5EF4-FFF2-40B4-BE49-F238E27FC236}">
+                <a16:creationId xmlns:a16="http://schemas.microsoft.com/office/drawing/2014/main" id="{AB506331-FAD2-C37C-4D5B-E040EFCF0952}"/>
+              </a:ext>
+            </a:extLst>
+          </p:cNvPr>
+          <p:cNvSpPr>
+            <a:spLocks noGrp="1"/>
+          </p:cNvSpPr>
+          <p:nvPr>
+            <p:ph type="title"/>
+          </p:nvPr>
+        </p:nvSpPr>
+        <p:spPr/>
+        <p:txBody>
+          <a:bodyPr/>
+          <a:lstStyle/>
+          <a:p>
+            <a:r>
+              <a:rPr lang="en-US" altLang="zh-CN" dirty="0"/>
+              <a:t>Lecture 3 - Links Queuing Delays ANS</a:t>
+            </a:r>
+            <a:endParaRPr lang="zh-CN" altLang="en-US" dirty="0"/>
+          </a:p>
+        </p:txBody>
+      </p:sp>
+      <p:sp>
+        <p:nvSpPr>
+          <p:cNvPr id="3" name="Slide Number Placeholder 2">
+            <a:extLst>
+              <a:ext uri="{FF2B5EF4-FFF2-40B4-BE49-F238E27FC236}">
+                <a16:creationId xmlns:a16="http://schemas.microsoft.com/office/drawing/2014/main" id="{04D1E93B-35C8-FF88-B5DA-7083BD3BE3B9}"/>
+              </a:ext>
+            </a:extLst>
+          </p:cNvPr>
+          <p:cNvSpPr>
+            <a:spLocks noGrp="1"/>
+          </p:cNvSpPr>
+          <p:nvPr>
+            <p:ph type="sldNum" sz="quarter" idx="12"/>
+          </p:nvPr>
+        </p:nvSpPr>
+        <p:spPr/>
+        <p:txBody>
+          <a:bodyPr/>
+          <a:lstStyle/>
+          <a:p>
+            <a:fld id="{EA7C8D44-3667-46F6-9772-CC52308E2A7F}" type="slidenum">
+              <a:rPr kumimoji="0" lang="en-US" smtClean="0"/>
+              <a:pPr/>
+              <a:t>8</a:t>
+            </a:fld>
+            <a:endParaRPr kumimoji="0" lang="en-US" dirty="0"/>
+          </a:p>
+        </p:txBody>
+      </p:sp>
+      <p:sp>
+        <p:nvSpPr>
+          <p:cNvPr id="4" name="Content Placeholder 3">
+            <a:extLst>
+              <a:ext uri="{FF2B5EF4-FFF2-40B4-BE49-F238E27FC236}">
+                <a16:creationId xmlns:a16="http://schemas.microsoft.com/office/drawing/2014/main" id="{7DDF39FB-0476-ECF4-DF79-B77C4F4C7DB7}"/>
+              </a:ext>
+            </a:extLst>
+          </p:cNvPr>
+          <p:cNvSpPr>
+            <a:spLocks noGrp="1"/>
+          </p:cNvSpPr>
+          <p:nvPr>
+            <p:ph sz="quarter" idx="1"/>
+          </p:nvPr>
+        </p:nvSpPr>
+        <p:spPr/>
+        <p:txBody>
+          <a:bodyPr>
+            <a:normAutofit fontScale="77500" lnSpcReduction="20000"/>
+          </a:bodyPr>
+          <a:lstStyle/>
+          <a:p>
+            <a:r>
+              <a:rPr lang="en-US" altLang="zh-CN" dirty="0"/>
+              <a:t>Starting at </a:t>
+            </a:r>
+            <a:r>
+              <a:rPr lang="zh-CN" altLang="en-US" dirty="0"/>
+              <a:t>𝑡 </a:t>
+            </a:r>
+            <a:r>
+              <a:rPr lang="en-US" altLang="zh-CN" dirty="0"/>
+              <a:t>= 0, </a:t>
+            </a:r>
+            <a:r>
+              <a:rPr lang="zh-CN" altLang="en-US" dirty="0"/>
+              <a:t>𝐻 </a:t>
+            </a:r>
+            <a:r>
+              <a:rPr lang="en-US" altLang="zh-CN" dirty="0"/>
+              <a:t>sends 10 payloads to </a:t>
+            </a:r>
+            <a:r>
+              <a:rPr lang="zh-CN" altLang="en-US" dirty="0"/>
+              <a:t>𝑇</a:t>
+            </a:r>
+            <a:r>
+              <a:rPr lang="en-US" altLang="zh-CN" dirty="0"/>
+              <a:t>, one after the other. Each payload is 20 </a:t>
+            </a:r>
+            <a:r>
+              <a:rPr lang="en-US" altLang="zh-CN" dirty="0" err="1"/>
+              <a:t>Gbits</a:t>
+            </a:r>
+            <a:r>
+              <a:rPr lang="en-US" altLang="zh-CN" dirty="0"/>
+              <a:t>. </a:t>
+            </a:r>
+            <a:r>
+              <a:rPr lang="zh-CN" altLang="en-US" dirty="0"/>
+              <a:t>𝐸 </a:t>
+            </a:r>
+            <a:r>
+              <a:rPr lang="en-US" altLang="zh-CN" dirty="0"/>
+              <a:t>uses store and forward, i.e., it must receive all bits of a payload before sending that payload along the next link ().</a:t>
+            </a:r>
+          </a:p>
+          <a:p>
+            <a:r>
+              <a:rPr lang="en-US" altLang="zh-CN" dirty="0"/>
+              <a:t>Q1 What is the queuing delay of the first payload? Note: For all queuing delay questions, count from the time the last bit of the payload arrives at </a:t>
+            </a:r>
+            <a:r>
+              <a:rPr lang="zh-CN" altLang="en-US" dirty="0"/>
+              <a:t>𝐸</a:t>
+            </a:r>
+            <a:r>
+              <a:rPr lang="en-US" altLang="zh-CN" dirty="0"/>
+              <a:t>, to the time the first bit of the payload is sent out of </a:t>
+            </a:r>
+            <a:r>
+              <a:rPr lang="zh-CN" altLang="en-US" dirty="0"/>
+              <a:t>𝐸</a:t>
+            </a:r>
+            <a:r>
+              <a:rPr lang="en-US" altLang="zh-CN" dirty="0"/>
+              <a:t>.</a:t>
+            </a:r>
+          </a:p>
+          <a:p>
+            <a:pPr lvl="1"/>
+            <a:r>
+              <a:rPr lang="en-US" altLang="zh-CN" dirty="0"/>
+              <a:t>ANS: 0 sec</a:t>
+            </a:r>
+          </a:p>
+          <a:p>
+            <a:r>
+              <a:rPr lang="en-US" altLang="zh-CN" dirty="0"/>
+              <a:t>Q2 (1 point) At what time does </a:t>
+            </a:r>
+            <a:r>
+              <a:rPr lang="zh-CN" altLang="en-US" dirty="0"/>
+              <a:t>𝑇 </a:t>
+            </a:r>
+            <a:r>
+              <a:rPr lang="en-US" altLang="zh-CN" dirty="0"/>
+              <a:t>receive the last bit of the first payload?</a:t>
+            </a:r>
+          </a:p>
+          <a:p>
+            <a:pPr lvl="1"/>
+            <a:r>
+              <a:rPr lang="en-US" altLang="zh-CN" dirty="0"/>
+              <a:t>ANS: </a:t>
+            </a:r>
+            <a:r>
+              <a:rPr lang="zh-CN" altLang="en-US" dirty="0"/>
+              <a:t>𝑡 </a:t>
+            </a:r>
+            <a:r>
+              <a:rPr lang="en-US" altLang="zh-CN" dirty="0"/>
+              <a:t>= 15 sec</a:t>
+            </a:r>
+          </a:p>
+          <a:p>
+            <a:r>
+              <a:rPr lang="en-US" altLang="zh-CN" dirty="0"/>
+              <a:t>Q3 (2 points) What is the queuing delay of the second payload?</a:t>
+            </a:r>
+          </a:p>
+          <a:p>
+            <a:pPr lvl="1"/>
+            <a:r>
+              <a:rPr lang="en-US" altLang="zh-CN" dirty="0"/>
+              <a:t>ANS: 1 sec</a:t>
+            </a:r>
+          </a:p>
+          <a:p>
+            <a:r>
+              <a:rPr lang="en-US" altLang="zh-CN" dirty="0"/>
+              <a:t>Q4 (2 points) At what time does </a:t>
+            </a:r>
+            <a:r>
+              <a:rPr lang="zh-CN" altLang="en-US" dirty="0"/>
+              <a:t>𝑇 </a:t>
+            </a:r>
+            <a:r>
+              <a:rPr lang="en-US" altLang="zh-CN" dirty="0"/>
+              <a:t>receive the last bit of the second payload?</a:t>
+            </a:r>
+          </a:p>
+          <a:p>
+            <a:pPr lvl="1"/>
+            <a:r>
+              <a:rPr lang="en-US" altLang="zh-CN" dirty="0"/>
+              <a:t>ANS: </a:t>
+            </a:r>
+            <a:r>
+              <a:rPr lang="zh-CN" altLang="en-US" dirty="0"/>
+              <a:t>𝑡 </a:t>
+            </a:r>
+            <a:r>
+              <a:rPr lang="en-US" altLang="zh-CN" dirty="0"/>
+              <a:t>= 17 sec</a:t>
+            </a:r>
+          </a:p>
+          <a:p>
+            <a:r>
+              <a:rPr lang="en-US" altLang="zh-CN" dirty="0"/>
+              <a:t>Q5 (2 points) What is the queuing delay of the 10th payload?</a:t>
+            </a:r>
+          </a:p>
+          <a:p>
+            <a:pPr lvl="1"/>
+            <a:r>
+              <a:rPr lang="en-US" altLang="zh-CN" dirty="0"/>
+              <a:t>ANS: 9 sec</a:t>
+            </a:r>
+          </a:p>
+          <a:p>
+            <a:r>
+              <a:rPr lang="en-US" altLang="zh-CN" dirty="0"/>
+              <a:t>Q6 (2 points) At what time does </a:t>
+            </a:r>
+            <a:r>
+              <a:rPr lang="zh-CN" altLang="en-US" dirty="0"/>
+              <a:t>𝑇 </a:t>
+            </a:r>
+            <a:r>
+              <a:rPr lang="en-US" altLang="zh-CN" dirty="0"/>
+              <a:t>receive the last bit of the 10th payload?</a:t>
+            </a:r>
+          </a:p>
+          <a:p>
+            <a:pPr lvl="1"/>
+            <a:r>
+              <a:rPr lang="en-US" altLang="zh-CN" dirty="0"/>
+              <a:t>ANS: </a:t>
+            </a:r>
+            <a:r>
+              <a:rPr lang="zh-CN" altLang="en-US" dirty="0"/>
+              <a:t>𝑡 </a:t>
+            </a:r>
+            <a:r>
+              <a:rPr lang="en-US" altLang="zh-CN" dirty="0"/>
+              <a:t>= 33 sec</a:t>
+            </a:r>
+            <a:endParaRPr lang="zh-CN" altLang="en-US" dirty="0"/>
+          </a:p>
+        </p:txBody>
+      </p:sp>
+      <p:pic>
+        <p:nvPicPr>
+          <p:cNvPr id="6" name="Picture 5" descr="The image depicts a network diagram illustrating two links with propagation delays of 2 and 10 seconds, and bandwidths of 20 Gbps and 10 Gbps respectively.&#10;&#10;AI-generated content may be incorrect.">
+            <a:extLst>
+              <a:ext uri="{FF2B5EF4-FFF2-40B4-BE49-F238E27FC236}">
+                <a16:creationId xmlns:a16="http://schemas.microsoft.com/office/drawing/2014/main" id="{11A44FD7-3CB6-BCEC-A980-859BB5D17566}"/>
+              </a:ext>
+            </a:extLst>
+          </p:cNvPr>
+          <p:cNvPicPr>
+            <a:picLocks noChangeAspect="1"/>
+          </p:cNvPicPr>
+          <p:nvPr/>
+        </p:nvPicPr>
+        <p:blipFill>
+          <a:blip r:embed="rId3"/>
+          <a:stretch>
+            <a:fillRect/>
+          </a:stretch>
+        </p:blipFill>
+        <p:spPr>
+          <a:xfrm>
+            <a:off x="3048000" y="5694933"/>
+            <a:ext cx="6697010" cy="924054"/>
+          </a:xfrm>
+          <a:prstGeom prst="rect">
+            <a:avLst/>
+          </a:prstGeom>
+        </p:spPr>
+      </p:pic>
+    </p:spTree>
+    <p:extLst>
+      <p:ext uri="{BB962C8B-B14F-4D97-AF65-F5344CB8AC3E}">
+        <p14:creationId xmlns:p14="http://schemas.microsoft.com/office/powerpoint/2010/main" val="1242299565"/>
+      </p:ext>
+    </p:extLst>
+  </p:cSld>
+  <p:clrMapOvr>
+    <a:masterClrMapping/>
+  </p:clrMapOvr>
+</p:sld>
+</file>
+
+<file path=ppt/slides/slide9.xml><?xml version="1.0" encoding="utf-8"?>
+<p:sld xmlns:a="http://schemas.openxmlformats.org/drawingml/2006/main" xmlns:r="http://schemas.openxmlformats.org/officeDocument/2006/relationships" xmlns:p="http://schemas.openxmlformats.org/presentationml/2006/main">
+  <p:cSld>
+    <p:spTree>
+      <p:nvGrpSpPr>
+        <p:cNvPr id="1" name=""/>
+        <p:cNvGrpSpPr/>
+        <p:nvPr/>
+      </p:nvGrpSpPr>
+      <p:grpSpPr>
+        <a:xfrm>
+          <a:off x="0" y="0"/>
+          <a:ext cx="0" cy="0"/>
+          <a:chOff x="0" y="0"/>
+          <a:chExt cx="0" cy="0"/>
+        </a:xfrm>
+      </p:grpSpPr>
+      <p:pic>
+        <p:nvPicPr>
+          <p:cNvPr id="8" name="Picture 7">
+            <a:extLst>
+              <a:ext uri="{FF2B5EF4-FFF2-40B4-BE49-F238E27FC236}">
+                <a16:creationId xmlns:a16="http://schemas.microsoft.com/office/drawing/2014/main" id="{317CA1F7-19B5-EB8E-6348-0AE5C3EEAAA2}"/>
+              </a:ext>
+            </a:extLst>
+          </p:cNvPr>
+          <p:cNvPicPr>
+            <a:picLocks noChangeAspect="1"/>
+          </p:cNvPicPr>
+          <p:nvPr/>
+        </p:nvPicPr>
+        <p:blipFill>
+          <a:blip r:embed="rId3"/>
+          <a:stretch>
+            <a:fillRect/>
+          </a:stretch>
+        </p:blipFill>
+        <p:spPr>
+          <a:xfrm>
+            <a:off x="5430635" y="5798056"/>
+            <a:ext cx="6697010" cy="924054"/>
+          </a:xfrm>
+          <a:prstGeom prst="rect">
+            <a:avLst/>
+          </a:prstGeom>
+        </p:spPr>
+      </p:pic>
+      <p:sp>
+        <p:nvSpPr>
+          <p:cNvPr id="2" name="Title 1">
+            <a:extLst>
+              <a:ext uri="{FF2B5EF4-FFF2-40B4-BE49-F238E27FC236}">
+                <a16:creationId xmlns:a16="http://schemas.microsoft.com/office/drawing/2014/main" id="{9ADF8C37-068B-2C7B-0271-17BC51A1C58A}"/>
+              </a:ext>
+            </a:extLst>
+          </p:cNvPr>
+          <p:cNvSpPr>
+            <a:spLocks noGrp="1"/>
+          </p:cNvSpPr>
+          <p:nvPr>
+            <p:ph type="title"/>
+          </p:nvPr>
+        </p:nvSpPr>
+        <p:spPr>
+          <a:xfrm>
+            <a:off x="609600" y="152400"/>
+            <a:ext cx="7010400" cy="990600"/>
+          </a:xfrm>
+        </p:spPr>
+        <p:txBody>
+          <a:bodyPr>
+            <a:normAutofit fontScale="90000"/>
+          </a:bodyPr>
+          <a:lstStyle/>
+          <a:p>
+            <a:r>
+              <a:rPr lang="en-US" altLang="zh-CN" dirty="0"/>
+              <a:t>Lecture 3 - Links Queuing Delays ANS</a:t>
+            </a:r>
+            <a:endParaRPr lang="zh-CN" altLang="en-US" dirty="0"/>
+          </a:p>
+        </p:txBody>
+      </p:sp>
+      <p:sp>
+        <p:nvSpPr>
+          <p:cNvPr id="3" name="Slide Number Placeholder 2">
+            <a:extLst>
+              <a:ext uri="{FF2B5EF4-FFF2-40B4-BE49-F238E27FC236}">
+                <a16:creationId xmlns:a16="http://schemas.microsoft.com/office/drawing/2014/main" id="{83E516CE-6AD8-5DCD-2FBD-50750649CFF2}"/>
+              </a:ext>
+            </a:extLst>
+          </p:cNvPr>
+          <p:cNvSpPr>
+            <a:spLocks noGrp="1"/>
+          </p:cNvSpPr>
+          <p:nvPr>
+            <p:ph type="sldNum" sz="quarter" idx="12"/>
+          </p:nvPr>
+        </p:nvSpPr>
+        <p:spPr/>
+        <p:txBody>
+          <a:bodyPr/>
+          <a:lstStyle/>
+          <a:p>
+            <a:fld id="{EA7C8D44-3667-46F6-9772-CC52308E2A7F}" type="slidenum">
+              <a:rPr kumimoji="0" lang="en-US" smtClean="0"/>
+              <a:pPr/>
+              <a:t>9</a:t>
+            </a:fld>
+            <a:endParaRPr kumimoji="0" lang="en-US" dirty="0"/>
+          </a:p>
+        </p:txBody>
+      </p:sp>
+      <p:sp>
+        <p:nvSpPr>
+          <p:cNvPr id="4" name="Content Placeholder 3">
+            <a:extLst>
+              <a:ext uri="{FF2B5EF4-FFF2-40B4-BE49-F238E27FC236}">
+                <a16:creationId xmlns:a16="http://schemas.microsoft.com/office/drawing/2014/main" id="{14244A22-B278-B662-A536-5B5167AFA778}"/>
+              </a:ext>
+            </a:extLst>
+          </p:cNvPr>
+          <p:cNvSpPr>
+            <a:spLocks noGrp="1"/>
+          </p:cNvSpPr>
+          <p:nvPr>
+            <p:ph sz="quarter" idx="1"/>
+          </p:nvPr>
+        </p:nvSpPr>
+        <p:spPr>
+          <a:xfrm>
+            <a:off x="609600" y="1219200"/>
+            <a:ext cx="7086600" cy="5638800"/>
+          </a:xfrm>
+        </p:spPr>
+        <p:txBody>
+          <a:bodyPr>
+            <a:normAutofit fontScale="55000" lnSpcReduction="20000"/>
+          </a:bodyPr>
+          <a:lstStyle/>
+          <a:p>
+            <a:r>
+              <a:rPr lang="en-US" altLang="zh-CN" dirty="0"/>
+              <a:t>Q1-5 ANS. This table shows the time each payload arrives at </a:t>
+            </a:r>
+            <a:r>
+              <a:rPr lang="zh-CN" altLang="en-US" dirty="0"/>
+              <a:t>𝐸 </a:t>
+            </a:r>
+            <a:r>
+              <a:rPr lang="en-US" altLang="zh-CN" dirty="0"/>
+              <a:t>(time of last bit arriving), the time each payload is sent from </a:t>
+            </a:r>
+            <a:r>
+              <a:rPr lang="zh-CN" altLang="en-US" dirty="0"/>
+              <a:t>𝐸 </a:t>
+            </a:r>
+            <a:r>
+              <a:rPr lang="en-US" altLang="zh-CN" dirty="0"/>
+              <a:t>(time of first bit sent out), and the queuing delay of payload.</a:t>
+            </a:r>
+          </a:p>
+          <a:p>
+            <a:r>
+              <a:rPr lang="en-US" altLang="zh-CN" dirty="0"/>
+              <a:t>Link 1: H -&gt; E.  Bandwidth = 20 Gbps, Transmission Delay for each 20 Gbit payload is 1s. Propagation Delay = 2s</a:t>
+            </a:r>
+            <a:br>
+              <a:rPr lang="en-US" altLang="zh-CN" dirty="0"/>
+            </a:br>
+            <a:r>
+              <a:rPr lang="en-US" altLang="zh-CN" dirty="0"/>
+              <a:t>Link 2: H -&gt; ET. Bandwidth = 10 Gbps, Transmission Delay for each 20 Gbit payload is 2s (service time). Propagation Delay = 10s</a:t>
+            </a:r>
+          </a:p>
+          <a:p>
+            <a:r>
+              <a:rPr lang="en-US" altLang="zh-CN" dirty="0"/>
+              <a:t>To derive the </a:t>
+            </a:r>
+            <a:r>
+              <a:rPr lang="en-US" altLang="zh-CN" dirty="0">
+                <a:solidFill>
+                  <a:srgbClr val="C00000"/>
+                </a:solidFill>
+              </a:rPr>
+              <a:t>time of arrival of the last bit of each payload at E</a:t>
+            </a:r>
+            <a:r>
+              <a:rPr lang="en-US" altLang="zh-CN" dirty="0"/>
+              <a:t> column, we consider Link 1:</a:t>
+            </a:r>
+          </a:p>
+          <a:p>
+            <a:pPr lvl="1"/>
+            <a:r>
+              <a:rPr lang="en-US" altLang="zh-CN" dirty="0"/>
+              <a:t>The first payload of 20 Gbps: First bit is transmitted from </a:t>
+            </a:r>
+            <a:r>
+              <a:rPr lang="zh-CN" altLang="en-US" dirty="0"/>
+              <a:t>𝐻 </a:t>
+            </a:r>
+            <a:r>
+              <a:rPr lang="en-US" altLang="zh-CN" dirty="0"/>
+              <a:t>at </a:t>
+            </a:r>
+            <a:r>
+              <a:rPr lang="zh-CN" altLang="en-US" dirty="0"/>
+              <a:t>𝑡 </a:t>
+            </a:r>
+            <a:r>
+              <a:rPr lang="en-US" altLang="zh-CN" dirty="0"/>
+              <a:t>= 0; the last bit is transmitted from </a:t>
+            </a:r>
+            <a:r>
+              <a:rPr lang="zh-CN" altLang="en-US" dirty="0"/>
+              <a:t>𝐻 </a:t>
+            </a:r>
+            <a:r>
+              <a:rPr lang="en-US" altLang="zh-CN" dirty="0"/>
+              <a:t>at </a:t>
+            </a:r>
+            <a:r>
+              <a:rPr lang="zh-CN" altLang="en-US" dirty="0"/>
+              <a:t>𝑡 </a:t>
+            </a:r>
+            <a:r>
+              <a:rPr lang="en-US" altLang="zh-CN" dirty="0"/>
+              <a:t>= 1, and arrives at </a:t>
+            </a:r>
+            <a:r>
+              <a:rPr lang="zh-CN" altLang="en-US" dirty="0"/>
+              <a:t>𝐸 </a:t>
+            </a:r>
+            <a:r>
+              <a:rPr lang="en-US" altLang="zh-CN" dirty="0"/>
+              <a:t>at </a:t>
+            </a:r>
+            <a:r>
+              <a:rPr lang="zh-CN" altLang="en-US" dirty="0"/>
+              <a:t>𝑡 </a:t>
+            </a:r>
+            <a:r>
+              <a:rPr lang="en-US" altLang="zh-CN" dirty="0"/>
+              <a:t>= 1 + Prop Delay (2) = 3.</a:t>
+            </a:r>
+          </a:p>
+          <a:p>
+            <a:pPr lvl="1"/>
+            <a:r>
+              <a:rPr lang="en-US" altLang="zh-CN" dirty="0"/>
+              <a:t>At this point, a constant stream of payloads is sent from </a:t>
+            </a:r>
+            <a:r>
+              <a:rPr lang="zh-CN" altLang="en-US" dirty="0"/>
+              <a:t>𝐻 </a:t>
+            </a:r>
+            <a:r>
+              <a:rPr lang="en-US" altLang="zh-CN" dirty="0"/>
+              <a:t>to </a:t>
+            </a:r>
+            <a:r>
+              <a:rPr lang="zh-CN" altLang="en-US" dirty="0"/>
+              <a:t>𝐸 </a:t>
+            </a:r>
+            <a:r>
+              <a:rPr lang="en-US" altLang="zh-CN" dirty="0"/>
+              <a:t>back-to-back. Each payload takes 1 second to transmit, so the times of arrivals are 3, 4, 5, … (1 second per packet).</a:t>
+            </a:r>
+          </a:p>
+          <a:p>
+            <a:r>
+              <a:rPr lang="en-US" altLang="zh-CN" dirty="0"/>
+              <a:t>To derive the </a:t>
+            </a:r>
+            <a:r>
+              <a:rPr lang="en-US" altLang="zh-CN" dirty="0">
+                <a:solidFill>
+                  <a:srgbClr val="C00000"/>
+                </a:solidFill>
+              </a:rPr>
+              <a:t>time of sending of the first bit of each payload from E</a:t>
+            </a:r>
+            <a:r>
+              <a:rPr lang="en-US" altLang="zh-CN" dirty="0"/>
+              <a:t> column, we consider Link 2:</a:t>
+            </a:r>
+          </a:p>
+          <a:p>
+            <a:pPr lvl="1"/>
+            <a:r>
+              <a:rPr lang="en-US" altLang="zh-CN" dirty="0"/>
+              <a:t>Payload 1′s last bit arrives at </a:t>
+            </a:r>
+            <a:r>
+              <a:rPr lang="zh-CN" altLang="en-US" dirty="0"/>
+              <a:t>𝑡 </a:t>
+            </a:r>
+            <a:r>
+              <a:rPr lang="en-US" altLang="zh-CN" dirty="0"/>
+              <a:t>= 3, so its first bit can be forwarded from E starting at </a:t>
+            </a:r>
+            <a:r>
+              <a:rPr lang="zh-CN" altLang="en-US" dirty="0"/>
+              <a:t>𝑡 </a:t>
+            </a:r>
+            <a:r>
+              <a:rPr lang="en-US" altLang="zh-CN" dirty="0"/>
+              <a:t>= 3, , with queuing delay of 3-3 = 0.  The last bit is transmitted from E</a:t>
+            </a:r>
+            <a:r>
+              <a:rPr lang="zh-CN" altLang="en-US" dirty="0"/>
+              <a:t> </a:t>
+            </a:r>
+            <a:r>
+              <a:rPr lang="en-US" altLang="zh-CN" dirty="0"/>
+              <a:t>at </a:t>
+            </a:r>
+            <a:r>
+              <a:rPr lang="zh-CN" altLang="en-US" dirty="0"/>
+              <a:t>𝑡 </a:t>
+            </a:r>
+            <a:r>
+              <a:rPr lang="en-US" altLang="zh-CN" dirty="0"/>
+              <a:t>= 5, and arrives at T</a:t>
+            </a:r>
+            <a:r>
+              <a:rPr lang="zh-CN" altLang="en-US" dirty="0"/>
+              <a:t> </a:t>
+            </a:r>
+            <a:r>
+              <a:rPr lang="en-US" altLang="zh-CN" dirty="0"/>
+              <a:t>at </a:t>
+            </a:r>
+            <a:r>
+              <a:rPr lang="zh-CN" altLang="en-US" dirty="0"/>
+              <a:t>𝑡 </a:t>
+            </a:r>
+            <a:r>
+              <a:rPr lang="en-US" altLang="zh-CN" dirty="0"/>
+              <a:t>= 5 + Prop Delay (10) = 15. </a:t>
+            </a:r>
+          </a:p>
+          <a:p>
+            <a:pPr lvl="1"/>
+            <a:r>
+              <a:rPr lang="en-US" altLang="zh-CN" dirty="0"/>
+              <a:t>Payload 2′s last bit arrives at </a:t>
+            </a:r>
+            <a:r>
+              <a:rPr lang="zh-CN" altLang="en-US" dirty="0"/>
+              <a:t>𝑡 </a:t>
+            </a:r>
+            <a:r>
+              <a:rPr lang="en-US" altLang="zh-CN" dirty="0"/>
+              <a:t>= 4, so its first bit can be forwarded from E starting at </a:t>
+            </a:r>
+            <a:r>
+              <a:rPr lang="zh-CN" altLang="en-US" dirty="0"/>
+              <a:t>𝑡 </a:t>
+            </a:r>
+            <a:r>
+              <a:rPr lang="en-US" altLang="zh-CN" dirty="0"/>
+              <a:t>= 5, with queuing delay of 5-4 = 1.  The last bit is transmitted from E</a:t>
+            </a:r>
+            <a:r>
+              <a:rPr lang="zh-CN" altLang="en-US" dirty="0"/>
+              <a:t> </a:t>
+            </a:r>
+            <a:r>
+              <a:rPr lang="en-US" altLang="zh-CN" dirty="0"/>
+              <a:t>at </a:t>
+            </a:r>
+            <a:r>
+              <a:rPr lang="zh-CN" altLang="en-US" dirty="0"/>
+              <a:t>𝑡 </a:t>
+            </a:r>
+            <a:r>
+              <a:rPr lang="en-US" altLang="zh-CN" dirty="0"/>
+              <a:t>= 7, and arrives at T</a:t>
+            </a:r>
+            <a:r>
+              <a:rPr lang="zh-CN" altLang="en-US" dirty="0"/>
+              <a:t> </a:t>
+            </a:r>
+            <a:r>
+              <a:rPr lang="en-US" altLang="zh-CN" dirty="0"/>
+              <a:t>at </a:t>
+            </a:r>
+            <a:r>
+              <a:rPr lang="zh-CN" altLang="en-US" dirty="0"/>
+              <a:t>𝑡 </a:t>
+            </a:r>
+            <a:r>
+              <a:rPr lang="en-US" altLang="zh-CN" dirty="0"/>
+              <a:t>= 7+10 =17.</a:t>
+            </a:r>
+          </a:p>
+          <a:p>
+            <a:pPr lvl="1"/>
+            <a:r>
+              <a:rPr lang="en-US" altLang="zh-CN" dirty="0"/>
+              <a:t>Time of sending of the first bit of each payload from E: 3, 5, 7,…</a:t>
+            </a:r>
+          </a:p>
+          <a:p>
+            <a:r>
+              <a:rPr lang="en-US" altLang="zh-CN" dirty="0"/>
+              <a:t>The queuing delay is the difference between the time of last bit arriving, and the time of first bit sending. It increases with each payload, since the queue builds up in size gradually, as Link 2 has a lower bandwidth than Link 1. Every second, backlog increases steadily → queue builds → delay grows</a:t>
+            </a:r>
+          </a:p>
+          <a:p>
+            <a:pPr lvl="1"/>
+            <a:r>
+              <a:rPr lang="en-US" altLang="zh-CN" dirty="0"/>
+              <a:t>1 payload arrives (20 Gbps link)</a:t>
+            </a:r>
+          </a:p>
+          <a:p>
+            <a:pPr lvl="1"/>
+            <a:r>
+              <a:rPr lang="en-US" altLang="zh-CN" dirty="0"/>
+              <a:t>But only 0.5 payload leaves (10 Gbps link)</a:t>
+            </a:r>
+            <a:endParaRPr lang="zh-CN" altLang="en-US" dirty="0"/>
+          </a:p>
+        </p:txBody>
+      </p:sp>
+      <p:pic>
+        <p:nvPicPr>
+          <p:cNvPr id="6" name="Picture 5" descr="The provided text appears to be a tabulated list of numbers, which could be interpreted as a sequence of events or values associated with a queuing system, such as delays, arrival times, or processing times, but without an accompanying image, it's not possible to describe any visual content.&#10;&#10;AI-generated content may be incorrect.">
+            <a:extLst>
+              <a:ext uri="{FF2B5EF4-FFF2-40B4-BE49-F238E27FC236}">
+                <a16:creationId xmlns:a16="http://schemas.microsoft.com/office/drawing/2014/main" id="{995AF2CD-460E-D89C-CC78-B3B6252F2981}"/>
+              </a:ext>
+            </a:extLst>
+          </p:cNvPr>
+          <p:cNvPicPr>
+            <a:picLocks noChangeAspect="1"/>
+          </p:cNvPicPr>
+          <p:nvPr/>
+        </p:nvPicPr>
+        <p:blipFill>
+          <a:blip r:embed="rId4"/>
+          <a:stretch>
+            <a:fillRect/>
+          </a:stretch>
+        </p:blipFill>
+        <p:spPr>
+          <a:xfrm>
+            <a:off x="7696200" y="2009539"/>
+            <a:ext cx="4277322" cy="3372321"/>
+          </a:xfrm>
+          <a:prstGeom prst="rect">
+            <a:avLst/>
+          </a:prstGeom>
+        </p:spPr>
+      </p:pic>
+      <mc:AlternateContent xmlns:mc="http://schemas.openxmlformats.org/markup-compatibility/2006">
+        <mc:Choice xmlns:a14="http://schemas.microsoft.com/office/drawing/2010/main" Requires="a14">
+          <p:sp>
+            <p:nvSpPr>
+              <p:cNvPr id="10" name="TextBox 9">
+                <a:extLst>
+                  <a:ext uri="{FF2B5EF4-FFF2-40B4-BE49-F238E27FC236}">
+                    <a16:creationId xmlns:a16="http://schemas.microsoft.com/office/drawing/2014/main" id="{C6286E33-128B-DB63-9962-A1077AF368D7}"/>
+                  </a:ext>
+                </a:extLst>
+              </p:cNvPr>
+              <p:cNvSpPr txBox="1"/>
+              <p:nvPr/>
+            </p:nvSpPr>
+            <p:spPr>
+              <a:xfrm>
+                <a:off x="7513202" y="308838"/>
+                <a:ext cx="4614443" cy="1624501"/>
+              </a:xfrm>
+              <a:prstGeom prst="rect">
+                <a:avLst/>
+              </a:prstGeom>
+              <a:solidFill>
+                <a:schemeClr val="bg1">
+                  <a:lumMod val="95000"/>
+                </a:schemeClr>
+              </a:solidFill>
+            </p:spPr>
+            <p:style>
+              <a:lnRef idx="1">
+                <a:schemeClr val="dk1"/>
+              </a:lnRef>
+              <a:fillRef idx="2">
+                <a:schemeClr val="dk1"/>
+              </a:fillRef>
+              <a:effectRef idx="1">
+                <a:schemeClr val="dk1"/>
+              </a:effectRef>
+              <a:fontRef idx="minor">
+                <a:schemeClr val="dk1"/>
+              </a:fontRef>
+            </p:style>
+            <p:txBody>
+              <a:bodyPr wrap="square">
+                <a:spAutoFit/>
+              </a:bodyPr>
+              <a:lstStyle/>
+              <a:p>
+                <a:r>
+                  <a:rPr lang="nl-NL" altLang="zh-CN" sz="1400" dirty="0"/>
+                  <a:t>For payload number </a:t>
+                </a:r>
+                <a14:m>
+                  <m:oMath xmlns:m="http://schemas.openxmlformats.org/officeDocument/2006/math">
+                    <m:r>
+                      <a:rPr lang="zh-CN" altLang="nl-NL" sz="1400" i="1">
+                        <a:latin typeface="Cambria Math" panose="02040503050406030204" pitchFamily="18" charset="0"/>
+                      </a:rPr>
+                      <m:t>𝑘</m:t>
+                    </m:r>
+                  </m:oMath>
+                </a14:m>
+                <a:r>
+                  <a:rPr lang="nl-NL" altLang="zh-CN" sz="1400" dirty="0"/>
+                  <a:t>:</a:t>
+                </a:r>
+              </a:p>
+              <a:p>
+                <a:pPr lvl="1"/>
+                <a14:m>
+                  <m:oMathPara xmlns:m="http://schemas.openxmlformats.org/officeDocument/2006/math">
+                    <m:oMathParaPr>
+                      <m:jc m:val="centerGroup"/>
+                    </m:oMathParaPr>
+                    <m:oMath xmlns:m="http://schemas.openxmlformats.org/officeDocument/2006/math">
+                      <m:r>
+                        <m:rPr>
+                          <m:nor/>
+                        </m:rPr>
+                        <a:rPr lang="nl-NL" altLang="zh-CN" sz="1400" b="0"/>
+                        <m:t>queueing</m:t>
+                      </m:r>
+                      <m:r>
+                        <m:rPr>
+                          <m:nor/>
+                        </m:rPr>
+                        <a:rPr lang="nl-NL" altLang="zh-CN" sz="1400" b="0" i="1"/>
+                        <m:t> </m:t>
+                      </m:r>
+                      <m:r>
+                        <m:rPr>
+                          <m:nor/>
+                        </m:rPr>
+                        <a:rPr lang="nl-NL" altLang="zh-CN" sz="1400" b="0" i="1"/>
+                        <m:t>delay</m:t>
+                      </m:r>
+                      <m:r>
+                        <m:rPr>
+                          <m:nor/>
+                        </m:rPr>
+                        <a:rPr lang="nl-NL" altLang="zh-CN" sz="1400" b="0" i="1"/>
+                        <m:t> </m:t>
+                      </m:r>
+                      <m:r>
+                        <m:rPr>
+                          <m:nor/>
+                        </m:rPr>
+                        <a:rPr lang="nl-NL" altLang="zh-CN" sz="1400" b="0" i="1"/>
+                        <m:t>at</m:t>
+                      </m:r>
+                      <m:r>
+                        <m:rPr>
+                          <m:nor/>
+                        </m:rPr>
+                        <a:rPr lang="nl-NL" altLang="zh-CN" sz="1400" b="0" i="1"/>
+                        <m:t> </m:t>
+                      </m:r>
+                      <m:r>
+                        <a:rPr lang="zh-CN" altLang="nl-NL" sz="1400" b="0" i="1">
+                          <a:latin typeface="Cambria Math" panose="02040503050406030204" pitchFamily="18" charset="0"/>
+                        </a:rPr>
+                        <m:t>𝐸</m:t>
+                      </m:r>
+                      <m:r>
+                        <a:rPr lang="nl-NL" altLang="zh-CN" sz="1400">
+                          <a:latin typeface="Cambria Math" panose="02040503050406030204" pitchFamily="18" charset="0"/>
+                        </a:rPr>
+                        <m:t>=</m:t>
+                      </m:r>
+                      <m:d>
+                        <m:dPr>
+                          <m:ctrlPr>
+                            <a:rPr lang="ar-AE" altLang="zh-CN" sz="1400" i="1">
+                              <a:latin typeface="Cambria Math" panose="02040503050406030204" pitchFamily="18" charset="0"/>
+                            </a:rPr>
+                          </m:ctrlPr>
+                        </m:dPr>
+                        <m:e>
+                          <m:r>
+                            <a:rPr lang="ar-AE" altLang="zh-CN" sz="1400">
+                              <a:latin typeface="Cambria Math" panose="02040503050406030204" pitchFamily="18" charset="0"/>
+                            </a:rPr>
+                            <m:t>2</m:t>
+                          </m:r>
+                          <m:r>
+                            <a:rPr lang="zh-CN" altLang="ar-AE" sz="1400" i="1">
+                              <a:latin typeface="Cambria Math" panose="02040503050406030204" pitchFamily="18" charset="0"/>
+                            </a:rPr>
+                            <m:t>𝑘</m:t>
+                          </m:r>
+                          <m:r>
+                            <a:rPr lang="ar-AE" altLang="zh-CN" sz="1400">
+                              <a:latin typeface="Cambria Math" panose="02040503050406030204" pitchFamily="18" charset="0"/>
+                            </a:rPr>
+                            <m:t>+</m:t>
+                          </m:r>
+                          <m:r>
+                            <a:rPr lang="ar-AE" altLang="zh-CN" sz="1400">
+                              <a:latin typeface="Cambria Math" panose="02040503050406030204" pitchFamily="18" charset="0"/>
+                            </a:rPr>
+                            <m:t>1</m:t>
+                          </m:r>
+                        </m:e>
+                      </m:d>
+                      <m:r>
+                        <a:rPr lang="ar-AE" altLang="zh-CN" sz="1400">
+                          <a:latin typeface="Cambria Math" panose="02040503050406030204" pitchFamily="18" charset="0"/>
+                        </a:rPr>
+                        <m:t>−</m:t>
+                      </m:r>
+                      <m:d>
+                        <m:dPr>
+                          <m:ctrlPr>
+                            <a:rPr lang="ar-AE" altLang="zh-CN" sz="1400" i="1">
+                              <a:latin typeface="Cambria Math" panose="02040503050406030204" pitchFamily="18" charset="0"/>
+                            </a:rPr>
+                          </m:ctrlPr>
+                        </m:dPr>
+                        <m:e>
+                          <m:r>
+                            <a:rPr lang="zh-CN" altLang="ar-AE" sz="1400" i="1">
+                              <a:latin typeface="Cambria Math" panose="02040503050406030204" pitchFamily="18" charset="0"/>
+                            </a:rPr>
+                            <m:t>𝑘</m:t>
+                          </m:r>
+                          <m:r>
+                            <a:rPr lang="ar-AE" altLang="zh-CN" sz="1400">
+                              <a:latin typeface="Cambria Math" panose="02040503050406030204" pitchFamily="18" charset="0"/>
+                            </a:rPr>
+                            <m:t>+</m:t>
+                          </m:r>
+                          <m:r>
+                            <a:rPr lang="ar-AE" altLang="zh-CN" sz="1400">
+                              <a:latin typeface="Cambria Math" panose="02040503050406030204" pitchFamily="18" charset="0"/>
+                            </a:rPr>
+                            <m:t>2</m:t>
+                          </m:r>
+                        </m:e>
+                      </m:d>
+                      <m:r>
+                        <a:rPr lang="ar-AE" altLang="zh-CN" sz="1400">
+                          <a:latin typeface="Cambria Math" panose="02040503050406030204" pitchFamily="18" charset="0"/>
+                        </a:rPr>
+                        <m:t>=</m:t>
+                      </m:r>
+                      <m:r>
+                        <a:rPr lang="zh-CN" altLang="ar-AE" sz="1400" i="1">
+                          <a:latin typeface="Cambria Math" panose="02040503050406030204" pitchFamily="18" charset="0"/>
+                        </a:rPr>
+                        <m:t>𝑘</m:t>
+                      </m:r>
+                      <m:r>
+                        <a:rPr lang="ar-AE" altLang="zh-CN" sz="1400">
+                          <a:latin typeface="Cambria Math" panose="02040503050406030204" pitchFamily="18" charset="0"/>
+                        </a:rPr>
+                        <m:t>−</m:t>
+                      </m:r>
+                      <m:r>
+                        <a:rPr lang="ar-AE" altLang="zh-CN" sz="1400">
+                          <a:latin typeface="Cambria Math" panose="02040503050406030204" pitchFamily="18" charset="0"/>
+                        </a:rPr>
+                        <m:t>1</m:t>
+                      </m:r>
+                    </m:oMath>
+                  </m:oMathPara>
+                </a14:m>
+                <a:endParaRPr lang="ar-AE" altLang="zh-CN" sz="1400" b="0" dirty="0"/>
+              </a:p>
+              <a:p>
+                <a:pPr lvl="1"/>
+                <a:r>
+                  <a:rPr lang="nl-NL" altLang="zh-CN" sz="1400" dirty="0"/>
+                  <a:t>So the delays are:</a:t>
+                </a:r>
+              </a:p>
+              <a:p>
+                <a:pPr lvl="1"/>
+                <a14:m>
+                  <m:oMath xmlns:m="http://schemas.openxmlformats.org/officeDocument/2006/math">
+                    <m:r>
+                      <a:rPr lang="nl-NL" altLang="zh-CN" sz="1400">
+                        <a:latin typeface="Cambria Math" panose="02040503050406030204" pitchFamily="18" charset="0"/>
+                      </a:rPr>
+                      <m:t>0</m:t>
+                    </m:r>
+                    <m:r>
+                      <a:rPr lang="nl-NL" altLang="zh-CN" sz="1400">
+                        <a:latin typeface="Cambria Math" panose="02040503050406030204" pitchFamily="18" charset="0"/>
+                      </a:rPr>
+                      <m:t>,</m:t>
+                    </m:r>
+                    <m:r>
+                      <a:rPr lang="nl-NL" altLang="zh-CN" sz="1400">
+                        <a:latin typeface="Cambria Math" panose="02040503050406030204" pitchFamily="18" charset="0"/>
+                      </a:rPr>
+                      <m:t>1</m:t>
+                    </m:r>
+                    <m:r>
+                      <a:rPr lang="nl-NL" altLang="zh-CN" sz="1400">
+                        <a:latin typeface="Cambria Math" panose="02040503050406030204" pitchFamily="18" charset="0"/>
+                      </a:rPr>
+                      <m:t>,</m:t>
+                    </m:r>
+                    <m:r>
+                      <a:rPr lang="nl-NL" altLang="zh-CN" sz="1400">
+                        <a:latin typeface="Cambria Math" panose="02040503050406030204" pitchFamily="18" charset="0"/>
+                      </a:rPr>
+                      <m:t>2</m:t>
+                    </m:r>
+                    <m:r>
+                      <a:rPr lang="nl-NL" altLang="zh-CN" sz="1400">
+                        <a:latin typeface="Cambria Math" panose="02040503050406030204" pitchFamily="18" charset="0"/>
+                      </a:rPr>
+                      <m:t>,</m:t>
+                    </m:r>
+                    <m:r>
+                      <a:rPr lang="nl-NL" altLang="zh-CN" sz="1400">
+                        <a:latin typeface="Cambria Math" panose="02040503050406030204" pitchFamily="18" charset="0"/>
+                      </a:rPr>
+                      <m:t>3</m:t>
+                    </m:r>
+                    <m:r>
+                      <a:rPr lang="nl-NL" altLang="zh-CN" sz="1400">
+                        <a:latin typeface="Cambria Math" panose="02040503050406030204" pitchFamily="18" charset="0"/>
+                      </a:rPr>
+                      <m:t>,…,</m:t>
+                    </m:r>
+                    <m:r>
+                      <a:rPr lang="nl-NL" altLang="zh-CN" sz="1400">
+                        <a:latin typeface="Cambria Math" panose="02040503050406030204" pitchFamily="18" charset="0"/>
+                      </a:rPr>
+                      <m:t>9</m:t>
+                    </m:r>
+                  </m:oMath>
+                </a14:m>
+                <a:r>
+                  <a:rPr lang="nl-NL" altLang="zh-CN" sz="1400" dirty="0"/>
+                  <a:t>, for payloads </a:t>
+                </a:r>
+                <a14:m>
+                  <m:oMath xmlns:m="http://schemas.openxmlformats.org/officeDocument/2006/math">
+                    <m:r>
+                      <a:rPr lang="nl-NL" altLang="zh-CN" sz="1400">
+                        <a:latin typeface="Cambria Math" panose="02040503050406030204" pitchFamily="18" charset="0"/>
+                      </a:rPr>
+                      <m:t>1</m:t>
+                    </m:r>
+                    <m:r>
+                      <a:rPr lang="en-US" altLang="zh-CN" sz="1400" b="0" i="0" smtClean="0">
+                        <a:latin typeface="Cambria Math" panose="02040503050406030204" pitchFamily="18" charset="0"/>
+                      </a:rPr>
+                      <m:t> </m:t>
+                    </m:r>
+                  </m:oMath>
+                </a14:m>
+                <a:r>
+                  <a:rPr lang="nl-NL" altLang="zh-CN" sz="1400" dirty="0"/>
+                  <a:t>through </a:t>
+                </a:r>
+                <a14:m>
+                  <m:oMath xmlns:m="http://schemas.openxmlformats.org/officeDocument/2006/math">
+                    <m:r>
+                      <a:rPr lang="nl-NL" altLang="zh-CN" sz="1400">
+                        <a:latin typeface="Cambria Math" panose="02040503050406030204" pitchFamily="18" charset="0"/>
+                      </a:rPr>
+                      <m:t>10</m:t>
+                    </m:r>
+                  </m:oMath>
+                </a14:m>
+                <a:r>
+                  <a:rPr lang="nl-NL" altLang="zh-CN" sz="1400" dirty="0"/>
+                  <a:t>.</a:t>
+                </a:r>
+              </a:p>
+              <a:p>
+                <a:r>
+                  <a:rPr lang="nl-NL" altLang="zh-CN" sz="1400" dirty="0"/>
+                  <a:t>Packets arrive at </a:t>
+                </a:r>
+                <a14:m>
+                  <m:oMath xmlns:m="http://schemas.openxmlformats.org/officeDocument/2006/math">
+                    <m:r>
+                      <a:rPr lang="zh-CN" altLang="nl-NL" sz="1400" i="1">
+                        <a:latin typeface="Cambria Math" panose="02040503050406030204" pitchFamily="18" charset="0"/>
+                      </a:rPr>
+                      <m:t>𝐸</m:t>
+                    </m:r>
+                  </m:oMath>
+                </a14:m>
+                <a:r>
+                  <a:rPr lang="nl-NL" altLang="zh-CN" sz="1400" dirty="0"/>
+                  <a:t> every 1 second, but </a:t>
+                </a:r>
+                <a14:m>
+                  <m:oMath xmlns:m="http://schemas.openxmlformats.org/officeDocument/2006/math">
+                    <m:r>
+                      <a:rPr lang="zh-CN" altLang="nl-NL" sz="1400" i="1">
+                        <a:latin typeface="Cambria Math" panose="02040503050406030204" pitchFamily="18" charset="0"/>
+                      </a:rPr>
+                      <m:t>𝐸</m:t>
+                    </m:r>
+                  </m:oMath>
+                </a14:m>
+                <a:r>
+                  <a:rPr lang="nl-NL" altLang="zh-CN" sz="1400" dirty="0"/>
+                  <a:t> can only start sending one every 2 seconds, so the backlog grows by 1 second per packet.</a:t>
+                </a:r>
+                <a:endParaRPr lang="zh-CN" altLang="en-US" sz="1400" dirty="0"/>
+              </a:p>
+            </p:txBody>
+          </p:sp>
+        </mc:Choice>
+        <mc:Fallback>
+          <p:sp>
+            <p:nvSpPr>
+              <p:cNvPr id="10" name="TextBox 9">
+                <a:extLst>
+                  <a:ext uri="{FF2B5EF4-FFF2-40B4-BE49-F238E27FC236}">
+                    <a16:creationId xmlns:a16="http://schemas.microsoft.com/office/drawing/2014/main" id="{C6286E33-128B-DB63-9962-A1077AF368D7}"/>
+                  </a:ext>
+                </a:extLst>
+              </p:cNvPr>
+              <p:cNvSpPr txBox="1">
+                <a:spLocks noRot="1" noChangeAspect="1" noMove="1" noResize="1" noEditPoints="1" noAdjustHandles="1" noChangeArrowheads="1" noChangeShapeType="1" noTextEdit="1"/>
+              </p:cNvSpPr>
+              <p:nvPr/>
+            </p:nvSpPr>
+            <p:spPr>
+              <a:xfrm>
+                <a:off x="7513202" y="308838"/>
+                <a:ext cx="4614443" cy="1624501"/>
+              </a:xfrm>
+              <a:prstGeom prst="rect">
+                <a:avLst/>
+              </a:prstGeom>
+              <a:blipFill>
+                <a:blip r:embed="rId5"/>
+                <a:stretch>
+                  <a:fillRect/>
+                </a:stretch>
+              </a:blipFill>
+            </p:spPr>
+            <p:txBody>
+              <a:bodyPr/>
+              <a:lstStyle/>
+              <a:p>
+                <a:r>
+                  <a:rPr lang="zh-CN" altLang="en-US">
+                    <a:noFill/>
+                  </a:rPr>
+                  <a:t> </a:t>
+                </a:r>
+              </a:p>
+            </p:txBody>
+          </p:sp>
+        </mc:Fallback>
+      </mc:AlternateContent>
+    </p:spTree>
+    <p:extLst>
+      <p:ext uri="{BB962C8B-B14F-4D97-AF65-F5344CB8AC3E}">
+        <p14:creationId xmlns:p14="http://schemas.microsoft.com/office/powerpoint/2010/main" val="3071524593"/>
+      </p:ext>
+    </p:extLst>
+  </p:cSld>
+  <p:clrMapOvr>
+    <a:masterClrMapping/>
+  </p:clrMapOvr>
+</p:sld>
+</file>
+
 <file path=ppt/theme/theme1.xml><?xml version="1.0" encoding="utf-8"?>
 <a:theme xmlns:a="http://schemas.openxmlformats.org/drawingml/2006/main" name="Origin">
   <a:themeElements>

--- a/Exams/CSC175  Sp26 Final Exam Sample Questions ANS.pptx
+++ b/Exams/CSC175  Sp26 Final Exam Sample Questions ANS.pptx
@@ -415,7 +415,7 @@
             <a:fld id="{2AEAFE1F-9E52-45C8-9793-E819F0044A1C}" type="datetimeFigureOut">
               <a:rPr lang="en-US" smtClean="0"/>
               <a:pPr/>
-              <a:t>4/14/2026</a:t>
+              <a:t>5/6/2026</a:t>
             </a:fld>
             <a:endParaRPr lang="en-US"/>
           </a:p>
@@ -2518,8 +2518,8 @@
         </p:nvSpPr>
         <p:spPr/>
       </p:sp>
-      <mc:AlternateContent xmlns:mc="http://schemas.openxmlformats.org/markup-compatibility/2006">
-        <mc:Choice xmlns:a14="http://schemas.microsoft.com/office/drawing/2010/main" Requires="a14">
+      <mc:AlternateContent xmlns:mc="http://schemas.openxmlformats.org/markup-compatibility/2006" xmlns:a14="http://schemas.microsoft.com/office/drawing/2010/main">
+        <mc:Choice Requires="a14">
           <p:sp>
             <p:nvSpPr>
               <p:cNvPr id="3" name="Notes Placeholder 2"/>
@@ -2573,7 +2573,7 @@
                         <a:solidFill>
                           <a:schemeClr val="tx1"/>
                         </a:solidFill>
-                        <a:latin typeface="+mn-lt"/>
+                        <a:latin typeface="Cambria Math" panose="02040503050406030204" pitchFamily="18" charset="0"/>
                         <a:ea typeface="+mn-ea"/>
                         <a:cs typeface="+mn-cs"/>
                       </a:rPr>
@@ -2584,7 +2584,7 @@
                         <a:solidFill>
                           <a:schemeClr val="tx1"/>
                         </a:solidFill>
-                        <a:latin typeface="+mn-lt"/>
+                        <a:latin typeface="Cambria Math" panose="02040503050406030204" pitchFamily="18" charset="0"/>
                         <a:ea typeface="+mn-ea"/>
                         <a:cs typeface="+mn-cs"/>
                       </a:rPr>
@@ -2598,7 +2598,7 @@
                             <a:solidFill>
                               <a:schemeClr val="tx1"/>
                             </a:solidFill>
-                            <a:latin typeface="+mn-lt"/>
+                            <a:latin typeface="Cambria Math" panose="02040503050406030204" pitchFamily="18" charset="0"/>
                             <a:ea typeface="+mn-ea"/>
                             <a:cs typeface="+mn-cs"/>
                           </a:rPr>
@@ -2753,7 +2753,7 @@
             </p:txBody>
           </p:sp>
         </mc:Choice>
-        <mc:Fallback>
+        <mc:Fallback xmlns="">
           <p:sp>
             <p:nvSpPr>
               <p:cNvPr id="3" name="Notes Placeholder 2"/>
@@ -3610,7 +3610,7 @@
             <a:fld id="{2E26774B-6488-4259-9342-6CBDB2BFD4E4}" type="datetime1">
               <a:rPr lang="en-US" smtClean="0"/>
               <a:pPr eaLnBrk="1" latinLnBrk="0" hangingPunct="1"/>
-              <a:t>4/14/2026</a:t>
+              <a:t>5/6/2026</a:t>
             </a:fld>
             <a:endParaRPr lang="en-US" sz="1600" dirty="0"/>
           </a:p>
@@ -3971,7 +3971,7 @@
             <a:fld id="{9B2E7711-0BE3-4AFC-959B-CB5C31A7AE48}" type="datetime1">
               <a:rPr lang="en-US" smtClean="0"/>
               <a:pPr eaLnBrk="1" latinLnBrk="0" hangingPunct="1"/>
-              <a:t>4/14/2026</a:t>
+              <a:t>5/6/2026</a:t>
             </a:fld>
             <a:endParaRPr lang="en-US"/>
           </a:p>
@@ -4148,7 +4148,7 @@
             <a:fld id="{825AAB62-A572-4E37-B772-B4A75ADE0B18}" type="datetime1">
               <a:rPr lang="en-US" smtClean="0"/>
               <a:pPr eaLnBrk="1" latinLnBrk="0" hangingPunct="1"/>
-              <a:t>4/14/2026</a:t>
+              <a:t>5/6/2026</a:t>
             </a:fld>
             <a:endParaRPr lang="en-US"/>
           </a:p>
@@ -9476,7 +9476,7 @@
             <a:fld id="{B0F52420-10F8-488E-969A-A9BE388BE9C4}" type="datetime1">
               <a:rPr lang="en-US" smtClean="0"/>
               <a:pPr eaLnBrk="1" latinLnBrk="0" hangingPunct="1"/>
-              <a:t>4/14/2026</a:t>
+              <a:t>5/6/2026</a:t>
             </a:fld>
             <a:endParaRPr lang="en-US" dirty="0"/>
           </a:p>
@@ -13890,7 +13890,7 @@
             <a:fld id="{96E96F24-58CF-47DA-907C-A9CD6353E425}" type="datetime1">
               <a:rPr lang="en-US" smtClean="0"/>
               <a:pPr eaLnBrk="1" latinLnBrk="0" hangingPunct="1"/>
-              <a:t>4/14/2026</a:t>
+              <a:t>5/6/2026</a:t>
             </a:fld>
             <a:endParaRPr lang="en-US" dirty="0"/>
           </a:p>
@@ -15824,7 +15824,7 @@
             <a:fld id="{53AE4463-726A-4A35-9F46-98893432A3F9}" type="datetime1">
               <a:rPr lang="en-US" smtClean="0"/>
               <a:pPr eaLnBrk="1" latinLnBrk="0" hangingPunct="1"/>
-              <a:t>4/14/2026</a:t>
+              <a:t>5/6/2026</a:t>
             </a:fld>
             <a:endParaRPr lang="en-US"/>
           </a:p>
@@ -16178,7 +16178,7 @@
             <a:fld id="{FDF404D0-E306-4E90-90E3-E44D26246FFC}" type="datetime1">
               <a:rPr lang="en-US" smtClean="0"/>
               <a:pPr eaLnBrk="1" latinLnBrk="0" hangingPunct="1"/>
-              <a:t>4/14/2026</a:t>
+              <a:t>5/6/2026</a:t>
             </a:fld>
             <a:endParaRPr lang="en-US"/>
           </a:p>
@@ -16412,7 +16412,7 @@
             <a:fld id="{1485DA14-76F0-4D93-83FB-7878C79A1986}" type="datetime1">
               <a:rPr lang="en-US" smtClean="0"/>
               <a:pPr eaLnBrk="1" latinLnBrk="0" hangingPunct="1"/>
-              <a:t>4/14/2026</a:t>
+              <a:t>5/6/2026</a:t>
             </a:fld>
             <a:endParaRPr lang="en-US"/>
           </a:p>
@@ -16555,7 +16555,7 @@
             <a:fld id="{A15E552D-49E1-496B-B79C-E100986B8B5F}" type="datetime1">
               <a:rPr lang="en-US" smtClean="0"/>
               <a:pPr eaLnBrk="1" latinLnBrk="0" hangingPunct="1"/>
-              <a:t>4/14/2026</a:t>
+              <a:t>5/6/2026</a:t>
             </a:fld>
             <a:endParaRPr lang="en-US"/>
           </a:p>
@@ -16834,7 +16834,7 @@
             <a:fld id="{CEC72505-1551-4A98-97CD-F520B07184AD}" type="datetime1">
               <a:rPr lang="en-US" smtClean="0"/>
               <a:pPr eaLnBrk="1" latinLnBrk="0" hangingPunct="1"/>
-              <a:t>4/14/2026</a:t>
+              <a:t>5/6/2026</a:t>
             </a:fld>
             <a:endParaRPr lang="en-US"/>
           </a:p>
@@ -17243,7 +17243,7 @@
             <a:fld id="{7218F47B-BA16-4F20-B5BA-73F598D94B51}" type="datetime1">
               <a:rPr lang="en-US" smtClean="0"/>
               <a:pPr eaLnBrk="1" latinLnBrk="0" hangingPunct="1"/>
-              <a:t>4/14/2026</a:t>
+              <a:t>5/6/2026</a:t>
             </a:fld>
             <a:endParaRPr lang="en-US"/>
           </a:p>
@@ -17582,7 +17582,7 @@
             <a:fld id="{4F3CB514-9CA6-4E48-9463-A430D31CFDE3}" type="datetime1">
               <a:rPr lang="en-US" smtClean="0"/>
               <a:pPr eaLnBrk="1" latinLnBrk="0" hangingPunct="1"/>
-              <a:t>4/14/2026</a:t>
+              <a:t>5/6/2026</a:t>
             </a:fld>
             <a:endParaRPr lang="en-US" sz="1400" dirty="0">
               <a:solidFill>
@@ -22164,8 +22164,8 @@
           </a:p>
         </p:txBody>
       </p:sp>
-      <mc:AlternateContent xmlns:mc="http://schemas.openxmlformats.org/markup-compatibility/2006">
-        <mc:Choice xmlns:a14="http://schemas.microsoft.com/office/drawing/2010/main" Requires="a14">
+      <mc:AlternateContent xmlns:mc="http://schemas.openxmlformats.org/markup-compatibility/2006" xmlns:a14="http://schemas.microsoft.com/office/drawing/2010/main">
+        <mc:Choice Requires="a14">
           <p:sp>
             <p:nvSpPr>
               <p:cNvPr id="4" name="Content Placeholder 3">
@@ -22257,39 +22257,57 @@
                 <a14:m>
                   <m:oMath xmlns:m="http://schemas.openxmlformats.org/officeDocument/2006/math">
                     <m:r>
-                      <a:rPr lang="zh-CN" altLang="en-US" i="1"/>
+                      <a:rPr lang="zh-CN" altLang="en-US" i="1">
+                        <a:latin typeface="Cambria Math" panose="02040503050406030204" pitchFamily="18" charset="0"/>
+                      </a:rPr>
                       <m:t>𝐷</m:t>
                     </m:r>
                     <m:r>
-                      <a:rPr lang="en-US" altLang="zh-CN"/>
+                      <a:rPr lang="en-US" altLang="zh-CN">
+                        <a:latin typeface="Cambria Math" panose="02040503050406030204" pitchFamily="18" charset="0"/>
+                      </a:rPr>
                       <m:t>→</m:t>
                     </m:r>
                     <m:r>
-                      <a:rPr lang="zh-CN" altLang="en-US" i="1"/>
+                      <a:rPr lang="zh-CN" altLang="en-US" i="1">
+                        <a:latin typeface="Cambria Math" panose="02040503050406030204" pitchFamily="18" charset="0"/>
+                      </a:rPr>
                       <m:t>𝐴</m:t>
                     </m:r>
                     <m:r>
-                      <a:rPr lang="en-US" altLang="zh-CN"/>
+                      <a:rPr lang="en-US" altLang="zh-CN">
+                        <a:latin typeface="Cambria Math" panose="02040503050406030204" pitchFamily="18" charset="0"/>
+                      </a:rPr>
                       <m:t>→</m:t>
                     </m:r>
                     <m:r>
-                      <a:rPr lang="zh-CN" altLang="en-US" i="1"/>
+                      <a:rPr lang="zh-CN" altLang="en-US" i="1">
+                        <a:latin typeface="Cambria Math" panose="02040503050406030204" pitchFamily="18" charset="0"/>
+                      </a:rPr>
                       <m:t>𝐵</m:t>
                     </m:r>
                     <m:r>
-                      <a:rPr lang="en-US" altLang="zh-CN"/>
+                      <a:rPr lang="en-US" altLang="zh-CN">
+                        <a:latin typeface="Cambria Math" panose="02040503050406030204" pitchFamily="18" charset="0"/>
+                      </a:rPr>
                       <m:t>→</m:t>
                     </m:r>
                     <m:r>
-                      <a:rPr lang="zh-CN" altLang="en-US" i="1"/>
+                      <a:rPr lang="zh-CN" altLang="en-US" i="1">
+                        <a:latin typeface="Cambria Math" panose="02040503050406030204" pitchFamily="18" charset="0"/>
+                      </a:rPr>
                       <m:t>𝐶</m:t>
                     </m:r>
                     <m:r>
-                      <a:rPr lang="en-US" altLang="zh-CN"/>
+                      <a:rPr lang="en-US" altLang="zh-CN">
+                        <a:latin typeface="Cambria Math" panose="02040503050406030204" pitchFamily="18" charset="0"/>
+                      </a:rPr>
                       <m:t>→</m:t>
                     </m:r>
                     <m:r>
-                      <a:rPr lang="zh-CN" altLang="en-US" i="1"/>
+                      <a:rPr lang="zh-CN" altLang="en-US" i="1">
+                        <a:latin typeface="Cambria Math" panose="02040503050406030204" pitchFamily="18" charset="0"/>
+                      </a:rPr>
                       <m:t>𝐹</m:t>
                     </m:r>
                   </m:oMath>
@@ -22316,23 +22334,33 @@
                 <a14:m>
                   <m:oMath xmlns:m="http://schemas.openxmlformats.org/officeDocument/2006/math">
                     <m:r>
-                      <a:rPr lang="zh-CN" altLang="en-US" i="1"/>
+                      <a:rPr lang="zh-CN" altLang="en-US" i="1">
+                        <a:latin typeface="Cambria Math" panose="02040503050406030204" pitchFamily="18" charset="0"/>
+                      </a:rPr>
                       <m:t>𝐵</m:t>
                     </m:r>
                     <m:r>
-                      <a:rPr lang="en-US" altLang="zh-CN"/>
+                      <a:rPr lang="en-US" altLang="zh-CN">
+                        <a:latin typeface="Cambria Math" panose="02040503050406030204" pitchFamily="18" charset="0"/>
+                      </a:rPr>
                       <m:t>→</m:t>
                     </m:r>
                     <m:r>
-                      <a:rPr lang="zh-CN" altLang="en-US" i="1"/>
+                      <a:rPr lang="zh-CN" altLang="en-US" i="1">
+                        <a:latin typeface="Cambria Math" panose="02040503050406030204" pitchFamily="18" charset="0"/>
+                      </a:rPr>
                       <m:t>𝐸</m:t>
                     </m:r>
                     <m:r>
-                      <a:rPr lang="en-US" altLang="zh-CN"/>
+                      <a:rPr lang="en-US" altLang="zh-CN">
+                        <a:latin typeface="Cambria Math" panose="02040503050406030204" pitchFamily="18" charset="0"/>
+                      </a:rPr>
                       <m:t>→</m:t>
                     </m:r>
                     <m:r>
-                      <a:rPr lang="zh-CN" altLang="en-US" i="1"/>
+                      <a:rPr lang="zh-CN" altLang="en-US" i="1">
+                        <a:latin typeface="Cambria Math" panose="02040503050406030204" pitchFamily="18" charset="0"/>
+                      </a:rPr>
                       <m:t>𝐹</m:t>
                     </m:r>
                   </m:oMath>
@@ -22351,31 +22379,45 @@
                 <a14:m>
                   <m:oMath xmlns:m="http://schemas.openxmlformats.org/officeDocument/2006/math">
                     <m:r>
-                      <a:rPr lang="zh-CN" altLang="en-US" i="1"/>
+                      <a:rPr lang="zh-CN" altLang="en-US" i="1">
+                        <a:latin typeface="Cambria Math" panose="02040503050406030204" pitchFamily="18" charset="0"/>
+                      </a:rPr>
                       <m:t>𝐸</m:t>
                     </m:r>
                     <m:r>
-                      <a:rPr lang="en-US" altLang="zh-CN"/>
+                      <a:rPr lang="en-US" altLang="zh-CN">
+                        <a:latin typeface="Cambria Math" panose="02040503050406030204" pitchFamily="18" charset="0"/>
+                      </a:rPr>
                       <m:t>→</m:t>
                     </m:r>
                     <m:r>
-                      <a:rPr lang="zh-CN" altLang="en-US" i="1"/>
+                      <a:rPr lang="zh-CN" altLang="en-US" i="1">
+                        <a:latin typeface="Cambria Math" panose="02040503050406030204" pitchFamily="18" charset="0"/>
+                      </a:rPr>
                       <m:t>𝐻</m:t>
                     </m:r>
                     <m:r>
-                      <a:rPr lang="en-US" altLang="zh-CN"/>
+                      <a:rPr lang="en-US" altLang="zh-CN">
+                        <a:latin typeface="Cambria Math" panose="02040503050406030204" pitchFamily="18" charset="0"/>
+                      </a:rPr>
                       <m:t>→</m:t>
                     </m:r>
                     <m:r>
-                      <a:rPr lang="zh-CN" altLang="en-US" i="1"/>
+                      <a:rPr lang="zh-CN" altLang="en-US" i="1">
+                        <a:latin typeface="Cambria Math" panose="02040503050406030204" pitchFamily="18" charset="0"/>
+                      </a:rPr>
                       <m:t>𝐼</m:t>
                     </m:r>
                     <m:r>
-                      <a:rPr lang="en-US" altLang="zh-CN"/>
+                      <a:rPr lang="en-US" altLang="zh-CN">
+                        <a:latin typeface="Cambria Math" panose="02040503050406030204" pitchFamily="18" charset="0"/>
+                      </a:rPr>
                       <m:t>→</m:t>
                     </m:r>
                     <m:r>
-                      <a:rPr lang="zh-CN" altLang="en-US" i="1"/>
+                      <a:rPr lang="zh-CN" altLang="en-US" i="1">
+                        <a:latin typeface="Cambria Math" panose="02040503050406030204" pitchFamily="18" charset="0"/>
+                      </a:rPr>
                       <m:t>𝐹</m:t>
                     </m:r>
                   </m:oMath>
@@ -22406,7 +22448,7 @@
             </p:txBody>
           </p:sp>
         </mc:Choice>
-        <mc:Fallback>
+        <mc:Fallback xmlns="">
           <p:sp>
             <p:nvSpPr>
               <p:cNvPr id="4" name="Content Placeholder 3">
@@ -22528,10 +22570,23 @@
         </p:nvSpPr>
         <p:spPr/>
         <p:txBody>
-          <a:bodyPr/>
+          <a:bodyPr>
+            <a:normAutofit fontScale="90000"/>
+          </a:bodyPr>
           <a:lstStyle/>
           <a:p>
-            <a:endParaRPr lang="zh-CN" altLang="en-US"/>
+            <a:r>
+              <a:rPr lang="nl-NL" altLang="zh-CN" dirty="0"/>
+              <a:t>	</a:t>
+            </a:r>
+            <a:br>
+              <a:rPr lang="nl-NL" altLang="zh-CN" dirty="0"/>
+            </a:br>
+            <a:r>
+              <a:rPr lang="nl-NL" altLang="zh-CN" dirty="0"/>
+              <a:t>Lecture 8 - Inter-Domain Routing</a:t>
+            </a:r>
+            <a:endParaRPr lang="zh-CN" altLang="en-US" dirty="0"/>
           </a:p>
         </p:txBody>
       </p:sp>
@@ -22581,15 +22636,159 @@
             <p:ph sz="quarter" idx="1"/>
           </p:nvPr>
         </p:nvSpPr>
-        <p:spPr/>
+        <p:spPr>
+          <a:xfrm>
+            <a:off x="609600" y="1219200"/>
+            <a:ext cx="7696200" cy="4937760"/>
+          </a:xfrm>
+        </p:spPr>
         <p:txBody>
-          <a:bodyPr/>
+          <a:bodyPr>
+            <a:normAutofit fontScale="70000" lnSpcReduction="20000"/>
+          </a:bodyPr>
           <a:lstStyle/>
           <a:p>
-            <a:endParaRPr lang="zh-CN" altLang="en-US"/>
+            <a:r>
+              <a:rPr lang="en-US" altLang="zh-CN" dirty="0"/>
+              <a:t>In Fig.1 a directed edge (→) denotes a provider - customer relationship while an undirected edge (-) denotes a peering relationship. Assume that the import and export policies follow Gao-Rexford rules. Note that all subparts are independent of one another (changes made in one subpart do not affect the subsequent ones).</a:t>
+            </a:r>
+          </a:p>
+          <a:p>
+            <a:r>
+              <a:rPr lang="en-US" altLang="zh-CN" dirty="0"/>
+              <a:t>Q1 Determine the path (if any) between the following </a:t>
+            </a:r>
+            <a:r>
+              <a:rPr lang="en-US" altLang="zh-CN" dirty="0" err="1"/>
+              <a:t>ASes</a:t>
+            </a:r>
+            <a:r>
+              <a:rPr lang="en-US" altLang="zh-CN" dirty="0"/>
+              <a:t>. If there is no path possible, write "None".</a:t>
+            </a:r>
+          </a:p>
+          <a:p>
+            <a:r>
+              <a:rPr lang="nl-NL" altLang="zh-CN" dirty="0"/>
+              <a:t>a) J to M?</a:t>
+            </a:r>
+          </a:p>
+          <a:p>
+            <a:pPr lvl="1"/>
+            <a:r>
+              <a:rPr lang="nl-NL" altLang="zh-CN" dirty="0"/>
+              <a:t>Solution: J → F → C → A → B →E →I→M</a:t>
+            </a:r>
+          </a:p>
+          <a:p>
+            <a:r>
+              <a:rPr lang="nl-NL" altLang="zh-CN" dirty="0"/>
+              <a:t>b) L to F?</a:t>
+            </a:r>
+          </a:p>
+          <a:p>
+            <a:pPr lvl="1"/>
+            <a:r>
+              <a:rPr lang="nl-NL" altLang="zh-CN" dirty="0"/>
+              <a:t>Solution: L →H → D → C → F</a:t>
+            </a:r>
+          </a:p>
+          <a:p>
+            <a:r>
+              <a:rPr lang="nl-NL" altLang="zh-CN" dirty="0"/>
+              <a:t>c) E to F?</a:t>
+            </a:r>
+          </a:p>
+          <a:p>
+            <a:pPr lvl="1"/>
+            <a:r>
+              <a:rPr lang="nl-NL" altLang="zh-CN" dirty="0"/>
+              <a:t>Solution: E → B → A → C → F</a:t>
+            </a:r>
+          </a:p>
+          <a:p>
+            <a:r>
+              <a:rPr lang="en-US" altLang="zh-CN" dirty="0"/>
+              <a:t>Q2 Hosts under which </a:t>
+            </a:r>
+            <a:r>
+              <a:rPr lang="en-US" altLang="zh-CN" dirty="0" err="1"/>
+              <a:t>ASes</a:t>
+            </a:r>
+            <a:r>
+              <a:rPr lang="en-US" altLang="zh-CN" dirty="0"/>
+              <a:t> would be advertised to AS C by AS D?</a:t>
+            </a:r>
+          </a:p>
+          <a:p>
+            <a:pPr lvl="1"/>
+            <a:r>
+              <a:rPr lang="en-US" altLang="zh-CN" b="1" dirty="0"/>
+              <a:t>Solution: </a:t>
+            </a:r>
+            <a:r>
+              <a:rPr lang="en-US" altLang="zh-CN" dirty="0"/>
+              <a:t>D, G, H, K, L</a:t>
+            </a:r>
+          </a:p>
+          <a:p>
+            <a:r>
+              <a:rPr lang="en-US" altLang="zh-CN" dirty="0"/>
+              <a:t>Q3 (3 points) The link between CD fails, what is the path from J to L?</a:t>
+            </a:r>
+          </a:p>
+          <a:p>
+            <a:pPr lvl="1"/>
+            <a:r>
+              <a:rPr lang="en-US" altLang="zh-CN" b="1" dirty="0"/>
+              <a:t>Solution: </a:t>
+            </a:r>
+            <a:r>
+              <a:rPr lang="en-US" altLang="zh-CN" dirty="0"/>
+              <a:t>J → F → C → A → D → H → L </a:t>
+            </a:r>
+            <a:br>
+              <a:rPr lang="en-US" altLang="zh-CN" dirty="0"/>
+            </a:br>
+            <a:endParaRPr lang="zh-CN" altLang="en-US" dirty="0"/>
           </a:p>
         </p:txBody>
       </p:sp>
+      <p:pic>
+        <p:nvPicPr>
+          <p:cNvPr id="6" name="Picture 5">
+            <a:extLst>
+              <a:ext uri="{FF2B5EF4-FFF2-40B4-BE49-F238E27FC236}">
+                <a16:creationId xmlns:a16="http://schemas.microsoft.com/office/drawing/2014/main" id="{9A1D28D2-DCAB-256D-2DEE-04644752C181}"/>
+              </a:ext>
+            </a:extLst>
+          </p:cNvPr>
+          <p:cNvPicPr>
+            <a:picLocks noChangeAspect="1"/>
+          </p:cNvPicPr>
+          <p:nvPr/>
+        </p:nvPicPr>
+        <p:blipFill>
+          <a:blip r:embed="rId2">
+            <a:extLst>
+              <a:ext uri="{28A0092B-C50C-407E-A947-70E740481C1C}">
+                <a14:useLocalDpi xmlns:a14="http://schemas.microsoft.com/office/drawing/2010/main" val="0"/>
+              </a:ext>
+            </a:extLst>
+          </a:blip>
+          <a:srcRect/>
+          <a:stretch/>
+        </p:blipFill>
+        <p:spPr>
+          <a:xfrm>
+            <a:off x="8305800" y="1948654"/>
+            <a:ext cx="3407300" cy="3289808"/>
+          </a:xfrm>
+          <a:prstGeom prst="rect">
+            <a:avLst/>
+          </a:prstGeom>
+        </p:spPr>
+      </p:pic>
     </p:spTree>
     <p:extLst>
       <p:ext uri="{BB962C8B-B14F-4D97-AF65-F5344CB8AC3E}">
@@ -28314,8 +28513,8 @@
           </a:prstGeom>
         </p:spPr>
       </p:pic>
-      <mc:AlternateContent xmlns:mc="http://schemas.openxmlformats.org/markup-compatibility/2006">
-        <mc:Choice xmlns:a14="http://schemas.microsoft.com/office/drawing/2010/main" Requires="a14">
+      <mc:AlternateContent xmlns:mc="http://schemas.openxmlformats.org/markup-compatibility/2006" xmlns:a14="http://schemas.microsoft.com/office/drawing/2010/main">
+        <mc:Choice Requires="a14">
           <p:sp>
             <p:nvSpPr>
               <p:cNvPr id="10" name="TextBox 9">
@@ -28686,7 +28885,7 @@
             </p:txBody>
           </p:sp>
         </mc:Choice>
-        <mc:Fallback>
+        <mc:Fallback xmlns="">
           <p:sp>
             <p:nvSpPr>
               <p:cNvPr id="10" name="TextBox 9">

--- a/Exams/CSC175  Sp26 Final Exam Sample Questions ANS.pptx
+++ b/Exams/CSC175  Sp26 Final Exam Sample Questions ANS.pptx
@@ -6,7 +6,7 @@
     <p:sldMasterId id="2147483672" r:id="rId2"/>
   </p:sldMasterIdLst>
   <p:notesMasterIdLst>
-    <p:notesMasterId r:id="rId31"/>
+    <p:notesMasterId r:id="rId32"/>
   </p:notesMasterIdLst>
   <p:sldIdLst>
     <p:sldId id="256" r:id="rId3"/>
@@ -28,15 +28,16 @@
     <p:sldId id="296" r:id="rId19"/>
     <p:sldId id="298" r:id="rId20"/>
     <p:sldId id="1067" r:id="rId21"/>
-    <p:sldId id="1068" r:id="rId22"/>
-    <p:sldId id="1069" r:id="rId23"/>
-    <p:sldId id="1065" r:id="rId24"/>
-    <p:sldId id="1066" r:id="rId25"/>
-    <p:sldId id="975" r:id="rId26"/>
-    <p:sldId id="1061" r:id="rId27"/>
-    <p:sldId id="1062" r:id="rId28"/>
-    <p:sldId id="1063" r:id="rId29"/>
-    <p:sldId id="1064" r:id="rId30"/>
+    <p:sldId id="1070" r:id="rId22"/>
+    <p:sldId id="1068" r:id="rId23"/>
+    <p:sldId id="1069" r:id="rId24"/>
+    <p:sldId id="1065" r:id="rId25"/>
+    <p:sldId id="1066" r:id="rId26"/>
+    <p:sldId id="975" r:id="rId27"/>
+    <p:sldId id="1061" r:id="rId28"/>
+    <p:sldId id="1062" r:id="rId29"/>
+    <p:sldId id="1063" r:id="rId30"/>
+    <p:sldId id="1064" r:id="rId31"/>
   </p:sldIdLst>
   <p:sldSz cx="12192000" cy="6858000"/>
   <p:notesSz cx="6950075" cy="9236075"/>
@@ -2247,6 +2248,843 @@
         </p:txBody>
       </p:sp>
     </p:spTree>
+  </p:cSld>
+  <p:clrMapOvr>
+    <a:masterClrMapping/>
+  </p:clrMapOvr>
+</p:notes>
+</file>
+
+<file path=ppt/notesSlides/notesSlide10.xml><?xml version="1.0" encoding="utf-8"?>
+<p:notes xmlns:a="http://schemas.openxmlformats.org/drawingml/2006/main" xmlns:r="http://schemas.openxmlformats.org/officeDocument/2006/relationships" xmlns:p="http://schemas.openxmlformats.org/presentationml/2006/main">
+  <p:cSld>
+    <p:spTree>
+      <p:nvGrpSpPr>
+        <p:cNvPr id="1" name="">
+          <a:extLst>
+            <a:ext uri="{FF2B5EF4-FFF2-40B4-BE49-F238E27FC236}">
+              <a16:creationId xmlns:a16="http://schemas.microsoft.com/office/drawing/2014/main" id="{9B177BA2-1CB1-A1F5-1AAA-A6AED21DCE4F}"/>
+            </a:ext>
+          </a:extLst>
+        </p:cNvPr>
+        <p:cNvGrpSpPr/>
+        <p:nvPr/>
+      </p:nvGrpSpPr>
+      <p:grpSpPr>
+        <a:xfrm>
+          <a:off x="0" y="0"/>
+          <a:ext cx="0" cy="0"/>
+          <a:chOff x="0" y="0"/>
+          <a:chExt cx="0" cy="0"/>
+        </a:xfrm>
+      </p:grpSpPr>
+      <p:sp>
+        <p:nvSpPr>
+          <p:cNvPr id="2" name="Slide Image Placeholder 1">
+            <a:extLst>
+              <a:ext uri="{FF2B5EF4-FFF2-40B4-BE49-F238E27FC236}">
+                <a16:creationId xmlns:a16="http://schemas.microsoft.com/office/drawing/2014/main" id="{A08DC006-F5F7-9C9C-8695-F410E3EAFE42}"/>
+              </a:ext>
+            </a:extLst>
+          </p:cNvPr>
+          <p:cNvSpPr>
+            <a:spLocks noGrp="1" noRot="1" noChangeAspect="1"/>
+          </p:cNvSpPr>
+          <p:nvPr>
+            <p:ph type="sldImg"/>
+          </p:nvPr>
+        </p:nvSpPr>
+        <p:spPr/>
+      </p:sp>
+      <p:sp>
+        <p:nvSpPr>
+          <p:cNvPr id="3" name="Notes Placeholder 2">
+            <a:extLst>
+              <a:ext uri="{FF2B5EF4-FFF2-40B4-BE49-F238E27FC236}">
+                <a16:creationId xmlns:a16="http://schemas.microsoft.com/office/drawing/2014/main" id="{7A3B2EE2-08BA-BEFA-2819-0C5A42BE1BF9}"/>
+              </a:ext>
+            </a:extLst>
+          </p:cNvPr>
+          <p:cNvSpPr>
+            <a:spLocks noGrp="1"/>
+          </p:cNvSpPr>
+          <p:nvPr>
+            <p:ph type="body" idx="1"/>
+          </p:nvPr>
+        </p:nvSpPr>
+        <p:spPr/>
+        <p:txBody>
+          <a:bodyPr/>
+          <a:lstStyle/>
+          <a:p>
+            <a:endParaRPr lang="en-US" altLang="zh-CN" dirty="0"/>
+          </a:p>
+          <a:p>
+            <a:r>
+              <a:rPr lang="nl-NL" altLang="zh-CN" dirty="0"/>
+              <a:t>https://wiki.eecs.yorku.ca/course_archive/2012-13/W/3214/_media/solutions_to_chapter_3_problems.pdf</a:t>
+            </a:r>
+          </a:p>
+          <a:p>
+            <a:pPr marL="0" marR="0" lvl="0" indent="0" algn="l" defTabSz="914400" rtl="0" eaLnBrk="1" fontAlgn="auto" latinLnBrk="0" hangingPunct="1">
+              <a:lnSpc>
+                <a:spcPct val="100000"/>
+              </a:lnSpc>
+              <a:spcBef>
+                <a:spcPts val="0"/>
+              </a:spcBef>
+              <a:spcAft>
+                <a:spcPts val="0"/>
+              </a:spcAft>
+              <a:buClrTx/>
+              <a:buSzTx/>
+              <a:buFontTx/>
+              <a:buNone/>
+              <a:tabLst/>
+              <a:defRPr/>
+            </a:pPr>
+            <a:r>
+              <a:rPr lang="en-US" altLang="zh-CN" sz="1200" dirty="0"/>
+              <a:t>If there was a timeout, the congestion window size would have dropped to 1.</a:t>
+            </a:r>
+          </a:p>
+          <a:p>
+            <a:endParaRPr lang="zh-CN" altLang="en-US" dirty="0"/>
+          </a:p>
+        </p:txBody>
+      </p:sp>
+      <p:sp>
+        <p:nvSpPr>
+          <p:cNvPr id="4" name="Slide Number Placeholder 3">
+            <a:extLst>
+              <a:ext uri="{FF2B5EF4-FFF2-40B4-BE49-F238E27FC236}">
+                <a16:creationId xmlns:a16="http://schemas.microsoft.com/office/drawing/2014/main" id="{D50CB27C-EF13-6CA2-0BD0-F43B97AB8F1D}"/>
+              </a:ext>
+            </a:extLst>
+          </p:cNvPr>
+          <p:cNvSpPr>
+            <a:spLocks noGrp="1"/>
+          </p:cNvSpPr>
+          <p:nvPr>
+            <p:ph type="sldNum" sz="quarter" idx="5"/>
+          </p:nvPr>
+        </p:nvSpPr>
+        <p:spPr/>
+        <p:txBody>
+          <a:bodyPr/>
+          <a:lstStyle/>
+          <a:p>
+            <a:fld id="{2D71AD5F-E36F-46B9-A99B-7B025244359D}" type="slidenum">
+              <a:rPr lang="en-US" smtClean="0"/>
+              <a:pPr/>
+              <a:t>24</a:t>
+            </a:fld>
+            <a:endParaRPr lang="en-US"/>
+          </a:p>
+        </p:txBody>
+      </p:sp>
+    </p:spTree>
+    <p:extLst>
+      <p:ext uri="{BB962C8B-B14F-4D97-AF65-F5344CB8AC3E}">
+        <p14:creationId xmlns:p14="http://schemas.microsoft.com/office/powerpoint/2010/main" val="1393953113"/>
+      </p:ext>
+    </p:extLst>
+  </p:cSld>
+  <p:clrMapOvr>
+    <a:masterClrMapping/>
+  </p:clrMapOvr>
+</p:notes>
+</file>
+
+<file path=ppt/notesSlides/notesSlide11.xml><?xml version="1.0" encoding="utf-8"?>
+<p:notes xmlns:a="http://schemas.openxmlformats.org/drawingml/2006/main" xmlns:r="http://schemas.openxmlformats.org/officeDocument/2006/relationships" xmlns:p="http://schemas.openxmlformats.org/presentationml/2006/main">
+  <p:cSld>
+    <p:spTree>
+      <p:nvGrpSpPr>
+        <p:cNvPr id="1" name=""/>
+        <p:cNvGrpSpPr/>
+        <p:nvPr/>
+      </p:nvGrpSpPr>
+      <p:grpSpPr>
+        <a:xfrm>
+          <a:off x="0" y="0"/>
+          <a:ext cx="0" cy="0"/>
+          <a:chOff x="0" y="0"/>
+          <a:chExt cx="0" cy="0"/>
+        </a:xfrm>
+      </p:grpSpPr>
+      <p:sp>
+        <p:nvSpPr>
+          <p:cNvPr id="2" name="Slide Image Placeholder 1"/>
+          <p:cNvSpPr>
+            <a:spLocks noGrp="1" noRot="1" noChangeAspect="1"/>
+          </p:cNvSpPr>
+          <p:nvPr>
+            <p:ph type="sldImg"/>
+          </p:nvPr>
+        </p:nvSpPr>
+        <p:spPr/>
+      </p:sp>
+      <p:sp>
+        <p:nvSpPr>
+          <p:cNvPr id="3" name="Notes Placeholder 2"/>
+          <p:cNvSpPr>
+            <a:spLocks noGrp="1"/>
+          </p:cNvSpPr>
+          <p:nvPr>
+            <p:ph type="body" idx="1"/>
+          </p:nvPr>
+        </p:nvSpPr>
+        <p:spPr/>
+        <p:txBody>
+          <a:bodyPr/>
+          <a:lstStyle/>
+          <a:p>
+            <a:r>
+              <a:rPr lang="en-GB" dirty="0"/>
+              <a:t>Let's break down the problem step by step based on the information provided in the table and the questions asked.</a:t>
+            </a:r>
+          </a:p>
+          <a:p>
+            <a:endParaRPr lang="en-GB" dirty="0"/>
+          </a:p>
+          <a:p>
+            <a:r>
+              <a:rPr lang="en-GB" dirty="0"/>
+              <a:t>### Given:</a:t>
+            </a:r>
+          </a:p>
+          <a:p>
+            <a:r>
+              <a:rPr lang="en-GB" dirty="0"/>
+              <a:t>- The 3-bit block cipher is represented as a mapping between plaintext and ciphertext:</a:t>
+            </a:r>
+          </a:p>
+          <a:p>
+            <a:endParaRPr lang="en-GB" dirty="0"/>
+          </a:p>
+          <a:p>
+            <a:r>
+              <a:rPr lang="en-GB" dirty="0"/>
+              <a:t>$$</a:t>
+            </a:r>
+          </a:p>
+          <a:p>
+            <a:r>
+              <a:rPr lang="en-GB" dirty="0"/>
+              <a:t>\begin{array}{|</a:t>
+            </a:r>
+            <a:r>
+              <a:rPr lang="en-GB" dirty="0" err="1"/>
+              <a:t>c|c</a:t>
+            </a:r>
+            <a:r>
+              <a:rPr lang="en-GB" dirty="0"/>
+              <a:t>|}</a:t>
+            </a:r>
+          </a:p>
+          <a:p>
+            <a:r>
+              <a:rPr lang="en-GB" dirty="0"/>
+              <a:t>\</a:t>
+            </a:r>
+            <a:r>
+              <a:rPr lang="en-GB" dirty="0" err="1"/>
+              <a:t>hline</a:t>
+            </a:r>
+            <a:endParaRPr lang="en-GB" dirty="0"/>
+          </a:p>
+          <a:p>
+            <a:r>
+              <a:rPr lang="en-GB" dirty="0"/>
+              <a:t>\text{Plaintext} &amp; \text{Ciphertext} \\</a:t>
+            </a:r>
+          </a:p>
+          <a:p>
+            <a:r>
+              <a:rPr lang="en-GB" dirty="0"/>
+              <a:t>\</a:t>
+            </a:r>
+            <a:r>
+              <a:rPr lang="en-GB" dirty="0" err="1"/>
+              <a:t>hline</a:t>
+            </a:r>
+            <a:endParaRPr lang="en-GB" dirty="0"/>
+          </a:p>
+          <a:p>
+            <a:r>
+              <a:rPr lang="en-GB" dirty="0"/>
+              <a:t>000 &amp; 110 \\</a:t>
+            </a:r>
+          </a:p>
+          <a:p>
+            <a:r>
+              <a:rPr lang="en-GB" dirty="0"/>
+              <a:t>001 &amp; 111 \\</a:t>
+            </a:r>
+          </a:p>
+          <a:p>
+            <a:r>
+              <a:rPr lang="en-GB" dirty="0"/>
+              <a:t>010 &amp; 101 \\</a:t>
+            </a:r>
+          </a:p>
+          <a:p>
+            <a:r>
+              <a:rPr lang="en-GB" dirty="0"/>
+              <a:t>011 &amp; 100 \\</a:t>
+            </a:r>
+          </a:p>
+          <a:p>
+            <a:r>
+              <a:rPr lang="en-GB" dirty="0"/>
+              <a:t>100 &amp; 011 \\</a:t>
+            </a:r>
+          </a:p>
+          <a:p>
+            <a:r>
+              <a:rPr lang="en-GB" dirty="0"/>
+              <a:t>101 &amp; 010 \\</a:t>
+            </a:r>
+          </a:p>
+          <a:p>
+            <a:r>
+              <a:rPr lang="en-GB" dirty="0"/>
+              <a:t>110 &amp; 000 \\</a:t>
+            </a:r>
+          </a:p>
+          <a:p>
+            <a:r>
+              <a:rPr lang="en-GB" dirty="0"/>
+              <a:t>111 &amp; 001 \\</a:t>
+            </a:r>
+          </a:p>
+          <a:p>
+            <a:r>
+              <a:rPr lang="en-GB" dirty="0"/>
+              <a:t>\</a:t>
+            </a:r>
+            <a:r>
+              <a:rPr lang="en-GB" dirty="0" err="1"/>
+              <a:t>hline</a:t>
+            </a:r>
+            <a:endParaRPr lang="en-GB" dirty="0"/>
+          </a:p>
+          <a:p>
+            <a:r>
+              <a:rPr lang="en-GB" dirty="0"/>
+              <a:t>\end{array}</a:t>
+            </a:r>
+          </a:p>
+          <a:p>
+            <a:r>
+              <a:rPr lang="en-GB" dirty="0"/>
+              <a:t>$$</a:t>
+            </a:r>
+          </a:p>
+          <a:p>
+            <a:endParaRPr lang="en-GB" dirty="0"/>
+          </a:p>
+          <a:p>
+            <a:r>
+              <a:rPr lang="en-GB" dirty="0"/>
+              <a:t>### (a) **Without CBC: What is the resulting ciphertext for the plaintext `100101100`?**</a:t>
+            </a:r>
+          </a:p>
+          <a:p>
+            <a:endParaRPr lang="en-GB" dirty="0"/>
+          </a:p>
+          <a:p>
+            <a:r>
+              <a:rPr lang="en-GB" dirty="0"/>
+              <a:t>The plaintext `100101100` is a sequence of 9 bits, which we can divide into three 3-bit blocks:</a:t>
+            </a:r>
+          </a:p>
+          <a:p>
+            <a:endParaRPr lang="en-GB" dirty="0"/>
+          </a:p>
+          <a:p>
+            <a:r>
+              <a:rPr lang="en-GB" dirty="0"/>
+              <a:t>- First block: `100`</a:t>
+            </a:r>
+          </a:p>
+          <a:p>
+            <a:r>
+              <a:rPr lang="en-GB" dirty="0"/>
+              <a:t>- Second block: `101`</a:t>
+            </a:r>
+          </a:p>
+          <a:p>
+            <a:r>
+              <a:rPr lang="en-GB" dirty="0"/>
+              <a:t>- Third block: `100`</a:t>
+            </a:r>
+          </a:p>
+          <a:p>
+            <a:endParaRPr lang="en-GB" dirty="0"/>
+          </a:p>
+          <a:p>
+            <a:r>
+              <a:rPr lang="en-GB" dirty="0"/>
+              <a:t>Using the table provided, we can map each block of plaintext to its corresponding ciphertext:</a:t>
+            </a:r>
+          </a:p>
+          <a:p>
+            <a:endParaRPr lang="en-GB" dirty="0"/>
+          </a:p>
+          <a:p>
+            <a:r>
+              <a:rPr lang="en-GB" dirty="0"/>
+              <a:t>- `100` maps to `011`</a:t>
+            </a:r>
+          </a:p>
+          <a:p>
+            <a:r>
+              <a:rPr lang="en-GB" dirty="0"/>
+              <a:t>- `101` maps to `010`</a:t>
+            </a:r>
+          </a:p>
+          <a:p>
+            <a:r>
+              <a:rPr lang="en-GB" dirty="0"/>
+              <a:t>- `100` maps to `011`</a:t>
+            </a:r>
+          </a:p>
+          <a:p>
+            <a:endParaRPr lang="en-GB" dirty="0"/>
+          </a:p>
+          <a:p>
+            <a:r>
+              <a:rPr lang="en-GB" dirty="0"/>
+              <a:t>Thus, the resulting ciphertext is the concatenation of these three ciphertext blocks:</a:t>
+            </a:r>
+          </a:p>
+          <a:p>
+            <a:endParaRPr lang="en-GB" dirty="0"/>
+          </a:p>
+          <a:p>
+            <a:r>
+              <a:rPr lang="en-GB" dirty="0"/>
+              <a:t>$$</a:t>
+            </a:r>
+          </a:p>
+          <a:p>
+            <a:r>
+              <a:rPr lang="en-GB" dirty="0"/>
+              <a:t>\text{Ciphertext} = 011010011</a:t>
+            </a:r>
+          </a:p>
+          <a:p>
+            <a:r>
+              <a:rPr lang="en-GB" dirty="0"/>
+              <a:t>$$</a:t>
+            </a:r>
+          </a:p>
+          <a:p>
+            <a:endParaRPr lang="en-GB" dirty="0"/>
+          </a:p>
+          <a:p>
+            <a:r>
+              <a:rPr lang="en-GB" dirty="0"/>
+              <a:t>### (b) **What can Trudy surmise if she sniffs the ciphertext and knows a 3-bit block cipher without CBC is being used?**</a:t>
+            </a:r>
+          </a:p>
+          <a:p>
+            <a:endParaRPr lang="en-GB" dirty="0"/>
+          </a:p>
+          <a:p>
+            <a:r>
+              <a:rPr lang="en-GB" dirty="0"/>
+              <a:t>If Trudy intercepts the ciphertext but does not know the specific cipher being used, she can infer certain things based on her knowledge of how block ciphers work:</a:t>
+            </a:r>
+          </a:p>
+          <a:p>
+            <a:endParaRPr lang="en-GB" dirty="0"/>
+          </a:p>
+          <a:p>
+            <a:r>
+              <a:rPr lang="en-GB" dirty="0"/>
+              <a:t>1. **Block Size**: Since she knows it's a 3-bit block cipher, she can deduce that each group of 3 bits in the intercepted ciphertext corresponds to one block of plaintext.</a:t>
+            </a:r>
+          </a:p>
+          <a:p>
+            <a:r>
+              <a:rPr lang="en-GB" dirty="0"/>
+              <a:t>   </a:t>
+            </a:r>
+          </a:p>
+          <a:p>
+            <a:r>
+              <a:rPr lang="en-GB" dirty="0"/>
+              <a:t>2. **Frequency Analysis**: If Trudy intercepts enough ciphertexts, she could perform frequency analysis on the blocks. For example, if certain ciphertext blocks appear more frequently, she might guess that they correspond to more common plaintext blocks (like spaces or common letters in text).</a:t>
+            </a:r>
+          </a:p>
+          <a:p>
+            <a:endParaRPr lang="en-GB" dirty="0"/>
+          </a:p>
+          <a:p>
+            <a:r>
+              <a:rPr lang="en-GB" dirty="0"/>
+              <a:t>3. **No CBC Weakness**: Without CBC (Cipher Block Chaining), each identical plaintext block will always map to the same ciphertext block. This makes it easier for Trudy to recognize patterns in repeated blocks of data.</a:t>
+            </a:r>
+          </a:p>
+          <a:p>
+            <a:endParaRPr lang="en-GB" dirty="0"/>
+          </a:p>
+          <a:p>
+            <a:r>
+              <a:rPr lang="en-GB" dirty="0"/>
+              <a:t>However, without knowing the specific mapping between plaintext and ciphertext, Trudy cannot directly decrypt the message unless she somehow discovers or guesses this mapping.</a:t>
+            </a:r>
+          </a:p>
+          <a:p>
+            <a:endParaRPr lang="en-GB" dirty="0"/>
+          </a:p>
+          <a:p>
+            <a:r>
+              <a:rPr lang="en-GB" dirty="0"/>
+              <a:t>### (c) **With CBC and IV = 111: What is the resulting ciphertext for the plaintext `100101100`?**</a:t>
+            </a:r>
+          </a:p>
+          <a:p>
+            <a:endParaRPr lang="en-GB" dirty="0"/>
+          </a:p>
+          <a:p>
+            <a:r>
+              <a:rPr lang="en-GB" dirty="0"/>
+              <a:t>When CBC (Cipher Block Chaining) is used, each plaintext block is XORed with the previous ciphertext block (or with the Initialization Vector (IV) for the first block) before being encrypted.</a:t>
+            </a:r>
+          </a:p>
+          <a:p>
+            <a:endParaRPr lang="en-GB" dirty="0"/>
+          </a:p>
+          <a:p>
+            <a:r>
+              <a:rPr lang="en-GB" dirty="0"/>
+              <a:t>1. **IV = 111**: The first step is to XOR the first plaintext block with the IV.</a:t>
+            </a:r>
+          </a:p>
+          <a:p>
+            <a:endParaRPr lang="en-GB" dirty="0"/>
+          </a:p>
+          <a:p>
+            <a:r>
+              <a:rPr lang="en-GB" dirty="0"/>
+              <a:t>   - First plaintext block: `100`</a:t>
+            </a:r>
+          </a:p>
+          <a:p>
+            <a:r>
+              <a:rPr lang="en-GB" dirty="0"/>
+              <a:t>   - IV: `111`</a:t>
+            </a:r>
+          </a:p>
+          <a:p>
+            <a:r>
+              <a:rPr lang="en-GB" dirty="0"/>
+              <a:t>   - XOR result: $$ 100 \</a:t>
+            </a:r>
+            <a:r>
+              <a:rPr lang="en-GB" dirty="0" err="1"/>
+              <a:t>oplus</a:t>
+            </a:r>
+            <a:r>
+              <a:rPr lang="en-GB" dirty="0"/>
+              <a:t> 111 = 011 $$</a:t>
+            </a:r>
+          </a:p>
+          <a:p>
+            <a:endParaRPr lang="en-GB" dirty="0"/>
+          </a:p>
+          <a:p>
+            <a:r>
+              <a:rPr lang="en-GB" dirty="0"/>
+              <a:t>   Now we encrypt this result (`011`) using our cipher table:</a:t>
+            </a:r>
+          </a:p>
+          <a:p>
+            <a:r>
+              <a:rPr lang="en-GB" dirty="0"/>
+              <a:t>   </a:t>
+            </a:r>
+          </a:p>
+          <a:p>
+            <a:r>
+              <a:rPr lang="en-GB" dirty="0"/>
+              <a:t>   - `011` maps to `100`.</a:t>
+            </a:r>
+          </a:p>
+          <a:p>
+            <a:endParaRPr lang="en-GB" dirty="0"/>
+          </a:p>
+          <a:p>
+            <a:r>
+              <a:rPr lang="en-GB" dirty="0"/>
+              <a:t>   So, the first ciphertext block is `100`.</a:t>
+            </a:r>
+          </a:p>
+          <a:p>
+            <a:endParaRPr lang="en-GB" dirty="0"/>
+          </a:p>
+          <a:p>
+            <a:r>
+              <a:rPr lang="en-GB" dirty="0"/>
+              <a:t>2. **Second Block**: Now we XOR the second plaintext block with the first ciphertext block:</a:t>
+            </a:r>
+          </a:p>
+          <a:p>
+            <a:endParaRPr lang="en-GB" dirty="0"/>
+          </a:p>
+          <a:p>
+            <a:r>
+              <a:rPr lang="en-GB" dirty="0"/>
+              <a:t>   - Second plaintext block: `101`</a:t>
+            </a:r>
+          </a:p>
+          <a:p>
+            <a:r>
+              <a:rPr lang="en-GB" dirty="0"/>
+              <a:t>   - First ciphertext block: `100`</a:t>
+            </a:r>
+          </a:p>
+          <a:p>
+            <a:r>
+              <a:rPr lang="en-GB" dirty="0"/>
+              <a:t>   - XOR result: $$ 101 \</a:t>
+            </a:r>
+            <a:r>
+              <a:rPr lang="en-GB" dirty="0" err="1"/>
+              <a:t>oplus</a:t>
+            </a:r>
+            <a:r>
+              <a:rPr lang="en-GB" dirty="0"/>
+              <a:t> 100 = 001 $$</a:t>
+            </a:r>
+          </a:p>
+          <a:p>
+            <a:endParaRPr lang="en-GB" dirty="0"/>
+          </a:p>
+          <a:p>
+            <a:r>
+              <a:rPr lang="en-GB" dirty="0"/>
+              <a:t>   Now we encrypt this result (`001`) using our cipher table:</a:t>
+            </a:r>
+          </a:p>
+          <a:p>
+            <a:r>
+              <a:rPr lang="en-GB" dirty="0"/>
+              <a:t>   </a:t>
+            </a:r>
+          </a:p>
+          <a:p>
+            <a:r>
+              <a:rPr lang="en-GB" dirty="0"/>
+              <a:t>   - `001` maps to `111`.</a:t>
+            </a:r>
+          </a:p>
+          <a:p>
+            <a:endParaRPr lang="en-GB" dirty="0"/>
+          </a:p>
+          <a:p>
+            <a:r>
+              <a:rPr lang="en-GB" dirty="0"/>
+              <a:t>   So, the second ciphertext block is `111`.</a:t>
+            </a:r>
+          </a:p>
+          <a:p>
+            <a:endParaRPr lang="en-GB" dirty="0"/>
+          </a:p>
+          <a:p>
+            <a:r>
+              <a:rPr lang="en-GB" dirty="0"/>
+              <a:t>3. **Third Block**: Finally, we XOR the third plaintext block with the second ciphertext block:</a:t>
+            </a:r>
+          </a:p>
+          <a:p>
+            <a:endParaRPr lang="en-GB" dirty="0"/>
+          </a:p>
+          <a:p>
+            <a:r>
+              <a:rPr lang="en-GB" dirty="0"/>
+              <a:t>   - Third plaintext block: `100`</a:t>
+            </a:r>
+          </a:p>
+          <a:p>
+            <a:r>
+              <a:rPr lang="en-GB" dirty="0"/>
+              <a:t>   - Second ciphertext block: `111`</a:t>
+            </a:r>
+          </a:p>
+          <a:p>
+            <a:r>
+              <a:rPr lang="en-GB" dirty="0"/>
+              <a:t>   - XOR result: $$ 100 \</a:t>
+            </a:r>
+            <a:r>
+              <a:rPr lang="en-GB" dirty="0" err="1"/>
+              <a:t>oplus</a:t>
+            </a:r>
+            <a:r>
+              <a:rPr lang="en-GB" dirty="0"/>
+              <a:t> 111 = 011 $$</a:t>
+            </a:r>
+          </a:p>
+          <a:p>
+            <a:endParaRPr lang="en-GB" dirty="0"/>
+          </a:p>
+          <a:p>
+            <a:r>
+              <a:rPr lang="en-GB" dirty="0"/>
+              <a:t>   Now we encrypt this result (`011`) using our cipher table:</a:t>
+            </a:r>
+          </a:p>
+          <a:p>
+            <a:r>
+              <a:rPr lang="en-GB" dirty="0"/>
+              <a:t>   </a:t>
+            </a:r>
+          </a:p>
+          <a:p>
+            <a:r>
+              <a:rPr lang="en-GB" dirty="0"/>
+              <a:t>   - `011` maps to `100`.</a:t>
+            </a:r>
+          </a:p>
+          <a:p>
+            <a:endParaRPr lang="en-GB" dirty="0"/>
+          </a:p>
+          <a:p>
+            <a:r>
+              <a:rPr lang="en-GB" dirty="0"/>
+              <a:t>   So, the third ciphertext block is `100`.</a:t>
+            </a:r>
+          </a:p>
+          <a:p>
+            <a:endParaRPr lang="en-GB" dirty="0"/>
+          </a:p>
+          <a:p>
+            <a:r>
+              <a:rPr lang="en-GB" dirty="0"/>
+              <a:t>Thus, when using CBC with IV = 111, the resulting ciphertext is:</a:t>
+            </a:r>
+          </a:p>
+          <a:p>
+            <a:endParaRPr lang="en-GB" dirty="0"/>
+          </a:p>
+          <a:p>
+            <a:r>
+              <a:rPr lang="en-GB" dirty="0"/>
+              <a:t>$$</a:t>
+            </a:r>
+          </a:p>
+          <a:p>
+            <a:r>
+              <a:rPr lang="en-GB" dirty="0"/>
+              <a:t>\text{Ciphertext} = 100111100</a:t>
+            </a:r>
+          </a:p>
+          <a:p>
+            <a:r>
+              <a:rPr lang="en-GB" dirty="0"/>
+              <a:t>$$</a:t>
+            </a:r>
+          </a:p>
+          <a:p>
+            <a:endParaRPr lang="en-GB" dirty="0"/>
+          </a:p>
+          <a:p>
+            <a:r>
+              <a:rPr lang="en-GB" dirty="0"/>
+              <a:t>### Final Answer Summary:</a:t>
+            </a:r>
+          </a:p>
+          <a:p>
+            <a:r>
+              <a:rPr lang="en-GB" dirty="0"/>
+              <a:t>- **(a)** Without CBC, resulting ciphertext for plaintext `100101100`:  </a:t>
+            </a:r>
+          </a:p>
+          <a:p>
+            <a:r>
+              <a:rPr lang="en-GB" dirty="0"/>
+              <a:t>  $$ \text{Ciphertext} = 011010011 $$</a:t>
+            </a:r>
+          </a:p>
+          <a:p>
+            <a:r>
+              <a:rPr lang="en-GB" dirty="0"/>
+              <a:t>  </a:t>
+            </a:r>
+          </a:p>
+          <a:p>
+            <a:r>
+              <a:rPr lang="en-GB" dirty="0"/>
+              <a:t>- **(b)** Trudy can infer that it's a 3-bit cipher and may use frequency analysis but cannot directly decrypt without knowing the specific mapping.</a:t>
+            </a:r>
+          </a:p>
+          <a:p>
+            <a:endParaRPr lang="en-GB" dirty="0"/>
+          </a:p>
+          <a:p>
+            <a:r>
+              <a:rPr lang="en-GB" dirty="0"/>
+              <a:t>- **(c)** With CBC and IV = 111, resulting ciphertext for plaintext `100101100`:  </a:t>
+            </a:r>
+          </a:p>
+          <a:p>
+            <a:r>
+              <a:rPr lang="en-GB" dirty="0"/>
+              <a:t>  $$ \text{Ciphertext} = 100111100 $$</a:t>
+            </a:r>
+          </a:p>
+          <a:p>
+            <a:endParaRPr lang="en-GB" dirty="0"/>
+          </a:p>
+          <a:p>
+            <a:r>
+              <a:rPr lang="en-GB" dirty="0"/>
+              <a:t>Citations:</a:t>
+            </a:r>
+          </a:p>
+          <a:p>
+            <a:r>
+              <a:rPr lang="en-GB" dirty="0"/>
+              <a:t>[1] https://ppl-ai-file-upload.s3.amazonaws.com/web/direct-files/657250/670d6e33-bf04-4786-8da4-9b8cff7bf69b/Temp.pdf</a:t>
+            </a:r>
+            <a:endParaRPr lang="en-SE" dirty="0"/>
+          </a:p>
+        </p:txBody>
+      </p:sp>
+      <p:sp>
+        <p:nvSpPr>
+          <p:cNvPr id="4" name="Slide Number Placeholder 3"/>
+          <p:cNvSpPr>
+            <a:spLocks noGrp="1"/>
+          </p:cNvSpPr>
+          <p:nvPr>
+            <p:ph type="sldNum" sz="quarter" idx="5"/>
+          </p:nvPr>
+        </p:nvSpPr>
+        <p:spPr/>
+        <p:txBody>
+          <a:bodyPr/>
+          <a:lstStyle/>
+          <a:p>
+            <a:fld id="{3D91EEAC-CFEF-9647-876F-EABC6B8338D7}" type="slidenum">
+              <a:rPr lang="en-US" smtClean="0"/>
+              <a:t>26</a:t>
+            </a:fld>
+            <a:endParaRPr lang="en-US" dirty="0"/>
+          </a:p>
+        </p:txBody>
+      </p:sp>
+    </p:spTree>
+    <p:extLst>
+      <p:ext uri="{BB962C8B-B14F-4D97-AF65-F5344CB8AC3E}">
+        <p14:creationId xmlns:p14="http://schemas.microsoft.com/office/powerpoint/2010/main" val="2198409018"/>
+      </p:ext>
+    </p:extLst>
   </p:cSld>
   <p:clrMapOvr>
     <a:masterClrMapping/>
@@ -3520,12 +4358,41 @@
           <a:bodyPr/>
           <a:lstStyle/>
           <a:p>
-            <a:endParaRPr lang="en-US" altLang="zh-CN" dirty="0"/>
-          </a:p>
-          <a:p>
-            <a:r>
-              <a:rPr lang="nl-NL" altLang="zh-CN" dirty="0"/>
-              <a:t>https://wiki.eecs.yorku.ca/course_archive/2012-13/W/3214/_media/solutions_to_chapter_3_problems.pdf</a:t>
+            <a:r>
+              <a:rPr lang="en-US" altLang="zh-CN" sz="1200" kern="1200" dirty="0">
+                <a:solidFill>
+                  <a:schemeClr val="tx1"/>
+                </a:solidFill>
+                <a:effectLst/>
+                <a:latin typeface="+mn-lt"/>
+                <a:ea typeface="+mn-ea"/>
+                <a:cs typeface="+mn-cs"/>
+              </a:rPr>
+              <a:t>Determine the path (if any) between the following </a:t>
+            </a:r>
+            <a:r>
+              <a:rPr lang="en-US" altLang="zh-CN" sz="1200" kern="1200" dirty="0" err="1">
+                <a:solidFill>
+                  <a:schemeClr val="tx1"/>
+                </a:solidFill>
+                <a:effectLst/>
+                <a:latin typeface="+mn-lt"/>
+                <a:ea typeface="+mn-ea"/>
+                <a:cs typeface="+mn-cs"/>
+              </a:rPr>
+              <a:t>ASes</a:t>
+            </a:r>
+            <a:r>
+              <a:rPr lang="en-US" altLang="zh-CN" sz="1200" kern="1200" dirty="0">
+                <a:solidFill>
+                  <a:schemeClr val="tx1"/>
+                </a:solidFill>
+                <a:effectLst/>
+                <a:latin typeface="+mn-lt"/>
+                <a:ea typeface="+mn-ea"/>
+                <a:cs typeface="+mn-cs"/>
+              </a:rPr>
+              <a:t>. If there is no path possible, write "None".</a:t>
             </a:r>
             <a:endParaRPr lang="zh-CN" altLang="en-US" dirty="0"/>
           </a:p>
@@ -3549,7 +4416,7 @@
             <a:fld id="{2D71AD5F-E36F-46B9-A99B-7B025244359D}" type="slidenum">
               <a:rPr lang="en-US" smtClean="0"/>
               <a:pPr/>
-              <a:t>22</a:t>
+              <a:t>19</a:t>
             </a:fld>
             <a:endParaRPr lang="en-US"/>
           </a:p>
@@ -3558,7 +4425,7 @@
     </p:spTree>
     <p:extLst>
       <p:ext uri="{BB962C8B-B14F-4D97-AF65-F5344CB8AC3E}">
-        <p14:creationId xmlns:p14="http://schemas.microsoft.com/office/powerpoint/2010/main" val="196097120"/>
+        <p14:creationId xmlns:p14="http://schemas.microsoft.com/office/powerpoint/2010/main" val="302481662"/>
       </p:ext>
     </p:extLst>
   </p:cSld>
@@ -3576,7 +4443,7 @@
         <p:cNvPr id="1" name="">
           <a:extLst>
             <a:ext uri="{FF2B5EF4-FFF2-40B4-BE49-F238E27FC236}">
-              <a16:creationId xmlns:a16="http://schemas.microsoft.com/office/drawing/2014/main" id="{9B177BA2-1CB1-A1F5-1AAA-A6AED21DCE4F}"/>
+              <a16:creationId xmlns:a16="http://schemas.microsoft.com/office/drawing/2014/main" id="{B7AE92E5-7E0E-2FF9-69EE-00CE9623CEF8}"/>
             </a:ext>
           </a:extLst>
         </p:cNvPr>
@@ -3596,7 +4463,7 @@
           <p:cNvPr id="2" name="Slide Image Placeholder 1">
             <a:extLst>
               <a:ext uri="{FF2B5EF4-FFF2-40B4-BE49-F238E27FC236}">
-                <a16:creationId xmlns:a16="http://schemas.microsoft.com/office/drawing/2014/main" id="{A08DC006-F5F7-9C9C-8695-F410E3EAFE42}"/>
+                <a16:creationId xmlns:a16="http://schemas.microsoft.com/office/drawing/2014/main" id="{9996023F-7074-F221-B90A-F02C7C8D0FAA}"/>
               </a:ext>
             </a:extLst>
           </p:cNvPr>
@@ -3614,7 +4481,7 @@
           <p:cNvPr id="3" name="Notes Placeholder 2">
             <a:extLst>
               <a:ext uri="{FF2B5EF4-FFF2-40B4-BE49-F238E27FC236}">
-                <a16:creationId xmlns:a16="http://schemas.microsoft.com/office/drawing/2014/main" id="{7A3B2EE2-08BA-BEFA-2819-0C5A42BE1BF9}"/>
+                <a16:creationId xmlns:a16="http://schemas.microsoft.com/office/drawing/2014/main" id="{238B59B5-BD89-7CFF-2C0A-C4886158309F}"/>
               </a:ext>
             </a:extLst>
           </p:cNvPr>
@@ -3630,38 +4497,42 @@
           <a:bodyPr/>
           <a:lstStyle/>
           <a:p>
-            <a:endParaRPr lang="en-US" altLang="zh-CN" dirty="0"/>
-          </a:p>
-          <a:p>
-            <a:r>
-              <a:rPr lang="nl-NL" altLang="zh-CN" dirty="0"/>
-              <a:t>https://wiki.eecs.yorku.ca/course_archive/2012-13/W/3214/_media/solutions_to_chapter_3_problems.pdf</a:t>
-            </a:r>
-          </a:p>
-          <a:p>
-            <a:pPr marL="0" marR="0" lvl="0" indent="0" algn="l" defTabSz="914400" rtl="0" eaLnBrk="1" fontAlgn="auto" latinLnBrk="0" hangingPunct="1">
-              <a:lnSpc>
-                <a:spcPct val="100000"/>
-              </a:lnSpc>
-              <a:spcBef>
-                <a:spcPts val="0"/>
-              </a:spcBef>
-              <a:spcAft>
-                <a:spcPts val="0"/>
-              </a:spcAft>
-              <a:buClrTx/>
-              <a:buSzTx/>
-              <a:buFontTx/>
-              <a:buNone/>
-              <a:tabLst/>
-              <a:defRPr/>
-            </a:pPr>
-            <a:r>
-              <a:rPr lang="en-US" altLang="zh-CN" sz="1200" dirty="0"/>
-              <a:t>If there was a timeout, the congestion window size would have dropped to 1.</a:t>
-            </a:r>
-          </a:p>
-          <a:p>
+            <a:r>
+              <a:rPr lang="en-US" altLang="zh-CN" sz="1200" kern="1200" dirty="0">
+                <a:solidFill>
+                  <a:schemeClr val="tx1"/>
+                </a:solidFill>
+                <a:effectLst/>
+                <a:latin typeface="+mn-lt"/>
+                <a:ea typeface="+mn-ea"/>
+                <a:cs typeface="+mn-cs"/>
+              </a:rPr>
+              <a:t>Determine the path (if any) between the following </a:t>
+            </a:r>
+            <a:r>
+              <a:rPr lang="en-US" altLang="zh-CN" sz="1200" kern="1200" dirty="0" err="1">
+                <a:solidFill>
+                  <a:schemeClr val="tx1"/>
+                </a:solidFill>
+                <a:effectLst/>
+                <a:latin typeface="+mn-lt"/>
+                <a:ea typeface="+mn-ea"/>
+                <a:cs typeface="+mn-cs"/>
+              </a:rPr>
+              <a:t>ASes</a:t>
+            </a:r>
+            <a:r>
+              <a:rPr lang="en-US" altLang="zh-CN" sz="1200" kern="1200" dirty="0">
+                <a:solidFill>
+                  <a:schemeClr val="tx1"/>
+                </a:solidFill>
+                <a:effectLst/>
+                <a:latin typeface="+mn-lt"/>
+                <a:ea typeface="+mn-ea"/>
+                <a:cs typeface="+mn-cs"/>
+              </a:rPr>
+              <a:t>. If there is no path possible, write "None".</a:t>
+            </a:r>
             <a:endParaRPr lang="zh-CN" altLang="en-US" dirty="0"/>
           </a:p>
         </p:txBody>
@@ -3671,7 +4542,7 @@
           <p:cNvPr id="4" name="Slide Number Placeholder 3">
             <a:extLst>
               <a:ext uri="{FF2B5EF4-FFF2-40B4-BE49-F238E27FC236}">
-                <a16:creationId xmlns:a16="http://schemas.microsoft.com/office/drawing/2014/main" id="{D50CB27C-EF13-6CA2-0BD0-F43B97AB8F1D}"/>
+                <a16:creationId xmlns:a16="http://schemas.microsoft.com/office/drawing/2014/main" id="{43DA8EDE-FB1C-C46D-A4EF-A47F6AFF0998}"/>
               </a:ext>
             </a:extLst>
           </p:cNvPr>
@@ -3690,7 +4561,7 @@
             <a:fld id="{2D71AD5F-E36F-46B9-A99B-7B025244359D}" type="slidenum">
               <a:rPr lang="en-US" smtClean="0"/>
               <a:pPr/>
-              <a:t>23</a:t>
+              <a:t>20</a:t>
             </a:fld>
             <a:endParaRPr lang="en-US"/>
           </a:p>
@@ -3699,7 +4570,7 @@
     </p:spTree>
     <p:extLst>
       <p:ext uri="{BB962C8B-B14F-4D97-AF65-F5344CB8AC3E}">
-        <p14:creationId xmlns:p14="http://schemas.microsoft.com/office/powerpoint/2010/main" val="1393953113"/>
+        <p14:creationId xmlns:p14="http://schemas.microsoft.com/office/powerpoint/2010/main" val="2417577168"/>
       </p:ext>
     </p:extLst>
   </p:cSld>
@@ -3753,619 +4624,14 @@
           <a:bodyPr/>
           <a:lstStyle/>
           <a:p>
-            <a:r>
-              <a:rPr lang="en-GB" dirty="0"/>
-              <a:t>Let's break down the problem step by step based on the information provided in the table and the questions asked.</a:t>
-            </a:r>
-          </a:p>
-          <a:p>
-            <a:endParaRPr lang="en-GB" dirty="0"/>
-          </a:p>
-          <a:p>
-            <a:r>
-              <a:rPr lang="en-GB" dirty="0"/>
-              <a:t>### Given:</a:t>
-            </a:r>
-          </a:p>
-          <a:p>
-            <a:r>
-              <a:rPr lang="en-GB" dirty="0"/>
-              <a:t>- The 3-bit block cipher is represented as a mapping between plaintext and ciphertext:</a:t>
-            </a:r>
-          </a:p>
-          <a:p>
-            <a:endParaRPr lang="en-GB" dirty="0"/>
-          </a:p>
-          <a:p>
-            <a:r>
-              <a:rPr lang="en-GB" dirty="0"/>
-              <a:t>$$</a:t>
-            </a:r>
-          </a:p>
-          <a:p>
-            <a:r>
-              <a:rPr lang="en-GB" dirty="0"/>
-              <a:t>\begin{array}{|</a:t>
-            </a:r>
-            <a:r>
-              <a:rPr lang="en-GB" dirty="0" err="1"/>
-              <a:t>c|c</a:t>
-            </a:r>
-            <a:r>
-              <a:rPr lang="en-GB" dirty="0"/>
-              <a:t>|}</a:t>
-            </a:r>
-          </a:p>
-          <a:p>
-            <a:r>
-              <a:rPr lang="en-GB" dirty="0"/>
-              <a:t>\</a:t>
-            </a:r>
-            <a:r>
-              <a:rPr lang="en-GB" dirty="0" err="1"/>
-              <a:t>hline</a:t>
-            </a:r>
-            <a:endParaRPr lang="en-GB" dirty="0"/>
-          </a:p>
-          <a:p>
-            <a:r>
-              <a:rPr lang="en-GB" dirty="0"/>
-              <a:t>\text{Plaintext} &amp; \text{Ciphertext} \\</a:t>
-            </a:r>
-          </a:p>
-          <a:p>
-            <a:r>
-              <a:rPr lang="en-GB" dirty="0"/>
-              <a:t>\</a:t>
-            </a:r>
-            <a:r>
-              <a:rPr lang="en-GB" dirty="0" err="1"/>
-              <a:t>hline</a:t>
-            </a:r>
-            <a:endParaRPr lang="en-GB" dirty="0"/>
-          </a:p>
-          <a:p>
-            <a:r>
-              <a:rPr lang="en-GB" dirty="0"/>
-              <a:t>000 &amp; 110 \\</a:t>
-            </a:r>
-          </a:p>
-          <a:p>
-            <a:r>
-              <a:rPr lang="en-GB" dirty="0"/>
-              <a:t>001 &amp; 111 \\</a:t>
-            </a:r>
-          </a:p>
-          <a:p>
-            <a:r>
-              <a:rPr lang="en-GB" dirty="0"/>
-              <a:t>010 &amp; 101 \\</a:t>
-            </a:r>
-          </a:p>
-          <a:p>
-            <a:r>
-              <a:rPr lang="en-GB" dirty="0"/>
-              <a:t>011 &amp; 100 \\</a:t>
-            </a:r>
-          </a:p>
-          <a:p>
-            <a:r>
-              <a:rPr lang="en-GB" dirty="0"/>
-              <a:t>100 &amp; 011 \\</a:t>
-            </a:r>
-          </a:p>
-          <a:p>
-            <a:r>
-              <a:rPr lang="en-GB" dirty="0"/>
-              <a:t>101 &amp; 010 \\</a:t>
-            </a:r>
-          </a:p>
-          <a:p>
-            <a:r>
-              <a:rPr lang="en-GB" dirty="0"/>
-              <a:t>110 &amp; 000 \\</a:t>
-            </a:r>
-          </a:p>
-          <a:p>
-            <a:r>
-              <a:rPr lang="en-GB" dirty="0"/>
-              <a:t>111 &amp; 001 \\</a:t>
-            </a:r>
-          </a:p>
-          <a:p>
-            <a:r>
-              <a:rPr lang="en-GB" dirty="0"/>
-              <a:t>\</a:t>
-            </a:r>
-            <a:r>
-              <a:rPr lang="en-GB" dirty="0" err="1"/>
-              <a:t>hline</a:t>
-            </a:r>
-            <a:endParaRPr lang="en-GB" dirty="0"/>
-          </a:p>
-          <a:p>
-            <a:r>
-              <a:rPr lang="en-GB" dirty="0"/>
-              <a:t>\end{array}</a:t>
-            </a:r>
-          </a:p>
-          <a:p>
-            <a:r>
-              <a:rPr lang="en-GB" dirty="0"/>
-              <a:t>$$</a:t>
-            </a:r>
-          </a:p>
-          <a:p>
-            <a:endParaRPr lang="en-GB" dirty="0"/>
-          </a:p>
-          <a:p>
-            <a:r>
-              <a:rPr lang="en-GB" dirty="0"/>
-              <a:t>### (a) **Without CBC: What is the resulting ciphertext for the plaintext `100101100`?**</a:t>
-            </a:r>
-          </a:p>
-          <a:p>
-            <a:endParaRPr lang="en-GB" dirty="0"/>
-          </a:p>
-          <a:p>
-            <a:r>
-              <a:rPr lang="en-GB" dirty="0"/>
-              <a:t>The plaintext `100101100` is a sequence of 9 bits, which we can divide into three 3-bit blocks:</a:t>
-            </a:r>
-          </a:p>
-          <a:p>
-            <a:endParaRPr lang="en-GB" dirty="0"/>
-          </a:p>
-          <a:p>
-            <a:r>
-              <a:rPr lang="en-GB" dirty="0"/>
-              <a:t>- First block: `100`</a:t>
-            </a:r>
-          </a:p>
-          <a:p>
-            <a:r>
-              <a:rPr lang="en-GB" dirty="0"/>
-              <a:t>- Second block: `101`</a:t>
-            </a:r>
-          </a:p>
-          <a:p>
-            <a:r>
-              <a:rPr lang="en-GB" dirty="0"/>
-              <a:t>- Third block: `100`</a:t>
-            </a:r>
-          </a:p>
-          <a:p>
-            <a:endParaRPr lang="en-GB" dirty="0"/>
-          </a:p>
-          <a:p>
-            <a:r>
-              <a:rPr lang="en-GB" dirty="0"/>
-              <a:t>Using the table provided, we can map each block of plaintext to its corresponding ciphertext:</a:t>
-            </a:r>
-          </a:p>
-          <a:p>
-            <a:endParaRPr lang="en-GB" dirty="0"/>
-          </a:p>
-          <a:p>
-            <a:r>
-              <a:rPr lang="en-GB" dirty="0"/>
-              <a:t>- `100` maps to `011`</a:t>
-            </a:r>
-          </a:p>
-          <a:p>
-            <a:r>
-              <a:rPr lang="en-GB" dirty="0"/>
-              <a:t>- `101` maps to `010`</a:t>
-            </a:r>
-          </a:p>
-          <a:p>
-            <a:r>
-              <a:rPr lang="en-GB" dirty="0"/>
-              <a:t>- `100` maps to `011`</a:t>
-            </a:r>
-          </a:p>
-          <a:p>
-            <a:endParaRPr lang="en-GB" dirty="0"/>
-          </a:p>
-          <a:p>
-            <a:r>
-              <a:rPr lang="en-GB" dirty="0"/>
-              <a:t>Thus, the resulting ciphertext is the concatenation of these three ciphertext blocks:</a:t>
-            </a:r>
-          </a:p>
-          <a:p>
-            <a:endParaRPr lang="en-GB" dirty="0"/>
-          </a:p>
-          <a:p>
-            <a:r>
-              <a:rPr lang="en-GB" dirty="0"/>
-              <a:t>$$</a:t>
-            </a:r>
-          </a:p>
-          <a:p>
-            <a:r>
-              <a:rPr lang="en-GB" dirty="0"/>
-              <a:t>\text{Ciphertext} = 011010011</a:t>
-            </a:r>
-          </a:p>
-          <a:p>
-            <a:r>
-              <a:rPr lang="en-GB" dirty="0"/>
-              <a:t>$$</a:t>
-            </a:r>
-          </a:p>
-          <a:p>
-            <a:endParaRPr lang="en-GB" dirty="0"/>
-          </a:p>
-          <a:p>
-            <a:r>
-              <a:rPr lang="en-GB" dirty="0"/>
-              <a:t>### (b) **What can Trudy surmise if she sniffs the ciphertext and knows a 3-bit block cipher without CBC is being used?**</a:t>
-            </a:r>
-          </a:p>
-          <a:p>
-            <a:endParaRPr lang="en-GB" dirty="0"/>
-          </a:p>
-          <a:p>
-            <a:r>
-              <a:rPr lang="en-GB" dirty="0"/>
-              <a:t>If Trudy intercepts the ciphertext but does not know the specific cipher being used, she can infer certain things based on her knowledge of how block ciphers work:</a:t>
-            </a:r>
-          </a:p>
-          <a:p>
-            <a:endParaRPr lang="en-GB" dirty="0"/>
-          </a:p>
-          <a:p>
-            <a:r>
-              <a:rPr lang="en-GB" dirty="0"/>
-              <a:t>1. **Block Size**: Since she knows it's a 3-bit block cipher, she can deduce that each group of 3 bits in the intercepted ciphertext corresponds to one block of plaintext.</a:t>
-            </a:r>
-          </a:p>
-          <a:p>
-            <a:r>
-              <a:rPr lang="en-GB" dirty="0"/>
-              <a:t>   </a:t>
-            </a:r>
-          </a:p>
-          <a:p>
-            <a:r>
-              <a:rPr lang="en-GB" dirty="0"/>
-              <a:t>2. **Frequency Analysis**: If Trudy intercepts enough ciphertexts, she could perform frequency analysis on the blocks. For example, if certain ciphertext blocks appear more frequently, she might guess that they correspond to more common plaintext blocks (like spaces or common letters in text).</a:t>
-            </a:r>
-          </a:p>
-          <a:p>
-            <a:endParaRPr lang="en-GB" dirty="0"/>
-          </a:p>
-          <a:p>
-            <a:r>
-              <a:rPr lang="en-GB" dirty="0"/>
-              <a:t>3. **No CBC Weakness**: Without CBC (Cipher Block Chaining), each identical plaintext block will always map to the same ciphertext block. This makes it easier for Trudy to recognize patterns in repeated blocks of data.</a:t>
-            </a:r>
-          </a:p>
-          <a:p>
-            <a:endParaRPr lang="en-GB" dirty="0"/>
-          </a:p>
-          <a:p>
-            <a:r>
-              <a:rPr lang="en-GB" dirty="0"/>
-              <a:t>However, without knowing the specific mapping between plaintext and ciphertext, Trudy cannot directly decrypt the message unless she somehow discovers or guesses this mapping.</a:t>
-            </a:r>
-          </a:p>
-          <a:p>
-            <a:endParaRPr lang="en-GB" dirty="0"/>
-          </a:p>
-          <a:p>
-            <a:r>
-              <a:rPr lang="en-GB" dirty="0"/>
-              <a:t>### (c) **With CBC and IV = 111: What is the resulting ciphertext for the plaintext `100101100`?**</a:t>
-            </a:r>
-          </a:p>
-          <a:p>
-            <a:endParaRPr lang="en-GB" dirty="0"/>
-          </a:p>
-          <a:p>
-            <a:r>
-              <a:rPr lang="en-GB" dirty="0"/>
-              <a:t>When CBC (Cipher Block Chaining) is used, each plaintext block is XORed with the previous ciphertext block (or with the Initialization Vector (IV) for the first block) before being encrypted.</a:t>
-            </a:r>
-          </a:p>
-          <a:p>
-            <a:endParaRPr lang="en-GB" dirty="0"/>
-          </a:p>
-          <a:p>
-            <a:r>
-              <a:rPr lang="en-GB" dirty="0"/>
-              <a:t>1. **IV = 111**: The first step is to XOR the first plaintext block with the IV.</a:t>
-            </a:r>
-          </a:p>
-          <a:p>
-            <a:endParaRPr lang="en-GB" dirty="0"/>
-          </a:p>
-          <a:p>
-            <a:r>
-              <a:rPr lang="en-GB" dirty="0"/>
-              <a:t>   - First plaintext block: `100`</a:t>
-            </a:r>
-          </a:p>
-          <a:p>
-            <a:r>
-              <a:rPr lang="en-GB" dirty="0"/>
-              <a:t>   - IV: `111`</a:t>
-            </a:r>
-          </a:p>
-          <a:p>
-            <a:r>
-              <a:rPr lang="en-GB" dirty="0"/>
-              <a:t>   - XOR result: $$ 100 \</a:t>
-            </a:r>
-            <a:r>
-              <a:rPr lang="en-GB" dirty="0" err="1"/>
-              <a:t>oplus</a:t>
-            </a:r>
-            <a:r>
-              <a:rPr lang="en-GB" dirty="0"/>
-              <a:t> 111 = 011 $$</a:t>
-            </a:r>
-          </a:p>
-          <a:p>
-            <a:endParaRPr lang="en-GB" dirty="0"/>
-          </a:p>
-          <a:p>
-            <a:r>
-              <a:rPr lang="en-GB" dirty="0"/>
-              <a:t>   Now we encrypt this result (`011`) using our cipher table:</a:t>
-            </a:r>
-          </a:p>
-          <a:p>
-            <a:r>
-              <a:rPr lang="en-GB" dirty="0"/>
-              <a:t>   </a:t>
-            </a:r>
-          </a:p>
-          <a:p>
-            <a:r>
-              <a:rPr lang="en-GB" dirty="0"/>
-              <a:t>   - `011` maps to `100`.</a:t>
-            </a:r>
-          </a:p>
-          <a:p>
-            <a:endParaRPr lang="en-GB" dirty="0"/>
-          </a:p>
-          <a:p>
-            <a:r>
-              <a:rPr lang="en-GB" dirty="0"/>
-              <a:t>   So, the first ciphertext block is `100`.</a:t>
-            </a:r>
-          </a:p>
-          <a:p>
-            <a:endParaRPr lang="en-GB" dirty="0"/>
-          </a:p>
-          <a:p>
-            <a:r>
-              <a:rPr lang="en-GB" dirty="0"/>
-              <a:t>2. **Second Block**: Now we XOR the second plaintext block with the first ciphertext block:</a:t>
-            </a:r>
-          </a:p>
-          <a:p>
-            <a:endParaRPr lang="en-GB" dirty="0"/>
-          </a:p>
-          <a:p>
-            <a:r>
-              <a:rPr lang="en-GB" dirty="0"/>
-              <a:t>   - Second plaintext block: `101`</a:t>
-            </a:r>
-          </a:p>
-          <a:p>
-            <a:r>
-              <a:rPr lang="en-GB" dirty="0"/>
-              <a:t>   - First ciphertext block: `100`</a:t>
-            </a:r>
-          </a:p>
-          <a:p>
-            <a:r>
-              <a:rPr lang="en-GB" dirty="0"/>
-              <a:t>   - XOR result: $$ 101 \</a:t>
-            </a:r>
-            <a:r>
-              <a:rPr lang="en-GB" dirty="0" err="1"/>
-              <a:t>oplus</a:t>
-            </a:r>
-            <a:r>
-              <a:rPr lang="en-GB" dirty="0"/>
-              <a:t> 100 = 001 $$</a:t>
-            </a:r>
-          </a:p>
-          <a:p>
-            <a:endParaRPr lang="en-GB" dirty="0"/>
-          </a:p>
-          <a:p>
-            <a:r>
-              <a:rPr lang="en-GB" dirty="0"/>
-              <a:t>   Now we encrypt this result (`001`) using our cipher table:</a:t>
-            </a:r>
-          </a:p>
-          <a:p>
-            <a:r>
-              <a:rPr lang="en-GB" dirty="0"/>
-              <a:t>   </a:t>
-            </a:r>
-          </a:p>
-          <a:p>
-            <a:r>
-              <a:rPr lang="en-GB" dirty="0"/>
-              <a:t>   - `001` maps to `111`.</a:t>
-            </a:r>
-          </a:p>
-          <a:p>
-            <a:endParaRPr lang="en-GB" dirty="0"/>
-          </a:p>
-          <a:p>
-            <a:r>
-              <a:rPr lang="en-GB" dirty="0"/>
-              <a:t>   So, the second ciphertext block is `111`.</a:t>
-            </a:r>
-          </a:p>
-          <a:p>
-            <a:endParaRPr lang="en-GB" dirty="0"/>
-          </a:p>
-          <a:p>
-            <a:r>
-              <a:rPr lang="en-GB" dirty="0"/>
-              <a:t>3. **Third Block**: Finally, we XOR the third plaintext block with the second ciphertext block:</a:t>
-            </a:r>
-          </a:p>
-          <a:p>
-            <a:endParaRPr lang="en-GB" dirty="0"/>
-          </a:p>
-          <a:p>
-            <a:r>
-              <a:rPr lang="en-GB" dirty="0"/>
-              <a:t>   - Third plaintext block: `100`</a:t>
-            </a:r>
-          </a:p>
-          <a:p>
-            <a:r>
-              <a:rPr lang="en-GB" dirty="0"/>
-              <a:t>   - Second ciphertext block: `111`</a:t>
-            </a:r>
-          </a:p>
-          <a:p>
-            <a:r>
-              <a:rPr lang="en-GB" dirty="0"/>
-              <a:t>   - XOR result: $$ 100 \</a:t>
-            </a:r>
-            <a:r>
-              <a:rPr lang="en-GB" dirty="0" err="1"/>
-              <a:t>oplus</a:t>
-            </a:r>
-            <a:r>
-              <a:rPr lang="en-GB" dirty="0"/>
-              <a:t> 111 = 011 $$</a:t>
-            </a:r>
-          </a:p>
-          <a:p>
-            <a:endParaRPr lang="en-GB" dirty="0"/>
-          </a:p>
-          <a:p>
-            <a:r>
-              <a:rPr lang="en-GB" dirty="0"/>
-              <a:t>   Now we encrypt this result (`011`) using our cipher table:</a:t>
-            </a:r>
-          </a:p>
-          <a:p>
-            <a:r>
-              <a:rPr lang="en-GB" dirty="0"/>
-              <a:t>   </a:t>
-            </a:r>
-          </a:p>
-          <a:p>
-            <a:r>
-              <a:rPr lang="en-GB" dirty="0"/>
-              <a:t>   - `011` maps to `100`.</a:t>
-            </a:r>
-          </a:p>
-          <a:p>
-            <a:endParaRPr lang="en-GB" dirty="0"/>
-          </a:p>
-          <a:p>
-            <a:r>
-              <a:rPr lang="en-GB" dirty="0"/>
-              <a:t>   So, the third ciphertext block is `100`.</a:t>
-            </a:r>
-          </a:p>
-          <a:p>
-            <a:endParaRPr lang="en-GB" dirty="0"/>
-          </a:p>
-          <a:p>
-            <a:r>
-              <a:rPr lang="en-GB" dirty="0"/>
-              <a:t>Thus, when using CBC with IV = 111, the resulting ciphertext is:</a:t>
-            </a:r>
-          </a:p>
-          <a:p>
-            <a:endParaRPr lang="en-GB" dirty="0"/>
-          </a:p>
-          <a:p>
-            <a:r>
-              <a:rPr lang="en-GB" dirty="0"/>
-              <a:t>$$</a:t>
-            </a:r>
-          </a:p>
-          <a:p>
-            <a:r>
-              <a:rPr lang="en-GB" dirty="0"/>
-              <a:t>\text{Ciphertext} = 100111100</a:t>
-            </a:r>
-          </a:p>
-          <a:p>
-            <a:r>
-              <a:rPr lang="en-GB" dirty="0"/>
-              <a:t>$$</a:t>
-            </a:r>
-          </a:p>
-          <a:p>
-            <a:endParaRPr lang="en-GB" dirty="0"/>
-          </a:p>
-          <a:p>
-            <a:r>
-              <a:rPr lang="en-GB" dirty="0"/>
-              <a:t>### Final Answer Summary:</a:t>
-            </a:r>
-          </a:p>
-          <a:p>
-            <a:r>
-              <a:rPr lang="en-GB" dirty="0"/>
-              <a:t>- **(a)** Without CBC, resulting ciphertext for plaintext `100101100`:  </a:t>
-            </a:r>
-          </a:p>
-          <a:p>
-            <a:r>
-              <a:rPr lang="en-GB" dirty="0"/>
-              <a:t>  $$ \text{Ciphertext} = 011010011 $$</a:t>
-            </a:r>
-          </a:p>
-          <a:p>
-            <a:r>
-              <a:rPr lang="en-GB" dirty="0"/>
-              <a:t>  </a:t>
-            </a:r>
-          </a:p>
-          <a:p>
-            <a:r>
-              <a:rPr lang="en-GB" dirty="0"/>
-              <a:t>- **(b)** Trudy can infer that it's a 3-bit cipher and may use frequency analysis but cannot directly decrypt without knowing the specific mapping.</a:t>
-            </a:r>
-          </a:p>
-          <a:p>
-            <a:endParaRPr lang="en-GB" dirty="0"/>
-          </a:p>
-          <a:p>
-            <a:r>
-              <a:rPr lang="en-GB" dirty="0"/>
-              <a:t>- **(c)** With CBC and IV = 111, resulting ciphertext for plaintext `100101100`:  </a:t>
-            </a:r>
-          </a:p>
-          <a:p>
-            <a:r>
-              <a:rPr lang="en-GB" dirty="0"/>
-              <a:t>  $$ \text{Ciphertext} = 100111100 $$</a:t>
-            </a:r>
-          </a:p>
-          <a:p>
-            <a:endParaRPr lang="en-GB" dirty="0"/>
-          </a:p>
-          <a:p>
-            <a:r>
-              <a:rPr lang="en-GB" dirty="0"/>
-              <a:t>Citations:</a:t>
-            </a:r>
-          </a:p>
-          <a:p>
-            <a:r>
-              <a:rPr lang="en-GB" dirty="0"/>
-              <a:t>[1] https://ppl-ai-file-upload.s3.amazonaws.com/web/direct-files/657250/670d6e33-bf04-4786-8da4-9b8cff7bf69b/Temp.pdf</a:t>
-            </a:r>
-            <a:endParaRPr lang="en-SE" dirty="0"/>
+            <a:endParaRPr lang="en-US" altLang="zh-CN" dirty="0"/>
+          </a:p>
+          <a:p>
+            <a:r>
+              <a:rPr lang="nl-NL" altLang="zh-CN" dirty="0"/>
+              <a:t>https://wiki.eecs.yorku.ca/course_archive/2012-13/W/3214/_media/solutions_to_chapter_3_problems.pdf</a:t>
+            </a:r>
+            <a:endParaRPr lang="zh-CN" altLang="en-US" dirty="0"/>
           </a:p>
         </p:txBody>
       </p:sp>
@@ -4384,18 +4650,19 @@
           <a:bodyPr/>
           <a:lstStyle/>
           <a:p>
-            <a:fld id="{3D91EEAC-CFEF-9647-876F-EABC6B8338D7}" type="slidenum">
+            <a:fld id="{2D71AD5F-E36F-46B9-A99B-7B025244359D}" type="slidenum">
               <a:rPr lang="en-US" smtClean="0"/>
-              <a:t>25</a:t>
+              <a:pPr/>
+              <a:t>23</a:t>
             </a:fld>
-            <a:endParaRPr lang="en-US" dirty="0"/>
+            <a:endParaRPr lang="en-US"/>
           </a:p>
         </p:txBody>
       </p:sp>
     </p:spTree>
     <p:extLst>
       <p:ext uri="{BB962C8B-B14F-4D97-AF65-F5344CB8AC3E}">
-        <p14:creationId xmlns:p14="http://schemas.microsoft.com/office/powerpoint/2010/main" val="2198409018"/>
+        <p14:creationId xmlns:p14="http://schemas.microsoft.com/office/powerpoint/2010/main" val="196097120"/>
       </p:ext>
     </p:extLst>
   </p:cSld>
@@ -23522,7 +23789,7 @@
             </a:br>
             <a:r>
               <a:rPr lang="nl-NL" altLang="zh-CN" dirty="0"/>
-              <a:t>Lecture 8 - Inter-Domain Routing</a:t>
+              <a:t>Lecture 8 - Inter-Domain Routing </a:t>
             </a:r>
             <a:endParaRPr lang="zh-CN" altLang="en-US" dirty="0"/>
           </a:p>
@@ -23582,14 +23849,49 @@
         </p:spPr>
         <p:txBody>
           <a:bodyPr>
-            <a:normAutofit fontScale="92500" lnSpcReduction="10000"/>
+            <a:normAutofit fontScale="62500" lnSpcReduction="20000"/>
           </a:bodyPr>
           <a:lstStyle/>
           <a:p>
             <a:r>
               <a:rPr lang="en-US" altLang="zh-CN" dirty="0"/>
-              <a:t>Consider the AS graph below, where each AS follows the Gao-Rexford import and export policies. Provider to Customer relationship is denoted by arrows; peer to peer relationship is denoted by horizontal lines with dots. (Hint: Every intermediate AS on a legal path must have at least one customer neighbor along that path. Valid AS paths should be valley-free: traffic goes up provider links zero or more times, may cross at most one peer link, and then goes down customer links zero or more times.)</a:t>
-            </a:r>
+              <a:t>Consider the AS graph below, where each AS follows the Gao-Rexford import and export policies. Provider to Customer relationship is denoted by arrows; peer to peer relationship is denoted by horizontal lines with dots. (Hint: Every intermediate AS on a legal path must have at least one customer neighbor along that path. Valid AS paths should be valley-free: traffic goes up provider links zero or more times, may cross at most one peer link, and then goes down customer links zero or more times.) Determine the path (if any) between the following </a:t>
+            </a:r>
+            <a:r>
+              <a:rPr lang="en-US" altLang="zh-CN" dirty="0" err="1"/>
+              <a:t>ASes</a:t>
+            </a:r>
+            <a:r>
+              <a:rPr lang="en-US" altLang="zh-CN" dirty="0"/>
+              <a:t>. If there is no path possible, write "None".</a:t>
+            </a:r>
+          </a:p>
+          <a:p>
+            <a:r>
+              <a:rPr lang="en-US" altLang="zh-CN" dirty="0"/>
+              <a:t>a) AS1 to AS8   </a:t>
+            </a:r>
+          </a:p>
+          <a:p>
+            <a:r>
+              <a:rPr lang="en-US" altLang="zh-CN" dirty="0"/>
+              <a:t>b) AS2 to AS7</a:t>
+            </a:r>
+          </a:p>
+          <a:p>
+            <a:r>
+              <a:rPr lang="en-US" altLang="zh-CN" dirty="0"/>
+              <a:t>c) AS3 to AS6</a:t>
+            </a:r>
+          </a:p>
+          <a:p>
+            <a:r>
+              <a:rPr lang="en-US" altLang="zh-CN" dirty="0"/>
+              <a:t>d) AS2 to AS5</a:t>
+            </a:r>
+            <a:endParaRPr lang="zh-CN" altLang="en-US" dirty="0"/>
+          </a:p>
+          <a:p>
             <a:endParaRPr lang="zh-CN" altLang="en-US" dirty="0"/>
           </a:p>
         </p:txBody>
@@ -23609,7 +23911,7 @@
           <p:nvPr/>
         </p:nvPicPr>
         <p:blipFill>
-          <a:blip r:embed="rId2">
+          <a:blip r:embed="rId3">
             <a:extLst>
               <a:ext uri="{28A0092B-C50C-407E-A947-70E740481C1C}">
                 <a14:useLocalDpi xmlns:a14="http://schemas.microsoft.com/office/drawing/2010/main" val="0"/>
@@ -27128,6 +27430,251 @@
   <p:cSld>
     <p:spTree>
       <p:nvGrpSpPr>
+        <p:cNvPr id="1" name="">
+          <a:extLst>
+            <a:ext uri="{FF2B5EF4-FFF2-40B4-BE49-F238E27FC236}">
+              <a16:creationId xmlns:a16="http://schemas.microsoft.com/office/drawing/2014/main" id="{2C8D5160-10C2-B5F1-CF6E-AA479A16BF0E}"/>
+            </a:ext>
+          </a:extLst>
+        </p:cNvPr>
+        <p:cNvGrpSpPr/>
+        <p:nvPr/>
+      </p:nvGrpSpPr>
+      <p:grpSpPr>
+        <a:xfrm>
+          <a:off x="0" y="0"/>
+          <a:ext cx="0" cy="0"/>
+          <a:chOff x="0" y="0"/>
+          <a:chExt cx="0" cy="0"/>
+        </a:xfrm>
+      </p:grpSpPr>
+      <p:sp>
+        <p:nvSpPr>
+          <p:cNvPr id="2" name="Title 1">
+            <a:extLst>
+              <a:ext uri="{FF2B5EF4-FFF2-40B4-BE49-F238E27FC236}">
+                <a16:creationId xmlns:a16="http://schemas.microsoft.com/office/drawing/2014/main" id="{1B2D0ED9-F182-063D-A698-7AA9FA18426E}"/>
+              </a:ext>
+            </a:extLst>
+          </p:cNvPr>
+          <p:cNvSpPr>
+            <a:spLocks noGrp="1"/>
+          </p:cNvSpPr>
+          <p:nvPr>
+            <p:ph type="title"/>
+          </p:nvPr>
+        </p:nvSpPr>
+        <p:spPr/>
+        <p:txBody>
+          <a:bodyPr>
+            <a:normAutofit fontScale="90000"/>
+          </a:bodyPr>
+          <a:lstStyle/>
+          <a:p>
+            <a:r>
+              <a:rPr lang="nl-NL" altLang="zh-CN" dirty="0"/>
+              <a:t>	</a:t>
+            </a:r>
+            <a:br>
+              <a:rPr lang="nl-NL" altLang="zh-CN" dirty="0"/>
+            </a:br>
+            <a:r>
+              <a:rPr lang="nl-NL" altLang="zh-CN" dirty="0"/>
+              <a:t>Lecture 8 - Inter-Domain Routing ANS </a:t>
+            </a:r>
+            <a:endParaRPr lang="zh-CN" altLang="en-US" dirty="0"/>
+          </a:p>
+        </p:txBody>
+      </p:sp>
+      <p:sp>
+        <p:nvSpPr>
+          <p:cNvPr id="3" name="Slide Number Placeholder 2">
+            <a:extLst>
+              <a:ext uri="{FF2B5EF4-FFF2-40B4-BE49-F238E27FC236}">
+                <a16:creationId xmlns:a16="http://schemas.microsoft.com/office/drawing/2014/main" id="{E7A74411-12AC-592E-9E74-B02E1EC2BDDF}"/>
+              </a:ext>
+            </a:extLst>
+          </p:cNvPr>
+          <p:cNvSpPr>
+            <a:spLocks noGrp="1"/>
+          </p:cNvSpPr>
+          <p:nvPr>
+            <p:ph type="sldNum" sz="quarter" idx="12"/>
+          </p:nvPr>
+        </p:nvSpPr>
+        <p:spPr/>
+        <p:txBody>
+          <a:bodyPr/>
+          <a:lstStyle/>
+          <a:p>
+            <a:fld id="{EA7C8D44-3667-46F6-9772-CC52308E2A7F}" type="slidenum">
+              <a:rPr kumimoji="0" lang="en-US" smtClean="0"/>
+              <a:pPr/>
+              <a:t>20</a:t>
+            </a:fld>
+            <a:endParaRPr kumimoji="0" lang="en-US" dirty="0"/>
+          </a:p>
+        </p:txBody>
+      </p:sp>
+      <p:sp>
+        <p:nvSpPr>
+          <p:cNvPr id="4" name="Content Placeholder 3">
+            <a:extLst>
+              <a:ext uri="{FF2B5EF4-FFF2-40B4-BE49-F238E27FC236}">
+                <a16:creationId xmlns:a16="http://schemas.microsoft.com/office/drawing/2014/main" id="{C47EC66F-BF3A-D0A3-A7EB-022412628B59}"/>
+              </a:ext>
+            </a:extLst>
+          </p:cNvPr>
+          <p:cNvSpPr>
+            <a:spLocks noGrp="1"/>
+          </p:cNvSpPr>
+          <p:nvPr>
+            <p:ph sz="quarter" idx="1"/>
+          </p:nvPr>
+        </p:nvSpPr>
+        <p:spPr>
+          <a:xfrm>
+            <a:off x="609600" y="1219200"/>
+            <a:ext cx="10972800" cy="3082160"/>
+          </a:xfrm>
+        </p:spPr>
+        <p:txBody>
+          <a:bodyPr>
+            <a:normAutofit fontScale="62500" lnSpcReduction="20000"/>
+          </a:bodyPr>
+          <a:lstStyle/>
+          <a:p>
+            <a:r>
+              <a:rPr lang="en-US" altLang="zh-CN" dirty="0"/>
+              <a:t>a) AS1 to AS8 </a:t>
+            </a:r>
+          </a:p>
+          <a:p>
+            <a:pPr lvl="1"/>
+            <a:r>
+              <a:rPr lang="en-US" altLang="zh-CN" dirty="0"/>
+              <a:t>None</a:t>
+            </a:r>
+          </a:p>
+          <a:p>
+            <a:r>
+              <a:rPr lang="en-US" altLang="zh-CN" dirty="0"/>
+              <a:t>b) AS2 to AS7</a:t>
+            </a:r>
+          </a:p>
+          <a:p>
+            <a:pPr lvl="1"/>
+            <a:r>
+              <a:rPr lang="en-US" altLang="zh-CN" dirty="0"/>
+              <a:t>AS2,  AS5,  AS7</a:t>
+            </a:r>
+          </a:p>
+          <a:p>
+            <a:pPr lvl="1"/>
+            <a:r>
+              <a:rPr lang="en-US" altLang="zh-CN" dirty="0"/>
+              <a:t>Note: AS2, AS3, AS4, AS5, AS7 is also legal, but AS2, AS5, AS7 is the correct path. Since AS2 learns that route from a peer (AS5), it is preferred over the provider-learned route via AS3</a:t>
+            </a:r>
+          </a:p>
+          <a:p>
+            <a:r>
+              <a:rPr lang="en-US" altLang="zh-CN" dirty="0"/>
+              <a:t>c) AS5 to AS8</a:t>
+            </a:r>
+          </a:p>
+          <a:p>
+            <a:pPr lvl="1"/>
+            <a:r>
+              <a:rPr lang="en-US" altLang="zh-CN" dirty="0"/>
+              <a:t>AS5,  AS6,  AS8</a:t>
+            </a:r>
+          </a:p>
+          <a:p>
+            <a:pPr lvl="1"/>
+            <a:r>
+              <a:rPr lang="en-US" altLang="zh-CN" dirty="0"/>
+              <a:t>Note:  AS5,  AS7,  AS8 is not a legal path, since AS7 does not have a customer neighbor along that path. It also violates the valley-free rule.</a:t>
+            </a:r>
+          </a:p>
+          <a:p>
+            <a:r>
+              <a:rPr lang="en-US" altLang="zh-CN" dirty="0"/>
+              <a:t>d) AS2 to AS5</a:t>
+            </a:r>
+          </a:p>
+          <a:p>
+            <a:pPr lvl="1"/>
+            <a:r>
+              <a:rPr lang="en-US" altLang="zh-CN" dirty="0"/>
+              <a:t>AS2, AS5</a:t>
+            </a:r>
+          </a:p>
+          <a:p>
+            <a:pPr lvl="1"/>
+            <a:r>
+              <a:rPr lang="en-US" altLang="zh-CN" dirty="0"/>
+              <a:t>Note:  AS2, AS3, AS4, AS5 is also legal, but AS2, AS5 is the correct path. </a:t>
+            </a:r>
+            <a:endParaRPr lang="zh-CN" altLang="en-US" dirty="0"/>
+          </a:p>
+        </p:txBody>
+      </p:sp>
+      <p:pic>
+        <p:nvPicPr>
+          <p:cNvPr id="5" name="Picture 4">
+            <a:extLst>
+              <a:ext uri="{FF2B5EF4-FFF2-40B4-BE49-F238E27FC236}">
+                <a16:creationId xmlns:a16="http://schemas.microsoft.com/office/drawing/2014/main" id="{2038BF27-4417-9696-1ABB-EA5296369371}"/>
+              </a:ext>
+            </a:extLst>
+          </p:cNvPr>
+          <p:cNvPicPr>
+            <a:picLocks noChangeAspect="1"/>
+          </p:cNvPicPr>
+          <p:nvPr/>
+        </p:nvPicPr>
+        <p:blipFill>
+          <a:blip r:embed="rId3">
+            <a:extLst>
+              <a:ext uri="{28A0092B-C50C-407E-A947-70E740481C1C}">
+                <a14:useLocalDpi xmlns:a14="http://schemas.microsoft.com/office/drawing/2010/main" val="0"/>
+              </a:ext>
+            </a:extLst>
+          </a:blip>
+          <a:srcRect/>
+          <a:stretch>
+            <a:fillRect/>
+          </a:stretch>
+        </p:blipFill>
+        <p:spPr bwMode="auto">
+          <a:xfrm>
+            <a:off x="2895600" y="4355084"/>
+            <a:ext cx="6745573" cy="2313302"/>
+          </a:xfrm>
+          <a:prstGeom prst="rect">
+            <a:avLst/>
+          </a:prstGeom>
+          <a:noFill/>
+        </p:spPr>
+      </p:pic>
+    </p:spTree>
+    <p:extLst>
+      <p:ext uri="{BB962C8B-B14F-4D97-AF65-F5344CB8AC3E}">
+        <p14:creationId xmlns:p14="http://schemas.microsoft.com/office/powerpoint/2010/main" val="1702780441"/>
+      </p:ext>
+    </p:extLst>
+  </p:cSld>
+  <p:clrMapOvr>
+    <a:masterClrMapping/>
+  </p:clrMapOvr>
+</p:sld>
+</file>
+
+<file path=ppt/slides/slide21.xml><?xml version="1.0" encoding="utf-8"?>
+<p:sld xmlns:a="http://schemas.openxmlformats.org/drawingml/2006/main" xmlns:r="http://schemas.openxmlformats.org/officeDocument/2006/relationships" xmlns:p="http://schemas.openxmlformats.org/presentationml/2006/main">
+  <p:cSld>
+    <p:spTree>
+      <p:nvGrpSpPr>
         <p:cNvPr id="1" name=""/>
         <p:cNvGrpSpPr/>
         <p:nvPr/>
@@ -27193,7 +27740,7 @@
             <a:fld id="{EA7C8D44-3667-46F6-9772-CC52308E2A7F}" type="slidenum">
               <a:rPr kumimoji="0" lang="en-US" smtClean="0"/>
               <a:pPr/>
-              <a:t>20</a:t>
+              <a:t>21</a:t>
             </a:fld>
             <a:endParaRPr kumimoji="0" lang="en-US" dirty="0"/>
           </a:p>
@@ -27306,14 +27853,14 @@
           <a:effectLst/>
           <a:extLst>
             <a:ext uri="{909E8E84-426E-40dd-AFC4-6F175D3DCCD1}">
-              <a14:hiddenFill xmlns:a14="http://schemas.microsoft.com/office/drawing/2010/main" xmlns="">
+              <a14:hiddenFill xmlns="" xmlns:a14="http://schemas.microsoft.com/office/drawing/2010/main">
                 <a:solidFill>
                   <a:srgbClr val="FFFFFF"/>
                 </a:solidFill>
               </a14:hiddenFill>
             </a:ext>
             <a:ext uri="{91240B29-F687-4f45-9708-019B960494DF}">
-              <a14:hiddenLine xmlns:a14="http://schemas.microsoft.com/office/drawing/2010/main" xmlns="" w="9525">
+              <a14:hiddenLine xmlns="" xmlns:a14="http://schemas.microsoft.com/office/drawing/2010/main" w="9525">
                 <a:solidFill>
                   <a:schemeClr val="tx1"/>
                 </a:solidFill>
@@ -27323,7 +27870,7 @@
               </a14:hiddenLine>
             </a:ext>
             <a:ext uri="{AF507438-7753-43e0-B8FC-AC1667EBCBE1}">
-              <a14:hiddenEffects xmlns:a14="http://schemas.microsoft.com/office/drawing/2010/main" xmlns="">
+              <a14:hiddenEffects xmlns="" xmlns:a14="http://schemas.microsoft.com/office/drawing/2010/main">
                 <a:effectLst>
                   <a:outerShdw blurRad="63500" dist="38099" dir="2700000" algn="ctr" rotWithShape="0">
                     <a:schemeClr val="bg2">
@@ -27513,14 +28060,14 @@
           <a:effectLst/>
           <a:extLst>
             <a:ext uri="{909E8E84-426E-40dd-AFC4-6F175D3DCCD1}">
-              <a14:hiddenFill xmlns:a14="http://schemas.microsoft.com/office/drawing/2010/main" xmlns="">
+              <a14:hiddenFill xmlns="" xmlns:a14="http://schemas.microsoft.com/office/drawing/2010/main">
                 <a:solidFill>
                   <a:srgbClr val="FFFFFF"/>
                 </a:solidFill>
               </a14:hiddenFill>
             </a:ext>
             <a:ext uri="{91240B29-F687-4f45-9708-019B960494DF}">
-              <a14:hiddenLine xmlns:a14="http://schemas.microsoft.com/office/drawing/2010/main" xmlns="" w="9525">
+              <a14:hiddenLine xmlns="" xmlns:a14="http://schemas.microsoft.com/office/drawing/2010/main" w="9525">
                 <a:solidFill>
                   <a:schemeClr val="tx1"/>
                 </a:solidFill>
@@ -27530,7 +28077,7 @@
               </a14:hiddenLine>
             </a:ext>
             <a:ext uri="{AF507438-7753-43e0-B8FC-AC1667EBCBE1}">
-              <a14:hiddenEffects xmlns:a14="http://schemas.microsoft.com/office/drawing/2010/main" xmlns="">
+              <a14:hiddenEffects xmlns="" xmlns:a14="http://schemas.microsoft.com/office/drawing/2010/main">
                 <a:effectLst>
                   <a:outerShdw blurRad="63500" dist="38099" dir="2700000" algn="ctr" rotWithShape="0">
                     <a:schemeClr val="bg2">
@@ -27725,12 +28272,12 @@
           <a:effectLst/>
           <a:extLst>
             <a:ext uri="{909E8E84-426E-40dd-AFC4-6F175D3DCCD1}">
-              <a14:hiddenFill xmlns:a14="http://schemas.microsoft.com/office/drawing/2010/main" xmlns="">
+              <a14:hiddenFill xmlns="" xmlns:a14="http://schemas.microsoft.com/office/drawing/2010/main">
                 <a:noFill/>
               </a14:hiddenFill>
             </a:ext>
             <a:ext uri="{AF507438-7753-43e0-B8FC-AC1667EBCBE1}">
-              <a14:hiddenEffects xmlns:a14="http://schemas.microsoft.com/office/drawing/2010/main" xmlns="">
+              <a14:hiddenEffects xmlns="" xmlns:a14="http://schemas.microsoft.com/office/drawing/2010/main">
                 <a:effectLst>
                   <a:outerShdw blurRad="63500" dist="38099" dir="2700000" algn="ctr" rotWithShape="0">
                     <a:schemeClr val="bg2">
@@ -27814,12 +28361,12 @@
           <a:effectLst/>
           <a:extLst>
             <a:ext uri="{909E8E84-426E-40dd-AFC4-6F175D3DCCD1}">
-              <a14:hiddenFill xmlns:a14="http://schemas.microsoft.com/office/drawing/2010/main" xmlns="">
+              <a14:hiddenFill xmlns="" xmlns:a14="http://schemas.microsoft.com/office/drawing/2010/main">
                 <a:noFill/>
               </a14:hiddenFill>
             </a:ext>
             <a:ext uri="{AF507438-7753-43e0-B8FC-AC1667EBCBE1}">
-              <a14:hiddenEffects xmlns:a14="http://schemas.microsoft.com/office/drawing/2010/main" xmlns="">
+              <a14:hiddenEffects xmlns="" xmlns:a14="http://schemas.microsoft.com/office/drawing/2010/main">
                 <a:effectLst>
                   <a:outerShdw blurRad="63500" dist="38099" dir="2700000" algn="ctr" rotWithShape="0">
                     <a:schemeClr val="bg2">
@@ -27900,7 +28447,7 @@
           <a:effectLst/>
           <a:extLst>
             <a:ext uri="{91240B29-F687-4f45-9708-019B960494DF}">
-              <a14:hiddenLine xmlns:a14="http://schemas.microsoft.com/office/drawing/2010/main" xmlns="" w="9525">
+              <a14:hiddenLine xmlns="" xmlns:a14="http://schemas.microsoft.com/office/drawing/2010/main" w="9525">
                 <a:solidFill>
                   <a:schemeClr val="tx1"/>
                 </a:solidFill>
@@ -27910,7 +28457,7 @@
               </a14:hiddenLine>
             </a:ext>
             <a:ext uri="{AF507438-7753-43e0-B8FC-AC1667EBCBE1}">
-              <a14:hiddenEffects xmlns:a14="http://schemas.microsoft.com/office/drawing/2010/main" xmlns="">
+              <a14:hiddenEffects xmlns="" xmlns:a14="http://schemas.microsoft.com/office/drawing/2010/main">
                 <a:effectLst>
                   <a:outerShdw blurRad="63500" dist="38099" dir="2700000" algn="ctr" rotWithShape="0">
                     <a:schemeClr val="bg2">
@@ -28014,12 +28561,12 @@
             <a:effectLst/>
             <a:extLst>
               <a:ext uri="{909E8E84-426E-40dd-AFC4-6F175D3DCCD1}">
-                <a14:hiddenFill xmlns:a14="http://schemas.microsoft.com/office/drawing/2010/main" xmlns="">
+                <a14:hiddenFill xmlns="" xmlns:a14="http://schemas.microsoft.com/office/drawing/2010/main">
                   <a:noFill/>
                 </a14:hiddenFill>
               </a:ext>
               <a:ext uri="{AF507438-7753-43e0-B8FC-AC1667EBCBE1}">
-                <a14:hiddenEffects xmlns:a14="http://schemas.microsoft.com/office/drawing/2010/main" xmlns="">
+                <a14:hiddenEffects xmlns="" xmlns:a14="http://schemas.microsoft.com/office/drawing/2010/main">
                   <a:effectLst>
                     <a:outerShdw blurRad="63500" dist="38099" dir="2700000" algn="ctr" rotWithShape="0">
                       <a:schemeClr val="bg2">
@@ -28100,14 +28647,14 @@
             <a:effectLst/>
             <a:extLst>
               <a:ext uri="{909E8E84-426E-40dd-AFC4-6F175D3DCCD1}">
-                <a14:hiddenFill xmlns:a14="http://schemas.microsoft.com/office/drawing/2010/main" xmlns="">
+                <a14:hiddenFill xmlns="" xmlns:a14="http://schemas.microsoft.com/office/drawing/2010/main">
                   <a:solidFill>
                     <a:srgbClr val="FFFFFF"/>
                   </a:solidFill>
                 </a14:hiddenFill>
               </a:ext>
               <a:ext uri="{91240B29-F687-4f45-9708-019B960494DF}">
-                <a14:hiddenLine xmlns:a14="http://schemas.microsoft.com/office/drawing/2010/main" xmlns="" w="9525">
+                <a14:hiddenLine xmlns="" xmlns:a14="http://schemas.microsoft.com/office/drawing/2010/main" w="9525">
                   <a:solidFill>
                     <a:schemeClr val="tx1"/>
                   </a:solidFill>
@@ -28117,7 +28664,7 @@
                 </a14:hiddenLine>
               </a:ext>
               <a:ext uri="{AF507438-7753-43e0-B8FC-AC1667EBCBE1}">
-                <a14:hiddenEffects xmlns:a14="http://schemas.microsoft.com/office/drawing/2010/main" xmlns="">
+                <a14:hiddenEffects xmlns="" xmlns:a14="http://schemas.microsoft.com/office/drawing/2010/main">
                   <a:effectLst>
                     <a:outerShdw blurRad="63500" dist="38099" dir="2700000" algn="ctr" rotWithShape="0">
                       <a:schemeClr val="bg2">
@@ -28310,7 +28857,7 @@
           <a:effectLst/>
           <a:extLst>
             <a:ext uri="{91240B29-F687-4f45-9708-019B960494DF}">
-              <a14:hiddenLine xmlns:a14="http://schemas.microsoft.com/office/drawing/2010/main" xmlns="" w="9525">
+              <a14:hiddenLine xmlns="" xmlns:a14="http://schemas.microsoft.com/office/drawing/2010/main" w="9525">
                 <a:solidFill>
                   <a:schemeClr val="tx1"/>
                 </a:solidFill>
@@ -28320,7 +28867,7 @@
               </a14:hiddenLine>
             </a:ext>
             <a:ext uri="{AF507438-7753-43e0-B8FC-AC1667EBCBE1}">
-              <a14:hiddenEffects xmlns:a14="http://schemas.microsoft.com/office/drawing/2010/main" xmlns="">
+              <a14:hiddenEffects xmlns="" xmlns:a14="http://schemas.microsoft.com/office/drawing/2010/main">
                 <a:effectLst>
                   <a:outerShdw blurRad="63500" dist="38099" dir="2700000" algn="ctr" rotWithShape="0">
                     <a:schemeClr val="bg2">
@@ -28424,12 +28971,12 @@
             <a:effectLst/>
             <a:extLst>
               <a:ext uri="{909E8E84-426E-40dd-AFC4-6F175D3DCCD1}">
-                <a14:hiddenFill xmlns:a14="http://schemas.microsoft.com/office/drawing/2010/main" xmlns="">
+                <a14:hiddenFill xmlns="" xmlns:a14="http://schemas.microsoft.com/office/drawing/2010/main">
                   <a:noFill/>
                 </a14:hiddenFill>
               </a:ext>
               <a:ext uri="{AF507438-7753-43e0-B8FC-AC1667EBCBE1}">
-                <a14:hiddenEffects xmlns:a14="http://schemas.microsoft.com/office/drawing/2010/main" xmlns="">
+                <a14:hiddenEffects xmlns="" xmlns:a14="http://schemas.microsoft.com/office/drawing/2010/main">
                   <a:effectLst>
                     <a:outerShdw blurRad="63500" dist="38099" dir="2700000" algn="ctr" rotWithShape="0">
                       <a:schemeClr val="bg2">
@@ -28510,14 +29057,14 @@
             <a:effectLst/>
             <a:extLst>
               <a:ext uri="{909E8E84-426E-40dd-AFC4-6F175D3DCCD1}">
-                <a14:hiddenFill xmlns:a14="http://schemas.microsoft.com/office/drawing/2010/main" xmlns="">
+                <a14:hiddenFill xmlns="" xmlns:a14="http://schemas.microsoft.com/office/drawing/2010/main">
                   <a:solidFill>
                     <a:srgbClr val="FFFFFF"/>
                   </a:solidFill>
                 </a14:hiddenFill>
               </a:ext>
               <a:ext uri="{91240B29-F687-4f45-9708-019B960494DF}">
-                <a14:hiddenLine xmlns:a14="http://schemas.microsoft.com/office/drawing/2010/main" xmlns="" w="9525">
+                <a14:hiddenLine xmlns="" xmlns:a14="http://schemas.microsoft.com/office/drawing/2010/main" w="9525">
                   <a:solidFill>
                     <a:schemeClr val="tx1"/>
                   </a:solidFill>
@@ -28527,7 +29074,7 @@
                 </a14:hiddenLine>
               </a:ext>
               <a:ext uri="{AF507438-7753-43e0-B8FC-AC1667EBCBE1}">
-                <a14:hiddenEffects xmlns:a14="http://schemas.microsoft.com/office/drawing/2010/main" xmlns="">
+                <a14:hiddenEffects xmlns="" xmlns:a14="http://schemas.microsoft.com/office/drawing/2010/main">
                   <a:effectLst>
                     <a:outerShdw blurRad="63500" dist="38099" dir="2700000" algn="ctr" rotWithShape="0">
                       <a:schemeClr val="bg2">
@@ -28722,14 +29269,14 @@
             <a:effectLst/>
             <a:extLst>
               <a:ext uri="{909E8E84-426E-40dd-AFC4-6F175D3DCCD1}">
-                <a14:hiddenFill xmlns:a14="http://schemas.microsoft.com/office/drawing/2010/main" xmlns="">
+                <a14:hiddenFill xmlns="" xmlns:a14="http://schemas.microsoft.com/office/drawing/2010/main">
                   <a:solidFill>
                     <a:schemeClr val="accent1"/>
                   </a:solidFill>
                 </a14:hiddenFill>
               </a:ext>
               <a:ext uri="{91240B29-F687-4f45-9708-019B960494DF}">
-                <a14:hiddenLine xmlns:a14="http://schemas.microsoft.com/office/drawing/2010/main" xmlns="" w="9525">
+                <a14:hiddenLine xmlns="" xmlns:a14="http://schemas.microsoft.com/office/drawing/2010/main" w="9525">
                   <a:solidFill>
                     <a:schemeClr val="tx1"/>
                   </a:solidFill>
@@ -28739,7 +29286,7 @@
                 </a14:hiddenLine>
               </a:ext>
               <a:ext uri="{AF507438-7753-43e0-B8FC-AC1667EBCBE1}">
-                <a14:hiddenEffects xmlns:a14="http://schemas.microsoft.com/office/drawing/2010/main" xmlns="">
+                <a14:hiddenEffects xmlns="" xmlns:a14="http://schemas.microsoft.com/office/drawing/2010/main">
                   <a:effectLst>
                     <a:outerShdw blurRad="63500" dist="38099" dir="2700000" algn="ctr" rotWithShape="0">
                       <a:schemeClr val="bg2">
@@ -28956,12 +29503,12 @@
               <a:effectLst/>
               <a:extLst>
                 <a:ext uri="{909E8E84-426E-40dd-AFC4-6F175D3DCCD1}">
-                  <a14:hiddenFill xmlns:a14="http://schemas.microsoft.com/office/drawing/2010/main" xmlns="">
+                  <a14:hiddenFill xmlns="" xmlns:a14="http://schemas.microsoft.com/office/drawing/2010/main">
                     <a:noFill/>
                   </a14:hiddenFill>
                 </a:ext>
                 <a:ext uri="{AF507438-7753-43e0-B8FC-AC1667EBCBE1}">
-                  <a14:hiddenEffects xmlns:a14="http://schemas.microsoft.com/office/drawing/2010/main" xmlns="">
+                  <a14:hiddenEffects xmlns="" xmlns:a14="http://schemas.microsoft.com/office/drawing/2010/main">
                     <a:effectLst>
                       <a:outerShdw blurRad="63500" dist="38099" dir="2700000" algn="ctr" rotWithShape="0">
                         <a:schemeClr val="bg2">
@@ -29045,12 +29592,12 @@
               <a:effectLst/>
               <a:extLst>
                 <a:ext uri="{909E8E84-426E-40dd-AFC4-6F175D3DCCD1}">
-                  <a14:hiddenFill xmlns:a14="http://schemas.microsoft.com/office/drawing/2010/main" xmlns="">
+                  <a14:hiddenFill xmlns="" xmlns:a14="http://schemas.microsoft.com/office/drawing/2010/main">
                     <a:noFill/>
                   </a14:hiddenFill>
                 </a:ext>
                 <a:ext uri="{AF507438-7753-43e0-B8FC-AC1667EBCBE1}">
-                  <a14:hiddenEffects xmlns:a14="http://schemas.microsoft.com/office/drawing/2010/main" xmlns="">
+                  <a14:hiddenEffects xmlns="" xmlns:a14="http://schemas.microsoft.com/office/drawing/2010/main">
                     <a:effectLst>
                       <a:outerShdw blurRad="63500" dist="38099" dir="2700000" algn="ctr" rotWithShape="0">
                         <a:schemeClr val="bg2">
@@ -29157,12 +29704,12 @@
               <a:effectLst/>
               <a:extLst>
                 <a:ext uri="{909E8E84-426E-40dd-AFC4-6F175D3DCCD1}">
-                  <a14:hiddenFill xmlns:a14="http://schemas.microsoft.com/office/drawing/2010/main" xmlns="">
+                  <a14:hiddenFill xmlns="" xmlns:a14="http://schemas.microsoft.com/office/drawing/2010/main">
                     <a:noFill/>
                   </a14:hiddenFill>
                 </a:ext>
                 <a:ext uri="{AF507438-7753-43e0-B8FC-AC1667EBCBE1}">
-                  <a14:hiddenEffects xmlns:a14="http://schemas.microsoft.com/office/drawing/2010/main" xmlns="">
+                  <a14:hiddenEffects xmlns="" xmlns:a14="http://schemas.microsoft.com/office/drawing/2010/main">
                     <a:effectLst>
                       <a:outerShdw blurRad="63500" dist="38099" dir="2700000" algn="ctr" rotWithShape="0">
                         <a:schemeClr val="bg2">
@@ -29246,12 +29793,12 @@
               <a:effectLst/>
               <a:extLst>
                 <a:ext uri="{909E8E84-426E-40dd-AFC4-6F175D3DCCD1}">
-                  <a14:hiddenFill xmlns:a14="http://schemas.microsoft.com/office/drawing/2010/main" xmlns="">
+                  <a14:hiddenFill xmlns="" xmlns:a14="http://schemas.microsoft.com/office/drawing/2010/main">
                     <a:noFill/>
                   </a14:hiddenFill>
                 </a:ext>
                 <a:ext uri="{AF507438-7753-43e0-B8FC-AC1667EBCBE1}">
-                  <a14:hiddenEffects xmlns:a14="http://schemas.microsoft.com/office/drawing/2010/main" xmlns="">
+                  <a14:hiddenEffects xmlns="" xmlns:a14="http://schemas.microsoft.com/office/drawing/2010/main">
                     <a:effectLst>
                       <a:outerShdw blurRad="63500" dist="38099" dir="2700000" algn="ctr" rotWithShape="0">
                         <a:schemeClr val="bg2">
@@ -29357,12 +29904,12 @@
             <a:effectLst/>
             <a:extLst>
               <a:ext uri="{909E8E84-426E-40dd-AFC4-6F175D3DCCD1}">
-                <a14:hiddenFill xmlns:a14="http://schemas.microsoft.com/office/drawing/2010/main" xmlns="">
+                <a14:hiddenFill xmlns="" xmlns:a14="http://schemas.microsoft.com/office/drawing/2010/main">
                   <a:noFill/>
                 </a14:hiddenFill>
               </a:ext>
               <a:ext uri="{AF507438-7753-43e0-B8FC-AC1667EBCBE1}">
-                <a14:hiddenEffects xmlns:a14="http://schemas.microsoft.com/office/drawing/2010/main" xmlns="">
+                <a14:hiddenEffects xmlns="" xmlns:a14="http://schemas.microsoft.com/office/drawing/2010/main">
                   <a:effectLst>
                     <a:outerShdw blurRad="63500" dist="38099" dir="2700000" algn="ctr" rotWithShape="0">
                       <a:schemeClr val="bg2">
@@ -29465,7 +30012,7 @@
               <a:effectLst/>
               <a:extLst>
                 <a:ext uri="{91240B29-F687-4f45-9708-019B960494DF}">
-                  <a14:hiddenLine xmlns:a14="http://schemas.microsoft.com/office/drawing/2010/main" xmlns="" w="9525">
+                  <a14:hiddenLine xmlns="" xmlns:a14="http://schemas.microsoft.com/office/drawing/2010/main" w="9525">
                     <a:solidFill>
                       <a:schemeClr val="tx1"/>
                     </a:solidFill>
@@ -29475,7 +30022,7 @@
                   </a14:hiddenLine>
                 </a:ext>
                 <a:ext uri="{AF507438-7753-43e0-B8FC-AC1667EBCBE1}">
-                  <a14:hiddenEffects xmlns:a14="http://schemas.microsoft.com/office/drawing/2010/main" xmlns="">
+                  <a14:hiddenEffects xmlns="" xmlns:a14="http://schemas.microsoft.com/office/drawing/2010/main">
                     <a:effectLst>
                       <a:outerShdw blurRad="63500" dist="38099" dir="2700000" algn="ctr" rotWithShape="0">
                         <a:schemeClr val="bg2">
@@ -29554,14 +30101,14 @@
               <a:effectLst/>
               <a:extLst>
                 <a:ext uri="{909E8E84-426E-40dd-AFC4-6F175D3DCCD1}">
-                  <a14:hiddenFill xmlns:a14="http://schemas.microsoft.com/office/drawing/2010/main" xmlns="">
+                  <a14:hiddenFill xmlns="" xmlns:a14="http://schemas.microsoft.com/office/drawing/2010/main">
                     <a:solidFill>
                       <a:srgbClr val="FFFFFF"/>
                     </a:solidFill>
                   </a14:hiddenFill>
                 </a:ext>
                 <a:ext uri="{91240B29-F687-4f45-9708-019B960494DF}">
-                  <a14:hiddenLine xmlns:a14="http://schemas.microsoft.com/office/drawing/2010/main" xmlns="" w="9525">
+                  <a14:hiddenLine xmlns="" xmlns:a14="http://schemas.microsoft.com/office/drawing/2010/main" w="9525">
                     <a:solidFill>
                       <a:schemeClr val="tx1"/>
                     </a:solidFill>
@@ -29571,7 +30118,7 @@
                   </a14:hiddenLine>
                 </a:ext>
                 <a:ext uri="{AF507438-7753-43e0-B8FC-AC1667EBCBE1}">
-                  <a14:hiddenEffects xmlns:a14="http://schemas.microsoft.com/office/drawing/2010/main" xmlns="">
+                  <a14:hiddenEffects xmlns="" xmlns:a14="http://schemas.microsoft.com/office/drawing/2010/main">
                     <a:effectLst>
                       <a:outerShdw blurRad="63500" dist="38099" dir="2700000" algn="ctr" rotWithShape="0">
                         <a:schemeClr val="bg2">
@@ -29781,12 +30328,12 @@
             <a:effectLst/>
             <a:extLst>
               <a:ext uri="{909E8E84-426E-40dd-AFC4-6F175D3DCCD1}">
-                <a14:hiddenFill xmlns:a14="http://schemas.microsoft.com/office/drawing/2010/main" xmlns="">
+                <a14:hiddenFill xmlns="" xmlns:a14="http://schemas.microsoft.com/office/drawing/2010/main">
                   <a:noFill/>
                 </a14:hiddenFill>
               </a:ext>
               <a:ext uri="{AF507438-7753-43e0-B8FC-AC1667EBCBE1}">
-                <a14:hiddenEffects xmlns:a14="http://schemas.microsoft.com/office/drawing/2010/main" xmlns="">
+                <a14:hiddenEffects xmlns="" xmlns:a14="http://schemas.microsoft.com/office/drawing/2010/main">
                   <a:effectLst>
                     <a:outerShdw blurRad="63500" dist="38099" dir="2700000" algn="ctr" rotWithShape="0">
                       <a:schemeClr val="bg2">
@@ -29889,7 +30436,7 @@
               <a:effectLst/>
               <a:extLst>
                 <a:ext uri="{91240B29-F687-4f45-9708-019B960494DF}">
-                  <a14:hiddenLine xmlns:a14="http://schemas.microsoft.com/office/drawing/2010/main" xmlns="" w="9525">
+                  <a14:hiddenLine xmlns="" xmlns:a14="http://schemas.microsoft.com/office/drawing/2010/main" w="9525">
                     <a:solidFill>
                       <a:schemeClr val="tx1"/>
                     </a:solidFill>
@@ -29899,7 +30446,7 @@
                   </a14:hiddenLine>
                 </a:ext>
                 <a:ext uri="{AF507438-7753-43e0-B8FC-AC1667EBCBE1}">
-                  <a14:hiddenEffects xmlns:a14="http://schemas.microsoft.com/office/drawing/2010/main" xmlns="">
+                  <a14:hiddenEffects xmlns="" xmlns:a14="http://schemas.microsoft.com/office/drawing/2010/main">
                     <a:effectLst>
                       <a:outerShdw blurRad="63500" dist="38099" dir="2700000" algn="ctr" rotWithShape="0">
                         <a:schemeClr val="bg2">
@@ -29978,14 +30525,14 @@
               <a:effectLst/>
               <a:extLst>
                 <a:ext uri="{909E8E84-426E-40dd-AFC4-6F175D3DCCD1}">
-                  <a14:hiddenFill xmlns:a14="http://schemas.microsoft.com/office/drawing/2010/main" xmlns="">
+                  <a14:hiddenFill xmlns="" xmlns:a14="http://schemas.microsoft.com/office/drawing/2010/main">
                     <a:solidFill>
                       <a:srgbClr val="FFFFFF"/>
                     </a:solidFill>
                   </a14:hiddenFill>
                 </a:ext>
                 <a:ext uri="{91240B29-F687-4f45-9708-019B960494DF}">
-                  <a14:hiddenLine xmlns:a14="http://schemas.microsoft.com/office/drawing/2010/main" xmlns="" w="9525">
+                  <a14:hiddenLine xmlns="" xmlns:a14="http://schemas.microsoft.com/office/drawing/2010/main" w="9525">
                     <a:solidFill>
                       <a:schemeClr val="tx1"/>
                     </a:solidFill>
@@ -29995,7 +30542,7 @@
                   </a14:hiddenLine>
                 </a:ext>
                 <a:ext uri="{AF507438-7753-43e0-B8FC-AC1667EBCBE1}">
-                  <a14:hiddenEffects xmlns:a14="http://schemas.microsoft.com/office/drawing/2010/main" xmlns="">
+                  <a14:hiddenEffects xmlns="" xmlns:a14="http://schemas.microsoft.com/office/drawing/2010/main">
                     <a:effectLst>
                       <a:outerShdw blurRad="63500" dist="38099" dir="2700000" algn="ctr" rotWithShape="0">
                         <a:schemeClr val="bg2">
@@ -30212,12 +30759,12 @@
             <a:effectLst/>
             <a:extLst>
               <a:ext uri="{909E8E84-426E-40dd-AFC4-6F175D3DCCD1}">
-                <a14:hiddenFill xmlns:a14="http://schemas.microsoft.com/office/drawing/2010/main" xmlns="">
+                <a14:hiddenFill xmlns="" xmlns:a14="http://schemas.microsoft.com/office/drawing/2010/main">
                   <a:noFill/>
                 </a14:hiddenFill>
               </a:ext>
               <a:ext uri="{AF507438-7753-43e0-B8FC-AC1667EBCBE1}">
-                <a14:hiddenEffects xmlns:a14="http://schemas.microsoft.com/office/drawing/2010/main" xmlns="">
+                <a14:hiddenEffects xmlns="" xmlns:a14="http://schemas.microsoft.com/office/drawing/2010/main">
                   <a:effectLst>
                     <a:outerShdw blurRad="63500" dist="38099" dir="2700000" algn="ctr" rotWithShape="0">
                       <a:schemeClr val="bg2">
@@ -30298,7 +30845,7 @@
             <a:effectLst/>
             <a:extLst>
               <a:ext uri="{91240B29-F687-4f45-9708-019B960494DF}">
-                <a14:hiddenLine xmlns:a14="http://schemas.microsoft.com/office/drawing/2010/main" xmlns="" w="9525">
+                <a14:hiddenLine xmlns="" xmlns:a14="http://schemas.microsoft.com/office/drawing/2010/main" w="9525">
                   <a:solidFill>
                     <a:schemeClr val="tx1"/>
                   </a:solidFill>
@@ -30308,7 +30855,7 @@
                 </a14:hiddenLine>
               </a:ext>
               <a:ext uri="{AF507438-7753-43e0-B8FC-AC1667EBCBE1}">
-                <a14:hiddenEffects xmlns:a14="http://schemas.microsoft.com/office/drawing/2010/main" xmlns="">
+                <a14:hiddenEffects xmlns="" xmlns:a14="http://schemas.microsoft.com/office/drawing/2010/main">
                   <a:effectLst>
                     <a:outerShdw blurRad="63500" dist="38099" dir="2700000" algn="ctr" rotWithShape="0">
                       <a:schemeClr val="bg2">
@@ -30387,14 +30934,14 @@
             <a:effectLst/>
             <a:extLst>
               <a:ext uri="{909E8E84-426E-40dd-AFC4-6F175D3DCCD1}">
-                <a14:hiddenFill xmlns:a14="http://schemas.microsoft.com/office/drawing/2010/main" xmlns="">
+                <a14:hiddenFill xmlns="" xmlns:a14="http://schemas.microsoft.com/office/drawing/2010/main">
                   <a:solidFill>
                     <a:srgbClr val="FFFFFF"/>
                   </a:solidFill>
                 </a14:hiddenFill>
               </a:ext>
               <a:ext uri="{91240B29-F687-4f45-9708-019B960494DF}">
-                <a14:hiddenLine xmlns:a14="http://schemas.microsoft.com/office/drawing/2010/main" xmlns="" w="9525">
+                <a14:hiddenLine xmlns="" xmlns:a14="http://schemas.microsoft.com/office/drawing/2010/main" w="9525">
                   <a:solidFill>
                     <a:schemeClr val="tx1"/>
                   </a:solidFill>
@@ -30404,7 +30951,7 @@
                 </a14:hiddenLine>
               </a:ext>
               <a:ext uri="{AF507438-7753-43e0-B8FC-AC1667EBCBE1}">
-                <a14:hiddenEffects xmlns:a14="http://schemas.microsoft.com/office/drawing/2010/main" xmlns="">
+                <a14:hiddenEffects xmlns="" xmlns:a14="http://schemas.microsoft.com/office/drawing/2010/main">
                   <a:effectLst>
                     <a:outerShdw blurRad="63500" dist="38099" dir="2700000" algn="ctr" rotWithShape="0">
                       <a:schemeClr val="bg2">
@@ -30621,12 +31168,12 @@
               <a:effectLst/>
               <a:extLst>
                 <a:ext uri="{909E8E84-426E-40dd-AFC4-6F175D3DCCD1}">
-                  <a14:hiddenFill xmlns:a14="http://schemas.microsoft.com/office/drawing/2010/main" xmlns="">
+                  <a14:hiddenFill xmlns="" xmlns:a14="http://schemas.microsoft.com/office/drawing/2010/main">
                     <a:noFill/>
                   </a14:hiddenFill>
                 </a:ext>
                 <a:ext uri="{AF507438-7753-43e0-B8FC-AC1667EBCBE1}">
-                  <a14:hiddenEffects xmlns:a14="http://schemas.microsoft.com/office/drawing/2010/main" xmlns="">
+                  <a14:hiddenEffects xmlns="" xmlns:a14="http://schemas.microsoft.com/office/drawing/2010/main">
                     <a:effectLst>
                       <a:outerShdw blurRad="63500" dist="38099" dir="2700000" algn="ctr" rotWithShape="0">
                         <a:schemeClr val="bg2">
@@ -30707,7 +31254,7 @@
               <a:effectLst/>
               <a:extLst>
                 <a:ext uri="{91240B29-F687-4f45-9708-019B960494DF}">
-                  <a14:hiddenLine xmlns:a14="http://schemas.microsoft.com/office/drawing/2010/main" xmlns="" w="9525">
+                  <a14:hiddenLine xmlns="" xmlns:a14="http://schemas.microsoft.com/office/drawing/2010/main" w="9525">
                     <a:solidFill>
                       <a:schemeClr val="tx1"/>
                     </a:solidFill>
@@ -30717,7 +31264,7 @@
                   </a14:hiddenLine>
                 </a:ext>
                 <a:ext uri="{AF507438-7753-43e0-B8FC-AC1667EBCBE1}">
-                  <a14:hiddenEffects xmlns:a14="http://schemas.microsoft.com/office/drawing/2010/main" xmlns="">
+                  <a14:hiddenEffects xmlns="" xmlns:a14="http://schemas.microsoft.com/office/drawing/2010/main">
                     <a:effectLst>
                       <a:outerShdw blurRad="63500" dist="38099" dir="2700000" algn="ctr" rotWithShape="0">
                         <a:schemeClr val="bg2">
@@ -30796,14 +31343,14 @@
               <a:effectLst/>
               <a:extLst>
                 <a:ext uri="{909E8E84-426E-40dd-AFC4-6F175D3DCCD1}">
-                  <a14:hiddenFill xmlns:a14="http://schemas.microsoft.com/office/drawing/2010/main" xmlns="">
+                  <a14:hiddenFill xmlns="" xmlns:a14="http://schemas.microsoft.com/office/drawing/2010/main">
                     <a:solidFill>
                       <a:srgbClr val="FFFFFF"/>
                     </a:solidFill>
                   </a14:hiddenFill>
                 </a:ext>
                 <a:ext uri="{91240B29-F687-4f45-9708-019B960494DF}">
-                  <a14:hiddenLine xmlns:a14="http://schemas.microsoft.com/office/drawing/2010/main" xmlns="" w="9525">
+                  <a14:hiddenLine xmlns="" xmlns:a14="http://schemas.microsoft.com/office/drawing/2010/main" w="9525">
                     <a:solidFill>
                       <a:schemeClr val="tx1"/>
                     </a:solidFill>
@@ -30813,7 +31360,7 @@
                   </a14:hiddenLine>
                 </a:ext>
                 <a:ext uri="{AF507438-7753-43e0-B8FC-AC1667EBCBE1}">
-                  <a14:hiddenEffects xmlns:a14="http://schemas.microsoft.com/office/drawing/2010/main" xmlns="">
+                  <a14:hiddenEffects xmlns="" xmlns:a14="http://schemas.microsoft.com/office/drawing/2010/main">
                     <a:effectLst>
                       <a:outerShdw blurRad="63500" dist="38099" dir="2700000" algn="ctr" rotWithShape="0">
                         <a:schemeClr val="bg2">
@@ -31731,7 +32278,7 @@
 </p:sld>
 </file>
 
-<file path=ppt/slides/slide21.xml><?xml version="1.0" encoding="utf-8"?>
+<file path=ppt/slides/slide22.xml><?xml version="1.0" encoding="utf-8"?>
 <p:sld xmlns:a="http://schemas.openxmlformats.org/drawingml/2006/main" xmlns:r="http://schemas.openxmlformats.org/officeDocument/2006/relationships" xmlns:p="http://schemas.openxmlformats.org/presentationml/2006/main">
   <p:cSld>
     <p:spTree>
@@ -31807,7 +32354,7 @@
             <a:fld id="{EA7C8D44-3667-46F6-9772-CC52308E2A7F}" type="slidenum">
               <a:rPr kumimoji="0" lang="en-US" smtClean="0"/>
               <a:pPr/>
-              <a:t>21</a:t>
+              <a:t>22</a:t>
             </a:fld>
             <a:endParaRPr kumimoji="0" lang="en-US" dirty="0"/>
           </a:p>
@@ -31925,12 +32472,12 @@
           <a:effectLst/>
           <a:extLst>
             <a:ext uri="{909E8E84-426E-40dd-AFC4-6F175D3DCCD1}">
-              <a14:hiddenFill xmlns:a14="http://schemas.microsoft.com/office/drawing/2010/main" xmlns="">
+              <a14:hiddenFill xmlns="" xmlns:a14="http://schemas.microsoft.com/office/drawing/2010/main">
                 <a:noFill/>
               </a14:hiddenFill>
             </a:ext>
             <a:ext uri="{AF507438-7753-43e0-B8FC-AC1667EBCBE1}">
-              <a14:hiddenEffects xmlns:a14="http://schemas.microsoft.com/office/drawing/2010/main" xmlns="">
+              <a14:hiddenEffects xmlns="" xmlns:a14="http://schemas.microsoft.com/office/drawing/2010/main">
                 <a:effectLst>
                   <a:outerShdw blurRad="63500" dist="38099" dir="2700000" algn="ctr" rotWithShape="0">
                     <a:schemeClr val="bg2">
@@ -32009,14 +32556,14 @@
           <a:effectLst/>
           <a:extLst>
             <a:ext uri="{909E8E84-426E-40dd-AFC4-6F175D3DCCD1}">
-              <a14:hiddenFill xmlns:a14="http://schemas.microsoft.com/office/drawing/2010/main" xmlns="">
+              <a14:hiddenFill xmlns="" xmlns:a14="http://schemas.microsoft.com/office/drawing/2010/main">
                 <a:solidFill>
                   <a:srgbClr val="FFFFFF"/>
                 </a:solidFill>
               </a14:hiddenFill>
             </a:ext>
             <a:ext uri="{91240B29-F687-4f45-9708-019B960494DF}">
-              <a14:hiddenLine xmlns:a14="http://schemas.microsoft.com/office/drawing/2010/main" xmlns="" w="9525">
+              <a14:hiddenLine xmlns="" xmlns:a14="http://schemas.microsoft.com/office/drawing/2010/main" w="9525">
                 <a:solidFill>
                   <a:schemeClr val="tx1"/>
                 </a:solidFill>
@@ -32026,7 +32573,7 @@
               </a14:hiddenLine>
             </a:ext>
             <a:ext uri="{AF507438-7753-43e0-B8FC-AC1667EBCBE1}">
-              <a14:hiddenEffects xmlns:a14="http://schemas.microsoft.com/office/drawing/2010/main" xmlns="">
+              <a14:hiddenEffects xmlns="" xmlns:a14="http://schemas.microsoft.com/office/drawing/2010/main">
                 <a:effectLst>
                   <a:outerShdw blurRad="63500" dist="38099" dir="2700000" algn="ctr" rotWithShape="0">
                     <a:schemeClr val="bg2">
@@ -32216,14 +32763,14 @@
           <a:effectLst/>
           <a:extLst>
             <a:ext uri="{909E8E84-426E-40dd-AFC4-6F175D3DCCD1}">
-              <a14:hiddenFill xmlns:a14="http://schemas.microsoft.com/office/drawing/2010/main" xmlns="">
+              <a14:hiddenFill xmlns="" xmlns:a14="http://schemas.microsoft.com/office/drawing/2010/main">
                 <a:solidFill>
                   <a:srgbClr val="FFFFFF"/>
                 </a:solidFill>
               </a14:hiddenFill>
             </a:ext>
             <a:ext uri="{91240B29-F687-4f45-9708-019B960494DF}">
-              <a14:hiddenLine xmlns:a14="http://schemas.microsoft.com/office/drawing/2010/main" xmlns="" w="9525">
+              <a14:hiddenLine xmlns="" xmlns:a14="http://schemas.microsoft.com/office/drawing/2010/main" w="9525">
                 <a:solidFill>
                   <a:schemeClr val="tx1"/>
                 </a:solidFill>
@@ -32233,7 +32780,7 @@
               </a14:hiddenLine>
             </a:ext>
             <a:ext uri="{AF507438-7753-43e0-B8FC-AC1667EBCBE1}">
-              <a14:hiddenEffects xmlns:a14="http://schemas.microsoft.com/office/drawing/2010/main" xmlns="">
+              <a14:hiddenEffects xmlns="" xmlns:a14="http://schemas.microsoft.com/office/drawing/2010/main">
                 <a:effectLst>
                   <a:outerShdw blurRad="63500" dist="38099" dir="2700000" algn="ctr" rotWithShape="0">
                     <a:schemeClr val="bg2">
@@ -32425,7 +32972,7 @@
           <a:effectLst/>
           <a:extLst>
             <a:ext uri="{91240B29-F687-4f45-9708-019B960494DF}">
-              <a14:hiddenLine xmlns:a14="http://schemas.microsoft.com/office/drawing/2010/main" xmlns="" w="9525">
+              <a14:hiddenLine xmlns="" xmlns:a14="http://schemas.microsoft.com/office/drawing/2010/main" w="9525">
                 <a:solidFill>
                   <a:schemeClr val="tx1"/>
                 </a:solidFill>
@@ -32435,7 +32982,7 @@
               </a14:hiddenLine>
             </a:ext>
             <a:ext uri="{AF507438-7753-43e0-B8FC-AC1667EBCBE1}">
-              <a14:hiddenEffects xmlns:a14="http://schemas.microsoft.com/office/drawing/2010/main" xmlns="">
+              <a14:hiddenEffects xmlns="" xmlns:a14="http://schemas.microsoft.com/office/drawing/2010/main">
                 <a:effectLst>
                   <a:outerShdw blurRad="63500" dist="38099" dir="2700000" algn="ctr" rotWithShape="0">
                     <a:schemeClr val="bg2">
@@ -32514,14 +33061,14 @@
           <a:effectLst/>
           <a:extLst>
             <a:ext uri="{909E8E84-426E-40dd-AFC4-6F175D3DCCD1}">
-              <a14:hiddenFill xmlns:a14="http://schemas.microsoft.com/office/drawing/2010/main" xmlns="">
+              <a14:hiddenFill xmlns="" xmlns:a14="http://schemas.microsoft.com/office/drawing/2010/main">
                 <a:solidFill>
                   <a:srgbClr val="FFFFFF"/>
                 </a:solidFill>
               </a14:hiddenFill>
             </a:ext>
             <a:ext uri="{91240B29-F687-4f45-9708-019B960494DF}">
-              <a14:hiddenLine xmlns:a14="http://schemas.microsoft.com/office/drawing/2010/main" xmlns="" w="9525">
+              <a14:hiddenLine xmlns="" xmlns:a14="http://schemas.microsoft.com/office/drawing/2010/main" w="9525">
                 <a:solidFill>
                   <a:schemeClr val="tx1"/>
                 </a:solidFill>
@@ -32531,7 +33078,7 @@
               </a14:hiddenLine>
             </a:ext>
             <a:ext uri="{AF507438-7753-43e0-B8FC-AC1667EBCBE1}">
-              <a14:hiddenEffects xmlns:a14="http://schemas.microsoft.com/office/drawing/2010/main" xmlns="">
+              <a14:hiddenEffects xmlns="" xmlns:a14="http://schemas.microsoft.com/office/drawing/2010/main">
                 <a:effectLst>
                   <a:outerShdw blurRad="63500" dist="38099" dir="2700000" algn="ctr" rotWithShape="0">
                     <a:schemeClr val="bg2">
@@ -32726,12 +33273,12 @@
           <a:effectLst/>
           <a:extLst>
             <a:ext uri="{909E8E84-426E-40dd-AFC4-6F175D3DCCD1}">
-              <a14:hiddenFill xmlns:a14="http://schemas.microsoft.com/office/drawing/2010/main" xmlns="">
+              <a14:hiddenFill xmlns="" xmlns:a14="http://schemas.microsoft.com/office/drawing/2010/main">
                 <a:noFill/>
               </a14:hiddenFill>
             </a:ext>
             <a:ext uri="{AF507438-7753-43e0-B8FC-AC1667EBCBE1}">
-              <a14:hiddenEffects xmlns:a14="http://schemas.microsoft.com/office/drawing/2010/main" xmlns="">
+              <a14:hiddenEffects xmlns="" xmlns:a14="http://schemas.microsoft.com/office/drawing/2010/main">
                 <a:effectLst>
                   <a:outerShdw blurRad="63500" dist="38099" dir="2700000" algn="ctr" rotWithShape="0">
                     <a:schemeClr val="bg2">
@@ -32815,12 +33362,12 @@
           <a:effectLst/>
           <a:extLst>
             <a:ext uri="{909E8E84-426E-40dd-AFC4-6F175D3DCCD1}">
-              <a14:hiddenFill xmlns:a14="http://schemas.microsoft.com/office/drawing/2010/main" xmlns="">
+              <a14:hiddenFill xmlns="" xmlns:a14="http://schemas.microsoft.com/office/drawing/2010/main">
                 <a:noFill/>
               </a14:hiddenFill>
             </a:ext>
             <a:ext uri="{AF507438-7753-43e0-B8FC-AC1667EBCBE1}">
-              <a14:hiddenEffects xmlns:a14="http://schemas.microsoft.com/office/drawing/2010/main" xmlns="">
+              <a14:hiddenEffects xmlns="" xmlns:a14="http://schemas.microsoft.com/office/drawing/2010/main">
                 <a:effectLst>
                   <a:outerShdw blurRad="63500" dist="38099" dir="2700000" algn="ctr" rotWithShape="0">
                     <a:schemeClr val="bg2">
@@ -32924,12 +33471,12 @@
             <a:effectLst/>
             <a:extLst>
               <a:ext uri="{909E8E84-426E-40dd-AFC4-6F175D3DCCD1}">
-                <a14:hiddenFill xmlns:a14="http://schemas.microsoft.com/office/drawing/2010/main" xmlns="">
+                <a14:hiddenFill xmlns="" xmlns:a14="http://schemas.microsoft.com/office/drawing/2010/main">
                   <a:noFill/>
                 </a14:hiddenFill>
               </a:ext>
               <a:ext uri="{AF507438-7753-43e0-B8FC-AC1667EBCBE1}">
-                <a14:hiddenEffects xmlns:a14="http://schemas.microsoft.com/office/drawing/2010/main" xmlns="">
+                <a14:hiddenEffects xmlns="" xmlns:a14="http://schemas.microsoft.com/office/drawing/2010/main">
                   <a:effectLst>
                     <a:outerShdw blurRad="63500" dist="38099" dir="2700000" algn="ctr" rotWithShape="0">
                       <a:schemeClr val="bg2">
@@ -33010,7 +33557,7 @@
             <a:effectLst/>
             <a:extLst>
               <a:ext uri="{91240B29-F687-4f45-9708-019B960494DF}">
-                <a14:hiddenLine xmlns:a14="http://schemas.microsoft.com/office/drawing/2010/main" xmlns="" w="9525">
+                <a14:hiddenLine xmlns="" xmlns:a14="http://schemas.microsoft.com/office/drawing/2010/main" w="9525">
                   <a:solidFill>
                     <a:schemeClr val="tx1"/>
                   </a:solidFill>
@@ -33020,7 +33567,7 @@
                 </a14:hiddenLine>
               </a:ext>
               <a:ext uri="{AF507438-7753-43e0-B8FC-AC1667EBCBE1}">
-                <a14:hiddenEffects xmlns:a14="http://schemas.microsoft.com/office/drawing/2010/main" xmlns="">
+                <a14:hiddenEffects xmlns="" xmlns:a14="http://schemas.microsoft.com/office/drawing/2010/main">
                   <a:effectLst>
                     <a:outerShdw blurRad="63500" dist="38099" dir="2700000" algn="ctr" rotWithShape="0">
                       <a:schemeClr val="bg2">
@@ -33099,14 +33646,14 @@
             <a:effectLst/>
             <a:extLst>
               <a:ext uri="{909E8E84-426E-40dd-AFC4-6F175D3DCCD1}">
-                <a14:hiddenFill xmlns:a14="http://schemas.microsoft.com/office/drawing/2010/main" xmlns="">
+                <a14:hiddenFill xmlns="" xmlns:a14="http://schemas.microsoft.com/office/drawing/2010/main">
                   <a:solidFill>
                     <a:srgbClr val="FFFFFF"/>
                   </a:solidFill>
                 </a14:hiddenFill>
               </a:ext>
               <a:ext uri="{91240B29-F687-4f45-9708-019B960494DF}">
-                <a14:hiddenLine xmlns:a14="http://schemas.microsoft.com/office/drawing/2010/main" xmlns="" w="9525">
+                <a14:hiddenLine xmlns="" xmlns:a14="http://schemas.microsoft.com/office/drawing/2010/main" w="9525">
                   <a:solidFill>
                     <a:schemeClr val="tx1"/>
                   </a:solidFill>
@@ -33116,7 +33663,7 @@
                 </a14:hiddenLine>
               </a:ext>
               <a:ext uri="{AF507438-7753-43e0-B8FC-AC1667EBCBE1}">
-                <a14:hiddenEffects xmlns:a14="http://schemas.microsoft.com/office/drawing/2010/main" xmlns="">
+                <a14:hiddenEffects xmlns="" xmlns:a14="http://schemas.microsoft.com/office/drawing/2010/main">
                   <a:effectLst>
                     <a:outerShdw blurRad="63500" dist="38099" dir="2700000" algn="ctr" rotWithShape="0">
                       <a:schemeClr val="bg2">
@@ -33308,7 +33855,7 @@
             <a:effectLst/>
             <a:extLst>
               <a:ext uri="{91240B29-F687-4f45-9708-019B960494DF}">
-                <a14:hiddenLine xmlns:a14="http://schemas.microsoft.com/office/drawing/2010/main" xmlns="" w="9525">
+                <a14:hiddenLine xmlns="" xmlns:a14="http://schemas.microsoft.com/office/drawing/2010/main" w="9525">
                   <a:solidFill>
                     <a:schemeClr val="tx1"/>
                   </a:solidFill>
@@ -33318,7 +33865,7 @@
                 </a14:hiddenLine>
               </a:ext>
               <a:ext uri="{AF507438-7753-43e0-B8FC-AC1667EBCBE1}">
-                <a14:hiddenEffects xmlns:a14="http://schemas.microsoft.com/office/drawing/2010/main" xmlns="">
+                <a14:hiddenEffects xmlns="" xmlns:a14="http://schemas.microsoft.com/office/drawing/2010/main">
                   <a:effectLst>
                     <a:outerShdw blurRad="63500" dist="38099" dir="2700000" algn="ctr" rotWithShape="0">
                       <a:schemeClr val="bg2">
@@ -33425,12 +33972,12 @@
             <a:effectLst/>
             <a:extLst>
               <a:ext uri="{909E8E84-426E-40dd-AFC4-6F175D3DCCD1}">
-                <a14:hiddenFill xmlns:a14="http://schemas.microsoft.com/office/drawing/2010/main" xmlns="">
+                <a14:hiddenFill xmlns="" xmlns:a14="http://schemas.microsoft.com/office/drawing/2010/main">
                   <a:noFill/>
                 </a14:hiddenFill>
               </a:ext>
               <a:ext uri="{AF507438-7753-43e0-B8FC-AC1667EBCBE1}">
-                <a14:hiddenEffects xmlns:a14="http://schemas.microsoft.com/office/drawing/2010/main" xmlns="">
+                <a14:hiddenEffects xmlns="" xmlns:a14="http://schemas.microsoft.com/office/drawing/2010/main">
                   <a:effectLst>
                     <a:outerShdw blurRad="63500" dist="38099" dir="2700000" algn="ctr" rotWithShape="0">
                       <a:schemeClr val="bg2">
@@ -33511,7 +34058,7 @@
             <a:effectLst/>
             <a:extLst>
               <a:ext uri="{91240B29-F687-4f45-9708-019B960494DF}">
-                <a14:hiddenLine xmlns:a14="http://schemas.microsoft.com/office/drawing/2010/main" xmlns="" w="9525">
+                <a14:hiddenLine xmlns="" xmlns:a14="http://schemas.microsoft.com/office/drawing/2010/main" w="9525">
                   <a:solidFill>
                     <a:schemeClr val="tx1"/>
                   </a:solidFill>
@@ -33521,7 +34068,7 @@
                 </a14:hiddenLine>
               </a:ext>
               <a:ext uri="{AF507438-7753-43e0-B8FC-AC1667EBCBE1}">
-                <a14:hiddenEffects xmlns:a14="http://schemas.microsoft.com/office/drawing/2010/main" xmlns="">
+                <a14:hiddenEffects xmlns="" xmlns:a14="http://schemas.microsoft.com/office/drawing/2010/main">
                   <a:effectLst>
                     <a:outerShdw blurRad="63500" dist="38099" dir="2700000" algn="ctr" rotWithShape="0">
                       <a:schemeClr val="bg2">
@@ -33600,14 +34147,14 @@
             <a:effectLst/>
             <a:extLst>
               <a:ext uri="{909E8E84-426E-40dd-AFC4-6F175D3DCCD1}">
-                <a14:hiddenFill xmlns:a14="http://schemas.microsoft.com/office/drawing/2010/main" xmlns="">
+                <a14:hiddenFill xmlns="" xmlns:a14="http://schemas.microsoft.com/office/drawing/2010/main">
                   <a:solidFill>
                     <a:srgbClr val="FFFFFF"/>
                   </a:solidFill>
                 </a14:hiddenFill>
               </a:ext>
               <a:ext uri="{91240B29-F687-4f45-9708-019B960494DF}">
-                <a14:hiddenLine xmlns:a14="http://schemas.microsoft.com/office/drawing/2010/main" xmlns="" w="9525">
+                <a14:hiddenLine xmlns="" xmlns:a14="http://schemas.microsoft.com/office/drawing/2010/main" w="9525">
                   <a:solidFill>
                     <a:schemeClr val="tx1"/>
                   </a:solidFill>
@@ -33617,7 +34164,7 @@
                 </a14:hiddenLine>
               </a:ext>
               <a:ext uri="{AF507438-7753-43e0-B8FC-AC1667EBCBE1}">
-                <a14:hiddenEffects xmlns:a14="http://schemas.microsoft.com/office/drawing/2010/main" xmlns="">
+                <a14:hiddenEffects xmlns="" xmlns:a14="http://schemas.microsoft.com/office/drawing/2010/main">
                   <a:effectLst>
                     <a:outerShdw blurRad="63500" dist="38099" dir="2700000" algn="ctr" rotWithShape="0">
                       <a:schemeClr val="bg2">
@@ -33828,14 +34375,14 @@
             <a:effectLst/>
             <a:extLst>
               <a:ext uri="{909E8E84-426E-40dd-AFC4-6F175D3DCCD1}">
-                <a14:hiddenFill xmlns:a14="http://schemas.microsoft.com/office/drawing/2010/main" xmlns="">
+                <a14:hiddenFill xmlns="" xmlns:a14="http://schemas.microsoft.com/office/drawing/2010/main">
                   <a:solidFill>
                     <a:schemeClr val="accent1"/>
                   </a:solidFill>
                 </a14:hiddenFill>
               </a:ext>
               <a:ext uri="{91240B29-F687-4f45-9708-019B960494DF}">
-                <a14:hiddenLine xmlns:a14="http://schemas.microsoft.com/office/drawing/2010/main" xmlns="" w="9525">
+                <a14:hiddenLine xmlns="" xmlns:a14="http://schemas.microsoft.com/office/drawing/2010/main" w="9525">
                   <a:solidFill>
                     <a:schemeClr val="tx1"/>
                   </a:solidFill>
@@ -33845,7 +34392,7 @@
                 </a14:hiddenLine>
               </a:ext>
               <a:ext uri="{AF507438-7753-43e0-B8FC-AC1667EBCBE1}">
-                <a14:hiddenEffects xmlns:a14="http://schemas.microsoft.com/office/drawing/2010/main" xmlns="">
+                <a14:hiddenEffects xmlns="" xmlns:a14="http://schemas.microsoft.com/office/drawing/2010/main">
                   <a:effectLst>
                     <a:outerShdw blurRad="63500" dist="38099" dir="2700000" algn="ctr" rotWithShape="0">
                       <a:schemeClr val="bg2">
@@ -34040,12 +34587,12 @@
             <a:effectLst/>
             <a:extLst>
               <a:ext uri="{909E8E84-426E-40dd-AFC4-6F175D3DCCD1}">
-                <a14:hiddenFill xmlns:a14="http://schemas.microsoft.com/office/drawing/2010/main" xmlns="">
+                <a14:hiddenFill xmlns="" xmlns:a14="http://schemas.microsoft.com/office/drawing/2010/main">
                   <a:noFill/>
                 </a14:hiddenFill>
               </a:ext>
               <a:ext uri="{AF507438-7753-43e0-B8FC-AC1667EBCBE1}">
-                <a14:hiddenEffects xmlns:a14="http://schemas.microsoft.com/office/drawing/2010/main" xmlns="">
+                <a14:hiddenEffects xmlns="" xmlns:a14="http://schemas.microsoft.com/office/drawing/2010/main">
                   <a:effectLst>
                     <a:outerShdw blurRad="63500" dist="38099" dir="2700000" algn="ctr" rotWithShape="0">
                       <a:schemeClr val="bg2">
@@ -34148,7 +34695,7 @@
               <a:effectLst/>
               <a:extLst>
                 <a:ext uri="{91240B29-F687-4f45-9708-019B960494DF}">
-                  <a14:hiddenLine xmlns:a14="http://schemas.microsoft.com/office/drawing/2010/main" xmlns="" w="9525">
+                  <a14:hiddenLine xmlns="" xmlns:a14="http://schemas.microsoft.com/office/drawing/2010/main" w="9525">
                     <a:solidFill>
                       <a:schemeClr val="tx1"/>
                     </a:solidFill>
@@ -34158,7 +34705,7 @@
                   </a14:hiddenLine>
                 </a:ext>
                 <a:ext uri="{AF507438-7753-43e0-B8FC-AC1667EBCBE1}">
-                  <a14:hiddenEffects xmlns:a14="http://schemas.microsoft.com/office/drawing/2010/main" xmlns="">
+                  <a14:hiddenEffects xmlns="" xmlns:a14="http://schemas.microsoft.com/office/drawing/2010/main">
                     <a:effectLst>
                       <a:outerShdw blurRad="63500" dist="38099" dir="2700000" algn="ctr" rotWithShape="0">
                         <a:schemeClr val="bg2">
@@ -34237,14 +34784,14 @@
               <a:effectLst/>
               <a:extLst>
                 <a:ext uri="{909E8E84-426E-40dd-AFC4-6F175D3DCCD1}">
-                  <a14:hiddenFill xmlns:a14="http://schemas.microsoft.com/office/drawing/2010/main" xmlns="">
+                  <a14:hiddenFill xmlns="" xmlns:a14="http://schemas.microsoft.com/office/drawing/2010/main">
                     <a:solidFill>
                       <a:srgbClr val="FFFFFF"/>
                     </a:solidFill>
                   </a14:hiddenFill>
                 </a:ext>
                 <a:ext uri="{91240B29-F687-4f45-9708-019B960494DF}">
-                  <a14:hiddenLine xmlns:a14="http://schemas.microsoft.com/office/drawing/2010/main" xmlns="" w="9525">
+                  <a14:hiddenLine xmlns="" xmlns:a14="http://schemas.microsoft.com/office/drawing/2010/main" w="9525">
                     <a:solidFill>
                       <a:schemeClr val="tx1"/>
                     </a:solidFill>
@@ -34254,7 +34801,7 @@
                   </a14:hiddenLine>
                 </a:ext>
                 <a:ext uri="{AF507438-7753-43e0-B8FC-AC1667EBCBE1}">
-                  <a14:hiddenEffects xmlns:a14="http://schemas.microsoft.com/office/drawing/2010/main" xmlns="">
+                  <a14:hiddenEffects xmlns="" xmlns:a14="http://schemas.microsoft.com/office/drawing/2010/main">
                     <a:effectLst>
                       <a:outerShdw blurRad="63500" dist="38099" dir="2700000" algn="ctr" rotWithShape="0">
                         <a:schemeClr val="bg2">
@@ -34440,12 +34987,12 @@
             <a:effectLst/>
             <a:extLst>
               <a:ext uri="{909E8E84-426E-40dd-AFC4-6F175D3DCCD1}">
-                <a14:hiddenFill xmlns:a14="http://schemas.microsoft.com/office/drawing/2010/main" xmlns="">
+                <a14:hiddenFill xmlns="" xmlns:a14="http://schemas.microsoft.com/office/drawing/2010/main">
                   <a:noFill/>
                 </a14:hiddenFill>
               </a:ext>
               <a:ext uri="{AF507438-7753-43e0-B8FC-AC1667EBCBE1}">
-                <a14:hiddenEffects xmlns:a14="http://schemas.microsoft.com/office/drawing/2010/main" xmlns="">
+                <a14:hiddenEffects xmlns="" xmlns:a14="http://schemas.microsoft.com/office/drawing/2010/main">
                   <a:effectLst>
                     <a:outerShdw blurRad="63500" dist="38099" dir="2700000" algn="ctr" rotWithShape="0">
                       <a:schemeClr val="bg2">
@@ -34548,7 +35095,7 @@
               <a:effectLst/>
               <a:extLst>
                 <a:ext uri="{91240B29-F687-4f45-9708-019B960494DF}">
-                  <a14:hiddenLine xmlns:a14="http://schemas.microsoft.com/office/drawing/2010/main" xmlns="" w="9525">
+                  <a14:hiddenLine xmlns="" xmlns:a14="http://schemas.microsoft.com/office/drawing/2010/main" w="9525">
                     <a:solidFill>
                       <a:schemeClr val="tx1"/>
                     </a:solidFill>
@@ -34558,7 +35105,7 @@
                   </a14:hiddenLine>
                 </a:ext>
                 <a:ext uri="{AF507438-7753-43e0-B8FC-AC1667EBCBE1}">
-                  <a14:hiddenEffects xmlns:a14="http://schemas.microsoft.com/office/drawing/2010/main" xmlns="">
+                  <a14:hiddenEffects xmlns="" xmlns:a14="http://schemas.microsoft.com/office/drawing/2010/main">
                     <a:effectLst>
                       <a:outerShdw blurRad="63500" dist="38099" dir="2700000" algn="ctr" rotWithShape="0">
                         <a:schemeClr val="bg2">
@@ -34637,14 +35184,14 @@
               <a:effectLst/>
               <a:extLst>
                 <a:ext uri="{909E8E84-426E-40dd-AFC4-6F175D3DCCD1}">
-                  <a14:hiddenFill xmlns:a14="http://schemas.microsoft.com/office/drawing/2010/main" xmlns="">
+                  <a14:hiddenFill xmlns="" xmlns:a14="http://schemas.microsoft.com/office/drawing/2010/main">
                     <a:solidFill>
                       <a:srgbClr val="FFFFFF"/>
                     </a:solidFill>
                   </a14:hiddenFill>
                 </a:ext>
                 <a:ext uri="{91240B29-F687-4f45-9708-019B960494DF}">
-                  <a14:hiddenLine xmlns:a14="http://schemas.microsoft.com/office/drawing/2010/main" xmlns="" w="9525">
+                  <a14:hiddenLine xmlns="" xmlns:a14="http://schemas.microsoft.com/office/drawing/2010/main" w="9525">
                     <a:solidFill>
                       <a:schemeClr val="tx1"/>
                     </a:solidFill>
@@ -34654,7 +35201,7 @@
                   </a14:hiddenLine>
                 </a:ext>
                 <a:ext uri="{AF507438-7753-43e0-B8FC-AC1667EBCBE1}">
-                  <a14:hiddenEffects xmlns:a14="http://schemas.microsoft.com/office/drawing/2010/main" xmlns="">
+                  <a14:hiddenEffects xmlns="" xmlns:a14="http://schemas.microsoft.com/office/drawing/2010/main">
                     <a:effectLst>
                       <a:outerShdw blurRad="63500" dist="38099" dir="2700000" algn="ctr" rotWithShape="0">
                         <a:schemeClr val="bg2">
@@ -35306,7 +35853,7 @@
           <a:effectLst/>
           <a:extLst>
             <a:ext uri="{91240B29-F687-4f45-9708-019B960494DF}">
-              <a14:hiddenLine xmlns:a14="http://schemas.microsoft.com/office/drawing/2010/main" xmlns="" w="9525">
+              <a14:hiddenLine xmlns="" xmlns:a14="http://schemas.microsoft.com/office/drawing/2010/main" w="9525">
                 <a:solidFill>
                   <a:schemeClr val="tx1"/>
                 </a:solidFill>
@@ -35316,7 +35863,7 @@
               </a14:hiddenLine>
             </a:ext>
             <a:ext uri="{AF507438-7753-43e0-B8FC-AC1667EBCBE1}">
-              <a14:hiddenEffects xmlns:a14="http://schemas.microsoft.com/office/drawing/2010/main" xmlns="">
+              <a14:hiddenEffects xmlns="" xmlns:a14="http://schemas.microsoft.com/office/drawing/2010/main">
                 <a:effectLst>
                   <a:outerShdw blurRad="63500" dist="38099" dir="2700000" algn="ctr" rotWithShape="0">
                     <a:schemeClr val="bg2">
@@ -35420,12 +35967,12 @@
             <a:effectLst/>
             <a:extLst>
               <a:ext uri="{909E8E84-426E-40dd-AFC4-6F175D3DCCD1}">
-                <a14:hiddenFill xmlns:a14="http://schemas.microsoft.com/office/drawing/2010/main" xmlns="">
+                <a14:hiddenFill xmlns="" xmlns:a14="http://schemas.microsoft.com/office/drawing/2010/main">
                   <a:noFill/>
                 </a14:hiddenFill>
               </a:ext>
               <a:ext uri="{AF507438-7753-43e0-B8FC-AC1667EBCBE1}">
-                <a14:hiddenEffects xmlns:a14="http://schemas.microsoft.com/office/drawing/2010/main" xmlns="">
+                <a14:hiddenEffects xmlns="" xmlns:a14="http://schemas.microsoft.com/office/drawing/2010/main">
                   <a:effectLst>
                     <a:outerShdw blurRad="63500" dist="38099" dir="2700000" algn="ctr" rotWithShape="0">
                       <a:schemeClr val="bg2">
@@ -35506,14 +36053,14 @@
             <a:effectLst/>
             <a:extLst>
               <a:ext uri="{909E8E84-426E-40dd-AFC4-6F175D3DCCD1}">
-                <a14:hiddenFill xmlns:a14="http://schemas.microsoft.com/office/drawing/2010/main" xmlns="">
+                <a14:hiddenFill xmlns="" xmlns:a14="http://schemas.microsoft.com/office/drawing/2010/main">
                   <a:solidFill>
                     <a:srgbClr val="FFFFFF"/>
                   </a:solidFill>
                 </a14:hiddenFill>
               </a:ext>
               <a:ext uri="{91240B29-F687-4f45-9708-019B960494DF}">
-                <a14:hiddenLine xmlns:a14="http://schemas.microsoft.com/office/drawing/2010/main" xmlns="" w="9525">
+                <a14:hiddenLine xmlns="" xmlns:a14="http://schemas.microsoft.com/office/drawing/2010/main" w="9525">
                   <a:solidFill>
                     <a:schemeClr val="tx1"/>
                   </a:solidFill>
@@ -35523,7 +36070,7 @@
                 </a14:hiddenLine>
               </a:ext>
               <a:ext uri="{AF507438-7753-43e0-B8FC-AC1667EBCBE1}">
-                <a14:hiddenEffects xmlns:a14="http://schemas.microsoft.com/office/drawing/2010/main" xmlns="">
+                <a14:hiddenEffects xmlns="" xmlns:a14="http://schemas.microsoft.com/office/drawing/2010/main">
                   <a:effectLst>
                     <a:outerShdw blurRad="63500" dist="38099" dir="2700000" algn="ctr" rotWithShape="0">
                       <a:schemeClr val="bg2">
@@ -36016,7 +36563,7 @@
 </p:sld>
 </file>
 
-<file path=ppt/slides/slide22.xml><?xml version="1.0" encoding="utf-8"?>
+<file path=ppt/slides/slide23.xml><?xml version="1.0" encoding="utf-8"?>
 <p:sld xmlns:a="http://schemas.openxmlformats.org/drawingml/2006/main" xmlns:r="http://schemas.openxmlformats.org/officeDocument/2006/relationships" xmlns:p="http://schemas.openxmlformats.org/presentationml/2006/main">
   <p:cSld>
     <p:spTree>
@@ -36095,7 +36642,7 @@
             <a:fld id="{EA7C8D44-3667-46F6-9772-CC52308E2A7F}" type="slidenum">
               <a:rPr kumimoji="0" lang="en-US" smtClean="0"/>
               <a:pPr/>
-              <a:t>22</a:t>
+              <a:t>23</a:t>
             </a:fld>
             <a:endParaRPr kumimoji="0" lang="en-US" dirty="0"/>
           </a:p>
@@ -36317,7 +36864,7 @@
 </p:sld>
 </file>
 
-<file path=ppt/slides/slide23.xml><?xml version="1.0" encoding="utf-8"?>
+<file path=ppt/slides/slide24.xml><?xml version="1.0" encoding="utf-8"?>
 <p:sld xmlns:a="http://schemas.openxmlformats.org/drawingml/2006/main" xmlns:r="http://schemas.openxmlformats.org/officeDocument/2006/relationships" xmlns:p="http://schemas.openxmlformats.org/presentationml/2006/main">
   <p:cSld>
     <p:spTree>
@@ -36432,7 +36979,7 @@
             <a:fld id="{EA7C8D44-3667-46F6-9772-CC52308E2A7F}" type="slidenum">
               <a:rPr kumimoji="0" lang="en-US" smtClean="0"/>
               <a:pPr/>
-              <a:t>23</a:t>
+              <a:t>24</a:t>
             </a:fld>
             <a:endParaRPr kumimoji="0" lang="en-US" dirty="0"/>
           </a:p>
@@ -36685,7 +37232,7 @@
 </p:sld>
 </file>
 
-<file path=ppt/slides/slide24.xml><?xml version="1.0" encoding="utf-8"?>
+<file path=ppt/slides/slide25.xml><?xml version="1.0" encoding="utf-8"?>
 <p:sld xmlns:a="http://schemas.openxmlformats.org/drawingml/2006/main" xmlns:r="http://schemas.openxmlformats.org/officeDocument/2006/relationships" xmlns:p="http://schemas.openxmlformats.org/presentationml/2006/main">
   <p:cSld>
     <p:spTree>
@@ -38876,7 +39423,7 @@
             <a:fld id="{EA7C8D44-3667-46F6-9772-CC52308E2A7F}" type="slidenum">
               <a:rPr kumimoji="0" lang="en-US" smtClean="0"/>
               <a:pPr/>
-              <a:t>24</a:t>
+              <a:t>25</a:t>
             </a:fld>
             <a:endParaRPr kumimoji="0" lang="en-US" dirty="0"/>
           </a:p>
@@ -38907,7 +39454,7 @@
 </p:sld>
 </file>
 
-<file path=ppt/slides/slide25.xml><?xml version="1.0" encoding="utf-8"?>
+<file path=ppt/slides/slide26.xml><?xml version="1.0" encoding="utf-8"?>
 <p:sld xmlns:a="http://schemas.openxmlformats.org/drawingml/2006/main" xmlns:r="http://schemas.openxmlformats.org/officeDocument/2006/relationships" xmlns:p="http://schemas.openxmlformats.org/presentationml/2006/main">
   <p:cSld>
     <p:spTree>
@@ -40872,7 +41419,7 @@
             <a:fld id="{EA7C8D44-3667-46F6-9772-CC52308E2A7F}" type="slidenum">
               <a:rPr kumimoji="0" lang="en-US" smtClean="0"/>
               <a:pPr/>
-              <a:t>25</a:t>
+              <a:t>26</a:t>
             </a:fld>
             <a:endParaRPr kumimoji="0" lang="en-US" dirty="0"/>
           </a:p>
@@ -40903,7 +41450,7 @@
 </p:sld>
 </file>
 
-<file path=ppt/slides/slide26.xml><?xml version="1.0" encoding="utf-8"?>
+<file path=ppt/slides/slide27.xml><?xml version="1.0" encoding="utf-8"?>
 <p:sld xmlns:a="http://schemas.openxmlformats.org/drawingml/2006/main" xmlns:r="http://schemas.openxmlformats.org/officeDocument/2006/relationships" xmlns:p="http://schemas.openxmlformats.org/presentationml/2006/main">
   <p:cSld>
     <p:spTree>
@@ -42678,7 +43225,7 @@
             <a:fld id="{EA7C8D44-3667-46F6-9772-CC52308E2A7F}" type="slidenum">
               <a:rPr kumimoji="0" lang="en-US" smtClean="0"/>
               <a:pPr/>
-              <a:t>26</a:t>
+              <a:t>27</a:t>
             </a:fld>
             <a:endParaRPr kumimoji="0" lang="en-US" dirty="0"/>
           </a:p>
@@ -42709,7 +43256,7 @@
 </p:sld>
 </file>
 
-<file path=ppt/slides/slide27.xml><?xml version="1.0" encoding="utf-8"?>
+<file path=ppt/slides/slide28.xml><?xml version="1.0" encoding="utf-8"?>
 <p:sld xmlns:a="http://schemas.openxmlformats.org/drawingml/2006/main" xmlns:r="http://schemas.openxmlformats.org/officeDocument/2006/relationships" xmlns:p="http://schemas.openxmlformats.org/presentationml/2006/main">
   <p:cSld>
     <p:spTree>
@@ -42825,7 +43372,7 @@
             <a:fld id="{EA7C8D44-3667-46F6-9772-CC52308E2A7F}" type="slidenum">
               <a:rPr kumimoji="0" lang="en-US" smtClean="0"/>
               <a:pPr/>
-              <a:t>27</a:t>
+              <a:t>28</a:t>
             </a:fld>
             <a:endParaRPr kumimoji="0" lang="en-US" dirty="0"/>
           </a:p>
@@ -42856,7 +43403,7 @@
 </p:sld>
 </file>
 
-<file path=ppt/slides/slide28.xml><?xml version="1.0" encoding="utf-8"?>
+<file path=ppt/slides/slide29.xml><?xml version="1.0" encoding="utf-8"?>
 <p:sld xmlns:a="http://schemas.openxmlformats.org/drawingml/2006/main" xmlns:r="http://schemas.openxmlformats.org/officeDocument/2006/relationships" xmlns:p="http://schemas.openxmlformats.org/presentationml/2006/main">
   <p:cSld>
     <p:spTree>
@@ -43038,7 +43585,7 @@
             <a:fld id="{EA7C8D44-3667-46F6-9772-CC52308E2A7F}" type="slidenum">
               <a:rPr kumimoji="0" lang="en-US" smtClean="0"/>
               <a:pPr/>
-              <a:t>28</a:t>
+              <a:t>29</a:t>
             </a:fld>
             <a:endParaRPr kumimoji="0" lang="en-US" dirty="0"/>
           </a:p>

--- a/Exams/CSC175  Sp26 Final Exam Sample Questions ANS.pptx
+++ b/Exams/CSC175  Sp26 Final Exam Sample Questions ANS.pptx
@@ -2446,7 +2446,10 @@
             </a:r>
           </a:p>
           <a:p>
-            <a:endParaRPr lang="en-GB" dirty="0"/>
+            <a:r>
+              <a:rPr lang="en-GB" dirty="0"/>
+              <a:t>010111010</a:t>
+            </a:r>
           </a:p>
           <a:p>
             <a:r>
@@ -27853,14 +27856,14 @@
           <a:effectLst/>
           <a:extLst>
             <a:ext uri="{909E8E84-426E-40dd-AFC4-6F175D3DCCD1}">
-              <a14:hiddenFill xmlns="" xmlns:a14="http://schemas.microsoft.com/office/drawing/2010/main">
+              <a14:hiddenFill xmlns:a14="http://schemas.microsoft.com/office/drawing/2010/main" xmlns="">
                 <a:solidFill>
                   <a:srgbClr val="FFFFFF"/>
                 </a:solidFill>
               </a14:hiddenFill>
             </a:ext>
             <a:ext uri="{91240B29-F687-4f45-9708-019B960494DF}">
-              <a14:hiddenLine xmlns="" xmlns:a14="http://schemas.microsoft.com/office/drawing/2010/main" w="9525">
+              <a14:hiddenLine xmlns:a14="http://schemas.microsoft.com/office/drawing/2010/main" xmlns="" w="9525">
                 <a:solidFill>
                   <a:schemeClr val="tx1"/>
                 </a:solidFill>
@@ -27870,7 +27873,7 @@
               </a14:hiddenLine>
             </a:ext>
             <a:ext uri="{AF507438-7753-43e0-B8FC-AC1667EBCBE1}">
-              <a14:hiddenEffects xmlns="" xmlns:a14="http://schemas.microsoft.com/office/drawing/2010/main">
+              <a14:hiddenEffects xmlns:a14="http://schemas.microsoft.com/office/drawing/2010/main" xmlns="">
                 <a:effectLst>
                   <a:outerShdw blurRad="63500" dist="38099" dir="2700000" algn="ctr" rotWithShape="0">
                     <a:schemeClr val="bg2">
@@ -28060,14 +28063,14 @@
           <a:effectLst/>
           <a:extLst>
             <a:ext uri="{909E8E84-426E-40dd-AFC4-6F175D3DCCD1}">
-              <a14:hiddenFill xmlns="" xmlns:a14="http://schemas.microsoft.com/office/drawing/2010/main">
+              <a14:hiddenFill xmlns:a14="http://schemas.microsoft.com/office/drawing/2010/main" xmlns="">
                 <a:solidFill>
                   <a:srgbClr val="FFFFFF"/>
                 </a:solidFill>
               </a14:hiddenFill>
             </a:ext>
             <a:ext uri="{91240B29-F687-4f45-9708-019B960494DF}">
-              <a14:hiddenLine xmlns="" xmlns:a14="http://schemas.microsoft.com/office/drawing/2010/main" w="9525">
+              <a14:hiddenLine xmlns:a14="http://schemas.microsoft.com/office/drawing/2010/main" xmlns="" w="9525">
                 <a:solidFill>
                   <a:schemeClr val="tx1"/>
                 </a:solidFill>
@@ -28077,7 +28080,7 @@
               </a14:hiddenLine>
             </a:ext>
             <a:ext uri="{AF507438-7753-43e0-B8FC-AC1667EBCBE1}">
-              <a14:hiddenEffects xmlns="" xmlns:a14="http://schemas.microsoft.com/office/drawing/2010/main">
+              <a14:hiddenEffects xmlns:a14="http://schemas.microsoft.com/office/drawing/2010/main" xmlns="">
                 <a:effectLst>
                   <a:outerShdw blurRad="63500" dist="38099" dir="2700000" algn="ctr" rotWithShape="0">
                     <a:schemeClr val="bg2">
@@ -28272,12 +28275,12 @@
           <a:effectLst/>
           <a:extLst>
             <a:ext uri="{909E8E84-426E-40dd-AFC4-6F175D3DCCD1}">
-              <a14:hiddenFill xmlns="" xmlns:a14="http://schemas.microsoft.com/office/drawing/2010/main">
+              <a14:hiddenFill xmlns:a14="http://schemas.microsoft.com/office/drawing/2010/main" xmlns="">
                 <a:noFill/>
               </a14:hiddenFill>
             </a:ext>
             <a:ext uri="{AF507438-7753-43e0-B8FC-AC1667EBCBE1}">
-              <a14:hiddenEffects xmlns="" xmlns:a14="http://schemas.microsoft.com/office/drawing/2010/main">
+              <a14:hiddenEffects xmlns:a14="http://schemas.microsoft.com/office/drawing/2010/main" xmlns="">
                 <a:effectLst>
                   <a:outerShdw blurRad="63500" dist="38099" dir="2700000" algn="ctr" rotWithShape="0">
                     <a:schemeClr val="bg2">
@@ -28361,12 +28364,12 @@
           <a:effectLst/>
           <a:extLst>
             <a:ext uri="{909E8E84-426E-40dd-AFC4-6F175D3DCCD1}">
-              <a14:hiddenFill xmlns="" xmlns:a14="http://schemas.microsoft.com/office/drawing/2010/main">
+              <a14:hiddenFill xmlns:a14="http://schemas.microsoft.com/office/drawing/2010/main" xmlns="">
                 <a:noFill/>
               </a14:hiddenFill>
             </a:ext>
             <a:ext uri="{AF507438-7753-43e0-B8FC-AC1667EBCBE1}">
-              <a14:hiddenEffects xmlns="" xmlns:a14="http://schemas.microsoft.com/office/drawing/2010/main">
+              <a14:hiddenEffects xmlns:a14="http://schemas.microsoft.com/office/drawing/2010/main" xmlns="">
                 <a:effectLst>
                   <a:outerShdw blurRad="63500" dist="38099" dir="2700000" algn="ctr" rotWithShape="0">
                     <a:schemeClr val="bg2">
@@ -28447,7 +28450,7 @@
           <a:effectLst/>
           <a:extLst>
             <a:ext uri="{91240B29-F687-4f45-9708-019B960494DF}">
-              <a14:hiddenLine xmlns="" xmlns:a14="http://schemas.microsoft.com/office/drawing/2010/main" w="9525">
+              <a14:hiddenLine xmlns:a14="http://schemas.microsoft.com/office/drawing/2010/main" xmlns="" w="9525">
                 <a:solidFill>
                   <a:schemeClr val="tx1"/>
                 </a:solidFill>
@@ -28457,7 +28460,7 @@
               </a14:hiddenLine>
             </a:ext>
             <a:ext uri="{AF507438-7753-43e0-B8FC-AC1667EBCBE1}">
-              <a14:hiddenEffects xmlns="" xmlns:a14="http://schemas.microsoft.com/office/drawing/2010/main">
+              <a14:hiddenEffects xmlns:a14="http://schemas.microsoft.com/office/drawing/2010/main" xmlns="">
                 <a:effectLst>
                   <a:outerShdw blurRad="63500" dist="38099" dir="2700000" algn="ctr" rotWithShape="0">
                     <a:schemeClr val="bg2">
@@ -28561,12 +28564,12 @@
             <a:effectLst/>
             <a:extLst>
               <a:ext uri="{909E8E84-426E-40dd-AFC4-6F175D3DCCD1}">
-                <a14:hiddenFill xmlns="" xmlns:a14="http://schemas.microsoft.com/office/drawing/2010/main">
+                <a14:hiddenFill xmlns:a14="http://schemas.microsoft.com/office/drawing/2010/main" xmlns="">
                   <a:noFill/>
                 </a14:hiddenFill>
               </a:ext>
               <a:ext uri="{AF507438-7753-43e0-B8FC-AC1667EBCBE1}">
-                <a14:hiddenEffects xmlns="" xmlns:a14="http://schemas.microsoft.com/office/drawing/2010/main">
+                <a14:hiddenEffects xmlns:a14="http://schemas.microsoft.com/office/drawing/2010/main" xmlns="">
                   <a:effectLst>
                     <a:outerShdw blurRad="63500" dist="38099" dir="2700000" algn="ctr" rotWithShape="0">
                       <a:schemeClr val="bg2">
@@ -28647,14 +28650,14 @@
             <a:effectLst/>
             <a:extLst>
               <a:ext uri="{909E8E84-426E-40dd-AFC4-6F175D3DCCD1}">
-                <a14:hiddenFill xmlns="" xmlns:a14="http://schemas.microsoft.com/office/drawing/2010/main">
+                <a14:hiddenFill xmlns:a14="http://schemas.microsoft.com/office/drawing/2010/main" xmlns="">
                   <a:solidFill>
                     <a:srgbClr val="FFFFFF"/>
                   </a:solidFill>
                 </a14:hiddenFill>
               </a:ext>
               <a:ext uri="{91240B29-F687-4f45-9708-019B960494DF}">
-                <a14:hiddenLine xmlns="" xmlns:a14="http://schemas.microsoft.com/office/drawing/2010/main" w="9525">
+                <a14:hiddenLine xmlns:a14="http://schemas.microsoft.com/office/drawing/2010/main" xmlns="" w="9525">
                   <a:solidFill>
                     <a:schemeClr val="tx1"/>
                   </a:solidFill>
@@ -28664,7 +28667,7 @@
                 </a14:hiddenLine>
               </a:ext>
               <a:ext uri="{AF507438-7753-43e0-B8FC-AC1667EBCBE1}">
-                <a14:hiddenEffects xmlns="" xmlns:a14="http://schemas.microsoft.com/office/drawing/2010/main">
+                <a14:hiddenEffects xmlns:a14="http://schemas.microsoft.com/office/drawing/2010/main" xmlns="">
                   <a:effectLst>
                     <a:outerShdw blurRad="63500" dist="38099" dir="2700000" algn="ctr" rotWithShape="0">
                       <a:schemeClr val="bg2">
@@ -28857,7 +28860,7 @@
           <a:effectLst/>
           <a:extLst>
             <a:ext uri="{91240B29-F687-4f45-9708-019B960494DF}">
-              <a14:hiddenLine xmlns="" xmlns:a14="http://schemas.microsoft.com/office/drawing/2010/main" w="9525">
+              <a14:hiddenLine xmlns:a14="http://schemas.microsoft.com/office/drawing/2010/main" xmlns="" w="9525">
                 <a:solidFill>
                   <a:schemeClr val="tx1"/>
                 </a:solidFill>
@@ -28867,7 +28870,7 @@
               </a14:hiddenLine>
             </a:ext>
             <a:ext uri="{AF507438-7753-43e0-B8FC-AC1667EBCBE1}">
-              <a14:hiddenEffects xmlns="" xmlns:a14="http://schemas.microsoft.com/office/drawing/2010/main">
+              <a14:hiddenEffects xmlns:a14="http://schemas.microsoft.com/office/drawing/2010/main" xmlns="">
                 <a:effectLst>
                   <a:outerShdw blurRad="63500" dist="38099" dir="2700000" algn="ctr" rotWithShape="0">
                     <a:schemeClr val="bg2">
@@ -28971,12 +28974,12 @@
             <a:effectLst/>
             <a:extLst>
               <a:ext uri="{909E8E84-426E-40dd-AFC4-6F175D3DCCD1}">
-                <a14:hiddenFill xmlns="" xmlns:a14="http://schemas.microsoft.com/office/drawing/2010/main">
+                <a14:hiddenFill xmlns:a14="http://schemas.microsoft.com/office/drawing/2010/main" xmlns="">
                   <a:noFill/>
                 </a14:hiddenFill>
               </a:ext>
               <a:ext uri="{AF507438-7753-43e0-B8FC-AC1667EBCBE1}">
-                <a14:hiddenEffects xmlns="" xmlns:a14="http://schemas.microsoft.com/office/drawing/2010/main">
+                <a14:hiddenEffects xmlns:a14="http://schemas.microsoft.com/office/drawing/2010/main" xmlns="">
                   <a:effectLst>
                     <a:outerShdw blurRad="63500" dist="38099" dir="2700000" algn="ctr" rotWithShape="0">
                       <a:schemeClr val="bg2">
@@ -29057,14 +29060,14 @@
             <a:effectLst/>
             <a:extLst>
               <a:ext uri="{909E8E84-426E-40dd-AFC4-6F175D3DCCD1}">
-                <a14:hiddenFill xmlns="" xmlns:a14="http://schemas.microsoft.com/office/drawing/2010/main">
+                <a14:hiddenFill xmlns:a14="http://schemas.microsoft.com/office/drawing/2010/main" xmlns="">
                   <a:solidFill>
                     <a:srgbClr val="FFFFFF"/>
                   </a:solidFill>
                 </a14:hiddenFill>
               </a:ext>
               <a:ext uri="{91240B29-F687-4f45-9708-019B960494DF}">
-                <a14:hiddenLine xmlns="" xmlns:a14="http://schemas.microsoft.com/office/drawing/2010/main" w="9525">
+                <a14:hiddenLine xmlns:a14="http://schemas.microsoft.com/office/drawing/2010/main" xmlns="" w="9525">
                   <a:solidFill>
                     <a:schemeClr val="tx1"/>
                   </a:solidFill>
@@ -29074,7 +29077,7 @@
                 </a14:hiddenLine>
               </a:ext>
               <a:ext uri="{AF507438-7753-43e0-B8FC-AC1667EBCBE1}">
-                <a14:hiddenEffects xmlns="" xmlns:a14="http://schemas.microsoft.com/office/drawing/2010/main">
+                <a14:hiddenEffects xmlns:a14="http://schemas.microsoft.com/office/drawing/2010/main" xmlns="">
                   <a:effectLst>
                     <a:outerShdw blurRad="63500" dist="38099" dir="2700000" algn="ctr" rotWithShape="0">
                       <a:schemeClr val="bg2">
@@ -29269,14 +29272,14 @@
             <a:effectLst/>
             <a:extLst>
               <a:ext uri="{909E8E84-426E-40dd-AFC4-6F175D3DCCD1}">
-                <a14:hiddenFill xmlns="" xmlns:a14="http://schemas.microsoft.com/office/drawing/2010/main">
+                <a14:hiddenFill xmlns:a14="http://schemas.microsoft.com/office/drawing/2010/main" xmlns="">
                   <a:solidFill>
                     <a:schemeClr val="accent1"/>
                   </a:solidFill>
                 </a14:hiddenFill>
               </a:ext>
               <a:ext uri="{91240B29-F687-4f45-9708-019B960494DF}">
-                <a14:hiddenLine xmlns="" xmlns:a14="http://schemas.microsoft.com/office/drawing/2010/main" w="9525">
+                <a14:hiddenLine xmlns:a14="http://schemas.microsoft.com/office/drawing/2010/main" xmlns="" w="9525">
                   <a:solidFill>
                     <a:schemeClr val="tx1"/>
                   </a:solidFill>
@@ -29286,7 +29289,7 @@
                 </a14:hiddenLine>
               </a:ext>
               <a:ext uri="{AF507438-7753-43e0-B8FC-AC1667EBCBE1}">
-                <a14:hiddenEffects xmlns="" xmlns:a14="http://schemas.microsoft.com/office/drawing/2010/main">
+                <a14:hiddenEffects xmlns:a14="http://schemas.microsoft.com/office/drawing/2010/main" xmlns="">
                   <a:effectLst>
                     <a:outerShdw blurRad="63500" dist="38099" dir="2700000" algn="ctr" rotWithShape="0">
                       <a:schemeClr val="bg2">
@@ -29503,12 +29506,12 @@
               <a:effectLst/>
               <a:extLst>
                 <a:ext uri="{909E8E84-426E-40dd-AFC4-6F175D3DCCD1}">
-                  <a14:hiddenFill xmlns="" xmlns:a14="http://schemas.microsoft.com/office/drawing/2010/main">
+                  <a14:hiddenFill xmlns:a14="http://schemas.microsoft.com/office/drawing/2010/main" xmlns="">
                     <a:noFill/>
                   </a14:hiddenFill>
                 </a:ext>
                 <a:ext uri="{AF507438-7753-43e0-B8FC-AC1667EBCBE1}">
-                  <a14:hiddenEffects xmlns="" xmlns:a14="http://schemas.microsoft.com/office/drawing/2010/main">
+                  <a14:hiddenEffects xmlns:a14="http://schemas.microsoft.com/office/drawing/2010/main" xmlns="">
                     <a:effectLst>
                       <a:outerShdw blurRad="63500" dist="38099" dir="2700000" algn="ctr" rotWithShape="0">
                         <a:schemeClr val="bg2">
@@ -29592,12 +29595,12 @@
               <a:effectLst/>
               <a:extLst>
                 <a:ext uri="{909E8E84-426E-40dd-AFC4-6F175D3DCCD1}">
-                  <a14:hiddenFill xmlns="" xmlns:a14="http://schemas.microsoft.com/office/drawing/2010/main">
+                  <a14:hiddenFill xmlns:a14="http://schemas.microsoft.com/office/drawing/2010/main" xmlns="">
                     <a:noFill/>
                   </a14:hiddenFill>
                 </a:ext>
                 <a:ext uri="{AF507438-7753-43e0-B8FC-AC1667EBCBE1}">
-                  <a14:hiddenEffects xmlns="" xmlns:a14="http://schemas.microsoft.com/office/drawing/2010/main">
+                  <a14:hiddenEffects xmlns:a14="http://schemas.microsoft.com/office/drawing/2010/main" xmlns="">
                     <a:effectLst>
                       <a:outerShdw blurRad="63500" dist="38099" dir="2700000" algn="ctr" rotWithShape="0">
                         <a:schemeClr val="bg2">
@@ -29704,12 +29707,12 @@
               <a:effectLst/>
               <a:extLst>
                 <a:ext uri="{909E8E84-426E-40dd-AFC4-6F175D3DCCD1}">
-                  <a14:hiddenFill xmlns="" xmlns:a14="http://schemas.microsoft.com/office/drawing/2010/main">
+                  <a14:hiddenFill xmlns:a14="http://schemas.microsoft.com/office/drawing/2010/main" xmlns="">
                     <a:noFill/>
                   </a14:hiddenFill>
                 </a:ext>
                 <a:ext uri="{AF507438-7753-43e0-B8FC-AC1667EBCBE1}">
-                  <a14:hiddenEffects xmlns="" xmlns:a14="http://schemas.microsoft.com/office/drawing/2010/main">
+                  <a14:hiddenEffects xmlns:a14="http://schemas.microsoft.com/office/drawing/2010/main" xmlns="">
                     <a:effectLst>
                       <a:outerShdw blurRad="63500" dist="38099" dir="2700000" algn="ctr" rotWithShape="0">
                         <a:schemeClr val="bg2">
@@ -29793,12 +29796,12 @@
               <a:effectLst/>
               <a:extLst>
                 <a:ext uri="{909E8E84-426E-40dd-AFC4-6F175D3DCCD1}">
-                  <a14:hiddenFill xmlns="" xmlns:a14="http://schemas.microsoft.com/office/drawing/2010/main">
+                  <a14:hiddenFill xmlns:a14="http://schemas.microsoft.com/office/drawing/2010/main" xmlns="">
                     <a:noFill/>
                   </a14:hiddenFill>
                 </a:ext>
                 <a:ext uri="{AF507438-7753-43e0-B8FC-AC1667EBCBE1}">
-                  <a14:hiddenEffects xmlns="" xmlns:a14="http://schemas.microsoft.com/office/drawing/2010/main">
+                  <a14:hiddenEffects xmlns:a14="http://schemas.microsoft.com/office/drawing/2010/main" xmlns="">
                     <a:effectLst>
                       <a:outerShdw blurRad="63500" dist="38099" dir="2700000" algn="ctr" rotWithShape="0">
                         <a:schemeClr val="bg2">
@@ -29904,12 +29907,12 @@
             <a:effectLst/>
             <a:extLst>
               <a:ext uri="{909E8E84-426E-40dd-AFC4-6F175D3DCCD1}">
-                <a14:hiddenFill xmlns="" xmlns:a14="http://schemas.microsoft.com/office/drawing/2010/main">
+                <a14:hiddenFill xmlns:a14="http://schemas.microsoft.com/office/drawing/2010/main" xmlns="">
                   <a:noFill/>
                 </a14:hiddenFill>
               </a:ext>
               <a:ext uri="{AF507438-7753-43e0-B8FC-AC1667EBCBE1}">
-                <a14:hiddenEffects xmlns="" xmlns:a14="http://schemas.microsoft.com/office/drawing/2010/main">
+                <a14:hiddenEffects xmlns:a14="http://schemas.microsoft.com/office/drawing/2010/main" xmlns="">
                   <a:effectLst>
                     <a:outerShdw blurRad="63500" dist="38099" dir="2700000" algn="ctr" rotWithShape="0">
                       <a:schemeClr val="bg2">
@@ -30012,7 +30015,7 @@
               <a:effectLst/>
               <a:extLst>
                 <a:ext uri="{91240B29-F687-4f45-9708-019B960494DF}">
-                  <a14:hiddenLine xmlns="" xmlns:a14="http://schemas.microsoft.com/office/drawing/2010/main" w="9525">
+                  <a14:hiddenLine xmlns:a14="http://schemas.microsoft.com/office/drawing/2010/main" xmlns="" w="9525">
                     <a:solidFill>
                       <a:schemeClr val="tx1"/>
                     </a:solidFill>
@@ -30022,7 +30025,7 @@
                   </a14:hiddenLine>
                 </a:ext>
                 <a:ext uri="{AF507438-7753-43e0-B8FC-AC1667EBCBE1}">
-                  <a14:hiddenEffects xmlns="" xmlns:a14="http://schemas.microsoft.com/office/drawing/2010/main">
+                  <a14:hiddenEffects xmlns:a14="http://schemas.microsoft.com/office/drawing/2010/main" xmlns="">
                     <a:effectLst>
                       <a:outerShdw blurRad="63500" dist="38099" dir="2700000" algn="ctr" rotWithShape="0">
                         <a:schemeClr val="bg2">
@@ -30101,14 +30104,14 @@
               <a:effectLst/>
               <a:extLst>
                 <a:ext uri="{909E8E84-426E-40dd-AFC4-6F175D3DCCD1}">
-                  <a14:hiddenFill xmlns="" xmlns:a14="http://schemas.microsoft.com/office/drawing/2010/main">
+                  <a14:hiddenFill xmlns:a14="http://schemas.microsoft.com/office/drawing/2010/main" xmlns="">
                     <a:solidFill>
                       <a:srgbClr val="FFFFFF"/>
                     </a:solidFill>
                   </a14:hiddenFill>
                 </a:ext>
                 <a:ext uri="{91240B29-F687-4f45-9708-019B960494DF}">
-                  <a14:hiddenLine xmlns="" xmlns:a14="http://schemas.microsoft.com/office/drawing/2010/main" w="9525">
+                  <a14:hiddenLine xmlns:a14="http://schemas.microsoft.com/office/drawing/2010/main" xmlns="" w="9525">
                     <a:solidFill>
                       <a:schemeClr val="tx1"/>
                     </a:solidFill>
@@ -30118,7 +30121,7 @@
                   </a14:hiddenLine>
                 </a:ext>
                 <a:ext uri="{AF507438-7753-43e0-B8FC-AC1667EBCBE1}">
-                  <a14:hiddenEffects xmlns="" xmlns:a14="http://schemas.microsoft.com/office/drawing/2010/main">
+                  <a14:hiddenEffects xmlns:a14="http://schemas.microsoft.com/office/drawing/2010/main" xmlns="">
                     <a:effectLst>
                       <a:outerShdw blurRad="63500" dist="38099" dir="2700000" algn="ctr" rotWithShape="0">
                         <a:schemeClr val="bg2">
@@ -30328,12 +30331,12 @@
             <a:effectLst/>
             <a:extLst>
               <a:ext uri="{909E8E84-426E-40dd-AFC4-6F175D3DCCD1}">
-                <a14:hiddenFill xmlns="" xmlns:a14="http://schemas.microsoft.com/office/drawing/2010/main">
+                <a14:hiddenFill xmlns:a14="http://schemas.microsoft.com/office/drawing/2010/main" xmlns="">
                   <a:noFill/>
                 </a14:hiddenFill>
               </a:ext>
               <a:ext uri="{AF507438-7753-43e0-B8FC-AC1667EBCBE1}">
-                <a14:hiddenEffects xmlns="" xmlns:a14="http://schemas.microsoft.com/office/drawing/2010/main">
+                <a14:hiddenEffects xmlns:a14="http://schemas.microsoft.com/office/drawing/2010/main" xmlns="">
                   <a:effectLst>
                     <a:outerShdw blurRad="63500" dist="38099" dir="2700000" algn="ctr" rotWithShape="0">
                       <a:schemeClr val="bg2">
@@ -30436,7 +30439,7 @@
               <a:effectLst/>
               <a:extLst>
                 <a:ext uri="{91240B29-F687-4f45-9708-019B960494DF}">
-                  <a14:hiddenLine xmlns="" xmlns:a14="http://schemas.microsoft.com/office/drawing/2010/main" w="9525">
+                  <a14:hiddenLine xmlns:a14="http://schemas.microsoft.com/office/drawing/2010/main" xmlns="" w="9525">
                     <a:solidFill>
                       <a:schemeClr val="tx1"/>
                     </a:solidFill>
@@ -30446,7 +30449,7 @@
                   </a14:hiddenLine>
                 </a:ext>
                 <a:ext uri="{AF507438-7753-43e0-B8FC-AC1667EBCBE1}">
-                  <a14:hiddenEffects xmlns="" xmlns:a14="http://schemas.microsoft.com/office/drawing/2010/main">
+                  <a14:hiddenEffects xmlns:a14="http://schemas.microsoft.com/office/drawing/2010/main" xmlns="">
                     <a:effectLst>
                       <a:outerShdw blurRad="63500" dist="38099" dir="2700000" algn="ctr" rotWithShape="0">
                         <a:schemeClr val="bg2">
@@ -30525,14 +30528,14 @@
               <a:effectLst/>
               <a:extLst>
                 <a:ext uri="{909E8E84-426E-40dd-AFC4-6F175D3DCCD1}">
-                  <a14:hiddenFill xmlns="" xmlns:a14="http://schemas.microsoft.com/office/drawing/2010/main">
+                  <a14:hiddenFill xmlns:a14="http://schemas.microsoft.com/office/drawing/2010/main" xmlns="">
                     <a:solidFill>
                       <a:srgbClr val="FFFFFF"/>
                     </a:solidFill>
                   </a14:hiddenFill>
                 </a:ext>
                 <a:ext uri="{91240B29-F687-4f45-9708-019B960494DF}">
-                  <a14:hiddenLine xmlns="" xmlns:a14="http://schemas.microsoft.com/office/drawing/2010/main" w="9525">
+                  <a14:hiddenLine xmlns:a14="http://schemas.microsoft.com/office/drawing/2010/main" xmlns="" w="9525">
                     <a:solidFill>
                       <a:schemeClr val="tx1"/>
                     </a:solidFill>
@@ -30542,7 +30545,7 @@
                   </a14:hiddenLine>
                 </a:ext>
                 <a:ext uri="{AF507438-7753-43e0-B8FC-AC1667EBCBE1}">
-                  <a14:hiddenEffects xmlns="" xmlns:a14="http://schemas.microsoft.com/office/drawing/2010/main">
+                  <a14:hiddenEffects xmlns:a14="http://schemas.microsoft.com/office/drawing/2010/main" xmlns="">
                     <a:effectLst>
                       <a:outerShdw blurRad="63500" dist="38099" dir="2700000" algn="ctr" rotWithShape="0">
                         <a:schemeClr val="bg2">
@@ -30759,12 +30762,12 @@
             <a:effectLst/>
             <a:extLst>
               <a:ext uri="{909E8E84-426E-40dd-AFC4-6F175D3DCCD1}">
-                <a14:hiddenFill xmlns="" xmlns:a14="http://schemas.microsoft.com/office/drawing/2010/main">
+                <a14:hiddenFill xmlns:a14="http://schemas.microsoft.com/office/drawing/2010/main" xmlns="">
                   <a:noFill/>
                 </a14:hiddenFill>
               </a:ext>
               <a:ext uri="{AF507438-7753-43e0-B8FC-AC1667EBCBE1}">
-                <a14:hiddenEffects xmlns="" xmlns:a14="http://schemas.microsoft.com/office/drawing/2010/main">
+                <a14:hiddenEffects xmlns:a14="http://schemas.microsoft.com/office/drawing/2010/main" xmlns="">
                   <a:effectLst>
                     <a:outerShdw blurRad="63500" dist="38099" dir="2700000" algn="ctr" rotWithShape="0">
                       <a:schemeClr val="bg2">
@@ -30845,7 +30848,7 @@
             <a:effectLst/>
             <a:extLst>
               <a:ext uri="{91240B29-F687-4f45-9708-019B960494DF}">
-                <a14:hiddenLine xmlns="" xmlns:a14="http://schemas.microsoft.com/office/drawing/2010/main" w="9525">
+                <a14:hiddenLine xmlns:a14="http://schemas.microsoft.com/office/drawing/2010/main" xmlns="" w="9525">
                   <a:solidFill>
                     <a:schemeClr val="tx1"/>
                   </a:solidFill>
@@ -30855,7 +30858,7 @@
                 </a14:hiddenLine>
               </a:ext>
               <a:ext uri="{AF507438-7753-43e0-B8FC-AC1667EBCBE1}">
-                <a14:hiddenEffects xmlns="" xmlns:a14="http://schemas.microsoft.com/office/drawing/2010/main">
+                <a14:hiddenEffects xmlns:a14="http://schemas.microsoft.com/office/drawing/2010/main" xmlns="">
                   <a:effectLst>
                     <a:outerShdw blurRad="63500" dist="38099" dir="2700000" algn="ctr" rotWithShape="0">
                       <a:schemeClr val="bg2">
@@ -30934,14 +30937,14 @@
             <a:effectLst/>
             <a:extLst>
               <a:ext uri="{909E8E84-426E-40dd-AFC4-6F175D3DCCD1}">
-                <a14:hiddenFill xmlns="" xmlns:a14="http://schemas.microsoft.com/office/drawing/2010/main">
+                <a14:hiddenFill xmlns:a14="http://schemas.microsoft.com/office/drawing/2010/main" xmlns="">
                   <a:solidFill>
                     <a:srgbClr val="FFFFFF"/>
                   </a:solidFill>
                 </a14:hiddenFill>
               </a:ext>
               <a:ext uri="{91240B29-F687-4f45-9708-019B960494DF}">
-                <a14:hiddenLine xmlns="" xmlns:a14="http://schemas.microsoft.com/office/drawing/2010/main" w="9525">
+                <a14:hiddenLine xmlns:a14="http://schemas.microsoft.com/office/drawing/2010/main" xmlns="" w="9525">
                   <a:solidFill>
                     <a:schemeClr val="tx1"/>
                   </a:solidFill>
@@ -30951,7 +30954,7 @@
                 </a14:hiddenLine>
               </a:ext>
               <a:ext uri="{AF507438-7753-43e0-B8FC-AC1667EBCBE1}">
-                <a14:hiddenEffects xmlns="" xmlns:a14="http://schemas.microsoft.com/office/drawing/2010/main">
+                <a14:hiddenEffects xmlns:a14="http://schemas.microsoft.com/office/drawing/2010/main" xmlns="">
                   <a:effectLst>
                     <a:outerShdw blurRad="63500" dist="38099" dir="2700000" algn="ctr" rotWithShape="0">
                       <a:schemeClr val="bg2">
@@ -31168,12 +31171,12 @@
               <a:effectLst/>
               <a:extLst>
                 <a:ext uri="{909E8E84-426E-40dd-AFC4-6F175D3DCCD1}">
-                  <a14:hiddenFill xmlns="" xmlns:a14="http://schemas.microsoft.com/office/drawing/2010/main">
+                  <a14:hiddenFill xmlns:a14="http://schemas.microsoft.com/office/drawing/2010/main" xmlns="">
                     <a:noFill/>
                   </a14:hiddenFill>
                 </a:ext>
                 <a:ext uri="{AF507438-7753-43e0-B8FC-AC1667EBCBE1}">
-                  <a14:hiddenEffects xmlns="" xmlns:a14="http://schemas.microsoft.com/office/drawing/2010/main">
+                  <a14:hiddenEffects xmlns:a14="http://schemas.microsoft.com/office/drawing/2010/main" xmlns="">
                     <a:effectLst>
                       <a:outerShdw blurRad="63500" dist="38099" dir="2700000" algn="ctr" rotWithShape="0">
                         <a:schemeClr val="bg2">
@@ -31254,7 +31257,7 @@
               <a:effectLst/>
               <a:extLst>
                 <a:ext uri="{91240B29-F687-4f45-9708-019B960494DF}">
-                  <a14:hiddenLine xmlns="" xmlns:a14="http://schemas.microsoft.com/office/drawing/2010/main" w="9525">
+                  <a14:hiddenLine xmlns:a14="http://schemas.microsoft.com/office/drawing/2010/main" xmlns="" w="9525">
                     <a:solidFill>
                       <a:schemeClr val="tx1"/>
                     </a:solidFill>
@@ -31264,7 +31267,7 @@
                   </a14:hiddenLine>
                 </a:ext>
                 <a:ext uri="{AF507438-7753-43e0-B8FC-AC1667EBCBE1}">
-                  <a14:hiddenEffects xmlns="" xmlns:a14="http://schemas.microsoft.com/office/drawing/2010/main">
+                  <a14:hiddenEffects xmlns:a14="http://schemas.microsoft.com/office/drawing/2010/main" xmlns="">
                     <a:effectLst>
                       <a:outerShdw blurRad="63500" dist="38099" dir="2700000" algn="ctr" rotWithShape="0">
                         <a:schemeClr val="bg2">
@@ -31343,14 +31346,14 @@
               <a:effectLst/>
               <a:extLst>
                 <a:ext uri="{909E8E84-426E-40dd-AFC4-6F175D3DCCD1}">
-                  <a14:hiddenFill xmlns="" xmlns:a14="http://schemas.microsoft.com/office/drawing/2010/main">
+                  <a14:hiddenFill xmlns:a14="http://schemas.microsoft.com/office/drawing/2010/main" xmlns="">
                     <a:solidFill>
                       <a:srgbClr val="FFFFFF"/>
                     </a:solidFill>
                   </a14:hiddenFill>
                 </a:ext>
                 <a:ext uri="{91240B29-F687-4f45-9708-019B960494DF}">
-                  <a14:hiddenLine xmlns="" xmlns:a14="http://schemas.microsoft.com/office/drawing/2010/main" w="9525">
+                  <a14:hiddenLine xmlns:a14="http://schemas.microsoft.com/office/drawing/2010/main" xmlns="" w="9525">
                     <a:solidFill>
                       <a:schemeClr val="tx1"/>
                     </a:solidFill>
@@ -31360,7 +31363,7 @@
                   </a14:hiddenLine>
                 </a:ext>
                 <a:ext uri="{AF507438-7753-43e0-B8FC-AC1667EBCBE1}">
-                  <a14:hiddenEffects xmlns="" xmlns:a14="http://schemas.microsoft.com/office/drawing/2010/main">
+                  <a14:hiddenEffects xmlns:a14="http://schemas.microsoft.com/office/drawing/2010/main" xmlns="">
                     <a:effectLst>
                       <a:outerShdw blurRad="63500" dist="38099" dir="2700000" algn="ctr" rotWithShape="0">
                         <a:schemeClr val="bg2">
@@ -32472,12 +32475,12 @@
           <a:effectLst/>
           <a:extLst>
             <a:ext uri="{909E8E84-426E-40dd-AFC4-6F175D3DCCD1}">
-              <a14:hiddenFill xmlns="" xmlns:a14="http://schemas.microsoft.com/office/drawing/2010/main">
+              <a14:hiddenFill xmlns:a14="http://schemas.microsoft.com/office/drawing/2010/main" xmlns="">
                 <a:noFill/>
               </a14:hiddenFill>
             </a:ext>
             <a:ext uri="{AF507438-7753-43e0-B8FC-AC1667EBCBE1}">
-              <a14:hiddenEffects xmlns="" xmlns:a14="http://schemas.microsoft.com/office/drawing/2010/main">
+              <a14:hiddenEffects xmlns:a14="http://schemas.microsoft.com/office/drawing/2010/main" xmlns="">
                 <a:effectLst>
                   <a:outerShdw blurRad="63500" dist="38099" dir="2700000" algn="ctr" rotWithShape="0">
                     <a:schemeClr val="bg2">
@@ -32556,14 +32559,14 @@
           <a:effectLst/>
           <a:extLst>
             <a:ext uri="{909E8E84-426E-40dd-AFC4-6F175D3DCCD1}">
-              <a14:hiddenFill xmlns="" xmlns:a14="http://schemas.microsoft.com/office/drawing/2010/main">
+              <a14:hiddenFill xmlns:a14="http://schemas.microsoft.com/office/drawing/2010/main" xmlns="">
                 <a:solidFill>
                   <a:srgbClr val="FFFFFF"/>
                 </a:solidFill>
               </a14:hiddenFill>
             </a:ext>
             <a:ext uri="{91240B29-F687-4f45-9708-019B960494DF}">
-              <a14:hiddenLine xmlns="" xmlns:a14="http://schemas.microsoft.com/office/drawing/2010/main" w="9525">
+              <a14:hiddenLine xmlns:a14="http://schemas.microsoft.com/office/drawing/2010/main" xmlns="" w="9525">
                 <a:solidFill>
                   <a:schemeClr val="tx1"/>
                 </a:solidFill>
@@ -32573,7 +32576,7 @@
               </a14:hiddenLine>
             </a:ext>
             <a:ext uri="{AF507438-7753-43e0-B8FC-AC1667EBCBE1}">
-              <a14:hiddenEffects xmlns="" xmlns:a14="http://schemas.microsoft.com/office/drawing/2010/main">
+              <a14:hiddenEffects xmlns:a14="http://schemas.microsoft.com/office/drawing/2010/main" xmlns="">
                 <a:effectLst>
                   <a:outerShdw blurRad="63500" dist="38099" dir="2700000" algn="ctr" rotWithShape="0">
                     <a:schemeClr val="bg2">
@@ -32763,14 +32766,14 @@
           <a:effectLst/>
           <a:extLst>
             <a:ext uri="{909E8E84-426E-40dd-AFC4-6F175D3DCCD1}">
-              <a14:hiddenFill xmlns="" xmlns:a14="http://schemas.microsoft.com/office/drawing/2010/main">
+              <a14:hiddenFill xmlns:a14="http://schemas.microsoft.com/office/drawing/2010/main" xmlns="">
                 <a:solidFill>
                   <a:srgbClr val="FFFFFF"/>
                 </a:solidFill>
               </a14:hiddenFill>
             </a:ext>
             <a:ext uri="{91240B29-F687-4f45-9708-019B960494DF}">
-              <a14:hiddenLine xmlns="" xmlns:a14="http://schemas.microsoft.com/office/drawing/2010/main" w="9525">
+              <a14:hiddenLine xmlns:a14="http://schemas.microsoft.com/office/drawing/2010/main" xmlns="" w="9525">
                 <a:solidFill>
                   <a:schemeClr val="tx1"/>
                 </a:solidFill>
@@ -32780,7 +32783,7 @@
               </a14:hiddenLine>
             </a:ext>
             <a:ext uri="{AF507438-7753-43e0-B8FC-AC1667EBCBE1}">
-              <a14:hiddenEffects xmlns="" xmlns:a14="http://schemas.microsoft.com/office/drawing/2010/main">
+              <a14:hiddenEffects xmlns:a14="http://schemas.microsoft.com/office/drawing/2010/main" xmlns="">
                 <a:effectLst>
                   <a:outerShdw blurRad="63500" dist="38099" dir="2700000" algn="ctr" rotWithShape="0">
                     <a:schemeClr val="bg2">
@@ -32972,7 +32975,7 @@
           <a:effectLst/>
           <a:extLst>
             <a:ext uri="{91240B29-F687-4f45-9708-019B960494DF}">
-              <a14:hiddenLine xmlns="" xmlns:a14="http://schemas.microsoft.com/office/drawing/2010/main" w="9525">
+              <a14:hiddenLine xmlns:a14="http://schemas.microsoft.com/office/drawing/2010/main" xmlns="" w="9525">
                 <a:solidFill>
                   <a:schemeClr val="tx1"/>
                 </a:solidFill>
@@ -32982,7 +32985,7 @@
               </a14:hiddenLine>
             </a:ext>
             <a:ext uri="{AF507438-7753-43e0-B8FC-AC1667EBCBE1}">
-              <a14:hiddenEffects xmlns="" xmlns:a14="http://schemas.microsoft.com/office/drawing/2010/main">
+              <a14:hiddenEffects xmlns:a14="http://schemas.microsoft.com/office/drawing/2010/main" xmlns="">
                 <a:effectLst>
                   <a:outerShdw blurRad="63500" dist="38099" dir="2700000" algn="ctr" rotWithShape="0">
                     <a:schemeClr val="bg2">
@@ -33061,14 +33064,14 @@
           <a:effectLst/>
           <a:extLst>
             <a:ext uri="{909E8E84-426E-40dd-AFC4-6F175D3DCCD1}">
-              <a14:hiddenFill xmlns="" xmlns:a14="http://schemas.microsoft.com/office/drawing/2010/main">
+              <a14:hiddenFill xmlns:a14="http://schemas.microsoft.com/office/drawing/2010/main" xmlns="">
                 <a:solidFill>
                   <a:srgbClr val="FFFFFF"/>
                 </a:solidFill>
               </a14:hiddenFill>
             </a:ext>
             <a:ext uri="{91240B29-F687-4f45-9708-019B960494DF}">
-              <a14:hiddenLine xmlns="" xmlns:a14="http://schemas.microsoft.com/office/drawing/2010/main" w="9525">
+              <a14:hiddenLine xmlns:a14="http://schemas.microsoft.com/office/drawing/2010/main" xmlns="" w="9525">
                 <a:solidFill>
                   <a:schemeClr val="tx1"/>
                 </a:solidFill>
@@ -33078,7 +33081,7 @@
               </a14:hiddenLine>
             </a:ext>
             <a:ext uri="{AF507438-7753-43e0-B8FC-AC1667EBCBE1}">
-              <a14:hiddenEffects xmlns="" xmlns:a14="http://schemas.microsoft.com/office/drawing/2010/main">
+              <a14:hiddenEffects xmlns:a14="http://schemas.microsoft.com/office/drawing/2010/main" xmlns="">
                 <a:effectLst>
                   <a:outerShdw blurRad="63500" dist="38099" dir="2700000" algn="ctr" rotWithShape="0">
                     <a:schemeClr val="bg2">
@@ -33273,12 +33276,12 @@
           <a:effectLst/>
           <a:extLst>
             <a:ext uri="{909E8E84-426E-40dd-AFC4-6F175D3DCCD1}">
-              <a14:hiddenFill xmlns="" xmlns:a14="http://schemas.microsoft.com/office/drawing/2010/main">
+              <a14:hiddenFill xmlns:a14="http://schemas.microsoft.com/office/drawing/2010/main" xmlns="">
                 <a:noFill/>
               </a14:hiddenFill>
             </a:ext>
             <a:ext uri="{AF507438-7753-43e0-B8FC-AC1667EBCBE1}">
-              <a14:hiddenEffects xmlns="" xmlns:a14="http://schemas.microsoft.com/office/drawing/2010/main">
+              <a14:hiddenEffects xmlns:a14="http://schemas.microsoft.com/office/drawing/2010/main" xmlns="">
                 <a:effectLst>
                   <a:outerShdw blurRad="63500" dist="38099" dir="2700000" algn="ctr" rotWithShape="0">
                     <a:schemeClr val="bg2">
@@ -33362,12 +33365,12 @@
           <a:effectLst/>
           <a:extLst>
             <a:ext uri="{909E8E84-426E-40dd-AFC4-6F175D3DCCD1}">
-              <a14:hiddenFill xmlns="" xmlns:a14="http://schemas.microsoft.com/office/drawing/2010/main">
+              <a14:hiddenFill xmlns:a14="http://schemas.microsoft.com/office/drawing/2010/main" xmlns="">
                 <a:noFill/>
               </a14:hiddenFill>
             </a:ext>
             <a:ext uri="{AF507438-7753-43e0-B8FC-AC1667EBCBE1}">
-              <a14:hiddenEffects xmlns="" xmlns:a14="http://schemas.microsoft.com/office/drawing/2010/main">
+              <a14:hiddenEffects xmlns:a14="http://schemas.microsoft.com/office/drawing/2010/main" xmlns="">
                 <a:effectLst>
                   <a:outerShdw blurRad="63500" dist="38099" dir="2700000" algn="ctr" rotWithShape="0">
                     <a:schemeClr val="bg2">
@@ -33471,12 +33474,12 @@
             <a:effectLst/>
             <a:extLst>
               <a:ext uri="{909E8E84-426E-40dd-AFC4-6F175D3DCCD1}">
-                <a14:hiddenFill xmlns="" xmlns:a14="http://schemas.microsoft.com/office/drawing/2010/main">
+                <a14:hiddenFill xmlns:a14="http://schemas.microsoft.com/office/drawing/2010/main" xmlns="">
                   <a:noFill/>
                 </a14:hiddenFill>
               </a:ext>
               <a:ext uri="{AF507438-7753-43e0-B8FC-AC1667EBCBE1}">
-                <a14:hiddenEffects xmlns="" xmlns:a14="http://schemas.microsoft.com/office/drawing/2010/main">
+                <a14:hiddenEffects xmlns:a14="http://schemas.microsoft.com/office/drawing/2010/main" xmlns="">
                   <a:effectLst>
                     <a:outerShdw blurRad="63500" dist="38099" dir="2700000" algn="ctr" rotWithShape="0">
                       <a:schemeClr val="bg2">
@@ -33557,7 +33560,7 @@
             <a:effectLst/>
             <a:extLst>
               <a:ext uri="{91240B29-F687-4f45-9708-019B960494DF}">
-                <a14:hiddenLine xmlns="" xmlns:a14="http://schemas.microsoft.com/office/drawing/2010/main" w="9525">
+                <a14:hiddenLine xmlns:a14="http://schemas.microsoft.com/office/drawing/2010/main" xmlns="" w="9525">
                   <a:solidFill>
                     <a:schemeClr val="tx1"/>
                   </a:solidFill>
@@ -33567,7 +33570,7 @@
                 </a14:hiddenLine>
               </a:ext>
               <a:ext uri="{AF507438-7753-43e0-B8FC-AC1667EBCBE1}">
-                <a14:hiddenEffects xmlns="" xmlns:a14="http://schemas.microsoft.com/office/drawing/2010/main">
+                <a14:hiddenEffects xmlns:a14="http://schemas.microsoft.com/office/drawing/2010/main" xmlns="">
                   <a:effectLst>
                     <a:outerShdw blurRad="63500" dist="38099" dir="2700000" algn="ctr" rotWithShape="0">
                       <a:schemeClr val="bg2">
@@ -33646,14 +33649,14 @@
             <a:effectLst/>
             <a:extLst>
               <a:ext uri="{909E8E84-426E-40dd-AFC4-6F175D3DCCD1}">
-                <a14:hiddenFill xmlns="" xmlns:a14="http://schemas.microsoft.com/office/drawing/2010/main">
+                <a14:hiddenFill xmlns:a14="http://schemas.microsoft.com/office/drawing/2010/main" xmlns="">
                   <a:solidFill>
                     <a:srgbClr val="FFFFFF"/>
                   </a:solidFill>
                 </a14:hiddenFill>
               </a:ext>
               <a:ext uri="{91240B29-F687-4f45-9708-019B960494DF}">
-                <a14:hiddenLine xmlns="" xmlns:a14="http://schemas.microsoft.com/office/drawing/2010/main" w="9525">
+                <a14:hiddenLine xmlns:a14="http://schemas.microsoft.com/office/drawing/2010/main" xmlns="" w="9525">
                   <a:solidFill>
                     <a:schemeClr val="tx1"/>
                   </a:solidFill>
@@ -33663,7 +33666,7 @@
                 </a14:hiddenLine>
               </a:ext>
               <a:ext uri="{AF507438-7753-43e0-B8FC-AC1667EBCBE1}">
-                <a14:hiddenEffects xmlns="" xmlns:a14="http://schemas.microsoft.com/office/drawing/2010/main">
+                <a14:hiddenEffects xmlns:a14="http://schemas.microsoft.com/office/drawing/2010/main" xmlns="">
                   <a:effectLst>
                     <a:outerShdw blurRad="63500" dist="38099" dir="2700000" algn="ctr" rotWithShape="0">
                       <a:schemeClr val="bg2">
@@ -33855,7 +33858,7 @@
             <a:effectLst/>
             <a:extLst>
               <a:ext uri="{91240B29-F687-4f45-9708-019B960494DF}">
-                <a14:hiddenLine xmlns="" xmlns:a14="http://schemas.microsoft.com/office/drawing/2010/main" w="9525">
+                <a14:hiddenLine xmlns:a14="http://schemas.microsoft.com/office/drawing/2010/main" xmlns="" w="9525">
                   <a:solidFill>
                     <a:schemeClr val="tx1"/>
                   </a:solidFill>
@@ -33865,7 +33868,7 @@
                 </a14:hiddenLine>
               </a:ext>
               <a:ext uri="{AF507438-7753-43e0-B8FC-AC1667EBCBE1}">
-                <a14:hiddenEffects xmlns="" xmlns:a14="http://schemas.microsoft.com/office/drawing/2010/main">
+                <a14:hiddenEffects xmlns:a14="http://schemas.microsoft.com/office/drawing/2010/main" xmlns="">
                   <a:effectLst>
                     <a:outerShdw blurRad="63500" dist="38099" dir="2700000" algn="ctr" rotWithShape="0">
                       <a:schemeClr val="bg2">
@@ -33972,12 +33975,12 @@
             <a:effectLst/>
             <a:extLst>
               <a:ext uri="{909E8E84-426E-40dd-AFC4-6F175D3DCCD1}">
-                <a14:hiddenFill xmlns="" xmlns:a14="http://schemas.microsoft.com/office/drawing/2010/main">
+                <a14:hiddenFill xmlns:a14="http://schemas.microsoft.com/office/drawing/2010/main" xmlns="">
                   <a:noFill/>
                 </a14:hiddenFill>
               </a:ext>
               <a:ext uri="{AF507438-7753-43e0-B8FC-AC1667EBCBE1}">
-                <a14:hiddenEffects xmlns="" xmlns:a14="http://schemas.microsoft.com/office/drawing/2010/main">
+                <a14:hiddenEffects xmlns:a14="http://schemas.microsoft.com/office/drawing/2010/main" xmlns="">
                   <a:effectLst>
                     <a:outerShdw blurRad="63500" dist="38099" dir="2700000" algn="ctr" rotWithShape="0">
                       <a:schemeClr val="bg2">
@@ -34058,7 +34061,7 @@
             <a:effectLst/>
             <a:extLst>
               <a:ext uri="{91240B29-F687-4f45-9708-019B960494DF}">
-                <a14:hiddenLine xmlns="" xmlns:a14="http://schemas.microsoft.com/office/drawing/2010/main" w="9525">
+                <a14:hiddenLine xmlns:a14="http://schemas.microsoft.com/office/drawing/2010/main" xmlns="" w="9525">
                   <a:solidFill>
                     <a:schemeClr val="tx1"/>
                   </a:solidFill>
@@ -34068,7 +34071,7 @@
                 </a14:hiddenLine>
               </a:ext>
               <a:ext uri="{AF507438-7753-43e0-B8FC-AC1667EBCBE1}">
-                <a14:hiddenEffects xmlns="" xmlns:a14="http://schemas.microsoft.com/office/drawing/2010/main">
+                <a14:hiddenEffects xmlns:a14="http://schemas.microsoft.com/office/drawing/2010/main" xmlns="">
                   <a:effectLst>
                     <a:outerShdw blurRad="63500" dist="38099" dir="2700000" algn="ctr" rotWithShape="0">
                       <a:schemeClr val="bg2">
@@ -34147,14 +34150,14 @@
             <a:effectLst/>
             <a:extLst>
               <a:ext uri="{909E8E84-426E-40dd-AFC4-6F175D3DCCD1}">
-                <a14:hiddenFill xmlns="" xmlns:a14="http://schemas.microsoft.com/office/drawing/2010/main">
+                <a14:hiddenFill xmlns:a14="http://schemas.microsoft.com/office/drawing/2010/main" xmlns="">
                   <a:solidFill>
                     <a:srgbClr val="FFFFFF"/>
                   </a:solidFill>
                 </a14:hiddenFill>
               </a:ext>
               <a:ext uri="{91240B29-F687-4f45-9708-019B960494DF}">
-                <a14:hiddenLine xmlns="" xmlns:a14="http://schemas.microsoft.com/office/drawing/2010/main" w="9525">
+                <a14:hiddenLine xmlns:a14="http://schemas.microsoft.com/office/drawing/2010/main" xmlns="" w="9525">
                   <a:solidFill>
                     <a:schemeClr val="tx1"/>
                   </a:solidFill>
@@ -34164,7 +34167,7 @@
                 </a14:hiddenLine>
               </a:ext>
               <a:ext uri="{AF507438-7753-43e0-B8FC-AC1667EBCBE1}">
-                <a14:hiddenEffects xmlns="" xmlns:a14="http://schemas.microsoft.com/office/drawing/2010/main">
+                <a14:hiddenEffects xmlns:a14="http://schemas.microsoft.com/office/drawing/2010/main" xmlns="">
                   <a:effectLst>
                     <a:outerShdw blurRad="63500" dist="38099" dir="2700000" algn="ctr" rotWithShape="0">
                       <a:schemeClr val="bg2">
@@ -34375,14 +34378,14 @@
             <a:effectLst/>
             <a:extLst>
               <a:ext uri="{909E8E84-426E-40dd-AFC4-6F175D3DCCD1}">
-                <a14:hiddenFill xmlns="" xmlns:a14="http://schemas.microsoft.com/office/drawing/2010/main">
+                <a14:hiddenFill xmlns:a14="http://schemas.microsoft.com/office/drawing/2010/main" xmlns="">
                   <a:solidFill>
                     <a:schemeClr val="accent1"/>
                   </a:solidFill>
                 </a14:hiddenFill>
               </a:ext>
               <a:ext uri="{91240B29-F687-4f45-9708-019B960494DF}">
-                <a14:hiddenLine xmlns="" xmlns:a14="http://schemas.microsoft.com/office/drawing/2010/main" w="9525">
+                <a14:hiddenLine xmlns:a14="http://schemas.microsoft.com/office/drawing/2010/main" xmlns="" w="9525">
                   <a:solidFill>
                     <a:schemeClr val="tx1"/>
                   </a:solidFill>
@@ -34392,7 +34395,7 @@
                 </a14:hiddenLine>
               </a:ext>
               <a:ext uri="{AF507438-7753-43e0-B8FC-AC1667EBCBE1}">
-                <a14:hiddenEffects xmlns="" xmlns:a14="http://schemas.microsoft.com/office/drawing/2010/main">
+                <a14:hiddenEffects xmlns:a14="http://schemas.microsoft.com/office/drawing/2010/main" xmlns="">
                   <a:effectLst>
                     <a:outerShdw blurRad="63500" dist="38099" dir="2700000" algn="ctr" rotWithShape="0">
                       <a:schemeClr val="bg2">
@@ -34587,12 +34590,12 @@
             <a:effectLst/>
             <a:extLst>
               <a:ext uri="{909E8E84-426E-40dd-AFC4-6F175D3DCCD1}">
-                <a14:hiddenFill xmlns="" xmlns:a14="http://schemas.microsoft.com/office/drawing/2010/main">
+                <a14:hiddenFill xmlns:a14="http://schemas.microsoft.com/office/drawing/2010/main" xmlns="">
                   <a:noFill/>
                 </a14:hiddenFill>
               </a:ext>
               <a:ext uri="{AF507438-7753-43e0-B8FC-AC1667EBCBE1}">
-                <a14:hiddenEffects xmlns="" xmlns:a14="http://schemas.microsoft.com/office/drawing/2010/main">
+                <a14:hiddenEffects xmlns:a14="http://schemas.microsoft.com/office/drawing/2010/main" xmlns="">
                   <a:effectLst>
                     <a:outerShdw blurRad="63500" dist="38099" dir="2700000" algn="ctr" rotWithShape="0">
                       <a:schemeClr val="bg2">
@@ -34695,7 +34698,7 @@
               <a:effectLst/>
               <a:extLst>
                 <a:ext uri="{91240B29-F687-4f45-9708-019B960494DF}">
-                  <a14:hiddenLine xmlns="" xmlns:a14="http://schemas.microsoft.com/office/drawing/2010/main" w="9525">
+                  <a14:hiddenLine xmlns:a14="http://schemas.microsoft.com/office/drawing/2010/main" xmlns="" w="9525">
                     <a:solidFill>
                       <a:schemeClr val="tx1"/>
                     </a:solidFill>
@@ -34705,7 +34708,7 @@
                   </a14:hiddenLine>
                 </a:ext>
                 <a:ext uri="{AF507438-7753-43e0-B8FC-AC1667EBCBE1}">
-                  <a14:hiddenEffects xmlns="" xmlns:a14="http://schemas.microsoft.com/office/drawing/2010/main">
+                  <a14:hiddenEffects xmlns:a14="http://schemas.microsoft.com/office/drawing/2010/main" xmlns="">
                     <a:effectLst>
                       <a:outerShdw blurRad="63500" dist="38099" dir="2700000" algn="ctr" rotWithShape="0">
                         <a:schemeClr val="bg2">
@@ -34784,14 +34787,14 @@
               <a:effectLst/>
               <a:extLst>
                 <a:ext uri="{909E8E84-426E-40dd-AFC4-6F175D3DCCD1}">
-                  <a14:hiddenFill xmlns="" xmlns:a14="http://schemas.microsoft.com/office/drawing/2010/main">
+                  <a14:hiddenFill xmlns:a14="http://schemas.microsoft.com/office/drawing/2010/main" xmlns="">
                     <a:solidFill>
                       <a:srgbClr val="FFFFFF"/>
                     </a:solidFill>
                   </a14:hiddenFill>
                 </a:ext>
                 <a:ext uri="{91240B29-F687-4f45-9708-019B960494DF}">
-                  <a14:hiddenLine xmlns="" xmlns:a14="http://schemas.microsoft.com/office/drawing/2010/main" w="9525">
+                  <a14:hiddenLine xmlns:a14="http://schemas.microsoft.com/office/drawing/2010/main" xmlns="" w="9525">
                     <a:solidFill>
                       <a:schemeClr val="tx1"/>
                     </a:solidFill>
@@ -34801,7 +34804,7 @@
                   </a14:hiddenLine>
                 </a:ext>
                 <a:ext uri="{AF507438-7753-43e0-B8FC-AC1667EBCBE1}">
-                  <a14:hiddenEffects xmlns="" xmlns:a14="http://schemas.microsoft.com/office/drawing/2010/main">
+                  <a14:hiddenEffects xmlns:a14="http://schemas.microsoft.com/office/drawing/2010/main" xmlns="">
                     <a:effectLst>
                       <a:outerShdw blurRad="63500" dist="38099" dir="2700000" algn="ctr" rotWithShape="0">
                         <a:schemeClr val="bg2">
@@ -34987,12 +34990,12 @@
             <a:effectLst/>
             <a:extLst>
               <a:ext uri="{909E8E84-426E-40dd-AFC4-6F175D3DCCD1}">
-                <a14:hiddenFill xmlns="" xmlns:a14="http://schemas.microsoft.com/office/drawing/2010/main">
+                <a14:hiddenFill xmlns:a14="http://schemas.microsoft.com/office/drawing/2010/main" xmlns="">
                   <a:noFill/>
                 </a14:hiddenFill>
               </a:ext>
               <a:ext uri="{AF507438-7753-43e0-B8FC-AC1667EBCBE1}">
-                <a14:hiddenEffects xmlns="" xmlns:a14="http://schemas.microsoft.com/office/drawing/2010/main">
+                <a14:hiddenEffects xmlns:a14="http://schemas.microsoft.com/office/drawing/2010/main" xmlns="">
                   <a:effectLst>
                     <a:outerShdw blurRad="63500" dist="38099" dir="2700000" algn="ctr" rotWithShape="0">
                       <a:schemeClr val="bg2">
@@ -35095,7 +35098,7 @@
               <a:effectLst/>
               <a:extLst>
                 <a:ext uri="{91240B29-F687-4f45-9708-019B960494DF}">
-                  <a14:hiddenLine xmlns="" xmlns:a14="http://schemas.microsoft.com/office/drawing/2010/main" w="9525">
+                  <a14:hiddenLine xmlns:a14="http://schemas.microsoft.com/office/drawing/2010/main" xmlns="" w="9525">
                     <a:solidFill>
                       <a:schemeClr val="tx1"/>
                     </a:solidFill>
@@ -35105,7 +35108,7 @@
                   </a14:hiddenLine>
                 </a:ext>
                 <a:ext uri="{AF507438-7753-43e0-B8FC-AC1667EBCBE1}">
-                  <a14:hiddenEffects xmlns="" xmlns:a14="http://schemas.microsoft.com/office/drawing/2010/main">
+                  <a14:hiddenEffects xmlns:a14="http://schemas.microsoft.com/office/drawing/2010/main" xmlns="">
                     <a:effectLst>
                       <a:outerShdw blurRad="63500" dist="38099" dir="2700000" algn="ctr" rotWithShape="0">
                         <a:schemeClr val="bg2">
@@ -35184,14 +35187,14 @@
               <a:effectLst/>
               <a:extLst>
                 <a:ext uri="{909E8E84-426E-40dd-AFC4-6F175D3DCCD1}">
-                  <a14:hiddenFill xmlns="" xmlns:a14="http://schemas.microsoft.com/office/drawing/2010/main">
+                  <a14:hiddenFill xmlns:a14="http://schemas.microsoft.com/office/drawing/2010/main" xmlns="">
                     <a:solidFill>
                       <a:srgbClr val="FFFFFF"/>
                     </a:solidFill>
                   </a14:hiddenFill>
                 </a:ext>
                 <a:ext uri="{91240B29-F687-4f45-9708-019B960494DF}">
-                  <a14:hiddenLine xmlns="" xmlns:a14="http://schemas.microsoft.com/office/drawing/2010/main" w="9525">
+                  <a14:hiddenLine xmlns:a14="http://schemas.microsoft.com/office/drawing/2010/main" xmlns="" w="9525">
                     <a:solidFill>
                       <a:schemeClr val="tx1"/>
                     </a:solidFill>
@@ -35201,7 +35204,7 @@
                   </a14:hiddenLine>
                 </a:ext>
                 <a:ext uri="{AF507438-7753-43e0-B8FC-AC1667EBCBE1}">
-                  <a14:hiddenEffects xmlns="" xmlns:a14="http://schemas.microsoft.com/office/drawing/2010/main">
+                  <a14:hiddenEffects xmlns:a14="http://schemas.microsoft.com/office/drawing/2010/main" xmlns="">
                     <a:effectLst>
                       <a:outerShdw blurRad="63500" dist="38099" dir="2700000" algn="ctr" rotWithShape="0">
                         <a:schemeClr val="bg2">
@@ -35853,7 +35856,7 @@
           <a:effectLst/>
           <a:extLst>
             <a:ext uri="{91240B29-F687-4f45-9708-019B960494DF}">
-              <a14:hiddenLine xmlns="" xmlns:a14="http://schemas.microsoft.com/office/drawing/2010/main" w="9525">
+              <a14:hiddenLine xmlns:a14="http://schemas.microsoft.com/office/drawing/2010/main" xmlns="" w="9525">
                 <a:solidFill>
                   <a:schemeClr val="tx1"/>
                 </a:solidFill>
@@ -35863,7 +35866,7 @@
               </a14:hiddenLine>
             </a:ext>
             <a:ext uri="{AF507438-7753-43e0-B8FC-AC1667EBCBE1}">
-              <a14:hiddenEffects xmlns="" xmlns:a14="http://schemas.microsoft.com/office/drawing/2010/main">
+              <a14:hiddenEffects xmlns:a14="http://schemas.microsoft.com/office/drawing/2010/main" xmlns="">
                 <a:effectLst>
                   <a:outerShdw blurRad="63500" dist="38099" dir="2700000" algn="ctr" rotWithShape="0">
                     <a:schemeClr val="bg2">
@@ -35967,12 +35970,12 @@
             <a:effectLst/>
             <a:extLst>
               <a:ext uri="{909E8E84-426E-40dd-AFC4-6F175D3DCCD1}">
-                <a14:hiddenFill xmlns="" xmlns:a14="http://schemas.microsoft.com/office/drawing/2010/main">
+                <a14:hiddenFill xmlns:a14="http://schemas.microsoft.com/office/drawing/2010/main" xmlns="">
                   <a:noFill/>
                 </a14:hiddenFill>
               </a:ext>
               <a:ext uri="{AF507438-7753-43e0-B8FC-AC1667EBCBE1}">
-                <a14:hiddenEffects xmlns="" xmlns:a14="http://schemas.microsoft.com/office/drawing/2010/main">
+                <a14:hiddenEffects xmlns:a14="http://schemas.microsoft.com/office/drawing/2010/main" xmlns="">
                   <a:effectLst>
                     <a:outerShdw blurRad="63500" dist="38099" dir="2700000" algn="ctr" rotWithShape="0">
                       <a:schemeClr val="bg2">
@@ -36053,14 +36056,14 @@
             <a:effectLst/>
             <a:extLst>
               <a:ext uri="{909E8E84-426E-40dd-AFC4-6F175D3DCCD1}">
-                <a14:hiddenFill xmlns="" xmlns:a14="http://schemas.microsoft.com/office/drawing/2010/main">
+                <a14:hiddenFill xmlns:a14="http://schemas.microsoft.com/office/drawing/2010/main" xmlns="">
                   <a:solidFill>
                     <a:srgbClr val="FFFFFF"/>
                   </a:solidFill>
                 </a14:hiddenFill>
               </a:ext>
               <a:ext uri="{91240B29-F687-4f45-9708-019B960494DF}">
-                <a14:hiddenLine xmlns="" xmlns:a14="http://schemas.microsoft.com/office/drawing/2010/main" w="9525">
+                <a14:hiddenLine xmlns:a14="http://schemas.microsoft.com/office/drawing/2010/main" xmlns="" w="9525">
                   <a:solidFill>
                     <a:schemeClr val="tx1"/>
                   </a:solidFill>
@@ -36070,7 +36073,7 @@
                 </a14:hiddenLine>
               </a:ext>
               <a:ext uri="{AF507438-7753-43e0-B8FC-AC1667EBCBE1}">
-                <a14:hiddenEffects xmlns="" xmlns:a14="http://schemas.microsoft.com/office/drawing/2010/main">
+                <a14:hiddenEffects xmlns:a14="http://schemas.microsoft.com/office/drawing/2010/main" xmlns="">
                   <a:effectLst>
                     <a:outerShdw blurRad="63500" dist="38099" dir="2700000" algn="ctr" rotWithShape="0">
                       <a:schemeClr val="bg2">
@@ -39767,7 +39770,7 @@
                         </a:rPr>
                         <a:t>010</a:t>
                       </a:r>
-                      <a:endParaRPr sz="2400">
+                      <a:endParaRPr sz="2400" dirty="0">
                         <a:latin typeface="Times New Roman"/>
                         <a:cs typeface="Times New Roman"/>
                       </a:endParaRPr>
@@ -40601,527 +40604,6 @@
       </p:pic>
       <p:sp>
         <p:nvSpPr>
-          <p:cNvPr id="2" name="Content Placeholder 1">
-            <a:extLst>
-              <a:ext uri="{FF2B5EF4-FFF2-40B4-BE49-F238E27FC236}">
-                <a16:creationId xmlns:a16="http://schemas.microsoft.com/office/drawing/2014/main" id="{969FB151-384C-9DC5-76A1-FD33648F1CB7}"/>
-              </a:ext>
-            </a:extLst>
-          </p:cNvPr>
-          <p:cNvSpPr>
-            <a:spLocks noGrp="1"/>
-          </p:cNvSpPr>
-          <p:nvPr>
-            <p:ph idx="1"/>
-          </p:nvPr>
-        </p:nvSpPr>
-        <p:spPr>
-          <a:xfrm>
-            <a:off x="138955" y="1346444"/>
-            <a:ext cx="6563181" cy="5247994"/>
-          </a:xfrm>
-        </p:spPr>
-        <p:txBody>
-          <a:bodyPr>
-            <a:normAutofit fontScale="92500" lnSpcReduction="10000"/>
-          </a:bodyPr>
-          <a:lstStyle/>
-          <a:p>
-            <a:pPr marL="355600" marR="436245" indent="-342900">
-              <a:lnSpc>
-                <a:spcPct val="120000"/>
-              </a:lnSpc>
-              <a:spcBef>
-                <a:spcPts val="575"/>
-              </a:spcBef>
-              <a:buAutoNum type="alphaLcParenBoth"/>
-              <a:tabLst>
-                <a:tab pos="355600" algn="l"/>
-                <a:tab pos="425450" algn="l"/>
-              </a:tabLst>
-            </a:pPr>
-            <a:r>
-              <a:rPr lang="en-GB" sz="1800" dirty="0">
-                <a:latin typeface="Times New Roman"/>
-                <a:cs typeface="Times New Roman"/>
-              </a:rPr>
-              <a:t>Initially assume that CBC is not used. What is the resulting ciphertext?</a:t>
-            </a:r>
-          </a:p>
-          <a:p>
-            <a:pPr marL="12700" marR="436245" indent="0">
-              <a:lnSpc>
-                <a:spcPct val="120000"/>
-              </a:lnSpc>
-              <a:spcBef>
-                <a:spcPts val="575"/>
-              </a:spcBef>
-              <a:buNone/>
-              <a:tabLst>
-                <a:tab pos="355600" algn="l"/>
-                <a:tab pos="425450" algn="l"/>
-              </a:tabLst>
-            </a:pPr>
-            <a:r>
-              <a:rPr lang="en-GB" sz="1800" dirty="0">
-                <a:latin typeface="Times New Roman"/>
-                <a:cs typeface="Times New Roman"/>
-              </a:rPr>
-              <a:t>ANS: Ciphertext for plaintext 100101100 is 011010011, since 100 maps to 011, 101 maps to 010, 100 maps to 011</a:t>
-            </a:r>
-          </a:p>
-          <a:p>
-            <a:pPr marL="12700" marR="436245" indent="0">
-              <a:lnSpc>
-                <a:spcPct val="120000"/>
-              </a:lnSpc>
-              <a:spcBef>
-                <a:spcPts val="575"/>
-              </a:spcBef>
-              <a:buNone/>
-              <a:tabLst>
-                <a:tab pos="355600" algn="l"/>
-                <a:tab pos="425450" algn="l"/>
-              </a:tabLst>
-            </a:pPr>
-            <a:r>
-              <a:rPr lang="en-GB" sz="1800" dirty="0">
-                <a:solidFill>
-                  <a:srgbClr val="011199"/>
-                </a:solidFill>
-                <a:latin typeface="Times New Roman"/>
-                <a:cs typeface="Times New Roman"/>
-              </a:rPr>
-              <a:t>(b) </a:t>
-            </a:r>
-            <a:r>
-              <a:rPr lang="en-GB" sz="1800" dirty="0">
-                <a:latin typeface="Times New Roman"/>
-                <a:cs typeface="Times New Roman"/>
-              </a:rPr>
-              <a:t>Suppose Trudy sniffs the ciphertext. Assuming she knows that a 3-bit block cipher without CBC </a:t>
-            </a:r>
-            <a:r>
-              <a:rPr lang="en-GB" sz="1600" dirty="0">
-                <a:latin typeface="Times New Roman" panose="02020603050405020304" pitchFamily="18" charset="0"/>
-                <a:cs typeface="Times New Roman" panose="02020603050405020304" pitchFamily="18" charset="0"/>
-              </a:rPr>
-              <a:t>is</a:t>
-            </a:r>
-            <a:r>
-              <a:rPr lang="en-GB" sz="1600" spc="-10" dirty="0">
-                <a:latin typeface="Times New Roman" panose="02020603050405020304" pitchFamily="18" charset="0"/>
-                <a:cs typeface="Times New Roman" panose="02020603050405020304" pitchFamily="18" charset="0"/>
-              </a:rPr>
-              <a:t> </a:t>
-            </a:r>
-            <a:r>
-              <a:rPr lang="en-GB" sz="1600" dirty="0">
-                <a:latin typeface="Times New Roman" panose="02020603050405020304" pitchFamily="18" charset="0"/>
-                <a:cs typeface="Times New Roman" panose="02020603050405020304" pitchFamily="18" charset="0"/>
-              </a:rPr>
-              <a:t>being</a:t>
-            </a:r>
-            <a:r>
-              <a:rPr lang="en-GB" sz="1600" spc="-15" dirty="0">
-                <a:latin typeface="Times New Roman" panose="02020603050405020304" pitchFamily="18" charset="0"/>
-                <a:cs typeface="Times New Roman" panose="02020603050405020304" pitchFamily="18" charset="0"/>
-              </a:rPr>
-              <a:t> </a:t>
-            </a:r>
-            <a:r>
-              <a:rPr lang="en-GB" sz="1600" dirty="0">
-                <a:latin typeface="Times New Roman" panose="02020603050405020304" pitchFamily="18" charset="0"/>
-                <a:cs typeface="Times New Roman" panose="02020603050405020304" pitchFamily="18" charset="0"/>
-              </a:rPr>
-              <a:t>employed</a:t>
-            </a:r>
-            <a:r>
-              <a:rPr lang="en-GB" sz="1600" spc="-30" dirty="0">
-                <a:latin typeface="Times New Roman" panose="02020603050405020304" pitchFamily="18" charset="0"/>
-                <a:cs typeface="Times New Roman" panose="02020603050405020304" pitchFamily="18" charset="0"/>
-              </a:rPr>
-              <a:t> </a:t>
-            </a:r>
-            <a:r>
-              <a:rPr lang="en-GB" sz="1600" spc="-20" dirty="0">
-                <a:latin typeface="Times New Roman" panose="02020603050405020304" pitchFamily="18" charset="0"/>
-                <a:cs typeface="Times New Roman" panose="02020603050405020304" pitchFamily="18" charset="0"/>
-              </a:rPr>
-              <a:t>(but </a:t>
-            </a:r>
-            <a:r>
-              <a:rPr lang="en-GB" sz="1600" dirty="0">
-                <a:latin typeface="Times New Roman" panose="02020603050405020304" pitchFamily="18" charset="0"/>
-                <a:cs typeface="Times New Roman" panose="02020603050405020304" pitchFamily="18" charset="0"/>
-              </a:rPr>
-              <a:t>doesn’t</a:t>
-            </a:r>
-            <a:r>
-              <a:rPr lang="en-GB" sz="1600" spc="-40" dirty="0">
-                <a:latin typeface="Times New Roman" panose="02020603050405020304" pitchFamily="18" charset="0"/>
-                <a:cs typeface="Times New Roman" panose="02020603050405020304" pitchFamily="18" charset="0"/>
-              </a:rPr>
-              <a:t> </a:t>
-            </a:r>
-            <a:r>
-              <a:rPr lang="en-GB" sz="1600" dirty="0">
-                <a:latin typeface="Times New Roman" panose="02020603050405020304" pitchFamily="18" charset="0"/>
-                <a:cs typeface="Times New Roman" panose="02020603050405020304" pitchFamily="18" charset="0"/>
-              </a:rPr>
-              <a:t>know</a:t>
-            </a:r>
-            <a:r>
-              <a:rPr lang="en-GB" sz="1600" spc="-20" dirty="0">
-                <a:latin typeface="Times New Roman" panose="02020603050405020304" pitchFamily="18" charset="0"/>
-                <a:cs typeface="Times New Roman" panose="02020603050405020304" pitchFamily="18" charset="0"/>
-              </a:rPr>
-              <a:t> </a:t>
-            </a:r>
-            <a:r>
-              <a:rPr lang="en-GB" sz="1600" dirty="0">
-                <a:latin typeface="Times New Roman" panose="02020603050405020304" pitchFamily="18" charset="0"/>
-                <a:cs typeface="Times New Roman" panose="02020603050405020304" pitchFamily="18" charset="0"/>
-              </a:rPr>
-              <a:t>the</a:t>
-            </a:r>
-            <a:r>
-              <a:rPr lang="en-GB" sz="1600" spc="-35" dirty="0">
-                <a:latin typeface="Times New Roman" panose="02020603050405020304" pitchFamily="18" charset="0"/>
-                <a:cs typeface="Times New Roman" panose="02020603050405020304" pitchFamily="18" charset="0"/>
-              </a:rPr>
-              <a:t> </a:t>
-            </a:r>
-            <a:r>
-              <a:rPr lang="en-GB" sz="1600" dirty="0">
-                <a:latin typeface="Times New Roman" panose="02020603050405020304" pitchFamily="18" charset="0"/>
-                <a:cs typeface="Times New Roman" panose="02020603050405020304" pitchFamily="18" charset="0"/>
-              </a:rPr>
-              <a:t>specific</a:t>
-            </a:r>
-            <a:r>
-              <a:rPr lang="en-GB" sz="1600" spc="-45" dirty="0">
-                <a:latin typeface="Times New Roman" panose="02020603050405020304" pitchFamily="18" charset="0"/>
-                <a:cs typeface="Times New Roman" panose="02020603050405020304" pitchFamily="18" charset="0"/>
-              </a:rPr>
-              <a:t> </a:t>
-            </a:r>
-            <a:r>
-              <a:rPr lang="en-GB" sz="1600" dirty="0">
-                <a:latin typeface="Times New Roman" panose="02020603050405020304" pitchFamily="18" charset="0"/>
-                <a:cs typeface="Times New Roman" panose="02020603050405020304" pitchFamily="18" charset="0"/>
-              </a:rPr>
-              <a:t>cipher),</a:t>
-            </a:r>
-            <a:r>
-              <a:rPr lang="en-GB" sz="1600" spc="-40" dirty="0">
-                <a:latin typeface="Times New Roman" panose="02020603050405020304" pitchFamily="18" charset="0"/>
-                <a:cs typeface="Times New Roman" panose="02020603050405020304" pitchFamily="18" charset="0"/>
-              </a:rPr>
-              <a:t> </a:t>
-            </a:r>
-            <a:r>
-              <a:rPr lang="en-GB" sz="1600" dirty="0">
-                <a:latin typeface="Times New Roman" panose="02020603050405020304" pitchFamily="18" charset="0"/>
-                <a:cs typeface="Times New Roman" panose="02020603050405020304" pitchFamily="18" charset="0"/>
-              </a:rPr>
-              <a:t>what</a:t>
-            </a:r>
-            <a:r>
-              <a:rPr lang="en-GB" sz="1600" spc="-35" dirty="0">
-                <a:latin typeface="Times New Roman" panose="02020603050405020304" pitchFamily="18" charset="0"/>
-                <a:cs typeface="Times New Roman" panose="02020603050405020304" pitchFamily="18" charset="0"/>
-              </a:rPr>
-              <a:t> </a:t>
-            </a:r>
-            <a:r>
-              <a:rPr lang="en-GB" sz="1600" dirty="0">
-                <a:latin typeface="Times New Roman" panose="02020603050405020304" pitchFamily="18" charset="0"/>
-                <a:cs typeface="Times New Roman" panose="02020603050405020304" pitchFamily="18" charset="0"/>
-              </a:rPr>
-              <a:t>can</a:t>
-            </a:r>
-            <a:r>
-              <a:rPr lang="en-GB" sz="1600" spc="-40" dirty="0">
-                <a:latin typeface="Times New Roman" panose="02020603050405020304" pitchFamily="18" charset="0"/>
-                <a:cs typeface="Times New Roman" panose="02020603050405020304" pitchFamily="18" charset="0"/>
-              </a:rPr>
-              <a:t> </a:t>
-            </a:r>
-            <a:r>
-              <a:rPr lang="en-GB" sz="1600" dirty="0">
-                <a:latin typeface="Times New Roman" panose="02020603050405020304" pitchFamily="18" charset="0"/>
-                <a:cs typeface="Times New Roman" panose="02020603050405020304" pitchFamily="18" charset="0"/>
-              </a:rPr>
-              <a:t>she</a:t>
-            </a:r>
-            <a:r>
-              <a:rPr lang="en-GB" sz="1600" spc="-30" dirty="0">
-                <a:latin typeface="Times New Roman" panose="02020603050405020304" pitchFamily="18" charset="0"/>
-                <a:cs typeface="Times New Roman" panose="02020603050405020304" pitchFamily="18" charset="0"/>
-              </a:rPr>
-              <a:t> </a:t>
-            </a:r>
-            <a:r>
-              <a:rPr lang="en-GB" sz="1600" spc="-10" dirty="0">
-                <a:latin typeface="Times New Roman" panose="02020603050405020304" pitchFamily="18" charset="0"/>
-                <a:cs typeface="Times New Roman" panose="02020603050405020304" pitchFamily="18" charset="0"/>
-              </a:rPr>
-              <a:t>infer?</a:t>
-            </a:r>
-          </a:p>
-          <a:p>
-            <a:pPr marL="12700" marR="5080" indent="0">
-              <a:lnSpc>
-                <a:spcPct val="100000"/>
-              </a:lnSpc>
-              <a:spcBef>
-                <a:spcPts val="575"/>
-              </a:spcBef>
-              <a:buNone/>
-              <a:tabLst>
-                <a:tab pos="355600" algn="l"/>
-                <a:tab pos="443230" algn="l"/>
-              </a:tabLst>
-            </a:pPr>
-            <a:r>
-              <a:rPr lang="en-GB" sz="1600" dirty="0">
-                <a:latin typeface="Times New Roman" panose="02020603050405020304" pitchFamily="18" charset="0"/>
-                <a:cs typeface="Times New Roman" panose="02020603050405020304" pitchFamily="18" charset="0"/>
-              </a:rPr>
-              <a:t>ANS: Without CBC, each identical plaintext block will always map to the same ciphertext block. This makes it easier for Trudy to recognize patterns in repeated blocks of data. If Trudy intercepts enough ciphertexts, she could perform frequency analysis on the blocks. For example, if certain ciphertext blocks appear more frequently, she might guess that they correspond to more common plaintext blocks (like spaces or common letters in text). Or if it is known that the message always starts out with certain predefined fields, then the cryptanalyst may have a number of known plaintext-ciphertext pairs to work with.</a:t>
-            </a:r>
-          </a:p>
-          <a:p>
-            <a:pPr marL="12700" marR="673735" indent="0">
-              <a:lnSpc>
-                <a:spcPct val="100000"/>
-              </a:lnSpc>
-              <a:spcBef>
-                <a:spcPts val="575"/>
-              </a:spcBef>
-              <a:buNone/>
-              <a:tabLst>
-                <a:tab pos="355600" algn="l"/>
-                <a:tab pos="425450" algn="l"/>
-              </a:tabLst>
-            </a:pPr>
-            <a:r>
-              <a:rPr lang="en-GB" sz="1600" dirty="0">
-                <a:solidFill>
-                  <a:srgbClr val="011199"/>
-                </a:solidFill>
-                <a:latin typeface="Times New Roman" panose="02020603050405020304" pitchFamily="18" charset="0"/>
-                <a:cs typeface="Times New Roman" panose="02020603050405020304" pitchFamily="18" charset="0"/>
-              </a:rPr>
-              <a:t>(c) </a:t>
-            </a:r>
-            <a:r>
-              <a:rPr lang="en-GB" sz="1600" dirty="0">
-                <a:latin typeface="Times New Roman" panose="02020603050405020304" pitchFamily="18" charset="0"/>
-                <a:cs typeface="Times New Roman" panose="02020603050405020304" pitchFamily="18" charset="0"/>
-              </a:rPr>
-              <a:t>Now,</a:t>
-            </a:r>
-            <a:r>
-              <a:rPr lang="en-GB" sz="1600" spc="-15" dirty="0">
-                <a:latin typeface="Times New Roman" panose="02020603050405020304" pitchFamily="18" charset="0"/>
-                <a:cs typeface="Times New Roman" panose="02020603050405020304" pitchFamily="18" charset="0"/>
-              </a:rPr>
-              <a:t> </a:t>
-            </a:r>
-            <a:r>
-              <a:rPr lang="en-GB" sz="1600" dirty="0">
-                <a:latin typeface="Times New Roman" panose="02020603050405020304" pitchFamily="18" charset="0"/>
-                <a:cs typeface="Times New Roman" panose="02020603050405020304" pitchFamily="18" charset="0"/>
-              </a:rPr>
-              <a:t>suppose</a:t>
-            </a:r>
-            <a:r>
-              <a:rPr lang="en-GB" sz="1600" spc="-15" dirty="0">
-                <a:latin typeface="Times New Roman" panose="02020603050405020304" pitchFamily="18" charset="0"/>
-                <a:cs typeface="Times New Roman" panose="02020603050405020304" pitchFamily="18" charset="0"/>
-              </a:rPr>
-              <a:t> </a:t>
-            </a:r>
-            <a:r>
-              <a:rPr lang="en-GB" sz="1600" dirty="0">
-                <a:latin typeface="Times New Roman" panose="02020603050405020304" pitchFamily="18" charset="0"/>
-                <a:cs typeface="Times New Roman" panose="02020603050405020304" pitchFamily="18" charset="0"/>
-              </a:rPr>
-              <a:t>that</a:t>
-            </a:r>
-            <a:r>
-              <a:rPr lang="en-GB" sz="1600" spc="-35" dirty="0">
-                <a:latin typeface="Times New Roman" panose="02020603050405020304" pitchFamily="18" charset="0"/>
-                <a:cs typeface="Times New Roman" panose="02020603050405020304" pitchFamily="18" charset="0"/>
-              </a:rPr>
-              <a:t> </a:t>
-            </a:r>
-            <a:r>
-              <a:rPr lang="en-GB" sz="1600" dirty="0">
-                <a:latin typeface="Times New Roman" panose="02020603050405020304" pitchFamily="18" charset="0"/>
-                <a:cs typeface="Times New Roman" panose="02020603050405020304" pitchFamily="18" charset="0"/>
-              </a:rPr>
-              <a:t>CBC</a:t>
-            </a:r>
-            <a:r>
-              <a:rPr lang="en-GB" sz="1600" spc="-25" dirty="0">
-                <a:latin typeface="Times New Roman" panose="02020603050405020304" pitchFamily="18" charset="0"/>
-                <a:cs typeface="Times New Roman" panose="02020603050405020304" pitchFamily="18" charset="0"/>
-              </a:rPr>
-              <a:t> </a:t>
-            </a:r>
-            <a:r>
-              <a:rPr lang="en-GB" sz="1600" dirty="0">
-                <a:latin typeface="Times New Roman" panose="02020603050405020304" pitchFamily="18" charset="0"/>
-                <a:cs typeface="Times New Roman" panose="02020603050405020304" pitchFamily="18" charset="0"/>
-              </a:rPr>
-              <a:t>is</a:t>
-            </a:r>
-            <a:r>
-              <a:rPr lang="en-GB" sz="1600" spc="-15" dirty="0">
-                <a:latin typeface="Times New Roman" panose="02020603050405020304" pitchFamily="18" charset="0"/>
-                <a:cs typeface="Times New Roman" panose="02020603050405020304" pitchFamily="18" charset="0"/>
-              </a:rPr>
-              <a:t> </a:t>
-            </a:r>
-            <a:r>
-              <a:rPr lang="en-GB" sz="1600" dirty="0">
-                <a:latin typeface="Times New Roman" panose="02020603050405020304" pitchFamily="18" charset="0"/>
-                <a:cs typeface="Times New Roman" panose="02020603050405020304" pitchFamily="18" charset="0"/>
-              </a:rPr>
-              <a:t>used</a:t>
-            </a:r>
-            <a:r>
-              <a:rPr lang="en-GB" sz="1600" spc="-25" dirty="0">
-                <a:latin typeface="Times New Roman" panose="02020603050405020304" pitchFamily="18" charset="0"/>
-                <a:cs typeface="Times New Roman" panose="02020603050405020304" pitchFamily="18" charset="0"/>
-              </a:rPr>
-              <a:t> </a:t>
-            </a:r>
-            <a:r>
-              <a:rPr lang="en-GB" sz="1600" dirty="0">
-                <a:latin typeface="Times New Roman" panose="02020603050405020304" pitchFamily="18" charset="0"/>
-                <a:cs typeface="Times New Roman" panose="02020603050405020304" pitchFamily="18" charset="0"/>
-              </a:rPr>
-              <a:t>with</a:t>
-            </a:r>
-            <a:r>
-              <a:rPr lang="en-GB" sz="1600" spc="-20" dirty="0">
-                <a:latin typeface="Times New Roman" panose="02020603050405020304" pitchFamily="18" charset="0"/>
-                <a:cs typeface="Times New Roman" panose="02020603050405020304" pitchFamily="18" charset="0"/>
-              </a:rPr>
-              <a:t> IV=</a:t>
-            </a:r>
-            <a:r>
-              <a:rPr lang="en-GB" sz="1600" dirty="0">
-                <a:latin typeface="Times New Roman" panose="02020603050405020304" pitchFamily="18" charset="0"/>
-                <a:cs typeface="Times New Roman" panose="02020603050405020304" pitchFamily="18" charset="0"/>
-              </a:rPr>
-              <a:t>111.</a:t>
-            </a:r>
-            <a:r>
-              <a:rPr lang="en-GB" sz="1600" spc="-10" dirty="0">
-                <a:latin typeface="Times New Roman" panose="02020603050405020304" pitchFamily="18" charset="0"/>
-                <a:cs typeface="Times New Roman" panose="02020603050405020304" pitchFamily="18" charset="0"/>
-              </a:rPr>
-              <a:t> </a:t>
-            </a:r>
-            <a:r>
-              <a:rPr lang="en-GB" sz="1600" dirty="0">
-                <a:latin typeface="Times New Roman" panose="02020603050405020304" pitchFamily="18" charset="0"/>
-                <a:cs typeface="Times New Roman" panose="02020603050405020304" pitchFamily="18" charset="0"/>
-              </a:rPr>
-              <a:t>What</a:t>
-            </a:r>
-            <a:r>
-              <a:rPr lang="en-GB" sz="1600" spc="-30" dirty="0">
-                <a:latin typeface="Times New Roman" panose="02020603050405020304" pitchFamily="18" charset="0"/>
-                <a:cs typeface="Times New Roman" panose="02020603050405020304" pitchFamily="18" charset="0"/>
-              </a:rPr>
-              <a:t> </a:t>
-            </a:r>
-            <a:r>
-              <a:rPr lang="en-GB" sz="1600" dirty="0">
-                <a:latin typeface="Times New Roman" panose="02020603050405020304" pitchFamily="18" charset="0"/>
-                <a:cs typeface="Times New Roman" panose="02020603050405020304" pitchFamily="18" charset="0"/>
-              </a:rPr>
-              <a:t>is</a:t>
-            </a:r>
-            <a:r>
-              <a:rPr lang="en-GB" sz="1600" spc="-20" dirty="0">
-                <a:latin typeface="Times New Roman" panose="02020603050405020304" pitchFamily="18" charset="0"/>
-                <a:cs typeface="Times New Roman" panose="02020603050405020304" pitchFamily="18" charset="0"/>
-              </a:rPr>
-              <a:t> </a:t>
-            </a:r>
-            <a:r>
-              <a:rPr lang="en-GB" sz="1600" spc="-25" dirty="0">
-                <a:latin typeface="Times New Roman" panose="02020603050405020304" pitchFamily="18" charset="0"/>
-                <a:cs typeface="Times New Roman" panose="02020603050405020304" pitchFamily="18" charset="0"/>
-              </a:rPr>
-              <a:t>the </a:t>
-            </a:r>
-            <a:r>
-              <a:rPr lang="en-GB" sz="1600" dirty="0">
-                <a:latin typeface="Times New Roman" panose="02020603050405020304" pitchFamily="18" charset="0"/>
-                <a:cs typeface="Times New Roman" panose="02020603050405020304" pitchFamily="18" charset="0"/>
-              </a:rPr>
-              <a:t>resulting</a:t>
-            </a:r>
-            <a:r>
-              <a:rPr lang="en-GB" sz="1600" spc="-55" dirty="0">
-                <a:latin typeface="Times New Roman" panose="02020603050405020304" pitchFamily="18" charset="0"/>
-                <a:cs typeface="Times New Roman" panose="02020603050405020304" pitchFamily="18" charset="0"/>
-              </a:rPr>
-              <a:t> </a:t>
-            </a:r>
-            <a:r>
-              <a:rPr lang="en-GB" sz="1600" spc="-10" dirty="0">
-                <a:latin typeface="Times New Roman" panose="02020603050405020304" pitchFamily="18" charset="0"/>
-                <a:cs typeface="Times New Roman" panose="02020603050405020304" pitchFamily="18" charset="0"/>
-              </a:rPr>
-              <a:t>ciphertext?</a:t>
-            </a:r>
-          </a:p>
-          <a:p>
-            <a:pPr marL="12700" marR="673735" indent="0">
-              <a:lnSpc>
-                <a:spcPct val="100000"/>
-              </a:lnSpc>
-              <a:spcBef>
-                <a:spcPts val="575"/>
-              </a:spcBef>
-              <a:buNone/>
-              <a:tabLst>
-                <a:tab pos="355600" algn="l"/>
-                <a:tab pos="425450" algn="l"/>
-              </a:tabLst>
-            </a:pPr>
-            <a:r>
-              <a:rPr lang="en-GB" sz="1600" spc="-10" dirty="0">
-                <a:latin typeface="Times New Roman" panose="02020603050405020304" pitchFamily="18" charset="0"/>
-                <a:cs typeface="Times New Roman" panose="02020603050405020304" pitchFamily="18" charset="0"/>
-              </a:rPr>
-              <a:t>ANS:  </a:t>
-            </a:r>
-            <a:r>
-              <a:rPr lang="en-GB" sz="1600" dirty="0">
-                <a:latin typeface="Times New Roman" panose="02020603050405020304" pitchFamily="18" charset="0"/>
-                <a:cs typeface="Times New Roman" panose="02020603050405020304" pitchFamily="18" charset="0"/>
-              </a:rPr>
-              <a:t>With CBC and IV = 111, resulting ciphertext for plaintext 100101100 is 100110101. (See next page.)</a:t>
-            </a:r>
-            <a:endParaRPr lang="en-SE" sz="1600" dirty="0">
-              <a:latin typeface="Times New Roman" panose="02020603050405020304" pitchFamily="18" charset="0"/>
-              <a:cs typeface="Times New Roman" panose="02020603050405020304" pitchFamily="18" charset="0"/>
-            </a:endParaRPr>
-          </a:p>
-        </p:txBody>
-      </p:sp>
-      <p:sp>
-        <p:nvSpPr>
           <p:cNvPr id="8" name="TextBox 7">
             <a:extLst>
               <a:ext uri="{FF2B5EF4-FFF2-40B4-BE49-F238E27FC236}">
@@ -41422,6 +40904,260 @@
               <a:t>26</a:t>
             </a:fld>
             <a:endParaRPr kumimoji="0" lang="en-US" dirty="0"/>
+          </a:p>
+        </p:txBody>
+      </p:sp>
+      <p:sp>
+        <p:nvSpPr>
+          <p:cNvPr id="4" name="Content Placeholder 1">
+            <a:extLst>
+              <a:ext uri="{FF2B5EF4-FFF2-40B4-BE49-F238E27FC236}">
+                <a16:creationId xmlns:a16="http://schemas.microsoft.com/office/drawing/2014/main" id="{2E44D3F4-D90D-0BA7-BA04-7CF89F44BB30}"/>
+              </a:ext>
+            </a:extLst>
+          </p:cNvPr>
+          <p:cNvSpPr txBox="1">
+            <a:spLocks/>
+          </p:cNvSpPr>
+          <p:nvPr/>
+        </p:nvSpPr>
+        <p:spPr>
+          <a:xfrm>
+            <a:off x="87112" y="1157177"/>
+            <a:ext cx="6161931" cy="5298301"/>
+          </a:xfrm>
+          <a:prstGeom prst="rect">
+            <a:avLst/>
+          </a:prstGeom>
+        </p:spPr>
+        <p:txBody>
+          <a:bodyPr vert="horz">
+            <a:normAutofit fontScale="85000" lnSpcReduction="20000"/>
+          </a:bodyPr>
+          <a:lstStyle>
+            <a:lvl1pPr marL="274320" indent="-274320" algn="l" rtl="0" eaLnBrk="1" latinLnBrk="0" hangingPunct="1">
+              <a:spcBef>
+                <a:spcPts val="600"/>
+              </a:spcBef>
+              <a:buClr>
+                <a:schemeClr val="accent1"/>
+              </a:buClr>
+              <a:buSzPct val="76000"/>
+              <a:buFont typeface="Wingdings 3"/>
+              <a:buChar char=""/>
+              <a:defRPr kumimoji="0" sz="2600" kern="1200">
+                <a:solidFill>
+                  <a:schemeClr val="tx1"/>
+                </a:solidFill>
+                <a:latin typeface="+mn-lt"/>
+                <a:ea typeface="+mn-ea"/>
+                <a:cs typeface="+mn-cs"/>
+              </a:defRPr>
+            </a:lvl1pPr>
+            <a:lvl2pPr marL="548640" indent="-274320" algn="l" rtl="0" eaLnBrk="1" latinLnBrk="0" hangingPunct="1">
+              <a:spcBef>
+                <a:spcPts val="500"/>
+              </a:spcBef>
+              <a:buClr>
+                <a:schemeClr val="accent2"/>
+              </a:buClr>
+              <a:buSzPct val="76000"/>
+              <a:buFont typeface="Wingdings 3"/>
+              <a:buChar char=""/>
+              <a:defRPr kumimoji="0" sz="2300" kern="1200">
+                <a:solidFill>
+                  <a:schemeClr val="tx2"/>
+                </a:solidFill>
+                <a:latin typeface="+mn-lt"/>
+                <a:ea typeface="+mn-ea"/>
+                <a:cs typeface="+mn-cs"/>
+              </a:defRPr>
+            </a:lvl2pPr>
+            <a:lvl3pPr marL="822960" indent="-228600" algn="l" rtl="0" eaLnBrk="1" latinLnBrk="0" hangingPunct="1">
+              <a:spcBef>
+                <a:spcPts val="500"/>
+              </a:spcBef>
+              <a:buClr>
+                <a:schemeClr val="bg1">
+                  <a:shade val="50000"/>
+                </a:schemeClr>
+              </a:buClr>
+              <a:buSzPct val="76000"/>
+              <a:buFont typeface="Wingdings 3"/>
+              <a:buChar char=""/>
+              <a:defRPr kumimoji="0" sz="2000" kern="1200">
+                <a:solidFill>
+                  <a:schemeClr val="tx1"/>
+                </a:solidFill>
+                <a:latin typeface="+mn-lt"/>
+                <a:ea typeface="+mn-ea"/>
+                <a:cs typeface="+mn-cs"/>
+              </a:defRPr>
+            </a:lvl3pPr>
+            <a:lvl4pPr marL="1097280" indent="-228600" algn="l" rtl="0" eaLnBrk="1" latinLnBrk="0" hangingPunct="1">
+              <a:spcBef>
+                <a:spcPts val="400"/>
+              </a:spcBef>
+              <a:buClr>
+                <a:schemeClr val="accent2">
+                  <a:shade val="75000"/>
+                </a:schemeClr>
+              </a:buClr>
+              <a:buSzPct val="70000"/>
+              <a:buFont typeface="Wingdings"/>
+              <a:buChar char=""/>
+              <a:defRPr kumimoji="0" sz="1800" kern="1200">
+                <a:solidFill>
+                  <a:schemeClr val="tx1"/>
+                </a:solidFill>
+                <a:latin typeface="+mn-lt"/>
+                <a:ea typeface="+mn-ea"/>
+                <a:cs typeface="+mn-cs"/>
+              </a:defRPr>
+            </a:lvl4pPr>
+            <a:lvl5pPr marL="1371600" indent="-228600" algn="l" rtl="0" eaLnBrk="1" latinLnBrk="0" hangingPunct="1">
+              <a:spcBef>
+                <a:spcPts val="300"/>
+              </a:spcBef>
+              <a:buClr>
+                <a:schemeClr val="accent2"/>
+              </a:buClr>
+              <a:buSzPct val="70000"/>
+              <a:buFont typeface="Wingdings"/>
+              <a:buChar char=""/>
+              <a:defRPr kumimoji="0" sz="1600" kern="1200">
+                <a:solidFill>
+                  <a:schemeClr val="tx1"/>
+                </a:solidFill>
+                <a:latin typeface="+mn-lt"/>
+                <a:ea typeface="+mn-ea"/>
+                <a:cs typeface="+mn-cs"/>
+              </a:defRPr>
+            </a:lvl5pPr>
+            <a:lvl6pPr marL="1645920" indent="-182880" algn="l" rtl="0" eaLnBrk="1" latinLnBrk="0" hangingPunct="1">
+              <a:spcBef>
+                <a:spcPts val="300"/>
+              </a:spcBef>
+              <a:buClr>
+                <a:srgbClr val="9FB8CD">
+                  <a:shade val="75000"/>
+                </a:srgbClr>
+              </a:buClr>
+              <a:buSzPct val="75000"/>
+              <a:buFont typeface="Wingdings 3"/>
+              <a:buChar char=""/>
+              <a:defRPr kumimoji="0" lang="en-US" sz="1600" kern="1200" smtClean="0">
+                <a:solidFill>
+                  <a:schemeClr val="tx1"/>
+                </a:solidFill>
+                <a:latin typeface="+mn-lt"/>
+                <a:ea typeface="+mn-ea"/>
+                <a:cs typeface="+mn-cs"/>
+              </a:defRPr>
+            </a:lvl6pPr>
+            <a:lvl7pPr marL="1828800" indent="-182880" algn="l" rtl="0" eaLnBrk="1" latinLnBrk="0" hangingPunct="1">
+              <a:spcBef>
+                <a:spcPts val="300"/>
+              </a:spcBef>
+              <a:buClr>
+                <a:srgbClr val="727CA3">
+                  <a:shade val="75000"/>
+                </a:srgbClr>
+              </a:buClr>
+              <a:buSzPct val="75000"/>
+              <a:buFont typeface="Wingdings 3"/>
+              <a:buChar char=""/>
+              <a:defRPr kumimoji="0" lang="en-US" sz="1400" kern="1200" smtClean="0">
+                <a:solidFill>
+                  <a:schemeClr val="tx1"/>
+                </a:solidFill>
+                <a:latin typeface="+mn-lt"/>
+                <a:ea typeface="+mn-ea"/>
+                <a:cs typeface="+mn-cs"/>
+              </a:defRPr>
+            </a:lvl7pPr>
+            <a:lvl8pPr marL="2011680" indent="-182880" algn="l" rtl="0" eaLnBrk="1" latinLnBrk="0" hangingPunct="1">
+              <a:spcBef>
+                <a:spcPts val="300"/>
+              </a:spcBef>
+              <a:buClr>
+                <a:prstClr val="white">
+                  <a:shade val="50000"/>
+                </a:prstClr>
+              </a:buClr>
+              <a:buSzPct val="75000"/>
+              <a:buFont typeface="Wingdings 3"/>
+              <a:buChar char=""/>
+              <a:defRPr kumimoji="0" lang="en-US" sz="1400" kern="1200" smtClean="0">
+                <a:solidFill>
+                  <a:schemeClr val="tx1"/>
+                </a:solidFill>
+                <a:latin typeface="+mn-lt"/>
+                <a:ea typeface="+mn-ea"/>
+                <a:cs typeface="+mn-cs"/>
+              </a:defRPr>
+            </a:lvl8pPr>
+            <a:lvl9pPr marL="2194560" indent="-182880" algn="l" rtl="0" eaLnBrk="1" latinLnBrk="0" hangingPunct="1">
+              <a:spcBef>
+                <a:spcPts val="300"/>
+              </a:spcBef>
+              <a:buClr>
+                <a:srgbClr val="9FB8CD"/>
+              </a:buClr>
+              <a:buSzPct val="75000"/>
+              <a:buFont typeface="Wingdings 3"/>
+              <a:buChar char=""/>
+              <a:defRPr kumimoji="0" lang="en-US" sz="1200" kern="1200" smtClean="0">
+                <a:solidFill>
+                  <a:schemeClr val="tx1"/>
+                </a:solidFill>
+                <a:latin typeface="+mn-lt"/>
+                <a:ea typeface="+mn-ea"/>
+                <a:cs typeface="+mn-cs"/>
+              </a:defRPr>
+            </a:lvl9pPr>
+          </a:lstStyle>
+          <a:p>
+            <a:r>
+              <a:rPr lang="en-US" dirty="0"/>
+              <a:t>(a) Initially assume that CBC is not used. What is the resulting ciphertext?</a:t>
+            </a:r>
+          </a:p>
+          <a:p>
+            <a:pPr lvl="1"/>
+            <a:r>
+              <a:rPr lang="en-US" dirty="0"/>
+              <a:t>ANS: Ciphertext for plaintext 100101100 is 011010011, since 100 maps to 011, 101 maps to 010, 100 maps to 011</a:t>
+            </a:r>
+          </a:p>
+          <a:p>
+            <a:r>
+              <a:rPr lang="en-US" dirty="0"/>
+              <a:t>(b) Suppose Trudy sniffs the ciphertext. Assuming she knows that a 3-bit block cipher without CBC is being employed (but doesn’t know the specific cipher), what can she infer?</a:t>
+            </a:r>
+          </a:p>
+          <a:p>
+            <a:pPr lvl="1"/>
+            <a:r>
+              <a:rPr lang="en-US" dirty="0"/>
+              <a:t>ANS: Since the same plaintext block always maps to the same ciphertext block, repeated blocks can be spotted. Here, the first and third plaintext blocks are both 010, and they both encrypt to 101. That reveals a pattern. </a:t>
+            </a:r>
+          </a:p>
+          <a:p>
+            <a:r>
+              <a:rPr lang="en-US" dirty="0"/>
+              <a:t>(c) Now, suppose that CBC is used with IV=111. What is the resulting ciphertext?</a:t>
+            </a:r>
+          </a:p>
+          <a:p>
+            <a:pPr lvl="1"/>
+            <a:r>
+              <a:rPr lang="en-US" dirty="0"/>
+              <a:t>ANS:  With CBC and IV = 111, resulting ciphertext for plaintext 100101100 is 100110101. (See next page.)</a:t>
+            </a:r>
+          </a:p>
+          <a:p>
+            <a:endParaRPr lang="en-GB" dirty="0"/>
           </a:p>
         </p:txBody>
       </p:sp>
@@ -43015,13 +42751,13 @@
         </p:nvSpPr>
         <p:spPr>
           <a:xfrm>
-            <a:off x="-27616" y="1017605"/>
-            <a:ext cx="5978017" cy="5751063"/>
+            <a:off x="-27616" y="1143000"/>
+            <a:ext cx="5887787" cy="5334000"/>
           </a:xfrm>
         </p:spPr>
         <p:txBody>
           <a:bodyPr>
-            <a:normAutofit fontScale="85000" lnSpcReduction="20000"/>
+            <a:normAutofit fontScale="77500" lnSpcReduction="20000"/>
           </a:bodyPr>
           <a:lstStyle/>
           <a:p>

--- a/Exams/CSC175  Sp26 Final Exam Sample Questions ANS.pptx
+++ b/Exams/CSC175  Sp26 Final Exam Sample Questions ANS.pptx
@@ -425,7 +425,7 @@
             <a:fld id="{2AEAFE1F-9E52-45C8-9793-E819F0044A1C}" type="datetimeFigureOut">
               <a:rPr lang="en-US" smtClean="0"/>
               <a:pPr/>
-              <a:t>5/6/2026</a:t>
+              <a:t>5/7/2026</a:t>
             </a:fld>
             <a:endParaRPr lang="en-US"/>
           </a:p>
@@ -2347,6 +2347,584 @@
               <a:rPr lang="en-US" altLang="zh-CN" sz="1200" dirty="0"/>
               <a:t>If there was a timeout, the congestion window size would have dropped to 1.</a:t>
             </a:r>
+          </a:p>
+          <a:p>
+            <a:r>
+              <a:rPr lang="en-US" altLang="zh-CN" sz="1200" b="1" i="0" kern="1200" dirty="0">
+                <a:solidFill>
+                  <a:schemeClr val="tx1"/>
+                </a:solidFill>
+                <a:effectLst/>
+                <a:latin typeface="+mn-lt"/>
+                <a:ea typeface="+mn-ea"/>
+                <a:cs typeface="+mn-cs"/>
+              </a:rPr>
+              <a:t>Slide 24 Congestion Control</a:t>
+            </a:r>
+            <a:r>
+              <a:rPr lang="en-US" altLang="zh-CN" sz="1200" b="0" i="0" kern="1200" dirty="0">
+                <a:solidFill>
+                  <a:schemeClr val="tx1"/>
+                </a:solidFill>
+                <a:effectLst/>
+                <a:latin typeface="+mn-lt"/>
+                <a:ea typeface="+mn-ea"/>
+                <a:cs typeface="+mn-cs"/>
+              </a:rPr>
+              <a:t>:</a:t>
+            </a:r>
+          </a:p>
+          <a:p>
+            <a:r>
+              <a:rPr lang="en-US" altLang="zh-CN" sz="1200" b="0" i="0" kern="1200" dirty="0">
+                <a:solidFill>
+                  <a:schemeClr val="tx1"/>
+                </a:solidFill>
+                <a:effectLst/>
+                <a:latin typeface="+mn-lt"/>
+                <a:ea typeface="+mn-ea"/>
+                <a:cs typeface="+mn-cs"/>
+              </a:rPr>
+              <a:t>(a) Slow start and ✓ (</a:t>
+            </a:r>
+            <a:r>
+              <a:rPr lang="en-US" altLang="zh-CN" sz="1200" b="0" i="0" kern="1200" dirty="0" err="1">
+                <a:solidFill>
+                  <a:schemeClr val="tx1"/>
+                </a:solidFill>
+                <a:effectLst/>
+                <a:latin typeface="+mn-lt"/>
+                <a:ea typeface="+mn-ea"/>
+                <a:cs typeface="+mn-cs"/>
+              </a:rPr>
+              <a:t>cwnd</a:t>
+            </a:r>
+            <a:r>
+              <a:rPr lang="en-US" altLang="zh-CN" sz="1200" b="0" i="0" kern="1200" dirty="0">
+                <a:solidFill>
+                  <a:schemeClr val="tx1"/>
+                </a:solidFill>
+                <a:effectLst/>
+                <a:latin typeface="+mn-lt"/>
+                <a:ea typeface="+mn-ea"/>
+                <a:cs typeface="+mn-cs"/>
+              </a:rPr>
+              <a:t> doubles)</a:t>
+            </a:r>
+            <a:r>
+              <a:rPr lang="en-US" altLang="zh-CN" sz="1200" b="0" i="0" u="none" strike="noStrike" kern="1200" dirty="0">
+                <a:solidFill>
+                  <a:schemeClr val="tx1"/>
+                </a:solidFill>
+                <a:effectLst/>
+                <a:latin typeface="+mn-lt"/>
+                <a:ea typeface="+mn-ea"/>
+                <a:cs typeface="+mn-cs"/>
+                <a:hlinkClick r:id="rId3"/>
+              </a:rPr>
+              <a:t>CSC175-Sp26-Final-Exam-Sample-Questions-ANS.pdf</a:t>
+            </a:r>
+            <a:r>
+              <a:rPr lang="en-US" altLang="zh-CN" sz="1200" b="0" i="0" kern="1200" dirty="0">
+                <a:solidFill>
+                  <a:schemeClr val="tx1"/>
+                </a:solidFill>
+                <a:effectLst/>
+                <a:latin typeface="+mn-lt"/>
+                <a:ea typeface="+mn-ea"/>
+                <a:cs typeface="+mn-cs"/>
+              </a:rPr>
+              <a:t>6</a:t>
+            </a:r>
+          </a:p>
+          <a:p>
+            <a:r>
+              <a:rPr lang="en-US" altLang="zh-CN" sz="1200" b="0" i="0" kern="1200" dirty="0">
+                <a:solidFill>
+                  <a:schemeClr val="tx1"/>
+                </a:solidFill>
+                <a:effectLst/>
+                <a:latin typeface="+mn-lt"/>
+                <a:ea typeface="+mn-ea"/>
+                <a:cs typeface="+mn-cs"/>
+              </a:rPr>
+              <a:t>(b) Congestion avoidance and ✓ (linear growth; though really is rounds 17 through 22, which is when window grows from 21 to 26 linearly)6</a:t>
+            </a:r>
+          </a:p>
+          <a:p>
+            <a:r>
+              <a:rPr lang="en-US" altLang="zh-CN" sz="1200" b="0" i="0" kern="1200" dirty="0">
+                <a:solidFill>
+                  <a:schemeClr val="tx1"/>
+                </a:solidFill>
+                <a:effectLst/>
+                <a:latin typeface="+mn-lt"/>
+                <a:ea typeface="+mn-ea"/>
+                <a:cs typeface="+mn-cs"/>
+              </a:rPr>
+              <a:t>(c) Round 16: window was 42, then drops to 21 → halved → triple-dup-ACK ✓</a:t>
+            </a:r>
+          </a:p>
+          <a:p>
+            <a:r>
+              <a:rPr lang="en-US" altLang="zh-CN" sz="1200" b="0" i="0" kern="1200" dirty="0">
+                <a:solidFill>
+                  <a:schemeClr val="tx1"/>
+                </a:solidFill>
+                <a:effectLst/>
+                <a:latin typeface="+mn-lt"/>
+                <a:ea typeface="+mn-ea"/>
+                <a:cs typeface="+mn-cs"/>
+              </a:rPr>
+              <a:t>(d) Round 22: window 26 → drops to 1 → timeout ✓</a:t>
+            </a:r>
+          </a:p>
+          <a:p>
+            <a:r>
+              <a:rPr lang="en-US" altLang="zh-CN" sz="1200" b="0" i="0" kern="1200" dirty="0">
+                <a:solidFill>
+                  <a:schemeClr val="tx1"/>
+                </a:solidFill>
+                <a:effectLst/>
+                <a:latin typeface="+mn-lt"/>
+                <a:ea typeface="+mn-ea"/>
+                <a:cs typeface="+mn-cs"/>
+              </a:rPr>
+              <a:t>(e) </a:t>
+            </a:r>
+            <a:r>
+              <a:rPr lang="en-US" altLang="zh-CN" sz="1200" b="0" i="0" kern="1200" dirty="0" err="1">
+                <a:solidFill>
+                  <a:schemeClr val="tx1"/>
+                </a:solidFill>
+                <a:effectLst/>
+                <a:latin typeface="+mn-lt"/>
+                <a:ea typeface="+mn-ea"/>
+                <a:cs typeface="+mn-cs"/>
+              </a:rPr>
+              <a:t>ssthresh</a:t>
+            </a:r>
+            <a:r>
+              <a:rPr lang="en-US" altLang="zh-CN" sz="1200" b="0" i="0" kern="1200" dirty="0">
+                <a:solidFill>
+                  <a:schemeClr val="tx1"/>
+                </a:solidFill>
+                <a:effectLst/>
+                <a:latin typeface="+mn-lt"/>
+                <a:ea typeface="+mn-ea"/>
+                <a:cs typeface="+mn-cs"/>
+              </a:rPr>
+              <a:t> starts at 32 (where slow start transitions to congestion avoidance)... wait, looking at graph slow start goes 1,2,4,8,16,32 then becomes congestion avoidance. So </a:t>
+            </a:r>
+            <a:r>
+              <a:rPr lang="en-US" altLang="zh-CN" sz="1200" b="0" i="0" kern="1200" dirty="0" err="1">
+                <a:solidFill>
+                  <a:schemeClr val="tx1"/>
+                </a:solidFill>
+                <a:effectLst/>
+                <a:latin typeface="+mn-lt"/>
+                <a:ea typeface="+mn-ea"/>
+                <a:cs typeface="+mn-cs"/>
+              </a:rPr>
+              <a:t>ssthresh</a:t>
+            </a:r>
+            <a:r>
+              <a:rPr lang="en-US" altLang="zh-CN" sz="1200" b="0" i="0" kern="1200" dirty="0">
+                <a:solidFill>
+                  <a:schemeClr val="tx1"/>
+                </a:solidFill>
+                <a:effectLst/>
+                <a:latin typeface="+mn-lt"/>
+                <a:ea typeface="+mn-ea"/>
+                <a:cs typeface="+mn-cs"/>
+              </a:rPr>
+              <a:t>=32 initially? But the graph shows transition happening at </a:t>
+            </a:r>
+            <a:r>
+              <a:rPr lang="en-US" altLang="zh-CN" sz="1200" b="0" i="0" kern="1200" dirty="0" err="1">
+                <a:solidFill>
+                  <a:schemeClr val="tx1"/>
+                </a:solidFill>
+                <a:effectLst/>
+                <a:latin typeface="+mn-lt"/>
+                <a:ea typeface="+mn-ea"/>
+                <a:cs typeface="+mn-cs"/>
+              </a:rPr>
+              <a:t>cwnd</a:t>
+            </a:r>
+            <a:r>
+              <a:rPr lang="en-US" altLang="zh-CN" sz="1200" b="0" i="0" kern="1200" dirty="0">
+                <a:solidFill>
+                  <a:schemeClr val="tx1"/>
+                </a:solidFill>
+                <a:effectLst/>
+                <a:latin typeface="+mn-lt"/>
+                <a:ea typeface="+mn-ea"/>
+                <a:cs typeface="+mn-cs"/>
+              </a:rPr>
+              <a:t>=32 (round 6). For initial </a:t>
+            </a:r>
+            <a:r>
+              <a:rPr lang="en-US" altLang="zh-CN" sz="1200" b="0" i="0" kern="1200" dirty="0" err="1">
+                <a:solidFill>
+                  <a:schemeClr val="tx1"/>
+                </a:solidFill>
+                <a:effectLst/>
+                <a:latin typeface="+mn-lt"/>
+                <a:ea typeface="+mn-ea"/>
+                <a:cs typeface="+mn-cs"/>
+              </a:rPr>
+              <a:t>ssthresh</a:t>
+            </a:r>
+            <a:r>
+              <a:rPr lang="en-US" altLang="zh-CN" sz="1200" b="0" i="0" kern="1200" dirty="0">
+                <a:solidFill>
+                  <a:schemeClr val="tx1"/>
+                </a:solidFill>
+                <a:effectLst/>
+                <a:latin typeface="+mn-lt"/>
+                <a:ea typeface="+mn-ea"/>
+                <a:cs typeface="+mn-cs"/>
+              </a:rPr>
+              <a:t> to be 32, we'd need the window to hit 32 and switch. In Reno, </a:t>
+            </a:r>
+            <a:r>
+              <a:rPr lang="en-US" altLang="zh-CN" sz="1200" b="0" i="0" kern="1200" dirty="0" err="1">
+                <a:solidFill>
+                  <a:schemeClr val="tx1"/>
+                </a:solidFill>
+                <a:effectLst/>
+                <a:latin typeface="+mn-lt"/>
+                <a:ea typeface="+mn-ea"/>
+                <a:cs typeface="+mn-cs"/>
+              </a:rPr>
+              <a:t>ssthresh</a:t>
+            </a:r>
+            <a:r>
+              <a:rPr lang="en-US" altLang="zh-CN" sz="1200" b="0" i="0" kern="1200" dirty="0">
+                <a:solidFill>
+                  <a:schemeClr val="tx1"/>
+                </a:solidFill>
+                <a:effectLst/>
+                <a:latin typeface="+mn-lt"/>
+                <a:ea typeface="+mn-ea"/>
+                <a:cs typeface="+mn-cs"/>
+              </a:rPr>
+              <a:t> is often initialized large; at round 5 window=16, round 6 window=32. So </a:t>
+            </a:r>
+            <a:r>
+              <a:rPr lang="en-US" altLang="zh-CN" sz="1200" b="0" i="0" kern="1200" dirty="0" err="1">
+                <a:solidFill>
+                  <a:schemeClr val="tx1"/>
+                </a:solidFill>
+                <a:effectLst/>
+                <a:latin typeface="+mn-lt"/>
+                <a:ea typeface="+mn-ea"/>
+                <a:cs typeface="+mn-cs"/>
+              </a:rPr>
+              <a:t>ssthresh</a:t>
+            </a:r>
+            <a:r>
+              <a:rPr lang="en-US" altLang="zh-CN" sz="1200" b="0" i="0" kern="1200" dirty="0">
+                <a:solidFill>
+                  <a:schemeClr val="tx1"/>
+                </a:solidFill>
+                <a:effectLst/>
+                <a:latin typeface="+mn-lt"/>
+                <a:ea typeface="+mn-ea"/>
+                <a:cs typeface="+mn-cs"/>
+              </a:rPr>
+              <a:t>=32 makes sense as the value at which transition occurs ✓.</a:t>
+            </a:r>
+          </a:p>
+          <a:p>
+            <a:r>
+              <a:rPr lang="en-US" altLang="zh-CN" sz="1200" b="0" i="0" kern="1200" dirty="0">
+                <a:solidFill>
+                  <a:schemeClr val="tx1"/>
+                </a:solidFill>
+                <a:effectLst/>
+                <a:latin typeface="+mn-lt"/>
+                <a:ea typeface="+mn-ea"/>
+                <a:cs typeface="+mn-cs"/>
+              </a:rPr>
+              <a:t>(f) After round 16 loss (window=42), </a:t>
+            </a:r>
+            <a:r>
+              <a:rPr lang="en-US" altLang="zh-CN" sz="1200" b="0" i="0" kern="1200" dirty="0" err="1">
+                <a:solidFill>
+                  <a:schemeClr val="tx1"/>
+                </a:solidFill>
+                <a:effectLst/>
+                <a:latin typeface="+mn-lt"/>
+                <a:ea typeface="+mn-ea"/>
+                <a:cs typeface="+mn-cs"/>
+              </a:rPr>
+              <a:t>ssthresh</a:t>
+            </a:r>
+            <a:r>
+              <a:rPr lang="en-US" altLang="zh-CN" sz="1200" b="0" i="0" kern="1200" dirty="0">
+                <a:solidFill>
+                  <a:schemeClr val="tx1"/>
+                </a:solidFill>
+                <a:effectLst/>
+                <a:latin typeface="+mn-lt"/>
+                <a:ea typeface="+mn-ea"/>
+                <a:cs typeface="+mn-cs"/>
+              </a:rPr>
+              <a:t>=42/2=21. So at round 18, </a:t>
+            </a:r>
+            <a:r>
+              <a:rPr lang="en-US" altLang="zh-CN" sz="1200" b="0" i="0" kern="1200" dirty="0" err="1">
+                <a:solidFill>
+                  <a:schemeClr val="tx1"/>
+                </a:solidFill>
+                <a:effectLst/>
+                <a:latin typeface="+mn-lt"/>
+                <a:ea typeface="+mn-ea"/>
+                <a:cs typeface="+mn-cs"/>
+              </a:rPr>
+              <a:t>ssthresh</a:t>
+            </a:r>
+            <a:r>
+              <a:rPr lang="en-US" altLang="zh-CN" sz="1200" b="0" i="0" kern="1200" dirty="0">
+                <a:solidFill>
+                  <a:schemeClr val="tx1"/>
+                </a:solidFill>
+                <a:effectLst/>
+                <a:latin typeface="+mn-lt"/>
+                <a:ea typeface="+mn-ea"/>
+                <a:cs typeface="+mn-cs"/>
+              </a:rPr>
+              <a:t>=21 ✓</a:t>
+            </a:r>
+          </a:p>
+          <a:p>
+            <a:r>
+              <a:rPr lang="en-US" altLang="zh-CN" sz="1200" b="0" i="0" kern="1200" dirty="0">
+                <a:solidFill>
+                  <a:schemeClr val="tx1"/>
+                </a:solidFill>
+                <a:effectLst/>
+                <a:latin typeface="+mn-lt"/>
+                <a:ea typeface="+mn-ea"/>
+                <a:cs typeface="+mn-cs"/>
+              </a:rPr>
+              <a:t>(g) After round 22 loss (window=26), </a:t>
+            </a:r>
+            <a:r>
+              <a:rPr lang="en-US" altLang="zh-CN" sz="1200" b="0" i="0" kern="1200" dirty="0" err="1">
+                <a:solidFill>
+                  <a:schemeClr val="tx1"/>
+                </a:solidFill>
+                <a:effectLst/>
+                <a:latin typeface="+mn-lt"/>
+                <a:ea typeface="+mn-ea"/>
+                <a:cs typeface="+mn-cs"/>
+              </a:rPr>
+              <a:t>ssthresh</a:t>
+            </a:r>
+            <a:r>
+              <a:rPr lang="en-US" altLang="zh-CN" sz="1200" b="0" i="0" kern="1200" dirty="0">
+                <a:solidFill>
+                  <a:schemeClr val="tx1"/>
+                </a:solidFill>
+                <a:effectLst/>
+                <a:latin typeface="+mn-lt"/>
+                <a:ea typeface="+mn-ea"/>
+                <a:cs typeface="+mn-cs"/>
+              </a:rPr>
+              <a:t>=26/2=13 ✓</a:t>
+            </a:r>
+          </a:p>
+          <a:p>
+            <a:r>
+              <a:rPr lang="en-US" altLang="zh-CN" sz="1200" b="0" i="0" kern="1200" dirty="0">
+                <a:solidFill>
+                  <a:schemeClr val="tx1"/>
+                </a:solidFill>
+                <a:effectLst/>
+                <a:latin typeface="+mn-lt"/>
+                <a:ea typeface="+mn-ea"/>
+                <a:cs typeface="+mn-cs"/>
+              </a:rPr>
+              <a:t>(h) Total packets through round 6: 1+2+4+8+16+32=63. Round 7: window starts at 33 (after slow start ends at 32 and goes to congestion avoidance, +1 = 33). Packets 64-96 sent in round 7. Packet 70 → round 7 ✓. </a:t>
+            </a:r>
+            <a:r>
+              <a:rPr lang="en-US" altLang="zh-CN" sz="1200" b="1" i="0" kern="1200" dirty="0">
+                <a:solidFill>
+                  <a:schemeClr val="tx1"/>
+                </a:solidFill>
+                <a:effectLst/>
+                <a:latin typeface="+mn-lt"/>
+                <a:ea typeface="+mn-ea"/>
+                <a:cs typeface="+mn-cs"/>
+              </a:rPr>
+              <a:t>But wait — looking at graph: at round 7 window is 33 (not 32). So in round 7, packets 64...64+33-1=96 sent. So packet 70 is in round 7 ✓.</a:t>
+            </a:r>
+            <a:endParaRPr lang="en-US" altLang="zh-CN" sz="1200" b="0" i="0" kern="1200" dirty="0">
+              <a:solidFill>
+                <a:schemeClr val="tx1"/>
+              </a:solidFill>
+              <a:effectLst/>
+              <a:latin typeface="+mn-lt"/>
+              <a:ea typeface="+mn-ea"/>
+              <a:cs typeface="+mn-cs"/>
+            </a:endParaRPr>
+          </a:p>
+          <a:p>
+            <a:r>
+              <a:rPr lang="en-US" altLang="zh-CN" sz="1200" b="0" i="0" kern="1200" dirty="0">
+                <a:solidFill>
+                  <a:schemeClr val="tx1"/>
+                </a:solidFill>
+                <a:effectLst/>
+                <a:latin typeface="+mn-lt"/>
+                <a:ea typeface="+mn-ea"/>
+                <a:cs typeface="+mn-cs"/>
+              </a:rPr>
+              <a:t>(</a:t>
+            </a:r>
+            <a:r>
+              <a:rPr lang="en-US" altLang="zh-CN" sz="1200" b="0" i="0" kern="1200" dirty="0" err="1">
+                <a:solidFill>
+                  <a:schemeClr val="tx1"/>
+                </a:solidFill>
+                <a:effectLst/>
+                <a:latin typeface="+mn-lt"/>
+                <a:ea typeface="+mn-ea"/>
+                <a:cs typeface="+mn-cs"/>
+              </a:rPr>
+              <a:t>i</a:t>
+            </a:r>
+            <a:r>
+              <a:rPr lang="en-US" altLang="zh-CN" sz="1200" b="0" i="0" kern="1200" dirty="0">
+                <a:solidFill>
+                  <a:schemeClr val="tx1"/>
+                </a:solidFill>
+                <a:effectLst/>
+                <a:latin typeface="+mn-lt"/>
+                <a:ea typeface="+mn-ea"/>
+                <a:cs typeface="+mn-cs"/>
+              </a:rPr>
+              <a:t>) After round 26 (window=8) detect loss via 3-dup-ACK in Reno (no fast recovery): </a:t>
+            </a:r>
+            <a:r>
+              <a:rPr lang="en-US" altLang="zh-CN" sz="1200" b="0" i="0" kern="1200" dirty="0" err="1">
+                <a:solidFill>
+                  <a:schemeClr val="tx1"/>
+                </a:solidFill>
+                <a:effectLst/>
+                <a:latin typeface="+mn-lt"/>
+                <a:ea typeface="+mn-ea"/>
+                <a:cs typeface="+mn-cs"/>
+              </a:rPr>
+              <a:t>ssthresh</a:t>
+            </a:r>
+            <a:r>
+              <a:rPr lang="en-US" altLang="zh-CN" sz="1200" b="0" i="0" kern="1200" dirty="0">
+                <a:solidFill>
+                  <a:schemeClr val="tx1"/>
+                </a:solidFill>
+                <a:effectLst/>
+                <a:latin typeface="+mn-lt"/>
+                <a:ea typeface="+mn-ea"/>
+                <a:cs typeface="+mn-cs"/>
+              </a:rPr>
+              <a:t>=8/2=4, </a:t>
+            </a:r>
+            <a:r>
+              <a:rPr lang="en-US" altLang="zh-CN" sz="1200" b="0" i="0" kern="1200" dirty="0" err="1">
+                <a:solidFill>
+                  <a:schemeClr val="tx1"/>
+                </a:solidFill>
+                <a:effectLst/>
+                <a:latin typeface="+mn-lt"/>
+                <a:ea typeface="+mn-ea"/>
+                <a:cs typeface="+mn-cs"/>
+              </a:rPr>
+              <a:t>cwnd</a:t>
+            </a:r>
+            <a:r>
+              <a:rPr lang="en-US" altLang="zh-CN" sz="1200" b="0" i="0" kern="1200" dirty="0">
+                <a:solidFill>
+                  <a:schemeClr val="tx1"/>
+                </a:solidFill>
+                <a:effectLst/>
+                <a:latin typeface="+mn-lt"/>
+                <a:ea typeface="+mn-ea"/>
+                <a:cs typeface="+mn-cs"/>
+              </a:rPr>
+              <a:t>=4. ✓. The answer says "both 4". With "no fast recovery" assumption stated in the problem, this is the correct behavior (</a:t>
+            </a:r>
+            <a:r>
+              <a:rPr lang="en-US" altLang="zh-CN" sz="1200" b="0" i="0" kern="1200" dirty="0" err="1">
+                <a:solidFill>
+                  <a:schemeClr val="tx1"/>
+                </a:solidFill>
+                <a:effectLst/>
+                <a:latin typeface="+mn-lt"/>
+                <a:ea typeface="+mn-ea"/>
+                <a:cs typeface="+mn-cs"/>
+              </a:rPr>
+              <a:t>cwnd</a:t>
+            </a:r>
+            <a:r>
+              <a:rPr lang="en-US" altLang="zh-CN" sz="1200" b="0" i="0" kern="1200" dirty="0">
+                <a:solidFill>
+                  <a:schemeClr val="tx1"/>
+                </a:solidFill>
+                <a:effectLst/>
+                <a:latin typeface="+mn-lt"/>
+                <a:ea typeface="+mn-ea"/>
+                <a:cs typeface="+mn-cs"/>
+              </a:rPr>
+              <a:t> jumps to </a:t>
+            </a:r>
+            <a:r>
+              <a:rPr lang="en-US" altLang="zh-CN" sz="1200" b="0" i="0" kern="1200" dirty="0" err="1">
+                <a:solidFill>
+                  <a:schemeClr val="tx1"/>
+                </a:solidFill>
+                <a:effectLst/>
+                <a:latin typeface="+mn-lt"/>
+                <a:ea typeface="+mn-ea"/>
+                <a:cs typeface="+mn-cs"/>
+              </a:rPr>
+              <a:t>ssthresh</a:t>
+            </a:r>
+            <a:r>
+              <a:rPr lang="en-US" altLang="zh-CN" sz="1200" b="0" i="0" kern="1200" dirty="0">
+                <a:solidFill>
+                  <a:schemeClr val="tx1"/>
+                </a:solidFill>
+                <a:effectLst/>
+                <a:latin typeface="+mn-lt"/>
+                <a:ea typeface="+mn-ea"/>
+                <a:cs typeface="+mn-cs"/>
+              </a:rPr>
+              <a:t> rather than ssthresh+3). ✓</a:t>
+            </a:r>
+          </a:p>
+          <a:p>
+            <a:pPr marL="0" marR="0" lvl="0" indent="0" algn="l" defTabSz="914400" rtl="0" eaLnBrk="1" fontAlgn="auto" latinLnBrk="0" hangingPunct="1">
+              <a:lnSpc>
+                <a:spcPct val="100000"/>
+              </a:lnSpc>
+              <a:spcBef>
+                <a:spcPts val="0"/>
+              </a:spcBef>
+              <a:spcAft>
+                <a:spcPts val="0"/>
+              </a:spcAft>
+              <a:buClrTx/>
+              <a:buSzTx/>
+              <a:buFontTx/>
+              <a:buNone/>
+              <a:tabLst/>
+              <a:defRPr/>
+            </a:pPr>
+            <a:endParaRPr lang="en-US" altLang="zh-CN" sz="1200" dirty="0"/>
           </a:p>
           <a:p>
             <a:endParaRPr lang="zh-CN" altLang="en-US" dirty="0"/>
@@ -4815,10 +5393,9 @@
           </a:lstStyle>
           <a:p>
             <a:pPr eaLnBrk="1" latinLnBrk="0" hangingPunct="1"/>
-            <a:fld id="{2E26774B-6488-4259-9342-6CBDB2BFD4E4}" type="datetime1">
-              <a:rPr lang="en-US" smtClean="0"/>
-              <a:pPr eaLnBrk="1" latinLnBrk="0" hangingPunct="1"/>
-              <a:t>5/6/2026</a:t>
+            <a:fld id="{776A81FC-0577-4CC6-94AD-3F8EEF0457FB}" type="datetime1">
+              <a:rPr lang="en-US" altLang="zh-CN" smtClean="0"/>
+              <a:t>5/7/2026</a:t>
             </a:fld>
             <a:endParaRPr lang="en-US" sz="1600" dirty="0"/>
           </a:p>
@@ -5176,10 +5753,9 @@
           <a:lstStyle/>
           <a:p>
             <a:pPr eaLnBrk="1" latinLnBrk="0" hangingPunct="1"/>
-            <a:fld id="{9B2E7711-0BE3-4AFC-959B-CB5C31A7AE48}" type="datetime1">
-              <a:rPr lang="en-US" smtClean="0"/>
-              <a:pPr eaLnBrk="1" latinLnBrk="0" hangingPunct="1"/>
-              <a:t>5/6/2026</a:t>
+            <a:fld id="{E577DC92-DEED-4A2B-A0C1-F48B65845841}" type="datetime1">
+              <a:rPr lang="en-US" altLang="zh-CN" smtClean="0"/>
+              <a:t>5/7/2026</a:t>
             </a:fld>
             <a:endParaRPr lang="en-US"/>
           </a:p>
@@ -5353,10 +5929,9 @@
           <a:lstStyle/>
           <a:p>
             <a:pPr eaLnBrk="1" latinLnBrk="0" hangingPunct="1"/>
-            <a:fld id="{825AAB62-A572-4E37-B772-B4A75ADE0B18}" type="datetime1">
-              <a:rPr lang="en-US" smtClean="0"/>
-              <a:pPr eaLnBrk="1" latinLnBrk="0" hangingPunct="1"/>
-              <a:t>5/6/2026</a:t>
+            <a:fld id="{CE90819C-3400-449D-8F1B-3E85CF6FEF44}" type="datetime1">
+              <a:rPr lang="en-US" altLang="zh-CN" smtClean="0"/>
+              <a:t>5/7/2026</a:t>
             </a:fld>
             <a:endParaRPr lang="en-US"/>
           </a:p>
@@ -10681,10 +11256,9 @@
           <a:lstStyle/>
           <a:p>
             <a:pPr eaLnBrk="1" latinLnBrk="0" hangingPunct="1"/>
-            <a:fld id="{B0F52420-10F8-488E-969A-A9BE388BE9C4}" type="datetime1">
-              <a:rPr lang="en-US" smtClean="0"/>
-              <a:pPr eaLnBrk="1" latinLnBrk="0" hangingPunct="1"/>
-              <a:t>5/6/2026</a:t>
+            <a:fld id="{B80C09D5-857A-4E10-99E9-B9CD93EDE946}" type="datetime1">
+              <a:rPr lang="en-US" altLang="zh-CN" smtClean="0"/>
+              <a:t>5/7/2026</a:t>
             </a:fld>
             <a:endParaRPr lang="en-US" dirty="0"/>
           </a:p>
@@ -15095,10 +15669,9 @@
           <a:lstStyle/>
           <a:p>
             <a:pPr eaLnBrk="1" latinLnBrk="0" hangingPunct="1"/>
-            <a:fld id="{96E96F24-58CF-47DA-907C-A9CD6353E425}" type="datetime1">
-              <a:rPr lang="en-US" smtClean="0"/>
-              <a:pPr eaLnBrk="1" latinLnBrk="0" hangingPunct="1"/>
-              <a:t>5/6/2026</a:t>
+            <a:fld id="{EED6E4C0-1F44-4710-A6AE-E7FA2673FA24}" type="datetime1">
+              <a:rPr lang="en-US" altLang="zh-CN" smtClean="0"/>
+              <a:t>5/7/2026</a:t>
             </a:fld>
             <a:endParaRPr lang="en-US" dirty="0"/>
           </a:p>
@@ -17029,10 +17602,9 @@
           <a:lstStyle/>
           <a:p>
             <a:pPr eaLnBrk="1" latinLnBrk="0" hangingPunct="1"/>
-            <a:fld id="{53AE4463-726A-4A35-9F46-98893432A3F9}" type="datetime1">
-              <a:rPr lang="en-US" smtClean="0"/>
-              <a:pPr eaLnBrk="1" latinLnBrk="0" hangingPunct="1"/>
-              <a:t>5/6/2026</a:t>
+            <a:fld id="{B8A91E98-8EB2-46C7-AB33-ED5C21248B76}" type="datetime1">
+              <a:rPr lang="en-US" altLang="zh-CN" smtClean="0"/>
+              <a:t>5/7/2026</a:t>
             </a:fld>
             <a:endParaRPr lang="en-US"/>
           </a:p>
@@ -17383,10 +17955,9 @@
           <a:lstStyle/>
           <a:p>
             <a:pPr eaLnBrk="1" latinLnBrk="0" hangingPunct="1"/>
-            <a:fld id="{FDF404D0-E306-4E90-90E3-E44D26246FFC}" type="datetime1">
-              <a:rPr lang="en-US" smtClean="0"/>
-              <a:pPr eaLnBrk="1" latinLnBrk="0" hangingPunct="1"/>
-              <a:t>5/6/2026</a:t>
+            <a:fld id="{F0315E88-AC65-4C30-BA78-C6C94F917817}" type="datetime1">
+              <a:rPr lang="en-US" altLang="zh-CN" smtClean="0"/>
+              <a:t>5/7/2026</a:t>
             </a:fld>
             <a:endParaRPr lang="en-US"/>
           </a:p>
@@ -17617,10 +18188,9 @@
           <a:lstStyle/>
           <a:p>
             <a:pPr eaLnBrk="1" latinLnBrk="0" hangingPunct="1"/>
-            <a:fld id="{1485DA14-76F0-4D93-83FB-7878C79A1986}" type="datetime1">
-              <a:rPr lang="en-US" smtClean="0"/>
-              <a:pPr eaLnBrk="1" latinLnBrk="0" hangingPunct="1"/>
-              <a:t>5/6/2026</a:t>
+            <a:fld id="{63225C77-8B1F-4EB9-845C-71F6CE235E05}" type="datetime1">
+              <a:rPr lang="en-US" altLang="zh-CN" smtClean="0"/>
+              <a:t>5/7/2026</a:t>
             </a:fld>
             <a:endParaRPr lang="en-US"/>
           </a:p>
@@ -17760,10 +18330,9 @@
           <a:lstStyle/>
           <a:p>
             <a:pPr eaLnBrk="1" latinLnBrk="0" hangingPunct="1"/>
-            <a:fld id="{A15E552D-49E1-496B-B79C-E100986B8B5F}" type="datetime1">
-              <a:rPr lang="en-US" smtClean="0"/>
-              <a:pPr eaLnBrk="1" latinLnBrk="0" hangingPunct="1"/>
-              <a:t>5/6/2026</a:t>
+            <a:fld id="{914EE104-9B15-43EA-ABC6-794FAE54B60F}" type="datetime1">
+              <a:rPr lang="en-US" altLang="zh-CN" smtClean="0"/>
+              <a:t>5/7/2026</a:t>
             </a:fld>
             <a:endParaRPr lang="en-US"/>
           </a:p>
@@ -18039,10 +18608,9 @@
           <a:lstStyle/>
           <a:p>
             <a:pPr eaLnBrk="1" latinLnBrk="0" hangingPunct="1"/>
-            <a:fld id="{CEC72505-1551-4A98-97CD-F520B07184AD}" type="datetime1">
-              <a:rPr lang="en-US" smtClean="0"/>
-              <a:pPr eaLnBrk="1" latinLnBrk="0" hangingPunct="1"/>
-              <a:t>5/6/2026</a:t>
+            <a:fld id="{28167C38-302B-46B6-93CA-D3B0A8A0E89D}" type="datetime1">
+              <a:rPr lang="en-US" altLang="zh-CN" smtClean="0"/>
+              <a:t>5/7/2026</a:t>
             </a:fld>
             <a:endParaRPr lang="en-US"/>
           </a:p>
@@ -18448,10 +19016,9 @@
           <a:lstStyle/>
           <a:p>
             <a:pPr eaLnBrk="1" latinLnBrk="0" hangingPunct="1"/>
-            <a:fld id="{7218F47B-BA16-4F20-B5BA-73F598D94B51}" type="datetime1">
-              <a:rPr lang="en-US" smtClean="0"/>
-              <a:pPr eaLnBrk="1" latinLnBrk="0" hangingPunct="1"/>
-              <a:t>5/6/2026</a:t>
+            <a:fld id="{5D663B3B-89BA-4A15-B7AF-4C51DFFED345}" type="datetime1">
+              <a:rPr lang="en-US" altLang="zh-CN" smtClean="0"/>
+              <a:t>5/7/2026</a:t>
             </a:fld>
             <a:endParaRPr lang="en-US"/>
           </a:p>
@@ -18787,10 +19354,9 @@
           </a:lstStyle>
           <a:p>
             <a:pPr eaLnBrk="1" latinLnBrk="0" hangingPunct="1"/>
-            <a:fld id="{4F3CB514-9CA6-4E48-9463-A430D31CFDE3}" type="datetime1">
-              <a:rPr lang="en-US" smtClean="0"/>
-              <a:pPr eaLnBrk="1" latinLnBrk="0" hangingPunct="1"/>
-              <a:t>5/6/2026</a:t>
+            <a:fld id="{9511A069-C41F-4C86-87E4-0A659B93F0FC}" type="datetime1">
+              <a:rPr lang="en-US" altLang="zh-CN" smtClean="0"/>
+              <a:t>5/7/2026</a:t>
             </a:fld>
             <a:endParaRPr lang="en-US" sz="1400" dirty="0">
               <a:solidFill>
@@ -23884,7 +24450,7 @@
           <a:p>
             <a:r>
               <a:rPr lang="en-US" altLang="zh-CN" dirty="0"/>
-              <a:t>c) AS3 to AS6</a:t>
+              <a:t>c) AS5 to AS8</a:t>
             </a:r>
           </a:p>
           <a:p>
@@ -36826,10 +37392,10 @@
       </p:sp>
       <p:pic>
         <p:nvPicPr>
-          <p:cNvPr id="6" name="Picture 5" descr="The diagram shows a graph depicting the congestion window size (segments) against transmission rounds, illustrating how the window size increases as the number of transmission rounds progresses.&#10;&#10;AI-generated content may be incorrect.">
+          <p:cNvPr id="5" name="Picture 4" descr="The diagram shows a graph depicting the congestion window size (segments) against transmission rounds, illustrating how the window size increases as the number of transmission rounds progresses.&#10;&#10;AI-generated content may be incorrect.">
             <a:extLst>
               <a:ext uri="{FF2B5EF4-FFF2-40B4-BE49-F238E27FC236}">
-                <a16:creationId xmlns:a16="http://schemas.microsoft.com/office/drawing/2014/main" id="{50C0062B-8C07-4E87-B713-B827325B042F}"/>
+                <a16:creationId xmlns:a16="http://schemas.microsoft.com/office/drawing/2014/main" id="{0DBA97C5-A992-5A53-F826-B44761FAA99D}"/>
               </a:ext>
             </a:extLst>
           </p:cNvPr>
@@ -36846,14 +37412,194 @@
         </p:blipFill>
         <p:spPr>
           <a:xfrm>
-            <a:off x="6172200" y="2254465"/>
-            <a:ext cx="5874599" cy="3474470"/>
+            <a:off x="6172200" y="2254463"/>
+            <a:ext cx="5874599" cy="3474471"/>
           </a:xfrm>
           <a:prstGeom prst="rect">
             <a:avLst/>
           </a:prstGeom>
         </p:spPr>
       </p:pic>
+      <p:sp>
+        <p:nvSpPr>
+          <p:cNvPr id="7" name="TextBox 6">
+            <a:extLst>
+              <a:ext uri="{FF2B5EF4-FFF2-40B4-BE49-F238E27FC236}">
+                <a16:creationId xmlns:a16="http://schemas.microsoft.com/office/drawing/2014/main" id="{A12145FF-6B0B-08B2-608E-C94B34693489}"/>
+              </a:ext>
+            </a:extLst>
+          </p:cNvPr>
+          <p:cNvSpPr txBox="1"/>
+          <p:nvPr/>
+        </p:nvSpPr>
+        <p:spPr>
+          <a:xfrm>
+            <a:off x="7510046" y="3111698"/>
+            <a:ext cx="338554" cy="276999"/>
+          </a:xfrm>
+          <a:prstGeom prst="rect">
+            <a:avLst/>
+          </a:prstGeom>
+          <a:noFill/>
+        </p:spPr>
+        <p:txBody>
+          <a:bodyPr wrap="none" rtlCol="0">
+            <a:spAutoFit/>
+          </a:bodyPr>
+          <a:lstStyle/>
+          <a:p>
+            <a:r>
+              <a:rPr lang="en-US" altLang="zh-CN" sz="1200" dirty="0"/>
+              <a:t>32</a:t>
+            </a:r>
+            <a:endParaRPr lang="zh-CN" altLang="en-US" sz="1200" dirty="0"/>
+          </a:p>
+        </p:txBody>
+      </p:sp>
+      <p:sp>
+        <p:nvSpPr>
+          <p:cNvPr id="8" name="TextBox 7">
+            <a:extLst>
+              <a:ext uri="{FF2B5EF4-FFF2-40B4-BE49-F238E27FC236}">
+                <a16:creationId xmlns:a16="http://schemas.microsoft.com/office/drawing/2014/main" id="{E925A963-03CE-568B-2550-02250FC1AF25}"/>
+              </a:ext>
+            </a:extLst>
+          </p:cNvPr>
+          <p:cNvSpPr txBox="1"/>
+          <p:nvPr/>
+        </p:nvSpPr>
+        <p:spPr>
+          <a:xfrm>
+            <a:off x="9525000" y="2362200"/>
+            <a:ext cx="338554" cy="276999"/>
+          </a:xfrm>
+          <a:prstGeom prst="rect">
+            <a:avLst/>
+          </a:prstGeom>
+          <a:noFill/>
+        </p:spPr>
+        <p:txBody>
+          <a:bodyPr wrap="none" rtlCol="0">
+            <a:spAutoFit/>
+          </a:bodyPr>
+          <a:lstStyle/>
+          <a:p>
+            <a:r>
+              <a:rPr lang="en-US" altLang="zh-CN" sz="1200" dirty="0"/>
+              <a:t>42</a:t>
+            </a:r>
+            <a:endParaRPr lang="zh-CN" altLang="en-US" sz="1200" dirty="0"/>
+          </a:p>
+        </p:txBody>
+      </p:sp>
+      <p:sp>
+        <p:nvSpPr>
+          <p:cNvPr id="9" name="TextBox 8">
+            <a:extLst>
+              <a:ext uri="{FF2B5EF4-FFF2-40B4-BE49-F238E27FC236}">
+                <a16:creationId xmlns:a16="http://schemas.microsoft.com/office/drawing/2014/main" id="{24519F94-98E5-895A-F876-551789517DE7}"/>
+              </a:ext>
+            </a:extLst>
+          </p:cNvPr>
+          <p:cNvSpPr txBox="1"/>
+          <p:nvPr/>
+        </p:nvSpPr>
+        <p:spPr>
+          <a:xfrm>
+            <a:off x="9694277" y="3785800"/>
+            <a:ext cx="338554" cy="276999"/>
+          </a:xfrm>
+          <a:prstGeom prst="rect">
+            <a:avLst/>
+          </a:prstGeom>
+          <a:noFill/>
+        </p:spPr>
+        <p:txBody>
+          <a:bodyPr wrap="none" rtlCol="0">
+            <a:spAutoFit/>
+          </a:bodyPr>
+          <a:lstStyle/>
+          <a:p>
+            <a:r>
+              <a:rPr lang="en-US" altLang="zh-CN" sz="1200" dirty="0"/>
+              <a:t>21</a:t>
+            </a:r>
+            <a:endParaRPr lang="zh-CN" altLang="en-US" sz="1200" dirty="0"/>
+          </a:p>
+        </p:txBody>
+      </p:sp>
+      <p:sp>
+        <p:nvSpPr>
+          <p:cNvPr id="10" name="TextBox 9">
+            <a:extLst>
+              <a:ext uri="{FF2B5EF4-FFF2-40B4-BE49-F238E27FC236}">
+                <a16:creationId xmlns:a16="http://schemas.microsoft.com/office/drawing/2014/main" id="{4DA5E0F7-D44B-506E-B0E5-2B62F8B47EB1}"/>
+              </a:ext>
+            </a:extLst>
+          </p:cNvPr>
+          <p:cNvSpPr txBox="1"/>
+          <p:nvPr/>
+        </p:nvSpPr>
+        <p:spPr>
+          <a:xfrm>
+            <a:off x="10820400" y="3290500"/>
+            <a:ext cx="338554" cy="276999"/>
+          </a:xfrm>
+          <a:prstGeom prst="rect">
+            <a:avLst/>
+          </a:prstGeom>
+          <a:noFill/>
+        </p:spPr>
+        <p:txBody>
+          <a:bodyPr wrap="none" rtlCol="0">
+            <a:spAutoFit/>
+          </a:bodyPr>
+          <a:lstStyle/>
+          <a:p>
+            <a:r>
+              <a:rPr lang="en-US" altLang="zh-CN" sz="1200" dirty="0"/>
+              <a:t>26</a:t>
+            </a:r>
+            <a:endParaRPr lang="zh-CN" altLang="en-US" sz="1200" dirty="0"/>
+          </a:p>
+        </p:txBody>
+      </p:sp>
+      <p:sp>
+        <p:nvSpPr>
+          <p:cNvPr id="11" name="TextBox 10">
+            <a:extLst>
+              <a:ext uri="{FF2B5EF4-FFF2-40B4-BE49-F238E27FC236}">
+                <a16:creationId xmlns:a16="http://schemas.microsoft.com/office/drawing/2014/main" id="{6A6BF93E-2A5F-17AD-4EE9-39A9702E72DE}"/>
+              </a:ext>
+            </a:extLst>
+          </p:cNvPr>
+          <p:cNvSpPr txBox="1"/>
+          <p:nvPr/>
+        </p:nvSpPr>
+        <p:spPr>
+          <a:xfrm>
+            <a:off x="11549390" y="4572000"/>
+            <a:ext cx="261610" cy="276999"/>
+          </a:xfrm>
+          <a:prstGeom prst="rect">
+            <a:avLst/>
+          </a:prstGeom>
+          <a:noFill/>
+        </p:spPr>
+        <p:txBody>
+          <a:bodyPr wrap="none" rtlCol="0">
+            <a:spAutoFit/>
+          </a:bodyPr>
+          <a:lstStyle/>
+          <a:p>
+            <a:r>
+              <a:rPr lang="en-US" altLang="zh-CN" sz="1200" dirty="0"/>
+              <a:t>8</a:t>
+            </a:r>
+            <a:endParaRPr lang="zh-CN" altLang="en-US" sz="1200" dirty="0"/>
+          </a:p>
+        </p:txBody>
+      </p:sp>
     </p:spTree>
     <p:extLst>
       <p:ext uri="{BB962C8B-B14F-4D97-AF65-F5344CB8AC3E}">
@@ -37222,6 +37968,42 @@
           </a:p>
         </p:txBody>
       </p:sp>
+      <p:sp>
+        <p:nvSpPr>
+          <p:cNvPr id="4" name="TextBox 3">
+            <a:extLst>
+              <a:ext uri="{FF2B5EF4-FFF2-40B4-BE49-F238E27FC236}">
+                <a16:creationId xmlns:a16="http://schemas.microsoft.com/office/drawing/2014/main" id="{8CC39FBD-DD93-A9B5-B10C-52762A5F6E4C}"/>
+              </a:ext>
+            </a:extLst>
+          </p:cNvPr>
+          <p:cNvSpPr txBox="1"/>
+          <p:nvPr/>
+        </p:nvSpPr>
+        <p:spPr>
+          <a:xfrm>
+            <a:off x="11549390" y="4572000"/>
+            <a:ext cx="261610" cy="276999"/>
+          </a:xfrm>
+          <a:prstGeom prst="rect">
+            <a:avLst/>
+          </a:prstGeom>
+          <a:noFill/>
+        </p:spPr>
+        <p:txBody>
+          <a:bodyPr wrap="none" rtlCol="0">
+            <a:spAutoFit/>
+          </a:bodyPr>
+          <a:lstStyle/>
+          <a:p>
+            <a:r>
+              <a:rPr lang="en-US" altLang="zh-CN" sz="1200" dirty="0"/>
+              <a:t>8</a:t>
+            </a:r>
+            <a:endParaRPr lang="zh-CN" altLang="en-US" sz="1200" dirty="0"/>
+          </a:p>
+        </p:txBody>
+      </p:sp>
     </p:spTree>
     <p:extLst>
       <p:ext uri="{BB962C8B-B14F-4D97-AF65-F5344CB8AC3E}">
@@ -37317,7 +38099,7 @@
           </a:bodyPr>
           <a:lstStyle/>
           <a:p>
-            <a:pPr marL="354965" indent="-342265">
+            <a:pPr marL="12700">
               <a:lnSpc>
                 <a:spcPct val="100000"/>
               </a:lnSpc>
@@ -37328,8 +38110,6 @@
                 <a:srgbClr val="063DE8"/>
               </a:buClr>
               <a:buSzPct val="75000"/>
-              <a:buFont typeface="Wingdings"/>
-              <a:buChar char=""/>
               <a:tabLst>
                 <a:tab pos="354965" algn="l"/>
               </a:tabLst>
@@ -37494,7 +38274,7 @@
           </a:bodyPr>
           <a:lstStyle/>
           <a:p>
-            <a:pPr marL="354965" indent="-342265">
+            <a:pPr marL="12700">
               <a:lnSpc>
                 <a:spcPct val="100000"/>
               </a:lnSpc>
@@ -37505,8 +38285,6 @@
                 <a:srgbClr val="063DE8"/>
               </a:buClr>
               <a:buSzPct val="75000"/>
-              <a:buFont typeface="Wingdings"/>
-              <a:buChar char=""/>
               <a:tabLst>
                 <a:tab pos="354965" algn="l"/>
               </a:tabLst>
@@ -38350,7 +39128,13 @@
           <p:cNvGraphicFramePr>
             <a:graphicFrameLocks noGrp="1"/>
           </p:cNvGraphicFramePr>
-          <p:nvPr/>
+          <p:nvPr>
+            <p:extLst>
+              <p:ext uri="{D42A27DB-BD31-4B8C-83A1-F6EECF244321}">
+                <p14:modId xmlns:p14="http://schemas.microsoft.com/office/powerpoint/2010/main" val="4056993315"/>
+              </p:ext>
+            </p:extLst>
+          </p:nvPr>
         </p:nvGraphicFramePr>
         <p:xfrm>
           <a:off x="2156568" y="2097090"/>
@@ -38440,267 +39224,17 @@
                       </a:pPr>
                       <a:r>
                         <a:rPr sz="2400" spc="-10" dirty="0">
+                          <a:solidFill>
+                            <a:schemeClr val="tx1"/>
+                          </a:solidFill>
                           <a:latin typeface="Times New Roman"/>
                           <a:cs typeface="Times New Roman"/>
                         </a:rPr>
                         <a:t>Plain</a:t>
                       </a:r>
                       <a:endParaRPr sz="2400">
-                        <a:latin typeface="Times New Roman"/>
-                        <a:cs typeface="Times New Roman"/>
-                      </a:endParaRPr>
-                    </a:p>
-                  </a:txBody>
-                  <a:tcPr marL="0" marR="0" marT="0" marB="0">
-                    <a:lnL w="19050">
-                      <a:solidFill>
-                        <a:srgbClr val="000000"/>
-                      </a:solidFill>
-                      <a:prstDash val="solid"/>
-                    </a:lnL>
-                    <a:lnR w="19050">
-                      <a:solidFill>
-                        <a:srgbClr val="000000"/>
-                      </a:solidFill>
-                      <a:prstDash val="solid"/>
-                    </a:lnR>
-                    <a:lnT w="19050">
-                      <a:solidFill>
-                        <a:srgbClr val="000000"/>
-                      </a:solidFill>
-                      <a:prstDash val="solid"/>
-                    </a:lnT>
-                    <a:lnB w="19050">
-                      <a:solidFill>
-                        <a:srgbClr val="000000"/>
-                      </a:solidFill>
-                      <a:prstDash val="solid"/>
-                    </a:lnB>
-                  </a:tcPr>
-                </a:tc>
-                <a:tc>
-                  <a:txBody>
-                    <a:bodyPr/>
-                    <a:lstStyle/>
-                    <a:p>
-                      <a:pPr algn="ctr">
-                        <a:lnSpc>
-                          <a:spcPts val="2765"/>
-                        </a:lnSpc>
-                      </a:pPr>
-                      <a:r>
-                        <a:rPr sz="2400" spc="-25" dirty="0">
-                          <a:latin typeface="Times New Roman"/>
-                          <a:cs typeface="Times New Roman"/>
-                        </a:rPr>
-                        <a:t>000</a:t>
-                      </a:r>
-                      <a:endParaRPr sz="2400">
-                        <a:latin typeface="Times New Roman"/>
-                        <a:cs typeface="Times New Roman"/>
-                      </a:endParaRPr>
-                    </a:p>
-                  </a:txBody>
-                  <a:tcPr marL="0" marR="0" marT="0" marB="0">
-                    <a:lnL w="19050">
-                      <a:solidFill>
-                        <a:srgbClr val="000000"/>
-                      </a:solidFill>
-                      <a:prstDash val="solid"/>
-                    </a:lnL>
-                    <a:lnR w="19050">
-                      <a:solidFill>
-                        <a:srgbClr val="000000"/>
-                      </a:solidFill>
-                      <a:prstDash val="solid"/>
-                    </a:lnR>
-                    <a:lnT w="19050">
-                      <a:solidFill>
-                        <a:srgbClr val="000000"/>
-                      </a:solidFill>
-                      <a:prstDash val="solid"/>
-                    </a:lnT>
-                    <a:lnB w="19050">
-                      <a:solidFill>
-                        <a:srgbClr val="000000"/>
-                      </a:solidFill>
-                      <a:prstDash val="solid"/>
-                    </a:lnB>
-                  </a:tcPr>
-                </a:tc>
-                <a:tc>
-                  <a:txBody>
-                    <a:bodyPr/>
-                    <a:lstStyle/>
-                    <a:p>
-                      <a:pPr algn="ctr">
-                        <a:lnSpc>
-                          <a:spcPts val="2765"/>
-                        </a:lnSpc>
-                      </a:pPr>
-                      <a:r>
-                        <a:rPr sz="2400" spc="-25" dirty="0">
-                          <a:latin typeface="Times New Roman"/>
-                          <a:cs typeface="Times New Roman"/>
-                        </a:rPr>
-                        <a:t>001</a:t>
-                      </a:r>
-                      <a:endParaRPr sz="2400">
-                        <a:latin typeface="Times New Roman"/>
-                        <a:cs typeface="Times New Roman"/>
-                      </a:endParaRPr>
-                    </a:p>
-                  </a:txBody>
-                  <a:tcPr marL="0" marR="0" marT="0" marB="0">
-                    <a:lnL w="19050">
-                      <a:solidFill>
-                        <a:srgbClr val="000000"/>
-                      </a:solidFill>
-                      <a:prstDash val="solid"/>
-                    </a:lnL>
-                    <a:lnR w="19050">
-                      <a:solidFill>
-                        <a:srgbClr val="000000"/>
-                      </a:solidFill>
-                      <a:prstDash val="solid"/>
-                    </a:lnR>
-                    <a:lnT w="19050">
-                      <a:solidFill>
-                        <a:srgbClr val="000000"/>
-                      </a:solidFill>
-                      <a:prstDash val="solid"/>
-                    </a:lnT>
-                    <a:lnB w="19050">
-                      <a:solidFill>
-                        <a:srgbClr val="000000"/>
-                      </a:solidFill>
-                      <a:prstDash val="solid"/>
-                    </a:lnB>
-                  </a:tcPr>
-                </a:tc>
-                <a:tc>
-                  <a:txBody>
-                    <a:bodyPr/>
-                    <a:lstStyle/>
-                    <a:p>
-                      <a:pPr algn="ctr">
-                        <a:lnSpc>
-                          <a:spcPts val="2765"/>
-                        </a:lnSpc>
-                      </a:pPr>
-                      <a:r>
-                        <a:rPr sz="2400" spc="-25" dirty="0">
-                          <a:latin typeface="Times New Roman"/>
-                          <a:cs typeface="Times New Roman"/>
-                        </a:rPr>
-                        <a:t>010</a:t>
-                      </a:r>
-                      <a:endParaRPr sz="2400">
-                        <a:latin typeface="Times New Roman"/>
-                        <a:cs typeface="Times New Roman"/>
-                      </a:endParaRPr>
-                    </a:p>
-                  </a:txBody>
-                  <a:tcPr marL="0" marR="0" marT="0" marB="0">
-                    <a:lnL w="19050">
-                      <a:solidFill>
-                        <a:srgbClr val="000000"/>
-                      </a:solidFill>
-                      <a:prstDash val="solid"/>
-                    </a:lnL>
-                    <a:lnR w="19050">
-                      <a:solidFill>
-                        <a:srgbClr val="000000"/>
-                      </a:solidFill>
-                      <a:prstDash val="solid"/>
-                    </a:lnR>
-                    <a:lnT w="19050">
-                      <a:solidFill>
-                        <a:srgbClr val="000000"/>
-                      </a:solidFill>
-                      <a:prstDash val="solid"/>
-                    </a:lnT>
-                    <a:lnB w="19050">
-                      <a:solidFill>
-                        <a:srgbClr val="000000"/>
-                      </a:solidFill>
-                      <a:prstDash val="solid"/>
-                    </a:lnB>
-                  </a:tcPr>
-                </a:tc>
-                <a:tc>
-                  <a:txBody>
-                    <a:bodyPr/>
-                    <a:lstStyle/>
-                    <a:p>
-                      <a:pPr algn="ctr">
-                        <a:lnSpc>
-                          <a:spcPts val="2765"/>
-                        </a:lnSpc>
-                      </a:pPr>
-                      <a:r>
-                        <a:rPr sz="2400" spc="-25" dirty="0">
-                          <a:latin typeface="Times New Roman"/>
-                          <a:cs typeface="Times New Roman"/>
-                        </a:rPr>
-                        <a:t>011</a:t>
-                      </a:r>
-                      <a:endParaRPr sz="2400" dirty="0">
-                        <a:latin typeface="Times New Roman"/>
-                        <a:cs typeface="Times New Roman"/>
-                      </a:endParaRPr>
-                    </a:p>
-                  </a:txBody>
-                  <a:tcPr marL="0" marR="0" marT="0" marB="0">
-                    <a:lnL w="19050">
-                      <a:solidFill>
-                        <a:srgbClr val="000000"/>
-                      </a:solidFill>
-                      <a:prstDash val="solid"/>
-                    </a:lnL>
-                    <a:lnR w="19050">
-                      <a:solidFill>
-                        <a:srgbClr val="000000"/>
-                      </a:solidFill>
-                      <a:prstDash val="solid"/>
-                    </a:lnR>
-                    <a:lnT w="19050">
-                      <a:solidFill>
-                        <a:srgbClr val="000000"/>
-                      </a:solidFill>
-                      <a:prstDash val="solid"/>
-                    </a:lnT>
-                    <a:lnB w="19050">
-                      <a:solidFill>
-                        <a:srgbClr val="000000"/>
-                      </a:solidFill>
-                      <a:prstDash val="solid"/>
-                    </a:lnB>
-                  </a:tcPr>
-                </a:tc>
-                <a:tc>
-                  <a:txBody>
-                    <a:bodyPr/>
-                    <a:lstStyle/>
-                    <a:p>
-                      <a:pPr algn="ctr">
-                        <a:lnSpc>
-                          <a:spcPts val="2765"/>
-                        </a:lnSpc>
-                      </a:pPr>
-                      <a:r>
-                        <a:rPr sz="2400" spc="-25" dirty="0">
-                          <a:solidFill>
-                            <a:srgbClr val="FF0000"/>
-                          </a:solidFill>
-                          <a:latin typeface="Times New Roman"/>
-                          <a:cs typeface="Times New Roman"/>
-                        </a:rPr>
-                        <a:t>100</a:t>
-                      </a:r>
-                      <a:endParaRPr sz="2400" dirty="0">
                         <a:solidFill>
-                          <a:srgbClr val="FF0000"/>
+                          <a:schemeClr val="tx1"/>
                         </a:solidFill>
                         <a:latin typeface="Times New Roman"/>
                         <a:cs typeface="Times New Roman"/>
@@ -38747,16 +39281,16 @@
                       <a:r>
                         <a:rPr sz="2400" spc="-25" dirty="0">
                           <a:solidFill>
-                            <a:srgbClr val="FF0000"/>
+                            <a:schemeClr val="tx1"/>
                           </a:solidFill>
                           <a:latin typeface="Times New Roman"/>
                           <a:cs typeface="Times New Roman"/>
                         </a:rPr>
-                        <a:t>101</a:t>
+                        <a:t>000</a:t>
                       </a:r>
                       <a:endParaRPr sz="2400">
                         <a:solidFill>
-                          <a:srgbClr val="FF0000"/>
+                          <a:schemeClr val="tx1"/>
                         </a:solidFill>
                         <a:latin typeface="Times New Roman"/>
                         <a:cs typeface="Times New Roman"/>
@@ -38802,12 +39336,18 @@
                       </a:pPr>
                       <a:r>
                         <a:rPr sz="2400" spc="-25" dirty="0">
+                          <a:solidFill>
+                            <a:schemeClr val="tx1"/>
+                          </a:solidFill>
                           <a:latin typeface="Times New Roman"/>
                           <a:cs typeface="Times New Roman"/>
                         </a:rPr>
-                        <a:t>110</a:t>
+                        <a:t>001</a:t>
                       </a:r>
-                      <a:endParaRPr sz="2400">
+                      <a:endParaRPr sz="2400" dirty="0">
+                        <a:solidFill>
+                          <a:schemeClr val="tx1"/>
+                        </a:solidFill>
                         <a:latin typeface="Times New Roman"/>
                         <a:cs typeface="Times New Roman"/>
                       </a:endParaRPr>
@@ -38852,12 +39392,298 @@
                       </a:pPr>
                       <a:r>
                         <a:rPr sz="2400" spc="-25" dirty="0">
+                          <a:solidFill>
+                            <a:schemeClr val="tx1"/>
+                          </a:solidFill>
+                          <a:latin typeface="Times New Roman"/>
+                          <a:cs typeface="Times New Roman"/>
+                        </a:rPr>
+                        <a:t>010</a:t>
+                      </a:r>
+                      <a:endParaRPr sz="2400">
+                        <a:solidFill>
+                          <a:schemeClr val="tx1"/>
+                        </a:solidFill>
+                        <a:latin typeface="Times New Roman"/>
+                        <a:cs typeface="Times New Roman"/>
+                      </a:endParaRPr>
+                    </a:p>
+                  </a:txBody>
+                  <a:tcPr marL="0" marR="0" marT="0" marB="0">
+                    <a:lnL w="19050">
+                      <a:solidFill>
+                        <a:srgbClr val="000000"/>
+                      </a:solidFill>
+                      <a:prstDash val="solid"/>
+                    </a:lnL>
+                    <a:lnR w="19050">
+                      <a:solidFill>
+                        <a:srgbClr val="000000"/>
+                      </a:solidFill>
+                      <a:prstDash val="solid"/>
+                    </a:lnR>
+                    <a:lnT w="19050">
+                      <a:solidFill>
+                        <a:srgbClr val="000000"/>
+                      </a:solidFill>
+                      <a:prstDash val="solid"/>
+                    </a:lnT>
+                    <a:lnB w="19050">
+                      <a:solidFill>
+                        <a:srgbClr val="000000"/>
+                      </a:solidFill>
+                      <a:prstDash val="solid"/>
+                    </a:lnB>
+                  </a:tcPr>
+                </a:tc>
+                <a:tc>
+                  <a:txBody>
+                    <a:bodyPr/>
+                    <a:lstStyle/>
+                    <a:p>
+                      <a:pPr algn="ctr">
+                        <a:lnSpc>
+                          <a:spcPts val="2765"/>
+                        </a:lnSpc>
+                      </a:pPr>
+                      <a:r>
+                        <a:rPr sz="2400" spc="-25" dirty="0">
+                          <a:solidFill>
+                            <a:schemeClr val="tx1"/>
+                          </a:solidFill>
+                          <a:latin typeface="Times New Roman"/>
+                          <a:cs typeface="Times New Roman"/>
+                        </a:rPr>
+                        <a:t>011</a:t>
+                      </a:r>
+                      <a:endParaRPr sz="2400" dirty="0">
+                        <a:solidFill>
+                          <a:schemeClr val="tx1"/>
+                        </a:solidFill>
+                        <a:latin typeface="Times New Roman"/>
+                        <a:cs typeface="Times New Roman"/>
+                      </a:endParaRPr>
+                    </a:p>
+                  </a:txBody>
+                  <a:tcPr marL="0" marR="0" marT="0" marB="0">
+                    <a:lnL w="19050">
+                      <a:solidFill>
+                        <a:srgbClr val="000000"/>
+                      </a:solidFill>
+                      <a:prstDash val="solid"/>
+                    </a:lnL>
+                    <a:lnR w="19050">
+                      <a:solidFill>
+                        <a:srgbClr val="000000"/>
+                      </a:solidFill>
+                      <a:prstDash val="solid"/>
+                    </a:lnR>
+                    <a:lnT w="19050">
+                      <a:solidFill>
+                        <a:srgbClr val="000000"/>
+                      </a:solidFill>
+                      <a:prstDash val="solid"/>
+                    </a:lnT>
+                    <a:lnB w="19050">
+                      <a:solidFill>
+                        <a:srgbClr val="000000"/>
+                      </a:solidFill>
+                      <a:prstDash val="solid"/>
+                    </a:lnB>
+                  </a:tcPr>
+                </a:tc>
+                <a:tc>
+                  <a:txBody>
+                    <a:bodyPr/>
+                    <a:lstStyle/>
+                    <a:p>
+                      <a:pPr algn="ctr">
+                        <a:lnSpc>
+                          <a:spcPts val="2765"/>
+                        </a:lnSpc>
+                      </a:pPr>
+                      <a:r>
+                        <a:rPr sz="2400" spc="-25" dirty="0">
+                          <a:solidFill>
+                            <a:schemeClr val="tx1"/>
+                          </a:solidFill>
+                          <a:latin typeface="Times New Roman"/>
+                          <a:cs typeface="Times New Roman"/>
+                        </a:rPr>
+                        <a:t>100</a:t>
+                      </a:r>
+                      <a:endParaRPr sz="2400" dirty="0">
+                        <a:solidFill>
+                          <a:schemeClr val="tx1"/>
+                        </a:solidFill>
+                        <a:latin typeface="Times New Roman"/>
+                        <a:cs typeface="Times New Roman"/>
+                      </a:endParaRPr>
+                    </a:p>
+                  </a:txBody>
+                  <a:tcPr marL="0" marR="0" marT="0" marB="0">
+                    <a:lnL w="19050">
+                      <a:solidFill>
+                        <a:srgbClr val="000000"/>
+                      </a:solidFill>
+                      <a:prstDash val="solid"/>
+                    </a:lnL>
+                    <a:lnR w="19050">
+                      <a:solidFill>
+                        <a:srgbClr val="000000"/>
+                      </a:solidFill>
+                      <a:prstDash val="solid"/>
+                    </a:lnR>
+                    <a:lnT w="19050">
+                      <a:solidFill>
+                        <a:srgbClr val="000000"/>
+                      </a:solidFill>
+                      <a:prstDash val="solid"/>
+                    </a:lnT>
+                    <a:lnB w="19050">
+                      <a:solidFill>
+                        <a:srgbClr val="000000"/>
+                      </a:solidFill>
+                      <a:prstDash val="solid"/>
+                    </a:lnB>
+                  </a:tcPr>
+                </a:tc>
+                <a:tc>
+                  <a:txBody>
+                    <a:bodyPr/>
+                    <a:lstStyle/>
+                    <a:p>
+                      <a:pPr algn="ctr">
+                        <a:lnSpc>
+                          <a:spcPts val="2765"/>
+                        </a:lnSpc>
+                      </a:pPr>
+                      <a:r>
+                        <a:rPr sz="2400" spc="-25" dirty="0">
+                          <a:solidFill>
+                            <a:schemeClr val="tx1"/>
+                          </a:solidFill>
+                          <a:latin typeface="Times New Roman"/>
+                          <a:cs typeface="Times New Roman"/>
+                        </a:rPr>
+                        <a:t>101</a:t>
+                      </a:r>
+                      <a:endParaRPr sz="2400">
+                        <a:solidFill>
+                          <a:schemeClr val="tx1"/>
+                        </a:solidFill>
+                        <a:latin typeface="Times New Roman"/>
+                        <a:cs typeface="Times New Roman"/>
+                      </a:endParaRPr>
+                    </a:p>
+                  </a:txBody>
+                  <a:tcPr marL="0" marR="0" marT="0" marB="0">
+                    <a:lnL w="19050">
+                      <a:solidFill>
+                        <a:srgbClr val="000000"/>
+                      </a:solidFill>
+                      <a:prstDash val="solid"/>
+                    </a:lnL>
+                    <a:lnR w="19050">
+                      <a:solidFill>
+                        <a:srgbClr val="000000"/>
+                      </a:solidFill>
+                      <a:prstDash val="solid"/>
+                    </a:lnR>
+                    <a:lnT w="19050">
+                      <a:solidFill>
+                        <a:srgbClr val="000000"/>
+                      </a:solidFill>
+                      <a:prstDash val="solid"/>
+                    </a:lnT>
+                    <a:lnB w="19050">
+                      <a:solidFill>
+                        <a:srgbClr val="000000"/>
+                      </a:solidFill>
+                      <a:prstDash val="solid"/>
+                    </a:lnB>
+                  </a:tcPr>
+                </a:tc>
+                <a:tc>
+                  <a:txBody>
+                    <a:bodyPr/>
+                    <a:lstStyle/>
+                    <a:p>
+                      <a:pPr algn="ctr">
+                        <a:lnSpc>
+                          <a:spcPts val="2765"/>
+                        </a:lnSpc>
+                      </a:pPr>
+                      <a:r>
+                        <a:rPr sz="2400" spc="-25" dirty="0">
+                          <a:solidFill>
+                            <a:schemeClr val="tx1"/>
+                          </a:solidFill>
+                          <a:latin typeface="Times New Roman"/>
+                          <a:cs typeface="Times New Roman"/>
+                        </a:rPr>
+                        <a:t>110</a:t>
+                      </a:r>
+                      <a:endParaRPr sz="2400">
+                        <a:solidFill>
+                          <a:schemeClr val="tx1"/>
+                        </a:solidFill>
+                        <a:latin typeface="Times New Roman"/>
+                        <a:cs typeface="Times New Roman"/>
+                      </a:endParaRPr>
+                    </a:p>
+                  </a:txBody>
+                  <a:tcPr marL="0" marR="0" marT="0" marB="0">
+                    <a:lnL w="19050">
+                      <a:solidFill>
+                        <a:srgbClr val="000000"/>
+                      </a:solidFill>
+                      <a:prstDash val="solid"/>
+                    </a:lnL>
+                    <a:lnR w="19050">
+                      <a:solidFill>
+                        <a:srgbClr val="000000"/>
+                      </a:solidFill>
+                      <a:prstDash val="solid"/>
+                    </a:lnR>
+                    <a:lnT w="19050">
+                      <a:solidFill>
+                        <a:srgbClr val="000000"/>
+                      </a:solidFill>
+                      <a:prstDash val="solid"/>
+                    </a:lnT>
+                    <a:lnB w="19050">
+                      <a:solidFill>
+                        <a:srgbClr val="000000"/>
+                      </a:solidFill>
+                      <a:prstDash val="solid"/>
+                    </a:lnB>
+                  </a:tcPr>
+                </a:tc>
+                <a:tc>
+                  <a:txBody>
+                    <a:bodyPr/>
+                    <a:lstStyle/>
+                    <a:p>
+                      <a:pPr algn="ctr">
+                        <a:lnSpc>
+                          <a:spcPts val="2765"/>
+                        </a:lnSpc>
+                      </a:pPr>
+                      <a:r>
+                        <a:rPr sz="2400" spc="-25" dirty="0">
+                          <a:solidFill>
+                            <a:schemeClr val="tx1"/>
+                          </a:solidFill>
                           <a:latin typeface="Times New Roman"/>
                           <a:cs typeface="Times New Roman"/>
                         </a:rPr>
                         <a:t>111</a:t>
                       </a:r>
                       <a:endParaRPr sz="2400">
+                        <a:solidFill>
+                          <a:schemeClr val="tx1"/>
+                        </a:solidFill>
                         <a:latin typeface="Times New Roman"/>
                         <a:cs typeface="Times New Roman"/>
                       </a:endParaRPr>
@@ -38909,295 +39735,17 @@
                       </a:pPr>
                       <a:r>
                         <a:rPr sz="2400" spc="-10" dirty="0">
+                          <a:solidFill>
+                            <a:schemeClr val="tx1"/>
+                          </a:solidFill>
                           <a:latin typeface="Times New Roman"/>
                           <a:cs typeface="Times New Roman"/>
                         </a:rPr>
                         <a:t>Cipher</a:t>
                       </a:r>
                       <a:endParaRPr sz="2400">
-                        <a:latin typeface="Times New Roman"/>
-                        <a:cs typeface="Times New Roman"/>
-                      </a:endParaRPr>
-                    </a:p>
-                  </a:txBody>
-                  <a:tcPr marL="0" marR="0" marT="0" marB="0">
-                    <a:lnL w="19050">
-                      <a:solidFill>
-                        <a:srgbClr val="000000"/>
-                      </a:solidFill>
-                      <a:prstDash val="solid"/>
-                    </a:lnL>
-                    <a:lnR w="19050">
-                      <a:solidFill>
-                        <a:srgbClr val="000000"/>
-                      </a:solidFill>
-                      <a:prstDash val="solid"/>
-                    </a:lnR>
-                    <a:lnT w="19050">
-                      <a:solidFill>
-                        <a:srgbClr val="000000"/>
-                      </a:solidFill>
-                      <a:prstDash val="solid"/>
-                    </a:lnT>
-                    <a:lnB w="19050">
-                      <a:solidFill>
-                        <a:srgbClr val="000000"/>
-                      </a:solidFill>
-                      <a:prstDash val="solid"/>
-                    </a:lnB>
-                  </a:tcPr>
-                </a:tc>
-                <a:tc>
-                  <a:txBody>
-                    <a:bodyPr/>
-                    <a:lstStyle/>
-                    <a:p>
-                      <a:pPr algn="ctr">
-                        <a:lnSpc>
-                          <a:spcPts val="2765"/>
-                        </a:lnSpc>
-                      </a:pPr>
-                      <a:r>
-                        <a:rPr sz="2400" spc="-25" dirty="0">
-                          <a:latin typeface="Times New Roman"/>
-                          <a:cs typeface="Times New Roman"/>
-                        </a:rPr>
-                        <a:t>11</a:t>
-                      </a:r>
-                      <a:r>
-                        <a:rPr lang="en-GB" sz="2400" spc="-25" dirty="0">
-                          <a:latin typeface="Times New Roman"/>
-                          <a:cs typeface="Times New Roman"/>
-                        </a:rPr>
-                        <a:t>1</a:t>
-                      </a:r>
-                      <a:endParaRPr sz="2400" dirty="0">
-                        <a:latin typeface="Times New Roman"/>
-                        <a:cs typeface="Times New Roman"/>
-                      </a:endParaRPr>
-                    </a:p>
-                  </a:txBody>
-                  <a:tcPr marL="0" marR="0" marT="0" marB="0">
-                    <a:lnL w="19050">
-                      <a:solidFill>
-                        <a:srgbClr val="000000"/>
-                      </a:solidFill>
-                      <a:prstDash val="solid"/>
-                    </a:lnL>
-                    <a:lnR w="19050">
-                      <a:solidFill>
-                        <a:srgbClr val="000000"/>
-                      </a:solidFill>
-                      <a:prstDash val="solid"/>
-                    </a:lnR>
-                    <a:lnT w="19050">
-                      <a:solidFill>
-                        <a:srgbClr val="000000"/>
-                      </a:solidFill>
-                      <a:prstDash val="solid"/>
-                    </a:lnT>
-                    <a:lnB w="19050">
-                      <a:solidFill>
-                        <a:srgbClr val="000000"/>
-                      </a:solidFill>
-                      <a:prstDash val="solid"/>
-                    </a:lnB>
-                  </a:tcPr>
-                </a:tc>
-                <a:tc>
-                  <a:txBody>
-                    <a:bodyPr/>
-                    <a:lstStyle/>
-                    <a:p>
-                      <a:pPr algn="ctr">
-                        <a:lnSpc>
-                          <a:spcPts val="2765"/>
-                        </a:lnSpc>
-                      </a:pPr>
-                      <a:r>
-                        <a:rPr sz="2400" spc="-25" dirty="0">
-                          <a:latin typeface="Times New Roman"/>
-                          <a:cs typeface="Times New Roman"/>
-                        </a:rPr>
-                        <a:t>1</a:t>
-                      </a:r>
-                      <a:r>
-                        <a:rPr lang="en-SE" sz="2400" spc="-25" dirty="0">
-                          <a:latin typeface="Times New Roman"/>
-                          <a:cs typeface="Times New Roman"/>
-                        </a:rPr>
-                        <a:t>1</a:t>
-                      </a:r>
-                      <a:r>
-                        <a:rPr lang="en-GB" sz="2400" spc="-25" dirty="0">
-                          <a:latin typeface="Times New Roman"/>
-                          <a:cs typeface="Times New Roman"/>
-                        </a:rPr>
-                        <a:t>0</a:t>
-                      </a:r>
-                      <a:endParaRPr sz="2400" dirty="0">
-                        <a:latin typeface="Times New Roman"/>
-                        <a:cs typeface="Times New Roman"/>
-                      </a:endParaRPr>
-                    </a:p>
-                  </a:txBody>
-                  <a:tcPr marL="0" marR="0" marT="0" marB="0">
-                    <a:lnL w="19050">
-                      <a:solidFill>
-                        <a:srgbClr val="000000"/>
-                      </a:solidFill>
-                      <a:prstDash val="solid"/>
-                    </a:lnL>
-                    <a:lnR w="19050">
-                      <a:solidFill>
-                        <a:srgbClr val="000000"/>
-                      </a:solidFill>
-                      <a:prstDash val="solid"/>
-                    </a:lnR>
-                    <a:lnT w="19050">
-                      <a:solidFill>
-                        <a:srgbClr val="000000"/>
-                      </a:solidFill>
-                      <a:prstDash val="solid"/>
-                    </a:lnT>
-                    <a:lnB w="19050">
-                      <a:solidFill>
-                        <a:srgbClr val="000000"/>
-                      </a:solidFill>
-                      <a:prstDash val="solid"/>
-                    </a:lnB>
-                  </a:tcPr>
-                </a:tc>
-                <a:tc>
-                  <a:txBody>
-                    <a:bodyPr/>
-                    <a:lstStyle/>
-                    <a:p>
-                      <a:pPr algn="ctr">
-                        <a:lnSpc>
-                          <a:spcPts val="2765"/>
-                        </a:lnSpc>
-                      </a:pPr>
-                      <a:r>
-                        <a:rPr sz="2400" spc="-25" dirty="0">
-                          <a:latin typeface="Times New Roman"/>
-                          <a:cs typeface="Times New Roman"/>
-                        </a:rPr>
-                        <a:t>101</a:t>
-                      </a:r>
-                      <a:endParaRPr sz="2400">
-                        <a:latin typeface="Times New Roman"/>
-                        <a:cs typeface="Times New Roman"/>
-                      </a:endParaRPr>
-                    </a:p>
-                  </a:txBody>
-                  <a:tcPr marL="0" marR="0" marT="0" marB="0">
-                    <a:lnL w="19050">
-                      <a:solidFill>
-                        <a:srgbClr val="000000"/>
-                      </a:solidFill>
-                      <a:prstDash val="solid"/>
-                    </a:lnL>
-                    <a:lnR w="19050">
-                      <a:solidFill>
-                        <a:srgbClr val="000000"/>
-                      </a:solidFill>
-                      <a:prstDash val="solid"/>
-                    </a:lnR>
-                    <a:lnT w="19050">
-                      <a:solidFill>
-                        <a:srgbClr val="000000"/>
-                      </a:solidFill>
-                      <a:prstDash val="solid"/>
-                    </a:lnT>
-                    <a:lnB w="19050">
-                      <a:solidFill>
-                        <a:srgbClr val="000000"/>
-                      </a:solidFill>
-                      <a:prstDash val="solid"/>
-                    </a:lnB>
-                  </a:tcPr>
-                </a:tc>
-                <a:tc>
-                  <a:txBody>
-                    <a:bodyPr/>
-                    <a:lstStyle/>
-                    <a:p>
-                      <a:pPr algn="ctr">
-                        <a:lnSpc>
-                          <a:spcPts val="2765"/>
-                        </a:lnSpc>
-                      </a:pPr>
-                      <a:r>
-                        <a:rPr sz="2400" spc="-25" dirty="0">
-                          <a:latin typeface="Times New Roman"/>
-                          <a:cs typeface="Times New Roman"/>
-                        </a:rPr>
-                        <a:t>1</a:t>
-                      </a:r>
-                      <a:r>
-                        <a:rPr lang="en-SE" sz="2400" spc="-25" dirty="0">
-                          <a:latin typeface="Times New Roman"/>
-                          <a:cs typeface="Times New Roman"/>
-                        </a:rPr>
-                        <a:t>00</a:t>
-                      </a:r>
-                      <a:endParaRPr sz="2400" dirty="0">
-                        <a:latin typeface="Times New Roman"/>
-                        <a:cs typeface="Times New Roman"/>
-                      </a:endParaRPr>
-                    </a:p>
-                  </a:txBody>
-                  <a:tcPr marL="0" marR="0" marT="0" marB="0">
-                    <a:lnL w="19050">
-                      <a:solidFill>
-                        <a:srgbClr val="000000"/>
-                      </a:solidFill>
-                      <a:prstDash val="solid"/>
-                    </a:lnL>
-                    <a:lnR w="19050">
-                      <a:solidFill>
-                        <a:srgbClr val="000000"/>
-                      </a:solidFill>
-                      <a:prstDash val="solid"/>
-                    </a:lnR>
-                    <a:lnT w="19050">
-                      <a:solidFill>
-                        <a:srgbClr val="000000"/>
-                      </a:solidFill>
-                      <a:prstDash val="solid"/>
-                    </a:lnT>
-                    <a:lnB w="19050">
-                      <a:solidFill>
-                        <a:srgbClr val="000000"/>
-                      </a:solidFill>
-                      <a:prstDash val="solid"/>
-                    </a:lnB>
-                  </a:tcPr>
-                </a:tc>
-                <a:tc>
-                  <a:txBody>
-                    <a:bodyPr/>
-                    <a:lstStyle/>
-                    <a:p>
-                      <a:pPr algn="ctr">
-                        <a:lnSpc>
-                          <a:spcPts val="2765"/>
-                        </a:lnSpc>
-                      </a:pPr>
-                      <a:r>
-                        <a:rPr sz="2400" spc="-25" dirty="0">
-                          <a:solidFill>
-                            <a:srgbClr val="FF0000"/>
-                          </a:solidFill>
-                          <a:latin typeface="Times New Roman"/>
-                          <a:cs typeface="Times New Roman"/>
-                        </a:rPr>
-                        <a:t>011</a:t>
-                      </a:r>
-                      <a:endParaRPr sz="2400" dirty="0">
                         <a:solidFill>
-                          <a:srgbClr val="FF0000"/>
+                          <a:schemeClr val="tx1"/>
                         </a:solidFill>
                         <a:latin typeface="Times New Roman"/>
                         <a:cs typeface="Times New Roman"/>
@@ -39244,16 +39792,26 @@
                       <a:r>
                         <a:rPr sz="2400" spc="-25" dirty="0">
                           <a:solidFill>
-                            <a:srgbClr val="FF0000"/>
+                            <a:schemeClr val="tx1"/>
                           </a:solidFill>
                           <a:latin typeface="Times New Roman"/>
                           <a:cs typeface="Times New Roman"/>
                         </a:rPr>
-                        <a:t>010</a:t>
+                        <a:t>11</a:t>
+                      </a:r>
+                      <a:r>
+                        <a:rPr lang="en-GB" sz="2400" spc="-25" dirty="0">
+                          <a:solidFill>
+                            <a:schemeClr val="tx1"/>
+                          </a:solidFill>
+                          <a:latin typeface="Times New Roman"/>
+                          <a:cs typeface="Times New Roman"/>
+                        </a:rPr>
+                        <a:t>1</a:t>
                       </a:r>
                       <a:endParaRPr sz="2400" dirty="0">
                         <a:solidFill>
-                          <a:srgbClr val="FF0000"/>
+                          <a:schemeClr val="tx1"/>
                         </a:solidFill>
                         <a:latin typeface="Times New Roman"/>
                         <a:cs typeface="Times New Roman"/>
@@ -39299,12 +39857,38 @@
                       </a:pPr>
                       <a:r>
                         <a:rPr sz="2400" spc="-25" dirty="0">
+                          <a:solidFill>
+                            <a:schemeClr val="tx1"/>
+                          </a:solidFill>
                           <a:latin typeface="Times New Roman"/>
                           <a:cs typeface="Times New Roman"/>
                         </a:rPr>
-                        <a:t>000</a:t>
+                        <a:t>1</a:t>
                       </a:r>
-                      <a:endParaRPr sz="2400">
+                      <a:r>
+                        <a:rPr lang="en-SE" sz="2400" spc="-25" dirty="0">
+                          <a:solidFill>
+                            <a:schemeClr val="tx1"/>
+                          </a:solidFill>
+                          <a:latin typeface="Times New Roman"/>
+                          <a:cs typeface="Times New Roman"/>
+                        </a:rPr>
+                        <a:t>1</a:t>
+                      </a:r>
+                      <a:r>
+                        <a:rPr lang="en-GB" sz="2400" spc="-25" dirty="0">
+                          <a:solidFill>
+                            <a:schemeClr val="tx1"/>
+                          </a:solidFill>
+                          <a:latin typeface="Times New Roman"/>
+                          <a:cs typeface="Times New Roman"/>
+                        </a:rPr>
+                        <a:t>0</a:t>
+                      </a:r>
+                      <a:endParaRPr sz="2400" dirty="0">
+                        <a:solidFill>
+                          <a:schemeClr val="tx1"/>
+                        </a:solidFill>
                         <a:latin typeface="Times New Roman"/>
                         <a:cs typeface="Times New Roman"/>
                       </a:endParaRPr>
@@ -39349,12 +39933,308 @@
                       </a:pPr>
                       <a:r>
                         <a:rPr sz="2400" spc="-25" dirty="0">
+                          <a:solidFill>
+                            <a:schemeClr val="tx1"/>
+                          </a:solidFill>
+                          <a:latin typeface="Times New Roman"/>
+                          <a:cs typeface="Times New Roman"/>
+                        </a:rPr>
+                        <a:t>101</a:t>
+                      </a:r>
+                      <a:endParaRPr sz="2400">
+                        <a:solidFill>
+                          <a:schemeClr val="tx1"/>
+                        </a:solidFill>
+                        <a:latin typeface="Times New Roman"/>
+                        <a:cs typeface="Times New Roman"/>
+                      </a:endParaRPr>
+                    </a:p>
+                  </a:txBody>
+                  <a:tcPr marL="0" marR="0" marT="0" marB="0">
+                    <a:lnL w="19050">
+                      <a:solidFill>
+                        <a:srgbClr val="000000"/>
+                      </a:solidFill>
+                      <a:prstDash val="solid"/>
+                    </a:lnL>
+                    <a:lnR w="19050">
+                      <a:solidFill>
+                        <a:srgbClr val="000000"/>
+                      </a:solidFill>
+                      <a:prstDash val="solid"/>
+                    </a:lnR>
+                    <a:lnT w="19050">
+                      <a:solidFill>
+                        <a:srgbClr val="000000"/>
+                      </a:solidFill>
+                      <a:prstDash val="solid"/>
+                    </a:lnT>
+                    <a:lnB w="19050">
+                      <a:solidFill>
+                        <a:srgbClr val="000000"/>
+                      </a:solidFill>
+                      <a:prstDash val="solid"/>
+                    </a:lnB>
+                  </a:tcPr>
+                </a:tc>
+                <a:tc>
+                  <a:txBody>
+                    <a:bodyPr/>
+                    <a:lstStyle/>
+                    <a:p>
+                      <a:pPr algn="ctr">
+                        <a:lnSpc>
+                          <a:spcPts val="2765"/>
+                        </a:lnSpc>
+                      </a:pPr>
+                      <a:r>
+                        <a:rPr sz="2400" spc="-25" dirty="0">
+                          <a:solidFill>
+                            <a:schemeClr val="tx1"/>
+                          </a:solidFill>
+                          <a:latin typeface="Times New Roman"/>
+                          <a:cs typeface="Times New Roman"/>
+                        </a:rPr>
+                        <a:t>1</a:t>
+                      </a:r>
+                      <a:r>
+                        <a:rPr lang="en-SE" sz="2400" spc="-25" dirty="0">
+                          <a:solidFill>
+                            <a:schemeClr val="tx1"/>
+                          </a:solidFill>
+                          <a:latin typeface="Times New Roman"/>
+                          <a:cs typeface="Times New Roman"/>
+                        </a:rPr>
+                        <a:t>00</a:t>
+                      </a:r>
+                      <a:endParaRPr sz="2400" dirty="0">
+                        <a:solidFill>
+                          <a:schemeClr val="tx1"/>
+                        </a:solidFill>
+                        <a:latin typeface="Times New Roman"/>
+                        <a:cs typeface="Times New Roman"/>
+                      </a:endParaRPr>
+                    </a:p>
+                  </a:txBody>
+                  <a:tcPr marL="0" marR="0" marT="0" marB="0">
+                    <a:lnL w="19050">
+                      <a:solidFill>
+                        <a:srgbClr val="000000"/>
+                      </a:solidFill>
+                      <a:prstDash val="solid"/>
+                    </a:lnL>
+                    <a:lnR w="19050">
+                      <a:solidFill>
+                        <a:srgbClr val="000000"/>
+                      </a:solidFill>
+                      <a:prstDash val="solid"/>
+                    </a:lnR>
+                    <a:lnT w="19050">
+                      <a:solidFill>
+                        <a:srgbClr val="000000"/>
+                      </a:solidFill>
+                      <a:prstDash val="solid"/>
+                    </a:lnT>
+                    <a:lnB w="19050">
+                      <a:solidFill>
+                        <a:srgbClr val="000000"/>
+                      </a:solidFill>
+                      <a:prstDash val="solid"/>
+                    </a:lnB>
+                  </a:tcPr>
+                </a:tc>
+                <a:tc>
+                  <a:txBody>
+                    <a:bodyPr/>
+                    <a:lstStyle/>
+                    <a:p>
+                      <a:pPr algn="ctr">
+                        <a:lnSpc>
+                          <a:spcPts val="2765"/>
+                        </a:lnSpc>
+                      </a:pPr>
+                      <a:r>
+                        <a:rPr sz="2400" spc="-25" dirty="0">
+                          <a:solidFill>
+                            <a:schemeClr val="tx1"/>
+                          </a:solidFill>
+                          <a:latin typeface="Times New Roman"/>
+                          <a:cs typeface="Times New Roman"/>
+                        </a:rPr>
+                        <a:t>011</a:t>
+                      </a:r>
+                      <a:endParaRPr sz="2400" dirty="0">
+                        <a:solidFill>
+                          <a:schemeClr val="tx1"/>
+                        </a:solidFill>
+                        <a:latin typeface="Times New Roman"/>
+                        <a:cs typeface="Times New Roman"/>
+                      </a:endParaRPr>
+                    </a:p>
+                  </a:txBody>
+                  <a:tcPr marL="0" marR="0" marT="0" marB="0">
+                    <a:lnL w="19050">
+                      <a:solidFill>
+                        <a:srgbClr val="000000"/>
+                      </a:solidFill>
+                      <a:prstDash val="solid"/>
+                    </a:lnL>
+                    <a:lnR w="19050">
+                      <a:solidFill>
+                        <a:srgbClr val="000000"/>
+                      </a:solidFill>
+                      <a:prstDash val="solid"/>
+                    </a:lnR>
+                    <a:lnT w="19050">
+                      <a:solidFill>
+                        <a:srgbClr val="000000"/>
+                      </a:solidFill>
+                      <a:prstDash val="solid"/>
+                    </a:lnT>
+                    <a:lnB w="19050">
+                      <a:solidFill>
+                        <a:srgbClr val="000000"/>
+                      </a:solidFill>
+                      <a:prstDash val="solid"/>
+                    </a:lnB>
+                  </a:tcPr>
+                </a:tc>
+                <a:tc>
+                  <a:txBody>
+                    <a:bodyPr/>
+                    <a:lstStyle/>
+                    <a:p>
+                      <a:pPr algn="ctr">
+                        <a:lnSpc>
+                          <a:spcPts val="2765"/>
+                        </a:lnSpc>
+                      </a:pPr>
+                      <a:r>
+                        <a:rPr sz="2400" spc="-25" dirty="0">
+                          <a:solidFill>
+                            <a:schemeClr val="tx1"/>
+                          </a:solidFill>
+                          <a:latin typeface="Times New Roman"/>
+                          <a:cs typeface="Times New Roman"/>
+                        </a:rPr>
+                        <a:t>010</a:t>
+                      </a:r>
+                      <a:endParaRPr sz="2400" dirty="0">
+                        <a:solidFill>
+                          <a:schemeClr val="tx1"/>
+                        </a:solidFill>
+                        <a:latin typeface="Times New Roman"/>
+                        <a:cs typeface="Times New Roman"/>
+                      </a:endParaRPr>
+                    </a:p>
+                  </a:txBody>
+                  <a:tcPr marL="0" marR="0" marT="0" marB="0">
+                    <a:lnL w="19050">
+                      <a:solidFill>
+                        <a:srgbClr val="000000"/>
+                      </a:solidFill>
+                      <a:prstDash val="solid"/>
+                    </a:lnL>
+                    <a:lnR w="19050">
+                      <a:solidFill>
+                        <a:srgbClr val="000000"/>
+                      </a:solidFill>
+                      <a:prstDash val="solid"/>
+                    </a:lnR>
+                    <a:lnT w="19050">
+                      <a:solidFill>
+                        <a:srgbClr val="000000"/>
+                      </a:solidFill>
+                      <a:prstDash val="solid"/>
+                    </a:lnT>
+                    <a:lnB w="19050">
+                      <a:solidFill>
+                        <a:srgbClr val="000000"/>
+                      </a:solidFill>
+                      <a:prstDash val="solid"/>
+                    </a:lnB>
+                  </a:tcPr>
+                </a:tc>
+                <a:tc>
+                  <a:txBody>
+                    <a:bodyPr/>
+                    <a:lstStyle/>
+                    <a:p>
+                      <a:pPr algn="ctr">
+                        <a:lnSpc>
+                          <a:spcPts val="2765"/>
+                        </a:lnSpc>
+                      </a:pPr>
+                      <a:r>
+                        <a:rPr sz="2400" spc="-25" dirty="0">
+                          <a:solidFill>
+                            <a:schemeClr val="tx1"/>
+                          </a:solidFill>
+                          <a:latin typeface="Times New Roman"/>
+                          <a:cs typeface="Times New Roman"/>
+                        </a:rPr>
+                        <a:t>000</a:t>
+                      </a:r>
+                      <a:endParaRPr sz="2400">
+                        <a:solidFill>
+                          <a:schemeClr val="tx1"/>
+                        </a:solidFill>
+                        <a:latin typeface="Times New Roman"/>
+                        <a:cs typeface="Times New Roman"/>
+                      </a:endParaRPr>
+                    </a:p>
+                  </a:txBody>
+                  <a:tcPr marL="0" marR="0" marT="0" marB="0">
+                    <a:lnL w="19050">
+                      <a:solidFill>
+                        <a:srgbClr val="000000"/>
+                      </a:solidFill>
+                      <a:prstDash val="solid"/>
+                    </a:lnL>
+                    <a:lnR w="19050">
+                      <a:solidFill>
+                        <a:srgbClr val="000000"/>
+                      </a:solidFill>
+                      <a:prstDash val="solid"/>
+                    </a:lnR>
+                    <a:lnT w="19050">
+                      <a:solidFill>
+                        <a:srgbClr val="000000"/>
+                      </a:solidFill>
+                      <a:prstDash val="solid"/>
+                    </a:lnT>
+                    <a:lnB w="19050">
+                      <a:solidFill>
+                        <a:srgbClr val="000000"/>
+                      </a:solidFill>
+                      <a:prstDash val="solid"/>
+                    </a:lnB>
+                  </a:tcPr>
+                </a:tc>
+                <a:tc>
+                  <a:txBody>
+                    <a:bodyPr/>
+                    <a:lstStyle/>
+                    <a:p>
+                      <a:pPr algn="ctr">
+                        <a:lnSpc>
+                          <a:spcPts val="2765"/>
+                        </a:lnSpc>
+                      </a:pPr>
+                      <a:r>
+                        <a:rPr sz="2400" spc="-25" dirty="0">
+                          <a:solidFill>
+                            <a:schemeClr val="tx1"/>
+                          </a:solidFill>
                           <a:latin typeface="Times New Roman"/>
                           <a:cs typeface="Times New Roman"/>
                         </a:rPr>
                         <a:t>001</a:t>
                       </a:r>
                       <a:endParaRPr sz="2400" dirty="0">
+                        <a:solidFill>
+                          <a:schemeClr val="tx1"/>
+                        </a:solidFill>
                         <a:latin typeface="Times New Roman"/>
                         <a:cs typeface="Times New Roman"/>
                       </a:endParaRPr>
@@ -41140,7 +42020,7 @@
             <a:pPr lvl="1"/>
             <a:r>
               <a:rPr lang="en-US" dirty="0"/>
-              <a:t>ANS: Since the same plaintext block always maps to the same ciphertext block, repeated blocks can be spotted. Here, the first and third plaintext blocks are both 010, and they both encrypt to 101. That reveals a pattern. </a:t>
+              <a:t>ANS: Since the same plaintext block always maps to the same ciphertext block, repeated blocks can be spotted. Here, the first and third plaintext blocks are both 100, and they both encrypt to 011. That reveals a pattern. </a:t>
             </a:r>
           </a:p>
           <a:p>
